--- a/Филимонов А. В/ДПФ и Сингулярное разложение для конференции.pptx
+++ b/Филимонов А. В/ДПФ и Сингулярное разложение для конференции.pptx
@@ -5,32 +5,27 @@
     <p:sldMasterId id="2147483682" r:id="rId1"/>
   </p:sldMasterIdLst>
   <p:notesMasterIdLst>
-    <p:notesMasterId r:id="rId18"/>
+    <p:notesMasterId r:id="rId13"/>
   </p:notesMasterIdLst>
   <p:sldIdLst>
     <p:sldId id="268" r:id="rId2"/>
-    <p:sldId id="257" r:id="rId3"/>
-    <p:sldId id="269" r:id="rId4"/>
-    <p:sldId id="270" r:id="rId5"/>
-    <p:sldId id="271" r:id="rId6"/>
-    <p:sldId id="272" r:id="rId7"/>
-    <p:sldId id="273" r:id="rId8"/>
-    <p:sldId id="256" r:id="rId9"/>
-    <p:sldId id="258" r:id="rId10"/>
-    <p:sldId id="259" r:id="rId11"/>
-    <p:sldId id="266" r:id="rId12"/>
-    <p:sldId id="260" r:id="rId13"/>
-    <p:sldId id="261" r:id="rId14"/>
-    <p:sldId id="262" r:id="rId15"/>
-    <p:sldId id="263" r:id="rId16"/>
-    <p:sldId id="264" r:id="rId17"/>
+    <p:sldId id="256" r:id="rId3"/>
+    <p:sldId id="258" r:id="rId4"/>
+    <p:sldId id="259" r:id="rId5"/>
+    <p:sldId id="266" r:id="rId6"/>
+    <p:sldId id="260" r:id="rId7"/>
+    <p:sldId id="261" r:id="rId8"/>
+    <p:sldId id="262" r:id="rId9"/>
+    <p:sldId id="263" r:id="rId10"/>
+    <p:sldId id="264" r:id="rId11"/>
+    <p:sldId id="269" r:id="rId12"/>
   </p:sldIdLst>
   <p:sldSz cx="14630400" cy="8229600"/>
   <p:notesSz cx="8229600" cy="14630400"/>
   <p:embeddedFontLst>
     <p:embeddedFont>
       <p:font typeface="Cambria Math" panose="02040503050406030204" pitchFamily="18" charset="0"/>
-      <p:regular r:id="rId19"/>
+      <p:regular r:id="rId14"/>
     </p:embeddedFont>
   </p:embeddedFontLst>
   <p:defaultTextStyle>
@@ -289,6 +284,15 @@
           </p:nvPr>
         </p:nvSpPr>
         <p:spPr/>
+        <p:txBody>
+          <a:bodyPr/>
+          <a:lstStyle/>
+          <a:p>
+            <a:endParaRPr lang="ru-RU" dirty="0">
+              <a:latin typeface="Times New Roman" panose="02020603050405020304" pitchFamily="18" charset="0"/>
+            </a:endParaRPr>
+          </a:p>
+        </p:txBody>
       </p:sp>
       <p:sp>
         <p:nvSpPr>
@@ -305,7 +309,9 @@
           <a:bodyPr/>
           <a:lstStyle/>
           <a:p>
-            <a:endParaRPr lang="en-US" dirty="0"/>
+            <a:endParaRPr lang="en-US" dirty="0">
+              <a:latin typeface="Times New Roman" panose="02020603050405020304" pitchFamily="18" charset="0"/>
+            </a:endParaRPr>
           </a:p>
         </p:txBody>
       </p:sp>
@@ -325,600 +331,10 @@
           <a:lstStyle/>
           <a:p>
             <a:fld id="{F7021451-1387-4CA6-816F-3879F97B5CBC}" type="slidenum">
-              <a:rPr lang="en-US"/>
-              <a:t>1</a:t>
-            </a:fld>
-            <a:endParaRPr lang="en-US"/>
-          </a:p>
-        </p:txBody>
-      </p:sp>
-    </p:spTree>
-    <p:extLst>
-      <p:ext uri="{BB962C8B-B14F-4D97-AF65-F5344CB8AC3E}">
-        <p14:creationId xmlns:p14="http://schemas.microsoft.com/office/powerpoint/2010/main" val="1024086991"/>
-      </p:ext>
-    </p:extLst>
-  </p:cSld>
-  <p:clrMapOvr>
-    <a:masterClrMapping/>
-  </p:clrMapOvr>
-</p:notes>
-</file>
-
-<file path=ppt/notesSlides/notesSlide10.xml><?xml version="1.0" encoding="utf-8"?>
-<p:notes xmlns:a="http://schemas.openxmlformats.org/drawingml/2006/main" xmlns:r="http://schemas.openxmlformats.org/officeDocument/2006/relationships" xmlns:p="http://schemas.openxmlformats.org/presentationml/2006/main">
-  <p:cSld>
-    <p:spTree>
-      <p:nvGrpSpPr>
-        <p:cNvPr id="1" name=""/>
-        <p:cNvGrpSpPr/>
-        <p:nvPr/>
-      </p:nvGrpSpPr>
-      <p:grpSpPr>
-        <a:xfrm>
-          <a:off x="0" y="0"/>
-          <a:ext cx="0" cy="0"/>
-          <a:chOff x="0" y="0"/>
-          <a:chExt cx="0" cy="0"/>
-        </a:xfrm>
-      </p:grpSpPr>
-      <p:sp>
-        <p:nvSpPr>
-          <p:cNvPr id="2" name="Slide Image Placeholder 1"/>
-          <p:cNvSpPr>
-            <a:spLocks noGrp="1" noRot="1" noChangeAspect="1"/>
-          </p:cNvSpPr>
-          <p:nvPr>
-            <p:ph type="sldImg"/>
-          </p:nvPr>
-        </p:nvSpPr>
-        <p:spPr/>
-        <p:txBody>
-          <a:bodyPr/>
-          <a:lstStyle/>
-          <a:p>
-            <a:endParaRPr lang="ru-RU" dirty="0">
-              <a:latin typeface="Times New Roman" panose="02020603050405020304" pitchFamily="18" charset="0"/>
-            </a:endParaRPr>
-          </a:p>
-        </p:txBody>
-      </p:sp>
-      <p:sp>
-        <p:nvSpPr>
-          <p:cNvPr id="3" name="Notes Placeholder 2"/>
-          <p:cNvSpPr>
-            <a:spLocks noGrp="1"/>
-          </p:cNvSpPr>
-          <p:nvPr>
-            <p:ph type="body" idx="1"/>
-          </p:nvPr>
-        </p:nvSpPr>
-        <p:spPr/>
-        <p:txBody>
-          <a:bodyPr/>
-          <a:lstStyle/>
-          <a:p>
-            <a:endParaRPr lang="en-US" dirty="0">
-              <a:latin typeface="Times New Roman" panose="02020603050405020304" pitchFamily="18" charset="0"/>
-            </a:endParaRPr>
-          </a:p>
-        </p:txBody>
-      </p:sp>
-      <p:sp>
-        <p:nvSpPr>
-          <p:cNvPr id="4" name="Slide Number Placeholder 3"/>
-          <p:cNvSpPr>
-            <a:spLocks noGrp="1"/>
-          </p:cNvSpPr>
-          <p:nvPr>
-            <p:ph type="sldNum" sz="quarter" idx="10"/>
-          </p:nvPr>
-        </p:nvSpPr>
-        <p:spPr/>
-        <p:txBody>
-          <a:bodyPr/>
-          <a:lstStyle/>
-          <a:p>
-            <a:fld id="{F7021451-1387-4CA6-816F-3879F97B5CBC}" type="slidenum">
               <a:rPr lang="en-US">
                 <a:latin typeface="Times New Roman" panose="02020603050405020304" pitchFamily="18" charset="0"/>
               </a:rPr>
-              <a:t>10</a:t>
-            </a:fld>
-            <a:endParaRPr lang="en-US">
-              <a:latin typeface="Times New Roman" panose="02020603050405020304" pitchFamily="18" charset="0"/>
-            </a:endParaRPr>
-          </a:p>
-        </p:txBody>
-      </p:sp>
-    </p:spTree>
-    <p:extLst>
-      <p:ext uri="{BB962C8B-B14F-4D97-AF65-F5344CB8AC3E}">
-        <p14:creationId xmlns:p14="http://schemas.microsoft.com/office/powerpoint/2010/main" val="1024086991"/>
-      </p:ext>
-    </p:extLst>
-  </p:cSld>
-  <p:clrMapOvr>
-    <a:masterClrMapping/>
-  </p:clrMapOvr>
-</p:notes>
-</file>
-
-<file path=ppt/notesSlides/notesSlide11.xml><?xml version="1.0" encoding="utf-8"?>
-<p:notes xmlns:a="http://schemas.openxmlformats.org/drawingml/2006/main" xmlns:r="http://schemas.openxmlformats.org/officeDocument/2006/relationships" xmlns:p="http://schemas.openxmlformats.org/presentationml/2006/main">
-  <p:cSld>
-    <p:spTree>
-      <p:nvGrpSpPr>
-        <p:cNvPr id="1" name=""/>
-        <p:cNvGrpSpPr/>
-        <p:nvPr/>
-      </p:nvGrpSpPr>
-      <p:grpSpPr>
-        <a:xfrm>
-          <a:off x="0" y="0"/>
-          <a:ext cx="0" cy="0"/>
-          <a:chOff x="0" y="0"/>
-          <a:chExt cx="0" cy="0"/>
-        </a:xfrm>
-      </p:grpSpPr>
-      <p:sp>
-        <p:nvSpPr>
-          <p:cNvPr id="2" name="Slide Image Placeholder 1"/>
-          <p:cNvSpPr>
-            <a:spLocks noGrp="1" noRot="1" noChangeAspect="1"/>
-          </p:cNvSpPr>
-          <p:nvPr>
-            <p:ph type="sldImg"/>
-          </p:nvPr>
-        </p:nvSpPr>
-        <p:spPr/>
-        <p:txBody>
-          <a:bodyPr/>
-          <a:lstStyle/>
-          <a:p>
-            <a:endParaRPr lang="ru-RU" dirty="0">
-              <a:latin typeface="Times New Roman" panose="02020603050405020304" pitchFamily="18" charset="0"/>
-            </a:endParaRPr>
-          </a:p>
-        </p:txBody>
-      </p:sp>
-      <p:sp>
-        <p:nvSpPr>
-          <p:cNvPr id="3" name="Notes Placeholder 2"/>
-          <p:cNvSpPr>
-            <a:spLocks noGrp="1"/>
-          </p:cNvSpPr>
-          <p:nvPr>
-            <p:ph type="body" idx="1"/>
-          </p:nvPr>
-        </p:nvSpPr>
-        <p:spPr/>
-        <p:txBody>
-          <a:bodyPr/>
-          <a:lstStyle/>
-          <a:p>
-            <a:endParaRPr lang="en-US" dirty="0">
-              <a:latin typeface="Times New Roman" panose="02020603050405020304" pitchFamily="18" charset="0"/>
-            </a:endParaRPr>
-          </a:p>
-        </p:txBody>
-      </p:sp>
-      <p:sp>
-        <p:nvSpPr>
-          <p:cNvPr id="4" name="Slide Number Placeholder 3"/>
-          <p:cNvSpPr>
-            <a:spLocks noGrp="1"/>
-          </p:cNvSpPr>
-          <p:nvPr>
-            <p:ph type="sldNum" sz="quarter" idx="10"/>
-          </p:nvPr>
-        </p:nvSpPr>
-        <p:spPr/>
-        <p:txBody>
-          <a:bodyPr/>
-          <a:lstStyle/>
-          <a:p>
-            <a:fld id="{F7021451-1387-4CA6-816F-3879F97B5CBC}" type="slidenum">
-              <a:rPr lang="en-US">
-                <a:latin typeface="Times New Roman" panose="02020603050405020304" pitchFamily="18" charset="0"/>
-              </a:rPr>
-              <a:t>12</a:t>
-            </a:fld>
-            <a:endParaRPr lang="en-US">
-              <a:latin typeface="Times New Roman" panose="02020603050405020304" pitchFamily="18" charset="0"/>
-            </a:endParaRPr>
-          </a:p>
-        </p:txBody>
-      </p:sp>
-    </p:spTree>
-    <p:extLst>
-      <p:ext uri="{BB962C8B-B14F-4D97-AF65-F5344CB8AC3E}">
-        <p14:creationId xmlns:p14="http://schemas.microsoft.com/office/powerpoint/2010/main" val="1024086991"/>
-      </p:ext>
-    </p:extLst>
-  </p:cSld>
-  <p:clrMapOvr>
-    <a:masterClrMapping/>
-  </p:clrMapOvr>
-</p:notes>
-</file>
-
-<file path=ppt/notesSlides/notesSlide12.xml><?xml version="1.0" encoding="utf-8"?>
-<p:notes xmlns:a="http://schemas.openxmlformats.org/drawingml/2006/main" xmlns:r="http://schemas.openxmlformats.org/officeDocument/2006/relationships" xmlns:p="http://schemas.openxmlformats.org/presentationml/2006/main">
-  <p:cSld>
-    <p:spTree>
-      <p:nvGrpSpPr>
-        <p:cNvPr id="1" name=""/>
-        <p:cNvGrpSpPr/>
-        <p:nvPr/>
-      </p:nvGrpSpPr>
-      <p:grpSpPr>
-        <a:xfrm>
-          <a:off x="0" y="0"/>
-          <a:ext cx="0" cy="0"/>
-          <a:chOff x="0" y="0"/>
-          <a:chExt cx="0" cy="0"/>
-        </a:xfrm>
-      </p:grpSpPr>
-      <p:sp>
-        <p:nvSpPr>
-          <p:cNvPr id="2" name="Slide Image Placeholder 1"/>
-          <p:cNvSpPr>
-            <a:spLocks noGrp="1" noRot="1" noChangeAspect="1"/>
-          </p:cNvSpPr>
-          <p:nvPr>
-            <p:ph type="sldImg"/>
-          </p:nvPr>
-        </p:nvSpPr>
-        <p:spPr/>
-        <p:txBody>
-          <a:bodyPr/>
-          <a:lstStyle/>
-          <a:p>
-            <a:endParaRPr lang="ru-RU" dirty="0">
-              <a:latin typeface="Times New Roman" panose="02020603050405020304" pitchFamily="18" charset="0"/>
-            </a:endParaRPr>
-          </a:p>
-        </p:txBody>
-      </p:sp>
-      <p:sp>
-        <p:nvSpPr>
-          <p:cNvPr id="3" name="Notes Placeholder 2"/>
-          <p:cNvSpPr>
-            <a:spLocks noGrp="1"/>
-          </p:cNvSpPr>
-          <p:nvPr>
-            <p:ph type="body" idx="1"/>
-          </p:nvPr>
-        </p:nvSpPr>
-        <p:spPr/>
-        <p:txBody>
-          <a:bodyPr/>
-          <a:lstStyle/>
-          <a:p>
-            <a:endParaRPr lang="en-US" dirty="0">
-              <a:latin typeface="Times New Roman" panose="02020603050405020304" pitchFamily="18" charset="0"/>
-            </a:endParaRPr>
-          </a:p>
-        </p:txBody>
-      </p:sp>
-      <p:sp>
-        <p:nvSpPr>
-          <p:cNvPr id="4" name="Slide Number Placeholder 3"/>
-          <p:cNvSpPr>
-            <a:spLocks noGrp="1"/>
-          </p:cNvSpPr>
-          <p:nvPr>
-            <p:ph type="sldNum" sz="quarter" idx="10"/>
-          </p:nvPr>
-        </p:nvSpPr>
-        <p:spPr/>
-        <p:txBody>
-          <a:bodyPr/>
-          <a:lstStyle/>
-          <a:p>
-            <a:fld id="{F7021451-1387-4CA6-816F-3879F97B5CBC}" type="slidenum">
-              <a:rPr lang="en-US">
-                <a:latin typeface="Times New Roman" panose="02020603050405020304" pitchFamily="18" charset="0"/>
-              </a:rPr>
-              <a:t>13</a:t>
-            </a:fld>
-            <a:endParaRPr lang="en-US">
-              <a:latin typeface="Times New Roman" panose="02020603050405020304" pitchFamily="18" charset="0"/>
-            </a:endParaRPr>
-          </a:p>
-        </p:txBody>
-      </p:sp>
-    </p:spTree>
-    <p:extLst>
-      <p:ext uri="{BB962C8B-B14F-4D97-AF65-F5344CB8AC3E}">
-        <p14:creationId xmlns:p14="http://schemas.microsoft.com/office/powerpoint/2010/main" val="1024086991"/>
-      </p:ext>
-    </p:extLst>
-  </p:cSld>
-  <p:clrMapOvr>
-    <a:masterClrMapping/>
-  </p:clrMapOvr>
-</p:notes>
-</file>
-
-<file path=ppt/notesSlides/notesSlide13.xml><?xml version="1.0" encoding="utf-8"?>
-<p:notes xmlns:a="http://schemas.openxmlformats.org/drawingml/2006/main" xmlns:r="http://schemas.openxmlformats.org/officeDocument/2006/relationships" xmlns:p="http://schemas.openxmlformats.org/presentationml/2006/main">
-  <p:cSld>
-    <p:spTree>
-      <p:nvGrpSpPr>
-        <p:cNvPr id="1" name=""/>
-        <p:cNvGrpSpPr/>
-        <p:nvPr/>
-      </p:nvGrpSpPr>
-      <p:grpSpPr>
-        <a:xfrm>
-          <a:off x="0" y="0"/>
-          <a:ext cx="0" cy="0"/>
-          <a:chOff x="0" y="0"/>
-          <a:chExt cx="0" cy="0"/>
-        </a:xfrm>
-      </p:grpSpPr>
-      <p:sp>
-        <p:nvSpPr>
-          <p:cNvPr id="2" name="Slide Image Placeholder 1"/>
-          <p:cNvSpPr>
-            <a:spLocks noGrp="1" noRot="1" noChangeAspect="1"/>
-          </p:cNvSpPr>
-          <p:nvPr>
-            <p:ph type="sldImg"/>
-          </p:nvPr>
-        </p:nvSpPr>
-        <p:spPr/>
-        <p:txBody>
-          <a:bodyPr/>
-          <a:lstStyle/>
-          <a:p>
-            <a:endParaRPr lang="ru-RU" dirty="0">
-              <a:latin typeface="Times New Roman" panose="02020603050405020304" pitchFamily="18" charset="0"/>
-            </a:endParaRPr>
-          </a:p>
-        </p:txBody>
-      </p:sp>
-      <p:sp>
-        <p:nvSpPr>
-          <p:cNvPr id="3" name="Notes Placeholder 2"/>
-          <p:cNvSpPr>
-            <a:spLocks noGrp="1"/>
-          </p:cNvSpPr>
-          <p:nvPr>
-            <p:ph type="body" idx="1"/>
-          </p:nvPr>
-        </p:nvSpPr>
-        <p:spPr/>
-        <p:txBody>
-          <a:bodyPr/>
-          <a:lstStyle/>
-          <a:p>
-            <a:endParaRPr lang="en-US" dirty="0">
-              <a:latin typeface="Times New Roman" panose="02020603050405020304" pitchFamily="18" charset="0"/>
-            </a:endParaRPr>
-          </a:p>
-        </p:txBody>
-      </p:sp>
-      <p:sp>
-        <p:nvSpPr>
-          <p:cNvPr id="4" name="Slide Number Placeholder 3"/>
-          <p:cNvSpPr>
-            <a:spLocks noGrp="1"/>
-          </p:cNvSpPr>
-          <p:nvPr>
-            <p:ph type="sldNum" sz="quarter" idx="10"/>
-          </p:nvPr>
-        </p:nvSpPr>
-        <p:spPr/>
-        <p:txBody>
-          <a:bodyPr/>
-          <a:lstStyle/>
-          <a:p>
-            <a:fld id="{F7021451-1387-4CA6-816F-3879F97B5CBC}" type="slidenum">
-              <a:rPr lang="en-US">
-                <a:latin typeface="Times New Roman" panose="02020603050405020304" pitchFamily="18" charset="0"/>
-              </a:rPr>
-              <a:t>14</a:t>
-            </a:fld>
-            <a:endParaRPr lang="en-US">
-              <a:latin typeface="Times New Roman" panose="02020603050405020304" pitchFamily="18" charset="0"/>
-            </a:endParaRPr>
-          </a:p>
-        </p:txBody>
-      </p:sp>
-    </p:spTree>
-    <p:extLst>
-      <p:ext uri="{BB962C8B-B14F-4D97-AF65-F5344CB8AC3E}">
-        <p14:creationId xmlns:p14="http://schemas.microsoft.com/office/powerpoint/2010/main" val="1024086991"/>
-      </p:ext>
-    </p:extLst>
-  </p:cSld>
-  <p:clrMapOvr>
-    <a:masterClrMapping/>
-  </p:clrMapOvr>
-</p:notes>
-</file>
-
-<file path=ppt/notesSlides/notesSlide14.xml><?xml version="1.0" encoding="utf-8"?>
-<p:notes xmlns:a="http://schemas.openxmlformats.org/drawingml/2006/main" xmlns:r="http://schemas.openxmlformats.org/officeDocument/2006/relationships" xmlns:p="http://schemas.openxmlformats.org/presentationml/2006/main">
-  <p:cSld>
-    <p:spTree>
-      <p:nvGrpSpPr>
-        <p:cNvPr id="1" name=""/>
-        <p:cNvGrpSpPr/>
-        <p:nvPr/>
-      </p:nvGrpSpPr>
-      <p:grpSpPr>
-        <a:xfrm>
-          <a:off x="0" y="0"/>
-          <a:ext cx="0" cy="0"/>
-          <a:chOff x="0" y="0"/>
-          <a:chExt cx="0" cy="0"/>
-        </a:xfrm>
-      </p:grpSpPr>
-      <p:sp>
-        <p:nvSpPr>
-          <p:cNvPr id="2" name="Slide Image Placeholder 1"/>
-          <p:cNvSpPr>
-            <a:spLocks noGrp="1" noRot="1" noChangeAspect="1"/>
-          </p:cNvSpPr>
-          <p:nvPr>
-            <p:ph type="sldImg"/>
-          </p:nvPr>
-        </p:nvSpPr>
-        <p:spPr/>
-        <p:txBody>
-          <a:bodyPr/>
-          <a:lstStyle/>
-          <a:p>
-            <a:endParaRPr lang="ru-RU" dirty="0">
-              <a:latin typeface="Times New Roman" panose="02020603050405020304" pitchFamily="18" charset="0"/>
-            </a:endParaRPr>
-          </a:p>
-        </p:txBody>
-      </p:sp>
-      <p:sp>
-        <p:nvSpPr>
-          <p:cNvPr id="3" name="Notes Placeholder 2"/>
-          <p:cNvSpPr>
-            <a:spLocks noGrp="1"/>
-          </p:cNvSpPr>
-          <p:nvPr>
-            <p:ph type="body" idx="1"/>
-          </p:nvPr>
-        </p:nvSpPr>
-        <p:spPr/>
-        <p:txBody>
-          <a:bodyPr/>
-          <a:lstStyle/>
-          <a:p>
-            <a:endParaRPr lang="en-US" dirty="0">
-              <a:latin typeface="Times New Roman" panose="02020603050405020304" pitchFamily="18" charset="0"/>
-            </a:endParaRPr>
-          </a:p>
-        </p:txBody>
-      </p:sp>
-      <p:sp>
-        <p:nvSpPr>
-          <p:cNvPr id="4" name="Slide Number Placeholder 3"/>
-          <p:cNvSpPr>
-            <a:spLocks noGrp="1"/>
-          </p:cNvSpPr>
-          <p:nvPr>
-            <p:ph type="sldNum" sz="quarter" idx="10"/>
-          </p:nvPr>
-        </p:nvSpPr>
-        <p:spPr/>
-        <p:txBody>
-          <a:bodyPr/>
-          <a:lstStyle/>
-          <a:p>
-            <a:fld id="{F7021451-1387-4CA6-816F-3879F97B5CBC}" type="slidenum">
-              <a:rPr lang="en-US">
-                <a:latin typeface="Times New Roman" panose="02020603050405020304" pitchFamily="18" charset="0"/>
-              </a:rPr>
-              <a:t>15</a:t>
-            </a:fld>
-            <a:endParaRPr lang="en-US">
-              <a:latin typeface="Times New Roman" panose="02020603050405020304" pitchFamily="18" charset="0"/>
-            </a:endParaRPr>
-          </a:p>
-        </p:txBody>
-      </p:sp>
-    </p:spTree>
-    <p:extLst>
-      <p:ext uri="{BB962C8B-B14F-4D97-AF65-F5344CB8AC3E}">
-        <p14:creationId xmlns:p14="http://schemas.microsoft.com/office/powerpoint/2010/main" val="1024086991"/>
-      </p:ext>
-    </p:extLst>
-  </p:cSld>
-  <p:clrMapOvr>
-    <a:masterClrMapping/>
-  </p:clrMapOvr>
-</p:notes>
-</file>
-
-<file path=ppt/notesSlides/notesSlide15.xml><?xml version="1.0" encoding="utf-8"?>
-<p:notes xmlns:a="http://schemas.openxmlformats.org/drawingml/2006/main" xmlns:r="http://schemas.openxmlformats.org/officeDocument/2006/relationships" xmlns:p="http://schemas.openxmlformats.org/presentationml/2006/main">
-  <p:cSld>
-    <p:spTree>
-      <p:nvGrpSpPr>
-        <p:cNvPr id="1" name=""/>
-        <p:cNvGrpSpPr/>
-        <p:nvPr/>
-      </p:nvGrpSpPr>
-      <p:grpSpPr>
-        <a:xfrm>
-          <a:off x="0" y="0"/>
-          <a:ext cx="0" cy="0"/>
-          <a:chOff x="0" y="0"/>
-          <a:chExt cx="0" cy="0"/>
-        </a:xfrm>
-      </p:grpSpPr>
-      <p:sp>
-        <p:nvSpPr>
-          <p:cNvPr id="2" name="Slide Image Placeholder 1"/>
-          <p:cNvSpPr>
-            <a:spLocks noGrp="1" noRot="1" noChangeAspect="1"/>
-          </p:cNvSpPr>
-          <p:nvPr>
-            <p:ph type="sldImg"/>
-          </p:nvPr>
-        </p:nvSpPr>
-        <p:spPr/>
-        <p:txBody>
-          <a:bodyPr/>
-          <a:lstStyle/>
-          <a:p>
-            <a:endParaRPr lang="ru-RU" dirty="0">
-              <a:latin typeface="Times New Roman" panose="02020603050405020304" pitchFamily="18" charset="0"/>
-            </a:endParaRPr>
-          </a:p>
-        </p:txBody>
-      </p:sp>
-      <p:sp>
-        <p:nvSpPr>
-          <p:cNvPr id="3" name="Notes Placeholder 2"/>
-          <p:cNvSpPr>
-            <a:spLocks noGrp="1"/>
-          </p:cNvSpPr>
-          <p:nvPr>
-            <p:ph type="body" idx="1"/>
-          </p:nvPr>
-        </p:nvSpPr>
-        <p:spPr/>
-        <p:txBody>
-          <a:bodyPr/>
-          <a:lstStyle/>
-          <a:p>
-            <a:endParaRPr lang="en-US" dirty="0">
-              <a:latin typeface="Times New Roman" panose="02020603050405020304" pitchFamily="18" charset="0"/>
-            </a:endParaRPr>
-          </a:p>
-        </p:txBody>
-      </p:sp>
-      <p:sp>
-        <p:nvSpPr>
-          <p:cNvPr id="4" name="Slide Number Placeholder 3"/>
-          <p:cNvSpPr>
-            <a:spLocks noGrp="1"/>
-          </p:cNvSpPr>
-          <p:nvPr>
-            <p:ph type="sldNum" sz="quarter" idx="10"/>
-          </p:nvPr>
-        </p:nvSpPr>
-        <p:spPr/>
-        <p:txBody>
-          <a:bodyPr/>
-          <a:lstStyle/>
-          <a:p>
-            <a:fld id="{F7021451-1387-4CA6-816F-3879F97B5CBC}" type="slidenum">
-              <a:rPr lang="en-US">
-                <a:latin typeface="Times New Roman" panose="02020603050405020304" pitchFamily="18" charset="0"/>
-              </a:rPr>
-              <a:t>16</a:t>
+              <a:t>2</a:t>
             </a:fld>
             <a:endParaRPr lang="en-US">
               <a:latin typeface="Times New Roman" panose="02020603050405020304" pitchFamily="18" charset="0"/>
@@ -967,6 +383,15 @@
           </p:nvPr>
         </p:nvSpPr>
         <p:spPr/>
+        <p:txBody>
+          <a:bodyPr/>
+          <a:lstStyle/>
+          <a:p>
+            <a:endParaRPr lang="ru-RU" dirty="0">
+              <a:latin typeface="Times New Roman" panose="02020603050405020304" pitchFamily="18" charset="0"/>
+            </a:endParaRPr>
+          </a:p>
+        </p:txBody>
       </p:sp>
       <p:sp>
         <p:nvSpPr>
@@ -983,7 +408,9 @@
           <a:bodyPr/>
           <a:lstStyle/>
           <a:p>
-            <a:endParaRPr lang="en-US" dirty="0"/>
+            <a:endParaRPr lang="en-US" dirty="0">
+              <a:latin typeface="Times New Roman" panose="02020603050405020304" pitchFamily="18" charset="0"/>
+            </a:endParaRPr>
           </a:p>
         </p:txBody>
       </p:sp>
@@ -1003,10 +430,14 @@
           <a:lstStyle/>
           <a:p>
             <a:fld id="{F7021451-1387-4CA6-816F-3879F97B5CBC}" type="slidenum">
-              <a:rPr lang="en-US"/>
-              <a:t>2</a:t>
+              <a:rPr lang="en-US">
+                <a:latin typeface="Times New Roman" panose="02020603050405020304" pitchFamily="18" charset="0"/>
+              </a:rPr>
+              <a:t>3</a:t>
             </a:fld>
-            <a:endParaRPr lang="en-US"/>
+            <a:endParaRPr lang="en-US">
+              <a:latin typeface="Times New Roman" panose="02020603050405020304" pitchFamily="18" charset="0"/>
+            </a:endParaRPr>
           </a:p>
         </p:txBody>
       </p:sp>
@@ -1051,6 +482,15 @@
           </p:nvPr>
         </p:nvSpPr>
         <p:spPr/>
+        <p:txBody>
+          <a:bodyPr/>
+          <a:lstStyle/>
+          <a:p>
+            <a:endParaRPr lang="ru-RU" dirty="0">
+              <a:latin typeface="Times New Roman" panose="02020603050405020304" pitchFamily="18" charset="0"/>
+            </a:endParaRPr>
+          </a:p>
+        </p:txBody>
       </p:sp>
       <p:sp>
         <p:nvSpPr>
@@ -1067,7 +507,9 @@
           <a:bodyPr/>
           <a:lstStyle/>
           <a:p>
-            <a:endParaRPr lang="en-US" dirty="0"/>
+            <a:endParaRPr lang="en-US" dirty="0">
+              <a:latin typeface="Times New Roman" panose="02020603050405020304" pitchFamily="18" charset="0"/>
+            </a:endParaRPr>
           </a:p>
         </p:txBody>
       </p:sp>
@@ -1087,10 +529,14 @@
           <a:lstStyle/>
           <a:p>
             <a:fld id="{F7021451-1387-4CA6-816F-3879F97B5CBC}" type="slidenum">
-              <a:rPr lang="en-US"/>
-              <a:t>3</a:t>
+              <a:rPr lang="en-US">
+                <a:latin typeface="Times New Roman" panose="02020603050405020304" pitchFamily="18" charset="0"/>
+              </a:rPr>
+              <a:t>4</a:t>
             </a:fld>
-            <a:endParaRPr lang="en-US"/>
+            <a:endParaRPr lang="en-US">
+              <a:latin typeface="Times New Roman" panose="02020603050405020304" pitchFamily="18" charset="0"/>
+            </a:endParaRPr>
           </a:p>
         </p:txBody>
       </p:sp>
@@ -1135,6 +581,15 @@
           </p:nvPr>
         </p:nvSpPr>
         <p:spPr/>
+        <p:txBody>
+          <a:bodyPr/>
+          <a:lstStyle/>
+          <a:p>
+            <a:endParaRPr lang="ru-RU" dirty="0">
+              <a:latin typeface="Times New Roman" panose="02020603050405020304" pitchFamily="18" charset="0"/>
+            </a:endParaRPr>
+          </a:p>
+        </p:txBody>
       </p:sp>
       <p:sp>
         <p:nvSpPr>
@@ -1151,7 +606,9 @@
           <a:bodyPr/>
           <a:lstStyle/>
           <a:p>
-            <a:endParaRPr lang="en-US" dirty="0"/>
+            <a:endParaRPr lang="en-US" dirty="0">
+              <a:latin typeface="Times New Roman" panose="02020603050405020304" pitchFamily="18" charset="0"/>
+            </a:endParaRPr>
           </a:p>
         </p:txBody>
       </p:sp>
@@ -1171,10 +628,14 @@
           <a:lstStyle/>
           <a:p>
             <a:fld id="{F7021451-1387-4CA6-816F-3879F97B5CBC}" type="slidenum">
-              <a:rPr lang="en-US"/>
-              <a:t>4</a:t>
+              <a:rPr lang="en-US">
+                <a:latin typeface="Times New Roman" panose="02020603050405020304" pitchFamily="18" charset="0"/>
+              </a:rPr>
+              <a:t>6</a:t>
             </a:fld>
-            <a:endParaRPr lang="en-US"/>
+            <a:endParaRPr lang="en-US">
+              <a:latin typeface="Times New Roman" panose="02020603050405020304" pitchFamily="18" charset="0"/>
+            </a:endParaRPr>
           </a:p>
         </p:txBody>
       </p:sp>
@@ -1219,6 +680,15 @@
           </p:nvPr>
         </p:nvSpPr>
         <p:spPr/>
+        <p:txBody>
+          <a:bodyPr/>
+          <a:lstStyle/>
+          <a:p>
+            <a:endParaRPr lang="ru-RU" dirty="0">
+              <a:latin typeface="Times New Roman" panose="02020603050405020304" pitchFamily="18" charset="0"/>
+            </a:endParaRPr>
+          </a:p>
+        </p:txBody>
       </p:sp>
       <p:sp>
         <p:nvSpPr>
@@ -1235,7 +705,9 @@
           <a:bodyPr/>
           <a:lstStyle/>
           <a:p>
-            <a:endParaRPr lang="en-US" dirty="0"/>
+            <a:endParaRPr lang="en-US" dirty="0">
+              <a:latin typeface="Times New Roman" panose="02020603050405020304" pitchFamily="18" charset="0"/>
+            </a:endParaRPr>
           </a:p>
         </p:txBody>
       </p:sp>
@@ -1255,10 +727,14 @@
           <a:lstStyle/>
           <a:p>
             <a:fld id="{F7021451-1387-4CA6-816F-3879F97B5CBC}" type="slidenum">
-              <a:rPr lang="en-US"/>
-              <a:t>5</a:t>
+              <a:rPr lang="en-US">
+                <a:latin typeface="Times New Roman" panose="02020603050405020304" pitchFamily="18" charset="0"/>
+              </a:rPr>
+              <a:t>7</a:t>
             </a:fld>
-            <a:endParaRPr lang="en-US"/>
+            <a:endParaRPr lang="en-US">
+              <a:latin typeface="Times New Roman" panose="02020603050405020304" pitchFamily="18" charset="0"/>
+            </a:endParaRPr>
           </a:p>
         </p:txBody>
       </p:sp>
@@ -1303,6 +779,15 @@
           </p:nvPr>
         </p:nvSpPr>
         <p:spPr/>
+        <p:txBody>
+          <a:bodyPr/>
+          <a:lstStyle/>
+          <a:p>
+            <a:endParaRPr lang="ru-RU" dirty="0">
+              <a:latin typeface="Times New Roman" panose="02020603050405020304" pitchFamily="18" charset="0"/>
+            </a:endParaRPr>
+          </a:p>
+        </p:txBody>
       </p:sp>
       <p:sp>
         <p:nvSpPr>
@@ -1319,7 +804,9 @@
           <a:bodyPr/>
           <a:lstStyle/>
           <a:p>
-            <a:endParaRPr lang="en-US" dirty="0"/>
+            <a:endParaRPr lang="en-US" dirty="0">
+              <a:latin typeface="Times New Roman" panose="02020603050405020304" pitchFamily="18" charset="0"/>
+            </a:endParaRPr>
           </a:p>
         </p:txBody>
       </p:sp>
@@ -1339,10 +826,14 @@
           <a:lstStyle/>
           <a:p>
             <a:fld id="{F7021451-1387-4CA6-816F-3879F97B5CBC}" type="slidenum">
-              <a:rPr lang="en-US"/>
-              <a:t>6</a:t>
+              <a:rPr lang="en-US">
+                <a:latin typeface="Times New Roman" panose="02020603050405020304" pitchFamily="18" charset="0"/>
+              </a:rPr>
+              <a:t>8</a:t>
             </a:fld>
-            <a:endParaRPr lang="en-US"/>
+            <a:endParaRPr lang="en-US">
+              <a:latin typeface="Times New Roman" panose="02020603050405020304" pitchFamily="18" charset="0"/>
+            </a:endParaRPr>
           </a:p>
         </p:txBody>
       </p:sp>
@@ -1387,6 +878,15 @@
           </p:nvPr>
         </p:nvSpPr>
         <p:spPr/>
+        <p:txBody>
+          <a:bodyPr/>
+          <a:lstStyle/>
+          <a:p>
+            <a:endParaRPr lang="ru-RU" dirty="0">
+              <a:latin typeface="Times New Roman" panose="02020603050405020304" pitchFamily="18" charset="0"/>
+            </a:endParaRPr>
+          </a:p>
+        </p:txBody>
       </p:sp>
       <p:sp>
         <p:nvSpPr>
@@ -1403,7 +903,9 @@
           <a:bodyPr/>
           <a:lstStyle/>
           <a:p>
-            <a:endParaRPr lang="en-US" dirty="0"/>
+            <a:endParaRPr lang="en-US" dirty="0">
+              <a:latin typeface="Times New Roman" panose="02020603050405020304" pitchFamily="18" charset="0"/>
+            </a:endParaRPr>
           </a:p>
         </p:txBody>
       </p:sp>
@@ -1423,10 +925,14 @@
           <a:lstStyle/>
           <a:p>
             <a:fld id="{F7021451-1387-4CA6-816F-3879F97B5CBC}" type="slidenum">
-              <a:rPr lang="en-US"/>
-              <a:t>7</a:t>
+              <a:rPr lang="en-US">
+                <a:latin typeface="Times New Roman" panose="02020603050405020304" pitchFamily="18" charset="0"/>
+              </a:rPr>
+              <a:t>9</a:t>
             </a:fld>
-            <a:endParaRPr lang="en-US"/>
+            <a:endParaRPr lang="en-US">
+              <a:latin typeface="Times New Roman" panose="02020603050405020304" pitchFamily="18" charset="0"/>
+            </a:endParaRPr>
           </a:p>
         </p:txBody>
       </p:sp>
@@ -1521,106 +1027,7 @@
               <a:rPr lang="en-US">
                 <a:latin typeface="Times New Roman" panose="02020603050405020304" pitchFamily="18" charset="0"/>
               </a:rPr>
-              <a:t>8</a:t>
-            </a:fld>
-            <a:endParaRPr lang="en-US">
-              <a:latin typeface="Times New Roman" panose="02020603050405020304" pitchFamily="18" charset="0"/>
-            </a:endParaRPr>
-          </a:p>
-        </p:txBody>
-      </p:sp>
-    </p:spTree>
-    <p:extLst>
-      <p:ext uri="{BB962C8B-B14F-4D97-AF65-F5344CB8AC3E}">
-        <p14:creationId xmlns:p14="http://schemas.microsoft.com/office/powerpoint/2010/main" val="1024086991"/>
-      </p:ext>
-    </p:extLst>
-  </p:cSld>
-  <p:clrMapOvr>
-    <a:masterClrMapping/>
-  </p:clrMapOvr>
-</p:notes>
-</file>
-
-<file path=ppt/notesSlides/notesSlide9.xml><?xml version="1.0" encoding="utf-8"?>
-<p:notes xmlns:a="http://schemas.openxmlformats.org/drawingml/2006/main" xmlns:r="http://schemas.openxmlformats.org/officeDocument/2006/relationships" xmlns:p="http://schemas.openxmlformats.org/presentationml/2006/main">
-  <p:cSld>
-    <p:spTree>
-      <p:nvGrpSpPr>
-        <p:cNvPr id="1" name=""/>
-        <p:cNvGrpSpPr/>
-        <p:nvPr/>
-      </p:nvGrpSpPr>
-      <p:grpSpPr>
-        <a:xfrm>
-          <a:off x="0" y="0"/>
-          <a:ext cx="0" cy="0"/>
-          <a:chOff x="0" y="0"/>
-          <a:chExt cx="0" cy="0"/>
-        </a:xfrm>
-      </p:grpSpPr>
-      <p:sp>
-        <p:nvSpPr>
-          <p:cNvPr id="2" name="Slide Image Placeholder 1"/>
-          <p:cNvSpPr>
-            <a:spLocks noGrp="1" noRot="1" noChangeAspect="1"/>
-          </p:cNvSpPr>
-          <p:nvPr>
-            <p:ph type="sldImg"/>
-          </p:nvPr>
-        </p:nvSpPr>
-        <p:spPr/>
-        <p:txBody>
-          <a:bodyPr/>
-          <a:lstStyle/>
-          <a:p>
-            <a:endParaRPr lang="ru-RU" dirty="0">
-              <a:latin typeface="Times New Roman" panose="02020603050405020304" pitchFamily="18" charset="0"/>
-            </a:endParaRPr>
-          </a:p>
-        </p:txBody>
-      </p:sp>
-      <p:sp>
-        <p:nvSpPr>
-          <p:cNvPr id="3" name="Notes Placeholder 2"/>
-          <p:cNvSpPr>
-            <a:spLocks noGrp="1"/>
-          </p:cNvSpPr>
-          <p:nvPr>
-            <p:ph type="body" idx="1"/>
-          </p:nvPr>
-        </p:nvSpPr>
-        <p:spPr/>
-        <p:txBody>
-          <a:bodyPr/>
-          <a:lstStyle/>
-          <a:p>
-            <a:endParaRPr lang="en-US" dirty="0">
-              <a:latin typeface="Times New Roman" panose="02020603050405020304" pitchFamily="18" charset="0"/>
-            </a:endParaRPr>
-          </a:p>
-        </p:txBody>
-      </p:sp>
-      <p:sp>
-        <p:nvSpPr>
-          <p:cNvPr id="4" name="Slide Number Placeholder 3"/>
-          <p:cNvSpPr>
-            <a:spLocks noGrp="1"/>
-          </p:cNvSpPr>
-          <p:nvPr>
-            <p:ph type="sldNum" sz="quarter" idx="10"/>
-          </p:nvPr>
-        </p:nvSpPr>
-        <p:spPr/>
-        <p:txBody>
-          <a:bodyPr/>
-          <a:lstStyle/>
-          <a:p>
-            <a:fld id="{F7021451-1387-4CA6-816F-3879F97B5CBC}" type="slidenum">
-              <a:rPr lang="en-US">
-                <a:latin typeface="Times New Roman" panose="02020603050405020304" pitchFamily="18" charset="0"/>
-              </a:rPr>
-              <a:t>9</a:t>
+              <a:t>10</a:t>
             </a:fld>
             <a:endParaRPr lang="en-US">
               <a:latin typeface="Times New Roman" panose="02020603050405020304" pitchFamily="18" charset="0"/>
@@ -1788,7 +1195,7 @@
           <a:p>
             <a:fld id="{2E651FA9-ADE1-4548-A5C3-336F9F0EAA53}" type="datetimeFigureOut">
               <a:rPr lang="ru-RU" smtClean="0"/>
-              <a:t>07.04.2026</a:t>
+              <a:t>08.04.2026</a:t>
             </a:fld>
             <a:endParaRPr lang="ru-RU"/>
           </a:p>
@@ -1987,7 +1394,7 @@
           <a:p>
             <a:fld id="{2E651FA9-ADE1-4548-A5C3-336F9F0EAA53}" type="datetimeFigureOut">
               <a:rPr lang="ru-RU" smtClean="0"/>
-              <a:t>07.04.2026</a:t>
+              <a:t>08.04.2026</a:t>
             </a:fld>
             <a:endParaRPr lang="ru-RU"/>
           </a:p>
@@ -2196,7 +1603,7 @@
           <a:p>
             <a:fld id="{2E651FA9-ADE1-4548-A5C3-336F9F0EAA53}" type="datetimeFigureOut">
               <a:rPr lang="ru-RU" smtClean="0"/>
-              <a:t>07.04.2026</a:t>
+              <a:t>08.04.2026</a:t>
             </a:fld>
             <a:endParaRPr lang="ru-RU"/>
           </a:p>
@@ -2302,36 +1709,6 @@
 
 <file path=ppt/slideLayouts/slideLayout13.xml><?xml version="1.0" encoding="utf-8"?>
 <p:sldLayout xmlns:a="http://schemas.openxmlformats.org/drawingml/2006/main" xmlns:r="http://schemas.openxmlformats.org/officeDocument/2006/relationships" xmlns:p="http://schemas.openxmlformats.org/presentationml/2006/main">
-  <p:cSld name="Slide 2 master">
-    <p:spTree>
-      <p:nvGrpSpPr>
-        <p:cNvPr id="1" name=""/>
-        <p:cNvGrpSpPr/>
-        <p:nvPr/>
-      </p:nvGrpSpPr>
-      <p:grpSpPr>
-        <a:xfrm>
-          <a:off x="0" y="0"/>
-          <a:ext cx="0" cy="0"/>
-          <a:chOff x="0" y="0"/>
-          <a:chExt cx="0" cy="0"/>
-        </a:xfrm>
-      </p:grpSpPr>
-    </p:spTree>
-    <p:extLst>
-      <p:ext uri="{BB962C8B-B14F-4D97-AF65-F5344CB8AC3E}">
-        <p14:creationId xmlns:p14="http://schemas.microsoft.com/office/powerpoint/2010/main" val="3511118998"/>
-      </p:ext>
-    </p:extLst>
-  </p:cSld>
-  <p:clrMapOvr>
-    <a:masterClrMapping/>
-  </p:clrMapOvr>
-</p:sldLayout>
-</file>
-
-<file path=ppt/slideLayouts/slideLayout14.xml><?xml version="1.0" encoding="utf-8"?>
-<p:sldLayout xmlns:a="http://schemas.openxmlformats.org/drawingml/2006/main" xmlns:r="http://schemas.openxmlformats.org/officeDocument/2006/relationships" xmlns:p="http://schemas.openxmlformats.org/presentationml/2006/main">
   <p:cSld name="Slide 3 master">
     <p:spTree>
       <p:nvGrpSpPr>
@@ -2360,7 +1737,7 @@
 </p:sldLayout>
 </file>
 
-<file path=ppt/slideLayouts/slideLayout15.xml><?xml version="1.0" encoding="utf-8"?>
+<file path=ppt/slideLayouts/slideLayout14.xml><?xml version="1.0" encoding="utf-8"?>
 <p:sldLayout xmlns:a="http://schemas.openxmlformats.org/drawingml/2006/main" xmlns:r="http://schemas.openxmlformats.org/officeDocument/2006/relationships" xmlns:p="http://schemas.openxmlformats.org/presentationml/2006/main">
   <p:cSld name="Slide 4 master">
     <p:spTree>
@@ -2390,7 +1767,7 @@
 </p:sldLayout>
 </file>
 
-<file path=ppt/slideLayouts/slideLayout16.xml><?xml version="1.0" encoding="utf-8"?>
+<file path=ppt/slideLayouts/slideLayout15.xml><?xml version="1.0" encoding="utf-8"?>
 <p:sldLayout xmlns:a="http://schemas.openxmlformats.org/drawingml/2006/main" xmlns:r="http://schemas.openxmlformats.org/officeDocument/2006/relationships" xmlns:p="http://schemas.openxmlformats.org/presentationml/2006/main">
   <p:cSld name="Slide 5 master">
     <p:spTree>
@@ -2420,7 +1797,7 @@
 </p:sldLayout>
 </file>
 
-<file path=ppt/slideLayouts/slideLayout17.xml><?xml version="1.0" encoding="utf-8"?>
+<file path=ppt/slideLayouts/slideLayout16.xml><?xml version="1.0" encoding="utf-8"?>
 <p:sldLayout xmlns:a="http://schemas.openxmlformats.org/drawingml/2006/main" xmlns:r="http://schemas.openxmlformats.org/officeDocument/2006/relationships" xmlns:p="http://schemas.openxmlformats.org/presentationml/2006/main">
   <p:cSld name="Slide 6 master">
     <p:spTree>
@@ -2450,7 +1827,7 @@
 </p:sldLayout>
 </file>
 
-<file path=ppt/slideLayouts/slideLayout18.xml><?xml version="1.0" encoding="utf-8"?>
+<file path=ppt/slideLayouts/slideLayout17.xml><?xml version="1.0" encoding="utf-8"?>
 <p:sldLayout xmlns:a="http://schemas.openxmlformats.org/drawingml/2006/main" xmlns:r="http://schemas.openxmlformats.org/officeDocument/2006/relationships" xmlns:p="http://schemas.openxmlformats.org/presentationml/2006/main">
   <p:cSld name="Slide 7 master">
     <p:spTree>
@@ -2480,7 +1857,7 @@
 </p:sldLayout>
 </file>
 
-<file path=ppt/slideLayouts/slideLayout19.xml><?xml version="1.0" encoding="utf-8"?>
+<file path=ppt/slideLayouts/slideLayout18.xml><?xml version="1.0" encoding="utf-8"?>
 <p:sldLayout xmlns:a="http://schemas.openxmlformats.org/drawingml/2006/main" xmlns:r="http://schemas.openxmlformats.org/officeDocument/2006/relationships" xmlns:p="http://schemas.openxmlformats.org/presentationml/2006/main">
   <p:cSld name="Slide 8 master">
     <p:spTree>
@@ -2501,6 +1878,36 @@
     <p:extLst>
       <p:ext uri="{BB962C8B-B14F-4D97-AF65-F5344CB8AC3E}">
         <p14:creationId xmlns:p14="http://schemas.microsoft.com/office/powerpoint/2010/main" val="4046415065"/>
+      </p:ext>
+    </p:extLst>
+  </p:cSld>
+  <p:clrMapOvr>
+    <a:masterClrMapping/>
+  </p:clrMapOvr>
+</p:sldLayout>
+</file>
+
+<file path=ppt/slideLayouts/slideLayout19.xml><?xml version="1.0" encoding="utf-8"?>
+<p:sldLayout xmlns:a="http://schemas.openxmlformats.org/drawingml/2006/main" xmlns:r="http://schemas.openxmlformats.org/officeDocument/2006/relationships" xmlns:p="http://schemas.openxmlformats.org/presentationml/2006/main">
+  <p:cSld name="Slide 9 master">
+    <p:spTree>
+      <p:nvGrpSpPr>
+        <p:cNvPr id="1" name=""/>
+        <p:cNvGrpSpPr/>
+        <p:nvPr/>
+      </p:nvGrpSpPr>
+      <p:grpSpPr>
+        <a:xfrm>
+          <a:off x="0" y="0"/>
+          <a:ext cx="0" cy="0"/>
+          <a:chOff x="0" y="0"/>
+          <a:chExt cx="0" cy="0"/>
+        </a:xfrm>
+      </p:grpSpPr>
+    </p:spTree>
+    <p:extLst>
+      <p:ext uri="{BB962C8B-B14F-4D97-AF65-F5344CB8AC3E}">
+        <p14:creationId xmlns:p14="http://schemas.microsoft.com/office/powerpoint/2010/main" val="4067345119"/>
       </p:ext>
     </p:extLst>
   </p:cSld>
@@ -2635,7 +2042,7 @@
           <a:p>
             <a:fld id="{2E651FA9-ADE1-4548-A5C3-336F9F0EAA53}" type="datetimeFigureOut">
               <a:rPr lang="ru-RU" smtClean="0"/>
-              <a:t>07.04.2026</a:t>
+              <a:t>08.04.2026</a:t>
             </a:fld>
             <a:endParaRPr lang="ru-RU"/>
           </a:p>
@@ -2706,36 +2113,6 @@
     <a:masterClrMapping/>
   </p:clrMapOvr>
   <p:hf sldNum="0" hdr="0" ftr="0" dt="0"/>
-</p:sldLayout>
-</file>
-
-<file path=ppt/slideLayouts/slideLayout20.xml><?xml version="1.0" encoding="utf-8"?>
-<p:sldLayout xmlns:a="http://schemas.openxmlformats.org/drawingml/2006/main" xmlns:r="http://schemas.openxmlformats.org/officeDocument/2006/relationships" xmlns:p="http://schemas.openxmlformats.org/presentationml/2006/main">
-  <p:cSld name="Slide 9 master">
-    <p:spTree>
-      <p:nvGrpSpPr>
-        <p:cNvPr id="1" name=""/>
-        <p:cNvGrpSpPr/>
-        <p:nvPr/>
-      </p:nvGrpSpPr>
-      <p:grpSpPr>
-        <a:xfrm>
-          <a:off x="0" y="0"/>
-          <a:ext cx="0" cy="0"/>
-          <a:chOff x="0" y="0"/>
-          <a:chExt cx="0" cy="0"/>
-        </a:xfrm>
-      </p:grpSpPr>
-    </p:spTree>
-    <p:extLst>
-      <p:ext uri="{BB962C8B-B14F-4D97-AF65-F5344CB8AC3E}">
-        <p14:creationId xmlns:p14="http://schemas.microsoft.com/office/powerpoint/2010/main" val="4067345119"/>
-      </p:ext>
-    </p:extLst>
-  </p:cSld>
-  <p:clrMapOvr>
-    <a:masterClrMapping/>
-  </p:clrMapOvr>
 </p:sldLayout>
 </file>
 
@@ -2941,7 +2318,7 @@
           <a:p>
             <a:fld id="{2E651FA9-ADE1-4548-A5C3-336F9F0EAA53}" type="datetimeFigureOut">
               <a:rPr lang="ru-RU" smtClean="0"/>
-              <a:t>07.04.2026</a:t>
+              <a:t>08.04.2026</a:t>
             </a:fld>
             <a:endParaRPr lang="ru-RU"/>
           </a:p>
@@ -3207,7 +2584,7 @@
           <a:p>
             <a:fld id="{2E651FA9-ADE1-4548-A5C3-336F9F0EAA53}" type="datetimeFigureOut">
               <a:rPr lang="ru-RU" smtClean="0"/>
-              <a:t>07.04.2026</a:t>
+              <a:t>08.04.2026</a:t>
             </a:fld>
             <a:endParaRPr lang="ru-RU"/>
           </a:p>
@@ -3620,7 +2997,7 @@
           <a:p>
             <a:fld id="{2E651FA9-ADE1-4548-A5C3-336F9F0EAA53}" type="datetimeFigureOut">
               <a:rPr lang="ru-RU" smtClean="0"/>
-              <a:t>07.04.2026</a:t>
+              <a:t>08.04.2026</a:t>
             </a:fld>
             <a:endParaRPr lang="ru-RU"/>
           </a:p>
@@ -3762,7 +3139,7 @@
           <a:p>
             <a:fld id="{2E651FA9-ADE1-4548-A5C3-336F9F0EAA53}" type="datetimeFigureOut">
               <a:rPr lang="ru-RU" smtClean="0"/>
-              <a:t>07.04.2026</a:t>
+              <a:t>08.04.2026</a:t>
             </a:fld>
             <a:endParaRPr lang="ru-RU"/>
           </a:p>
@@ -3876,7 +3253,7 @@
           <a:p>
             <a:fld id="{2E651FA9-ADE1-4548-A5C3-336F9F0EAA53}" type="datetimeFigureOut">
               <a:rPr lang="ru-RU" smtClean="0"/>
-              <a:t>07.04.2026</a:t>
+              <a:t>08.04.2026</a:t>
             </a:fld>
             <a:endParaRPr lang="ru-RU"/>
           </a:p>
@@ -4188,7 +3565,7 @@
           <a:p>
             <a:fld id="{2E651FA9-ADE1-4548-A5C3-336F9F0EAA53}" type="datetimeFigureOut">
               <a:rPr lang="ru-RU" smtClean="0"/>
-              <a:t>07.04.2026</a:t>
+              <a:t>08.04.2026</a:t>
             </a:fld>
             <a:endParaRPr lang="ru-RU"/>
           </a:p>
@@ -4477,7 +3854,7 @@
           <a:p>
             <a:fld id="{2E651FA9-ADE1-4548-A5C3-336F9F0EAA53}" type="datetimeFigureOut">
               <a:rPr lang="ru-RU" smtClean="0"/>
-              <a:t>07.04.2026</a:t>
+              <a:t>08.04.2026</a:t>
             </a:fld>
             <a:endParaRPr lang="ru-RU"/>
           </a:p>
@@ -4720,7 +4097,7 @@
             <a:fld id="{2E651FA9-ADE1-4548-A5C3-336F9F0EAA53}" type="datetimeFigureOut">
               <a:rPr lang="ru-RU" smtClean="0"/>
               <a:pPr/>
-              <a:t>07.04.2026</a:t>
+              <a:t>08.04.2026</a:t>
             </a:fld>
             <a:endParaRPr lang="ru-RU" dirty="0"/>
           </a:p>
@@ -4838,14 +4215,13 @@
     <p:sldLayoutId id="2147483692" r:id="rId10"/>
     <p:sldLayoutId id="2147483693" r:id="rId11"/>
     <p:sldLayoutId id="2147483694" r:id="rId12"/>
-    <p:sldLayoutId id="2147483695" r:id="rId13"/>
-    <p:sldLayoutId id="2147483696" r:id="rId14"/>
-    <p:sldLayoutId id="2147483697" r:id="rId15"/>
-    <p:sldLayoutId id="2147483698" r:id="rId16"/>
-    <p:sldLayoutId id="2147483699" r:id="rId17"/>
-    <p:sldLayoutId id="2147483700" r:id="rId18"/>
-    <p:sldLayoutId id="2147483701" r:id="rId19"/>
-    <p:sldLayoutId id="2147483702" r:id="rId20"/>
+    <p:sldLayoutId id="2147483696" r:id="rId13"/>
+    <p:sldLayoutId id="2147483697" r:id="rId14"/>
+    <p:sldLayoutId id="2147483698" r:id="rId15"/>
+    <p:sldLayoutId id="2147483699" r:id="rId16"/>
+    <p:sldLayoutId id="2147483700" r:id="rId17"/>
+    <p:sldLayoutId id="2147483701" r:id="rId18"/>
+    <p:sldLayoutId id="2147483702" r:id="rId19"/>
   </p:sldLayoutIdLst>
   <p:hf sldNum="0" hdr="0" ftr="0" dt="0"/>
   <p:txStyles>
@@ -5150,14 +4526,123 @@
       </p:grpSpPr>
       <p:sp>
         <p:nvSpPr>
+          <p:cNvPr id="2" name="Заголовок 1">
+            <a:extLst>
+              <a:ext uri="{FF2B5EF4-FFF2-40B4-BE49-F238E27FC236}">
+                <a16:creationId xmlns:a16="http://schemas.microsoft.com/office/drawing/2014/main" id="{5FC79F1B-B57D-5CB0-0168-72FAF36519DE}"/>
+              </a:ext>
+            </a:extLst>
+          </p:cNvPr>
+          <p:cNvSpPr>
+            <a:spLocks noGrp="1"/>
+          </p:cNvSpPr>
+          <p:nvPr>
+            <p:ph type="ctrTitle"/>
+          </p:nvPr>
+        </p:nvSpPr>
+        <p:spPr/>
+        <p:txBody>
+          <a:bodyPr/>
+          <a:lstStyle/>
+          <a:p>
+            <a:r>
+              <a:rPr lang="ru-RU" dirty="0"/>
+              <a:t>Фильтрация сигналов сингулярным разделением</a:t>
+            </a:r>
+          </a:p>
+        </p:txBody>
+      </p:sp>
+      <p:sp>
+        <p:nvSpPr>
+          <p:cNvPr id="3" name="Подзаголовок 2">
+            <a:extLst>
+              <a:ext uri="{FF2B5EF4-FFF2-40B4-BE49-F238E27FC236}">
+                <a16:creationId xmlns:a16="http://schemas.microsoft.com/office/drawing/2014/main" id="{D59C922D-3F66-493B-5D55-980FE354403D}"/>
+              </a:ext>
+            </a:extLst>
+          </p:cNvPr>
+          <p:cNvSpPr>
+            <a:spLocks noGrp="1"/>
+          </p:cNvSpPr>
+          <p:nvPr>
+            <p:ph type="subTitle" idx="1"/>
+          </p:nvPr>
+        </p:nvSpPr>
+        <p:spPr>
+          <a:xfrm>
+            <a:off x="9780998" y="5315903"/>
+            <a:ext cx="4849402" cy="1986914"/>
+          </a:xfrm>
+        </p:spPr>
+        <p:txBody>
+          <a:bodyPr/>
+          <a:lstStyle/>
+          <a:p>
+            <a:r>
+              <a:rPr lang="ru-RU" dirty="0"/>
+              <a:t>Выполнили студенты группы РСК-21</a:t>
+            </a:r>
+            <a:br>
+              <a:rPr lang="ru-RU" dirty="0"/>
+            </a:br>
+            <a:r>
+              <a:rPr lang="ru-RU" dirty="0"/>
+              <a:t>Филимонов А</a:t>
+            </a:r>
+            <a:br>
+              <a:rPr lang="ru-RU" dirty="0"/>
+            </a:br>
+            <a:r>
+              <a:rPr lang="ru-RU" dirty="0" err="1"/>
+              <a:t>Шубёнкин</a:t>
+            </a:r>
+            <a:r>
+              <a:rPr lang="ru-RU" dirty="0"/>
+              <a:t> М</a:t>
+            </a:r>
+          </a:p>
+        </p:txBody>
+      </p:sp>
+    </p:spTree>
+    <p:extLst>
+      <p:ext uri="{BB962C8B-B14F-4D97-AF65-F5344CB8AC3E}">
+        <p14:creationId xmlns:p14="http://schemas.microsoft.com/office/powerpoint/2010/main" val="4274091883"/>
+      </p:ext>
+    </p:extLst>
+  </p:cSld>
+  <p:clrMapOvr>
+    <a:masterClrMapping/>
+  </p:clrMapOvr>
+</p:sld>
+</file>
+
+<file path=ppt/slides/slide10.xml><?xml version="1.0" encoding="utf-8"?>
+<p:sld xmlns:a="http://schemas.openxmlformats.org/drawingml/2006/main" xmlns:r="http://schemas.openxmlformats.org/officeDocument/2006/relationships" xmlns:p="http://schemas.openxmlformats.org/presentationml/2006/main">
+  <p:cSld name="Slide 9">
+    <p:spTree>
+      <p:nvGrpSpPr>
+        <p:cNvPr id="1" name=""/>
+        <p:cNvGrpSpPr/>
+        <p:nvPr/>
+      </p:nvGrpSpPr>
+      <p:grpSpPr>
+        <a:xfrm>
+          <a:off x="0" y="0"/>
+          <a:ext cx="0" cy="0"/>
+          <a:chOff x="0" y="0"/>
+          <a:chExt cx="0" cy="0"/>
+        </a:xfrm>
+      </p:grpSpPr>
+      <p:sp>
+        <p:nvSpPr>
           <p:cNvPr id="2" name="Text 0"/>
           <p:cNvSpPr/>
           <p:nvPr/>
         </p:nvSpPr>
         <p:spPr>
           <a:xfrm>
-            <a:off x="864037" y="717429"/>
-            <a:ext cx="7169110" cy="771525"/>
+            <a:off x="789503" y="730012"/>
+            <a:ext cx="6525697" cy="474821"/>
           </a:xfrm>
           <a:prstGeom prst="rect">
             <a:avLst/>
@@ -5171,33 +4656,21 @@
           <a:p>
             <a:pPr marL="0" indent="0" algn="l">
               <a:lnSpc>
-                <a:spcPts val="6050"/>
+                <a:spcPts val="3700"/>
               </a:lnSpc>
               <a:buNone/>
             </a:pPr>
             <a:r>
               <a:rPr lang="en-US" sz="4500" dirty="0">
-                <a:solidFill>
-                  <a:srgbClr val="030303"/>
-                </a:solidFill>
                 <a:latin typeface="Times New Roman" panose="02020603050405020304" pitchFamily="18" charset="0"/>
-                <a:ea typeface="DM Sans Semi Bold" pitchFamily="34" charset="-122"/>
+                <a:ea typeface="Instrument Sans Semi Bold" pitchFamily="34" charset="-122"/>
                 <a:cs typeface="Times New Roman" panose="02020603050405020304" pitchFamily="18" charset="0"/>
               </a:rPr>
-              <a:t>Преобразование</a:t>
+              <a:t>Визуализация фильтрации сигнала</a:t>
             </a:r>
-            <a:r>
-              <a:rPr lang="en-US" sz="4850" dirty="0">
-                <a:solidFill>
-                  <a:srgbClr val="030303"/>
-                </a:solidFill>
-                <a:latin typeface="Times New Roman" panose="02020603050405020304" pitchFamily="18" charset="0"/>
-                <a:ea typeface="DM Sans Semi Bold" pitchFamily="34" charset="-122"/>
-                <a:cs typeface="Times New Roman" panose="02020603050405020304" pitchFamily="18" charset="0"/>
-              </a:rPr>
-              <a:t> Фурье</a:t>
-            </a:r>
-            <a:endParaRPr lang="en-US" sz="4850" dirty="0"/>
+            <a:endParaRPr lang="en-US" sz="4500" dirty="0">
+              <a:latin typeface="Times New Roman" panose="02020603050405020304" pitchFamily="18" charset="0"/>
+            </a:endParaRPr>
           </a:p>
         </p:txBody>
       </p:sp>
@@ -5209,8 +4682,8 @@
         </p:nvSpPr>
         <p:spPr>
           <a:xfrm>
-            <a:off x="864037" y="2064900"/>
-            <a:ext cx="12902327" cy="1580198"/>
+            <a:off x="789503" y="1416367"/>
+            <a:ext cx="13297856" cy="405765"/>
           </a:xfrm>
           <a:prstGeom prst="rect">
             <a:avLst/>
@@ -5224,40 +4697,284 @@
           <a:p>
             <a:pPr marL="0" indent="0" algn="l">
               <a:lnSpc>
-                <a:spcPts val="3100"/>
+                <a:spcPts val="1550"/>
               </a:lnSpc>
               <a:buNone/>
             </a:pPr>
             <a:r>
               <a:rPr lang="en-US" sz="2200" dirty="0">
                 <a:latin typeface="Times New Roman" panose="02020603050405020304" pitchFamily="18" charset="0"/>
+                <a:ea typeface="Instrument Sans Medium" pitchFamily="34" charset="-122"/>
+                <a:cs typeface="Times New Roman" panose="02020603050405020304" pitchFamily="18" charset="0"/>
               </a:rPr>
-              <a:t>Преобразование Фурье  — операция, сопоставляющая одной функции вещественной переменной другую функцию, описывающую коэффициенты («амплитуды») при разложении исходной функции на гармонические колебания с разными частотами. Простыми словами — это способ разделения сложного сигнала на </a:t>
+              <a:t>Эффективность метода SVD для фильтрации сигнала наглядно демонстрируется сравнением исходного, зашумлённого и восстановленного сигналов.</a:t>
+            </a:r>
+            <a:endParaRPr lang="en-US" sz="2200" dirty="0">
+              <a:latin typeface="Times New Roman" panose="02020603050405020304" pitchFamily="18" charset="0"/>
+            </a:endParaRPr>
+          </a:p>
+        </p:txBody>
+      </p:sp>
+      <p:pic>
+        <p:nvPicPr>
+          <p:cNvPr id="7" name="Рисунок 6">
+            <a:extLst>
+              <a:ext uri="{FF2B5EF4-FFF2-40B4-BE49-F238E27FC236}">
+                <a16:creationId xmlns:a16="http://schemas.microsoft.com/office/drawing/2014/main" id="{50775F34-D26C-8B5C-3B0C-19501EAE1CB0}"/>
+              </a:ext>
+            </a:extLst>
+          </p:cNvPr>
+          <p:cNvPicPr>
+            <a:picLocks noChangeAspect="1"/>
+          </p:cNvPicPr>
+          <p:nvPr/>
+        </p:nvPicPr>
+        <p:blipFill>
+          <a:blip r:embed="rId3"/>
+          <a:stretch>
+            <a:fillRect/>
+          </a:stretch>
+        </p:blipFill>
+        <p:spPr>
+          <a:xfrm>
+            <a:off x="2946663" y="1961299"/>
+            <a:ext cx="7872025" cy="1838629"/>
+          </a:xfrm>
+          <a:prstGeom prst="rect">
+            <a:avLst/>
+          </a:prstGeom>
+        </p:spPr>
+      </p:pic>
+      <p:pic>
+        <p:nvPicPr>
+          <p:cNvPr id="8" name="Рисунок 7">
+            <a:extLst>
+              <a:ext uri="{FF2B5EF4-FFF2-40B4-BE49-F238E27FC236}">
+                <a16:creationId xmlns:a16="http://schemas.microsoft.com/office/drawing/2014/main" id="{B61970F9-74A7-9BCC-C516-34B839BFD3FA}"/>
+              </a:ext>
+            </a:extLst>
+          </p:cNvPr>
+          <p:cNvPicPr>
+            <a:picLocks noChangeAspect="1"/>
+          </p:cNvPicPr>
+          <p:nvPr/>
+        </p:nvPicPr>
+        <p:blipFill>
+          <a:blip r:embed="rId4"/>
+          <a:stretch>
+            <a:fillRect/>
+          </a:stretch>
+        </p:blipFill>
+        <p:spPr>
+          <a:xfrm>
+            <a:off x="3018582" y="3799928"/>
+            <a:ext cx="7872025" cy="1845361"/>
+          </a:xfrm>
+          <a:prstGeom prst="rect">
+            <a:avLst/>
+          </a:prstGeom>
+        </p:spPr>
+      </p:pic>
+      <p:pic>
+        <p:nvPicPr>
+          <p:cNvPr id="9" name="Рисунок 8">
+            <a:extLst>
+              <a:ext uri="{FF2B5EF4-FFF2-40B4-BE49-F238E27FC236}">
+                <a16:creationId xmlns:a16="http://schemas.microsoft.com/office/drawing/2014/main" id="{D9E2DC31-C9FB-AC40-A72E-4305964CCF64}"/>
+              </a:ext>
+            </a:extLst>
+          </p:cNvPr>
+          <p:cNvPicPr>
+            <a:picLocks noChangeAspect="1"/>
+          </p:cNvPicPr>
+          <p:nvPr/>
+        </p:nvPicPr>
+        <p:blipFill>
+          <a:blip r:embed="rId5"/>
+          <a:stretch>
+            <a:fillRect/>
+          </a:stretch>
+        </p:blipFill>
+        <p:spPr>
+          <a:xfrm>
+            <a:off x="2982622" y="5645289"/>
+            <a:ext cx="7943944" cy="1882600"/>
+          </a:xfrm>
+          <a:prstGeom prst="rect">
+            <a:avLst/>
+          </a:prstGeom>
+        </p:spPr>
+      </p:pic>
+    </p:spTree>
+  </p:cSld>
+  <p:clrMapOvr>
+    <a:masterClrMapping/>
+  </p:clrMapOvr>
+</p:sld>
+</file>
+
+<file path=ppt/slides/slide11.xml><?xml version="1.0" encoding="utf-8"?>
+<p:sld xmlns:a="http://schemas.openxmlformats.org/drawingml/2006/main" xmlns:r="http://schemas.openxmlformats.org/officeDocument/2006/relationships" xmlns:p="http://schemas.openxmlformats.org/presentationml/2006/main">
+  <p:cSld>
+    <p:spTree>
+      <p:nvGrpSpPr>
+        <p:cNvPr id="1" name=""/>
+        <p:cNvGrpSpPr/>
+        <p:nvPr/>
+      </p:nvGrpSpPr>
+      <p:grpSpPr>
+        <a:xfrm>
+          <a:off x="0" y="0"/>
+          <a:ext cx="0" cy="0"/>
+          <a:chOff x="0" y="0"/>
+          <a:chExt cx="0" cy="0"/>
+        </a:xfrm>
+      </p:grpSpPr>
+      <p:sp>
+        <p:nvSpPr>
+          <p:cNvPr id="2" name="Заголовок 1">
+            <a:extLst>
+              <a:ext uri="{FF2B5EF4-FFF2-40B4-BE49-F238E27FC236}">
+                <a16:creationId xmlns:a16="http://schemas.microsoft.com/office/drawing/2014/main" id="{C6442623-314F-772A-ACFE-C1C534F19D8F}"/>
+              </a:ext>
+            </a:extLst>
+          </p:cNvPr>
+          <p:cNvSpPr>
+            <a:spLocks noGrp="1"/>
+          </p:cNvSpPr>
+          <p:nvPr>
+            <p:ph type="title"/>
+          </p:nvPr>
+        </p:nvSpPr>
+        <p:spPr/>
+        <p:txBody>
+          <a:bodyPr>
+            <a:normAutofit/>
+          </a:bodyPr>
+          <a:lstStyle/>
+          <a:p>
+            <a:r>
+              <a:rPr lang="ru-RU" sz="4500" dirty="0">
+                <a:latin typeface="Times New Roman" panose="02020603050405020304" pitchFamily="18" charset="0"/>
+                <a:cs typeface="Times New Roman" panose="02020603050405020304" pitchFamily="18" charset="0"/>
+              </a:rPr>
+              <a:t>Вывод</a:t>
+            </a:r>
+          </a:p>
+        </p:txBody>
+      </p:sp>
+      <p:sp>
+        <p:nvSpPr>
+          <p:cNvPr id="3" name="Объект 2">
+            <a:extLst>
+              <a:ext uri="{FF2B5EF4-FFF2-40B4-BE49-F238E27FC236}">
+                <a16:creationId xmlns:a16="http://schemas.microsoft.com/office/drawing/2014/main" id="{E15F115D-9A20-A075-5EF1-952F1024E2F0}"/>
+              </a:ext>
+            </a:extLst>
+          </p:cNvPr>
+          <p:cNvSpPr>
+            <a:spLocks noGrp="1"/>
+          </p:cNvSpPr>
+          <p:nvPr>
+            <p:ph idx="1"/>
+          </p:nvPr>
+        </p:nvSpPr>
+        <p:spPr/>
+        <p:txBody>
+          <a:bodyPr>
+            <a:normAutofit/>
+          </a:bodyPr>
+          <a:lstStyle/>
+          <a:p>
+            <a:pPr marL="0" indent="0">
+              <a:buNone/>
+            </a:pPr>
+            <a:r>
+              <a:rPr lang="ru-RU" sz="3000" dirty="0">
+                <a:latin typeface="Times New Roman" panose="02020603050405020304" pitchFamily="18" charset="0"/>
+                <a:cs typeface="Times New Roman" panose="02020603050405020304" pitchFamily="18" charset="0"/>
+              </a:rPr>
+              <a:t>Несмотря на большое количество вычислений, фильтрация сигналов сингулярным разложением является эффективным и универсальным методом подавления шума.</a:t>
+            </a:r>
+          </a:p>
+        </p:txBody>
+      </p:sp>
+    </p:spTree>
+    <p:extLst>
+      <p:ext uri="{BB962C8B-B14F-4D97-AF65-F5344CB8AC3E}">
+        <p14:creationId xmlns:p14="http://schemas.microsoft.com/office/powerpoint/2010/main" val="1713433438"/>
+      </p:ext>
+    </p:extLst>
+  </p:cSld>
+  <p:clrMapOvr>
+    <a:masterClrMapping/>
+  </p:clrMapOvr>
+</p:sld>
+</file>
+
+<file path=ppt/slides/slide2.xml><?xml version="1.0" encoding="utf-8"?>
+<p:sld xmlns:a="http://schemas.openxmlformats.org/drawingml/2006/main" xmlns:r="http://schemas.openxmlformats.org/officeDocument/2006/relationships" xmlns:p="http://schemas.openxmlformats.org/presentationml/2006/main">
+  <p:cSld name="Slide 1">
+    <p:spTree>
+      <p:nvGrpSpPr>
+        <p:cNvPr id="1" name=""/>
+        <p:cNvGrpSpPr/>
+        <p:nvPr/>
+      </p:nvGrpSpPr>
+      <p:grpSpPr>
+        <a:xfrm>
+          <a:off x="0" y="0"/>
+          <a:ext cx="0" cy="0"/>
+          <a:chOff x="0" y="0"/>
+          <a:chExt cx="0" cy="0"/>
+        </a:xfrm>
+      </p:grpSpPr>
+      <p:sp>
+        <p:nvSpPr>
+          <p:cNvPr id="2" name="Text 0"/>
+          <p:cNvSpPr/>
+          <p:nvPr/>
+        </p:nvSpPr>
+        <p:spPr>
+          <a:xfrm>
+            <a:off x="857250" y="636924"/>
+            <a:ext cx="11953637" cy="708779"/>
+          </a:xfrm>
+          <a:prstGeom prst="rect">
+            <a:avLst/>
+          </a:prstGeom>
+          <a:noFill/>
+          <a:ln/>
+        </p:spPr>
+        <p:txBody>
+          <a:bodyPr wrap="none" lIns="0" tIns="0" rIns="0" bIns="0" rtlCol="0" anchor="t"/>
+          <a:lstStyle/>
+          <a:p>
+            <a:pPr marL="0" indent="0" algn="l">
+              <a:lnSpc>
+                <a:spcPts val="5550"/>
+              </a:lnSpc>
+              <a:buNone/>
+            </a:pPr>
+            <a:r>
+              <a:rPr lang="en-US" sz="4500" dirty="0">
+                <a:latin typeface="Times New Roman" panose="02020603050405020304" pitchFamily="18" charset="0"/>
+                <a:ea typeface="Instrument Sans Semi Bold" pitchFamily="34" charset="-122"/>
+                <a:cs typeface="Times New Roman" panose="02020603050405020304" pitchFamily="18" charset="0"/>
+              </a:rPr>
+              <a:t>Собственные</a:t>
             </a:r>
             <a:r>
-              <a:rPr lang="en-US" sz="2200" dirty="0" err="1">
+              <a:rPr lang="en-US" sz="4450" dirty="0">
                 <a:latin typeface="Times New Roman" panose="02020603050405020304" pitchFamily="18" charset="0"/>
+                <a:ea typeface="Instrument Sans Semi Bold" pitchFamily="34" charset="-122"/>
+                <a:cs typeface="Times New Roman" panose="02020603050405020304" pitchFamily="18" charset="0"/>
               </a:rPr>
-              <a:t>составляющие</a:t>
+              <a:t> значения и векторы матрицы</a:t>
             </a:r>
-            <a:r>
-              <a:rPr lang="en-US" sz="2200" dirty="0">
-                <a:latin typeface="Times New Roman" panose="02020603050405020304" pitchFamily="18" charset="0"/>
-              </a:rPr>
-              <a:t> </a:t>
-            </a:r>
-            <a:r>
-              <a:rPr lang="en-US" sz="2200" dirty="0" err="1">
-                <a:latin typeface="Times New Roman" panose="02020603050405020304" pitchFamily="18" charset="0"/>
-              </a:rPr>
-              <a:t>синусоиды</a:t>
-            </a:r>
-            <a:r>
-              <a:rPr lang="en-US" sz="2200" dirty="0">
-                <a:latin typeface="Times New Roman" panose="02020603050405020304" pitchFamily="18" charset="0"/>
-              </a:rPr>
-              <a:t>.</a:t>
-            </a:r>
+            <a:endParaRPr lang="en-US" sz="4450" dirty="0">
+              <a:latin typeface="Times New Roman" panose="02020603050405020304" pitchFamily="18" charset="0"/>
+            </a:endParaRPr>
           </a:p>
         </p:txBody>
       </p:sp>
@@ -5269,8 +4986,50 @@
         </p:nvSpPr>
         <p:spPr>
           <a:xfrm>
-            <a:off x="864037" y="3789187"/>
-            <a:ext cx="12902327" cy="1185148"/>
+            <a:off x="879261" y="2370118"/>
+            <a:ext cx="2835235" cy="354330"/>
+          </a:xfrm>
+          <a:prstGeom prst="rect">
+            <a:avLst/>
+          </a:prstGeom>
+          <a:noFill/>
+          <a:ln/>
+        </p:spPr>
+        <p:txBody>
+          <a:bodyPr wrap="none" lIns="0" tIns="0" rIns="0" bIns="0" rtlCol="0" anchor="t"/>
+          <a:lstStyle/>
+          <a:p>
+            <a:pPr marL="0" indent="0" algn="l">
+              <a:lnSpc>
+                <a:spcPts val="2750"/>
+              </a:lnSpc>
+              <a:buNone/>
+            </a:pPr>
+            <a:r>
+              <a:rPr lang="en-US" sz="2200" dirty="0">
+                <a:latin typeface="Times New Roman" panose="02020603050405020304" pitchFamily="18" charset="0"/>
+                <a:ea typeface="Instrument Sans Semi Bold" pitchFamily="34" charset="-122"/>
+                <a:cs typeface="Times New Roman" panose="02020603050405020304" pitchFamily="18" charset="0"/>
+              </a:rPr>
+              <a:t>Определение</a:t>
+            </a:r>
+            <a:endParaRPr lang="en-US" sz="2200" dirty="0">
+              <a:latin typeface="Times New Roman" panose="02020603050405020304" pitchFamily="18" charset="0"/>
+              <a:cs typeface="Times New Roman" panose="02020603050405020304" pitchFamily="18" charset="0"/>
+            </a:endParaRPr>
+          </a:p>
+        </p:txBody>
+      </p:sp>
+      <p:sp>
+        <p:nvSpPr>
+          <p:cNvPr id="5" name="Text 3"/>
+          <p:cNvSpPr/>
+          <p:nvPr/>
+        </p:nvSpPr>
+        <p:spPr>
+          <a:xfrm>
+            <a:off x="879261" y="2951262"/>
+            <a:ext cx="6117788" cy="725805"/>
           </a:xfrm>
           <a:prstGeom prst="rect">
             <a:avLst/>
@@ -5284,38 +5043,921 @@
           <a:p>
             <a:pPr marL="0" indent="0" algn="l">
               <a:lnSpc>
-                <a:spcPts val="3100"/>
+                <a:spcPts val="2850"/>
+              </a:lnSpc>
+              <a:buNone/>
+            </a:pPr>
+            <a:r>
+              <a:rPr lang="en-US" sz="1900" dirty="0">
+                <a:latin typeface="Times New Roman" panose="02020603050405020304" pitchFamily="18" charset="0"/>
+                <a:ea typeface="Instrument Sans Medium" pitchFamily="34" charset="-122"/>
+                <a:cs typeface="Times New Roman" panose="02020603050405020304" pitchFamily="18" charset="0"/>
+              </a:rPr>
+              <a:t>Число </a:t>
+            </a:r>
+            <a:r>
+              <a:rPr lang="en-US" sz="1900" b="1" dirty="0">
+                <a:latin typeface="Times New Roman" panose="02020603050405020304" pitchFamily="18" charset="0"/>
+                <a:ea typeface="Instrument Sans Medium" pitchFamily="34" charset="-122"/>
+                <a:cs typeface="Times New Roman" panose="02020603050405020304" pitchFamily="18" charset="0"/>
+              </a:rPr>
+              <a:t>λ</a:t>
+            </a:r>
+            <a:r>
+              <a:rPr lang="en-US" sz="1900" dirty="0">
+                <a:latin typeface="Times New Roman" panose="02020603050405020304" pitchFamily="18" charset="0"/>
+                <a:ea typeface="Instrument Sans Medium" pitchFamily="34" charset="-122"/>
+                <a:cs typeface="Times New Roman" panose="02020603050405020304" pitchFamily="18" charset="0"/>
+              </a:rPr>
+              <a:t> — собственное значение матрицы </a:t>
+            </a:r>
+            <a:r>
+              <a:rPr lang="en-US" sz="1900" b="1" dirty="0">
+                <a:latin typeface="Times New Roman" panose="02020603050405020304" pitchFamily="18" charset="0"/>
+                <a:ea typeface="Instrument Sans Medium" pitchFamily="34" charset="-122"/>
+                <a:cs typeface="Times New Roman" panose="02020603050405020304" pitchFamily="18" charset="0"/>
+              </a:rPr>
+              <a:t>A</a:t>
+            </a:r>
+            <a:r>
+              <a:rPr lang="en-US" sz="1900" dirty="0">
+                <a:latin typeface="Times New Roman" panose="02020603050405020304" pitchFamily="18" charset="0"/>
+                <a:ea typeface="Instrument Sans Medium" pitchFamily="34" charset="-122"/>
+                <a:cs typeface="Times New Roman" panose="02020603050405020304" pitchFamily="18" charset="0"/>
+              </a:rPr>
+              <a:t>, если существует ненулевой вектор </a:t>
+            </a:r>
+            <a:r>
+              <a:rPr lang="en-US" sz="1900" b="1" dirty="0">
+                <a:latin typeface="Times New Roman" panose="02020603050405020304" pitchFamily="18" charset="0"/>
+                <a:ea typeface="Instrument Sans Medium" pitchFamily="34" charset="-122"/>
+                <a:cs typeface="Times New Roman" panose="02020603050405020304" pitchFamily="18" charset="0"/>
+              </a:rPr>
+              <a:t>x</a:t>
+            </a:r>
+            <a:r>
+              <a:rPr lang="en-US" sz="1900" dirty="0">
+                <a:latin typeface="Times New Roman" panose="02020603050405020304" pitchFamily="18" charset="0"/>
+                <a:ea typeface="Instrument Sans Medium" pitchFamily="34" charset="-122"/>
+                <a:cs typeface="Times New Roman" panose="02020603050405020304" pitchFamily="18" charset="0"/>
+              </a:rPr>
+              <a:t> такой, что:</a:t>
+            </a:r>
+            <a:endParaRPr lang="en-US" sz="1900" dirty="0">
+              <a:latin typeface="Times New Roman" panose="02020603050405020304" pitchFamily="18" charset="0"/>
+              <a:cs typeface="Times New Roman" panose="02020603050405020304" pitchFamily="18" charset="0"/>
+            </a:endParaRPr>
+          </a:p>
+        </p:txBody>
+      </p:sp>
+      <p:sp>
+        <p:nvSpPr>
+          <p:cNvPr id="6" name="Text 4"/>
+          <p:cNvSpPr/>
+          <p:nvPr/>
+        </p:nvSpPr>
+        <p:spPr>
+          <a:xfrm>
+            <a:off x="857250" y="4544378"/>
+            <a:ext cx="6117788" cy="393263"/>
+          </a:xfrm>
+          <a:prstGeom prst="rect">
+            <a:avLst/>
+          </a:prstGeom>
+          <a:noFill/>
+          <a:ln/>
+        </p:spPr>
+        <p:txBody>
+          <a:bodyPr wrap="none" lIns="0" tIns="0" rIns="0" bIns="0" rtlCol="0" anchor="t"/>
+          <a:lstStyle/>
+          <a:p>
+            <a:pPr marL="0" indent="0" algn="l">
+              <a:lnSpc>
+                <a:spcPts val="3200"/>
+              </a:lnSpc>
+              <a:buNone/>
+            </a:pPr>
+            <a:endParaRPr lang="en-US" sz="2000" dirty="0">
+              <a:latin typeface="Times New Roman" panose="02020603050405020304" pitchFamily="18" charset="0"/>
+            </a:endParaRPr>
+          </a:p>
+        </p:txBody>
+      </p:sp>
+      <p:sp>
+        <p:nvSpPr>
+          <p:cNvPr id="8" name="Text 5"/>
+          <p:cNvSpPr/>
+          <p:nvPr/>
+        </p:nvSpPr>
+        <p:spPr>
+          <a:xfrm>
+            <a:off x="879261" y="4644450"/>
+            <a:ext cx="6117788" cy="725805"/>
+          </a:xfrm>
+          <a:prstGeom prst="rect">
+            <a:avLst/>
+          </a:prstGeom>
+          <a:noFill/>
+          <a:ln/>
+        </p:spPr>
+        <p:txBody>
+          <a:bodyPr wrap="square" lIns="0" tIns="0" rIns="0" bIns="0" rtlCol="0" anchor="t"/>
+          <a:lstStyle/>
+          <a:p>
+            <a:pPr marL="0" indent="0" algn="l">
+              <a:lnSpc>
+                <a:spcPts val="2850"/>
               </a:lnSpc>
               <a:buNone/>
             </a:pPr>
             <a:r>
               <a:rPr lang="en-US" sz="2200" dirty="0">
                 <a:latin typeface="Times New Roman" panose="02020603050405020304" pitchFamily="18" charset="0"/>
-                <a:ea typeface="Inter Medium" pitchFamily="34" charset="-122"/>
+                <a:ea typeface="Instrument Sans Medium" pitchFamily="34" charset="-122"/>
                 <a:cs typeface="Times New Roman" panose="02020603050405020304" pitchFamily="18" charset="0"/>
               </a:rPr>
-              <a:t>Метод открыт французским математиком Жан-Батистом</a:t>
+              <a:t>Вектор </a:t>
             </a:r>
             <a:r>
               <a:rPr lang="en-US" sz="2200" b="1" dirty="0">
                 <a:latin typeface="Times New Roman" panose="02020603050405020304" pitchFamily="18" charset="0"/>
-                <a:ea typeface="Inter Medium" pitchFamily="34" charset="-122"/>
+                <a:ea typeface="Instrument Sans Medium" pitchFamily="34" charset="-122"/>
                 <a:cs typeface="Times New Roman" panose="02020603050405020304" pitchFamily="18" charset="0"/>
               </a:rPr>
-              <a:t> </a:t>
+              <a:t>x</a:t>
             </a:r>
             <a:r>
               <a:rPr lang="en-US" sz="2200" dirty="0">
                 <a:latin typeface="Times New Roman" panose="02020603050405020304" pitchFamily="18" charset="0"/>
-                <a:ea typeface="Inter Medium" pitchFamily="34" charset="-122"/>
+                <a:ea typeface="Instrument Sans Medium" pitchFamily="34" charset="-122"/>
                 <a:cs typeface="Times New Roman" panose="02020603050405020304" pitchFamily="18" charset="0"/>
               </a:rPr>
-              <a:t>Жозефом Фурье в начале 1800-х годов и является основоположником спектрального анализа — способа обработки сигналов, позволяющего охарактеризовать частотный состав измеряемого сигнала.</a:t>
+              <a:t> называется собственным вектором, соответствующим λ.</a:t>
             </a:r>
-            <a:endParaRPr lang="en-US" sz="2200" dirty="0"/>
+            <a:endParaRPr lang="en-US" sz="2200" dirty="0">
+              <a:latin typeface="Times New Roman" panose="02020603050405020304" pitchFamily="18" charset="0"/>
+              <a:cs typeface="Times New Roman" panose="02020603050405020304" pitchFamily="18" charset="0"/>
+            </a:endParaRPr>
           </a:p>
         </p:txBody>
       </p:sp>
+      <p:sp>
+        <p:nvSpPr>
+          <p:cNvPr id="9" name="Text 6"/>
+          <p:cNvSpPr/>
+          <p:nvPr/>
+        </p:nvSpPr>
+        <p:spPr>
+          <a:xfrm>
+            <a:off x="7793551" y="2534678"/>
+            <a:ext cx="4978122" cy="354330"/>
+          </a:xfrm>
+          <a:prstGeom prst="rect">
+            <a:avLst/>
+          </a:prstGeom>
+          <a:noFill/>
+          <a:ln/>
+        </p:spPr>
+        <p:txBody>
+          <a:bodyPr wrap="none" lIns="0" tIns="0" rIns="0" bIns="0" rtlCol="0" anchor="t"/>
+          <a:lstStyle/>
+          <a:p>
+            <a:pPr marL="0" indent="0" algn="l">
+              <a:lnSpc>
+                <a:spcPts val="2750"/>
+              </a:lnSpc>
+              <a:buNone/>
+            </a:pPr>
+            <a:r>
+              <a:rPr lang="en-US" sz="2200" dirty="0">
+                <a:latin typeface="Times New Roman" panose="02020603050405020304" pitchFamily="18" charset="0"/>
+                <a:cs typeface="Times New Roman" panose="02020603050405020304" pitchFamily="18" charset="0"/>
+              </a:rPr>
+              <a:t>Нахождение собственных значений</a:t>
+            </a:r>
+          </a:p>
+        </p:txBody>
+      </p:sp>
+      <p:sp>
+        <p:nvSpPr>
+          <p:cNvPr id="10" name="Text 7"/>
+          <p:cNvSpPr/>
+          <p:nvPr/>
+        </p:nvSpPr>
+        <p:spPr>
+          <a:xfrm>
+            <a:off x="7793551" y="3115822"/>
+            <a:ext cx="6244709" cy="362903"/>
+          </a:xfrm>
+          <a:prstGeom prst="rect">
+            <a:avLst/>
+          </a:prstGeom>
+          <a:noFill/>
+          <a:ln/>
+        </p:spPr>
+        <p:txBody>
+          <a:bodyPr wrap="none" lIns="0" tIns="0" rIns="0" bIns="0" rtlCol="0" anchor="t"/>
+          <a:lstStyle/>
+          <a:p>
+            <a:pPr marL="0" indent="0" algn="l">
+              <a:lnSpc>
+                <a:spcPts val="2850"/>
+              </a:lnSpc>
+              <a:buNone/>
+            </a:pPr>
+            <a:r>
+              <a:rPr lang="en-US" sz="2200" dirty="0">
+                <a:latin typeface="Times New Roman" panose="02020603050405020304" pitchFamily="18" charset="0"/>
+                <a:cs typeface="Times New Roman" panose="02020603050405020304" pitchFamily="18" charset="0"/>
+              </a:rPr>
+              <a:t>Составляется уравнение</a:t>
+            </a:r>
+            <a:r>
+              <a:rPr lang="en-US" sz="1750" dirty="0">
+                <a:solidFill>
+                  <a:srgbClr val="1E3063"/>
+                </a:solidFill>
+                <a:latin typeface="Times New Roman" panose="02020603050405020304" pitchFamily="18" charset="0"/>
+                <a:cs typeface="Times New Roman" panose="02020603050405020304" pitchFamily="18" charset="0"/>
+              </a:rPr>
+              <a:t>:</a:t>
+            </a:r>
+            <a:endParaRPr lang="en-US" sz="1750" dirty="0">
+              <a:latin typeface="Times New Roman" panose="02020603050405020304" pitchFamily="18" charset="0"/>
+            </a:endParaRPr>
+          </a:p>
+        </p:txBody>
+      </p:sp>
+      <p:sp>
+        <p:nvSpPr>
+          <p:cNvPr id="11" name="Text 8"/>
+          <p:cNvSpPr/>
+          <p:nvPr/>
+        </p:nvSpPr>
+        <p:spPr>
+          <a:xfrm>
+            <a:off x="7599521" y="4181475"/>
+            <a:ext cx="6244709" cy="393263"/>
+          </a:xfrm>
+          <a:prstGeom prst="rect">
+            <a:avLst/>
+          </a:prstGeom>
+          <a:noFill/>
+          <a:ln/>
+        </p:spPr>
+        <p:txBody>
+          <a:bodyPr wrap="none" lIns="0" tIns="0" rIns="0" bIns="0" rtlCol="0" anchor="t"/>
+          <a:lstStyle/>
+          <a:p>
+            <a:pPr marL="0" indent="0" algn="l">
+              <a:lnSpc>
+                <a:spcPts val="3200"/>
+              </a:lnSpc>
+              <a:buNone/>
+            </a:pPr>
+            <a:endParaRPr lang="en-US" sz="2000" dirty="0">
+              <a:latin typeface="Times New Roman" panose="02020603050405020304" pitchFamily="18" charset="0"/>
+            </a:endParaRPr>
+          </a:p>
+        </p:txBody>
+      </p:sp>
+      <p:sp>
+        <p:nvSpPr>
+          <p:cNvPr id="13" name="Text 9"/>
+          <p:cNvSpPr/>
+          <p:nvPr/>
+        </p:nvSpPr>
+        <p:spPr>
+          <a:xfrm>
+            <a:off x="7793551" y="4446107"/>
+            <a:ext cx="6244709" cy="725805"/>
+          </a:xfrm>
+          <a:prstGeom prst="rect">
+            <a:avLst/>
+          </a:prstGeom>
+          <a:noFill/>
+          <a:ln/>
+        </p:spPr>
+        <p:txBody>
+          <a:bodyPr wrap="square" lIns="0" tIns="0" rIns="0" bIns="0" rtlCol="0" anchor="t"/>
+          <a:lstStyle/>
+          <a:p>
+            <a:pPr marL="0" indent="0" algn="l">
+              <a:lnSpc>
+                <a:spcPts val="2850"/>
+              </a:lnSpc>
+              <a:buNone/>
+            </a:pPr>
+            <a:r>
+              <a:rPr lang="en-US" sz="2000" dirty="0">
+                <a:latin typeface="Times New Roman" panose="02020603050405020304" pitchFamily="18" charset="0"/>
+                <a:ea typeface="Instrument Sans Medium" pitchFamily="34" charset="-122"/>
+                <a:cs typeface="Times New Roman" panose="02020603050405020304" pitchFamily="18" charset="0"/>
+              </a:rPr>
+              <a:t>После нахождения λ собственные векторы определяются из системы:</a:t>
+            </a:r>
+            <a:endParaRPr lang="en-US" sz="2000" dirty="0">
+              <a:latin typeface="Times New Roman" panose="02020603050405020304" pitchFamily="18" charset="0"/>
+              <a:cs typeface="Times New Roman" panose="02020603050405020304" pitchFamily="18" charset="0"/>
+            </a:endParaRPr>
+          </a:p>
+        </p:txBody>
+      </p:sp>
+      <p:sp>
+        <p:nvSpPr>
+          <p:cNvPr id="14" name="Text 10"/>
+          <p:cNvSpPr/>
+          <p:nvPr/>
+        </p:nvSpPr>
+        <p:spPr>
+          <a:xfrm>
+            <a:off x="7599521" y="5874663"/>
+            <a:ext cx="6244709" cy="393263"/>
+          </a:xfrm>
+          <a:prstGeom prst="rect">
+            <a:avLst/>
+          </a:prstGeom>
+          <a:noFill/>
+          <a:ln/>
+        </p:spPr>
+        <p:txBody>
+          <a:bodyPr wrap="none" lIns="0" tIns="0" rIns="0" bIns="0" rtlCol="0" anchor="t"/>
+          <a:lstStyle/>
+          <a:p>
+            <a:pPr marL="0" indent="0" algn="l">
+              <a:lnSpc>
+                <a:spcPts val="3200"/>
+              </a:lnSpc>
+              <a:buNone/>
+            </a:pPr>
+            <a:endParaRPr lang="en-US" sz="2000" dirty="0">
+              <a:latin typeface="Times New Roman" panose="02020603050405020304" pitchFamily="18" charset="0"/>
+            </a:endParaRPr>
+          </a:p>
+        </p:txBody>
+      </p:sp>
+      <mc:AlternateContent xmlns:mc="http://schemas.openxmlformats.org/markup-compatibility/2006">
+        <mc:Choice xmlns:a14="http://schemas.microsoft.com/office/drawing/2010/main" Requires="a14">
+          <p:sp>
+            <p:nvSpPr>
+              <p:cNvPr id="16" name="TextBox 15">
+                <a:extLst>
+                  <a:ext uri="{FF2B5EF4-FFF2-40B4-BE49-F238E27FC236}">
+                    <a16:creationId xmlns:a16="http://schemas.microsoft.com/office/drawing/2014/main" id="{DDC2A393-F61B-B74B-97F3-A563DDD261F7}"/>
+                  </a:ext>
+                </a:extLst>
+              </p:cNvPr>
+              <p:cNvSpPr txBox="1"/>
+              <p:nvPr/>
+            </p:nvSpPr>
+            <p:spPr>
+              <a:xfrm>
+                <a:off x="9154274" y="3667022"/>
+                <a:ext cx="2892621" cy="461665"/>
+              </a:xfrm>
+              <a:prstGeom prst="rect">
+                <a:avLst/>
+              </a:prstGeom>
+              <a:noFill/>
+            </p:spPr>
+            <p:txBody>
+              <a:bodyPr wrap="square" lIns="0" tIns="0" rIns="0" bIns="0" rtlCol="0">
+                <a:spAutoFit/>
+              </a:bodyPr>
+              <a:lstStyle/>
+              <a:p>
+                <a:pPr/>
+                <a14:m>
+                  <m:oMathPara xmlns:m="http://schemas.openxmlformats.org/officeDocument/2006/math">
+                    <m:oMathParaPr>
+                      <m:jc m:val="centerGroup"/>
+                    </m:oMathParaPr>
+                    <m:oMath xmlns:m="http://schemas.openxmlformats.org/officeDocument/2006/math">
+                      <m:r>
+                        <m:rPr>
+                          <m:sty m:val="p"/>
+                        </m:rPr>
+                        <a:rPr lang="en-US" sz="3000" b="0" i="1" smtClean="0">
+                          <a:latin typeface="Cambria Math" panose="02040503050406030204" pitchFamily="18" charset="0"/>
+                        </a:rPr>
+                        <m:t>det</m:t>
+                      </m:r>
+                      <m:r>
+                        <a:rPr lang="en-US" sz="3000" b="0" i="1" smtClean="0">
+                          <a:latin typeface="Cambria Math" panose="02040503050406030204" pitchFamily="18" charset="0"/>
+                        </a:rPr>
+                        <m:t>(</m:t>
+                      </m:r>
+                      <m:r>
+                        <m:rPr>
+                          <m:sty m:val="p"/>
+                        </m:rPr>
+                        <a:rPr lang="en-US" sz="3000" b="0" i="1" smtClean="0">
+                          <a:latin typeface="Cambria Math" panose="02040503050406030204" pitchFamily="18" charset="0"/>
+                        </a:rPr>
+                        <m:t>A</m:t>
+                      </m:r>
+                      <m:r>
+                        <a:rPr lang="en-US" sz="3000" b="0" i="1" smtClean="0">
+                          <a:latin typeface="Cambria Math" panose="02040503050406030204" pitchFamily="18" charset="0"/>
+                        </a:rPr>
+                        <m:t>−</m:t>
+                      </m:r>
+                      <m:r>
+                        <a:rPr lang="en-US" sz="3000" b="0" i="1" smtClean="0">
+                          <a:latin typeface="Cambria Math" panose="02040503050406030204" pitchFamily="18" charset="0"/>
+                          <a:ea typeface="Cambria Math" panose="02040503050406030204" pitchFamily="18" charset="0"/>
+                        </a:rPr>
+                        <m:t>𝜆</m:t>
+                      </m:r>
+                      <m:r>
+                        <m:rPr>
+                          <m:sty m:val="p"/>
+                        </m:rPr>
+                        <a:rPr lang="en-US" sz="3000" b="0" i="1" smtClean="0">
+                          <a:latin typeface="Cambria Math" panose="02040503050406030204" pitchFamily="18" charset="0"/>
+                          <a:ea typeface="Cambria Math" panose="02040503050406030204" pitchFamily="18" charset="0"/>
+                        </a:rPr>
+                        <m:t>I</m:t>
+                      </m:r>
+                      <m:r>
+                        <a:rPr lang="en-US" sz="3000" b="0" i="1" smtClean="0">
+                          <a:latin typeface="Cambria Math" panose="02040503050406030204" pitchFamily="18" charset="0"/>
+                          <a:ea typeface="Cambria Math" panose="02040503050406030204" pitchFamily="18" charset="0"/>
+                        </a:rPr>
+                        <m:t>)=0</m:t>
+                      </m:r>
+                    </m:oMath>
+                  </m:oMathPara>
+                </a14:m>
+                <a:endParaRPr lang="ru-RU" sz="3000" dirty="0">
+                  <a:latin typeface="Times New Roman" panose="02020603050405020304" pitchFamily="18" charset="0"/>
+                </a:endParaRPr>
+              </a:p>
+            </p:txBody>
+          </p:sp>
+        </mc:Choice>
+        <mc:Fallback>
+          <p:sp>
+            <p:nvSpPr>
+              <p:cNvPr id="16" name="TextBox 15">
+                <a:extLst>
+                  <a:ext uri="{FF2B5EF4-FFF2-40B4-BE49-F238E27FC236}">
+                    <a16:creationId xmlns:a16="http://schemas.microsoft.com/office/drawing/2014/main" id="{DDC2A393-F61B-B74B-97F3-A563DDD261F7}"/>
+                  </a:ext>
+                </a:extLst>
+              </p:cNvPr>
+              <p:cNvSpPr txBox="1">
+                <a:spLocks noRot="1" noChangeAspect="1" noMove="1" noResize="1" noEditPoints="1" noAdjustHandles="1" noChangeArrowheads="1" noChangeShapeType="1" noTextEdit="1"/>
+              </p:cNvSpPr>
+              <p:nvPr/>
+            </p:nvSpPr>
+            <p:spPr>
+              <a:xfrm>
+                <a:off x="9154274" y="3667022"/>
+                <a:ext cx="2892621" cy="461665"/>
+              </a:xfrm>
+              <a:prstGeom prst="rect">
+                <a:avLst/>
+              </a:prstGeom>
+              <a:blipFill>
+                <a:blip r:embed="rId3"/>
+                <a:stretch>
+                  <a:fillRect/>
+                </a:stretch>
+              </a:blipFill>
+            </p:spPr>
+            <p:txBody>
+              <a:bodyPr/>
+              <a:lstStyle/>
+              <a:p>
+                <a:r>
+                  <a:rPr lang="ru-RU">
+                    <a:noFill/>
+                  </a:rPr>
+                  <a:t> </a:t>
+                </a:r>
+              </a:p>
+            </p:txBody>
+          </p:sp>
+        </mc:Fallback>
+      </mc:AlternateContent>
+      <mc:AlternateContent xmlns:mc="http://schemas.openxmlformats.org/markup-compatibility/2006">
+        <mc:Choice xmlns:a14="http://schemas.microsoft.com/office/drawing/2010/main" Requires="a14">
+          <p:sp>
+            <p:nvSpPr>
+              <p:cNvPr id="29" name="TextBox 28">
+                <a:extLst>
+                  <a:ext uri="{FF2B5EF4-FFF2-40B4-BE49-F238E27FC236}">
+                    <a16:creationId xmlns:a16="http://schemas.microsoft.com/office/drawing/2014/main" id="{DBFE8700-A7C8-AFD2-AE4E-AD6203C1F006}"/>
+                  </a:ext>
+                </a:extLst>
+              </p:cNvPr>
+              <p:cNvSpPr txBox="1"/>
+              <p:nvPr/>
+            </p:nvSpPr>
+            <p:spPr>
+              <a:xfrm>
+                <a:off x="6942984" y="5320665"/>
+                <a:ext cx="7315200" cy="553998"/>
+              </a:xfrm>
+              <a:prstGeom prst="rect">
+                <a:avLst/>
+              </a:prstGeom>
+              <a:noFill/>
+            </p:spPr>
+            <p:txBody>
+              <a:bodyPr wrap="square">
+                <a:spAutoFit/>
+              </a:bodyPr>
+              <a:lstStyle/>
+              <a:p>
+                <a:pPr marL="0" marR="0" lvl="0" indent="0" algn="l" defTabSz="914400" rtl="0" eaLnBrk="1" fontAlgn="auto" latinLnBrk="0" hangingPunct="1">
+                  <a:lnSpc>
+                    <a:spcPct val="100000"/>
+                  </a:lnSpc>
+                  <a:spcBef>
+                    <a:spcPts val="0"/>
+                  </a:spcBef>
+                  <a:spcAft>
+                    <a:spcPts val="0"/>
+                  </a:spcAft>
+                  <a:buClrTx/>
+                  <a:buSzTx/>
+                  <a:buFontTx/>
+                  <a:buNone/>
+                  <a:tabLst/>
+                  <a:defRPr/>
+                </a:pPr>
+                <a14:m>
+                  <m:oMathPara xmlns:m="http://schemas.openxmlformats.org/officeDocument/2006/math">
+                    <m:oMathParaPr>
+                      <m:jc m:val="centerGroup"/>
+                    </m:oMathParaPr>
+                    <m:oMath xmlns:m="http://schemas.openxmlformats.org/officeDocument/2006/math">
+                      <m:r>
+                        <a:rPr lang="en-US" sz="3000" i="1">
+                          <a:solidFill>
+                            <a:prstClr val="black"/>
+                          </a:solidFill>
+                          <a:latin typeface="Cambria Math" panose="02040503050406030204" pitchFamily="18" charset="0"/>
+                        </a:rPr>
+                        <m:t>(</m:t>
+                      </m:r>
+                      <m:r>
+                        <m:rPr>
+                          <m:sty m:val="p"/>
+                        </m:rPr>
+                        <a:rPr kumimoji="0" lang="en-US" sz="3000" b="0" i="1" u="none" strike="noStrike" kern="1200" cap="none" spc="0" normalizeH="0" baseline="0" noProof="0" smtClean="0">
+                          <a:ln>
+                            <a:noFill/>
+                          </a:ln>
+                          <a:solidFill>
+                            <a:prstClr val="black"/>
+                          </a:solidFill>
+                          <a:effectLst/>
+                          <a:uLnTx/>
+                          <a:uFillTx/>
+                          <a:latin typeface="Cambria Math" panose="02040503050406030204" pitchFamily="18" charset="0"/>
+                          <a:ea typeface="+mn-ea"/>
+                          <a:cs typeface="+mn-cs"/>
+                        </a:rPr>
+                        <m:t>A</m:t>
+                      </m:r>
+                      <m:r>
+                        <a:rPr kumimoji="0" lang="en-US" sz="3000" b="0" i="1" u="none" strike="noStrike" kern="1200" cap="none" spc="0" normalizeH="0" baseline="0" noProof="0" smtClean="0">
+                          <a:ln>
+                            <a:noFill/>
+                          </a:ln>
+                          <a:solidFill>
+                            <a:prstClr val="black"/>
+                          </a:solidFill>
+                          <a:effectLst/>
+                          <a:uLnTx/>
+                          <a:uFillTx/>
+                          <a:latin typeface="Cambria Math" panose="02040503050406030204" pitchFamily="18" charset="0"/>
+                          <a:ea typeface="+mn-ea"/>
+                          <a:cs typeface="+mn-cs"/>
+                        </a:rPr>
+                        <m:t>−</m:t>
+                      </m:r>
+                      <m:r>
+                        <a:rPr kumimoji="0" lang="en-US" sz="3000" b="0" i="1" u="none" strike="noStrike" kern="1200" cap="none" spc="0" normalizeH="0" baseline="0" noProof="0" smtClean="0">
+                          <a:ln>
+                            <a:noFill/>
+                          </a:ln>
+                          <a:solidFill>
+                            <a:prstClr val="black"/>
+                          </a:solidFill>
+                          <a:effectLst/>
+                          <a:uLnTx/>
+                          <a:uFillTx/>
+                          <a:latin typeface="Cambria Math" panose="02040503050406030204" pitchFamily="18" charset="0"/>
+                          <a:ea typeface="Cambria Math" panose="02040503050406030204" pitchFamily="18" charset="0"/>
+                          <a:cs typeface="+mn-cs"/>
+                        </a:rPr>
+                        <m:t>𝜆</m:t>
+                      </m:r>
+                      <m:r>
+                        <m:rPr>
+                          <m:sty m:val="p"/>
+                        </m:rPr>
+                        <a:rPr kumimoji="0" lang="en-US" sz="3000" b="0" i="1" u="none" strike="noStrike" kern="1200" cap="none" spc="0" normalizeH="0" baseline="0" noProof="0" smtClean="0">
+                          <a:ln>
+                            <a:noFill/>
+                          </a:ln>
+                          <a:solidFill>
+                            <a:prstClr val="black"/>
+                          </a:solidFill>
+                          <a:effectLst/>
+                          <a:uLnTx/>
+                          <a:uFillTx/>
+                          <a:latin typeface="Cambria Math" panose="02040503050406030204" pitchFamily="18" charset="0"/>
+                          <a:ea typeface="Cambria Math" panose="02040503050406030204" pitchFamily="18" charset="0"/>
+                          <a:cs typeface="+mn-cs"/>
+                        </a:rPr>
+                        <m:t>I</m:t>
+                      </m:r>
+                      <m:r>
+                        <a:rPr kumimoji="0" lang="en-US" sz="3000" b="0" i="1" u="none" strike="noStrike" kern="1200" cap="none" spc="0" normalizeH="0" baseline="0" noProof="0" smtClean="0">
+                          <a:ln>
+                            <a:noFill/>
+                          </a:ln>
+                          <a:solidFill>
+                            <a:prstClr val="black"/>
+                          </a:solidFill>
+                          <a:effectLst/>
+                          <a:uLnTx/>
+                          <a:uFillTx/>
+                          <a:latin typeface="Cambria Math" panose="02040503050406030204" pitchFamily="18" charset="0"/>
+                          <a:ea typeface="Cambria Math" panose="02040503050406030204" pitchFamily="18" charset="0"/>
+                          <a:cs typeface="+mn-cs"/>
+                        </a:rPr>
+                        <m:t>)</m:t>
+                      </m:r>
+                      <m:r>
+                        <m:rPr>
+                          <m:sty m:val="p"/>
+                        </m:rPr>
+                        <a:rPr kumimoji="0" lang="en-US" sz="3000" b="0" i="1" u="none" strike="noStrike" kern="1200" cap="none" spc="0" normalizeH="0" baseline="0" noProof="0" smtClean="0">
+                          <a:ln>
+                            <a:noFill/>
+                          </a:ln>
+                          <a:solidFill>
+                            <a:prstClr val="black"/>
+                          </a:solidFill>
+                          <a:effectLst/>
+                          <a:uLnTx/>
+                          <a:uFillTx/>
+                          <a:latin typeface="Cambria Math" panose="02040503050406030204" pitchFamily="18" charset="0"/>
+                          <a:ea typeface="Cambria Math" panose="02040503050406030204" pitchFamily="18" charset="0"/>
+                          <a:cs typeface="+mn-cs"/>
+                        </a:rPr>
+                        <m:t>x</m:t>
+                      </m:r>
+                      <m:r>
+                        <a:rPr kumimoji="0" lang="en-US" sz="3000" b="0" i="1" u="none" strike="noStrike" kern="1200" cap="none" spc="0" normalizeH="0" baseline="0" noProof="0" smtClean="0">
+                          <a:ln>
+                            <a:noFill/>
+                          </a:ln>
+                          <a:solidFill>
+                            <a:prstClr val="black"/>
+                          </a:solidFill>
+                          <a:effectLst/>
+                          <a:uLnTx/>
+                          <a:uFillTx/>
+                          <a:latin typeface="Cambria Math" panose="02040503050406030204" pitchFamily="18" charset="0"/>
+                          <a:ea typeface="Cambria Math" panose="02040503050406030204" pitchFamily="18" charset="0"/>
+                          <a:cs typeface="+mn-cs"/>
+                        </a:rPr>
+                        <m:t>=0</m:t>
+                      </m:r>
+                    </m:oMath>
+                  </m:oMathPara>
+                </a14:m>
+                <a:endParaRPr kumimoji="0" lang="ru-RU" sz="3000" b="0" i="0" u="none" strike="noStrike" kern="1200" cap="none" spc="0" normalizeH="0" baseline="0" noProof="0" dirty="0">
+                  <a:ln>
+                    <a:noFill/>
+                  </a:ln>
+                  <a:solidFill>
+                    <a:prstClr val="black"/>
+                  </a:solidFill>
+                  <a:effectLst/>
+                  <a:uLnTx/>
+                  <a:uFillTx/>
+                  <a:latin typeface="Times New Roman" panose="02020603050405020304" pitchFamily="18" charset="0"/>
+                  <a:ea typeface="+mn-ea"/>
+                  <a:cs typeface="+mn-cs"/>
+                </a:endParaRPr>
+              </a:p>
+            </p:txBody>
+          </p:sp>
+        </mc:Choice>
+        <mc:Fallback>
+          <p:sp>
+            <p:nvSpPr>
+              <p:cNvPr id="29" name="TextBox 28">
+                <a:extLst>
+                  <a:ext uri="{FF2B5EF4-FFF2-40B4-BE49-F238E27FC236}">
+                    <a16:creationId xmlns:a16="http://schemas.microsoft.com/office/drawing/2014/main" id="{DBFE8700-A7C8-AFD2-AE4E-AD6203C1F006}"/>
+                  </a:ext>
+                </a:extLst>
+              </p:cNvPr>
+              <p:cNvSpPr txBox="1">
+                <a:spLocks noRot="1" noChangeAspect="1" noMove="1" noResize="1" noEditPoints="1" noAdjustHandles="1" noChangeArrowheads="1" noChangeShapeType="1" noTextEdit="1"/>
+              </p:cNvSpPr>
+              <p:nvPr/>
+            </p:nvSpPr>
+            <p:spPr>
+              <a:xfrm>
+                <a:off x="6942984" y="5320665"/>
+                <a:ext cx="7315200" cy="553998"/>
+              </a:xfrm>
+              <a:prstGeom prst="rect">
+                <a:avLst/>
+              </a:prstGeom>
+              <a:blipFill>
+                <a:blip r:embed="rId4"/>
+                <a:stretch>
+                  <a:fillRect/>
+                </a:stretch>
+              </a:blipFill>
+            </p:spPr>
+            <p:txBody>
+              <a:bodyPr/>
+              <a:lstStyle/>
+              <a:p>
+                <a:r>
+                  <a:rPr lang="ru-RU">
+                    <a:noFill/>
+                  </a:rPr>
+                  <a:t> </a:t>
+                </a:r>
+              </a:p>
+            </p:txBody>
+          </p:sp>
+        </mc:Fallback>
+      </mc:AlternateContent>
+      <mc:AlternateContent xmlns:mc="http://schemas.openxmlformats.org/markup-compatibility/2006" xmlns:a14="http://schemas.microsoft.com/office/drawing/2010/main">
+        <mc:Choice Requires="a14">
+          <p:sp>
+            <p:nvSpPr>
+              <p:cNvPr id="31" name="TextBox 30">
+                <a:extLst>
+                  <a:ext uri="{FF2B5EF4-FFF2-40B4-BE49-F238E27FC236}">
+                    <a16:creationId xmlns:a16="http://schemas.microsoft.com/office/drawing/2014/main" id="{DC695A97-F70A-7FFC-54D1-017BC110B41F}"/>
+                  </a:ext>
+                </a:extLst>
+              </p:cNvPr>
+              <p:cNvSpPr txBox="1"/>
+              <p:nvPr/>
+            </p:nvSpPr>
+            <p:spPr>
+              <a:xfrm>
+                <a:off x="-284320" y="3837801"/>
+                <a:ext cx="7315200" cy="553998"/>
+              </a:xfrm>
+              <a:prstGeom prst="rect">
+                <a:avLst/>
+              </a:prstGeom>
+              <a:noFill/>
+            </p:spPr>
+            <p:txBody>
+              <a:bodyPr wrap="square">
+                <a:spAutoFit/>
+              </a:bodyPr>
+              <a:lstStyle/>
+              <a:p>
+                <a:pPr/>
+                <a14:m>
+                  <m:oMathPara xmlns:m="http://schemas.openxmlformats.org/officeDocument/2006/math">
+                    <m:oMathParaPr>
+                      <m:jc m:val="centerGroup"/>
+                    </m:oMathParaPr>
+                    <m:oMath xmlns:m="http://schemas.openxmlformats.org/officeDocument/2006/math">
+                      <m:r>
+                        <m:rPr>
+                          <m:sty m:val="p"/>
+                        </m:rPr>
+                        <a:rPr kumimoji="0" lang="en-US" sz="3000" b="0" i="1" u="none" strike="noStrike" kern="1200" cap="none" spc="0" normalizeH="0" baseline="0" noProof="0" smtClean="0">
+                          <a:ln>
+                            <a:noFill/>
+                          </a:ln>
+                          <a:solidFill>
+                            <a:prstClr val="black"/>
+                          </a:solidFill>
+                          <a:effectLst/>
+                          <a:uLnTx/>
+                          <a:uFillTx/>
+                          <a:latin typeface="Cambria Math" panose="02040503050406030204" pitchFamily="18" charset="0"/>
+                        </a:rPr>
+                        <m:t>Ax</m:t>
+                      </m:r>
+                      <m:r>
+                        <a:rPr kumimoji="0" lang="en-US" sz="3000" b="0" i="1" u="none" strike="noStrike" kern="1200" cap="none" spc="0" normalizeH="0" baseline="0" noProof="0" smtClean="0">
+                          <a:ln>
+                            <a:noFill/>
+                          </a:ln>
+                          <a:solidFill>
+                            <a:prstClr val="black"/>
+                          </a:solidFill>
+                          <a:effectLst/>
+                          <a:uLnTx/>
+                          <a:uFillTx/>
+                          <a:latin typeface="Cambria Math" panose="02040503050406030204" pitchFamily="18" charset="0"/>
+                        </a:rPr>
+                        <m:t>=</m:t>
+                      </m:r>
+                      <m:r>
+                        <a:rPr kumimoji="0" lang="en-US" sz="3000" b="0" i="1" u="none" strike="noStrike" kern="1200" cap="none" spc="0" normalizeH="0" baseline="0" noProof="0" smtClean="0">
+                          <a:ln>
+                            <a:noFill/>
+                          </a:ln>
+                          <a:solidFill>
+                            <a:prstClr val="black"/>
+                          </a:solidFill>
+                          <a:effectLst/>
+                          <a:uLnTx/>
+                          <a:uFillTx/>
+                          <a:latin typeface="Cambria Math" panose="02040503050406030204" pitchFamily="18" charset="0"/>
+                          <a:ea typeface="Cambria Math" panose="02040503050406030204" pitchFamily="18" charset="0"/>
+                        </a:rPr>
+                        <m:t>𝜆</m:t>
+                      </m:r>
+                      <m:r>
+                        <m:rPr>
+                          <m:sty m:val="p"/>
+                        </m:rPr>
+                        <a:rPr kumimoji="0" lang="en-US" sz="3000" b="0" i="1" u="none" strike="noStrike" kern="1200" cap="none" spc="0" normalizeH="0" baseline="0" noProof="0" smtClean="0">
+                          <a:ln>
+                            <a:noFill/>
+                          </a:ln>
+                          <a:solidFill>
+                            <a:prstClr val="black"/>
+                          </a:solidFill>
+                          <a:effectLst/>
+                          <a:uLnTx/>
+                          <a:uFillTx/>
+                          <a:latin typeface="Cambria Math" panose="02040503050406030204" pitchFamily="18" charset="0"/>
+                          <a:ea typeface="Cambria Math" panose="02040503050406030204" pitchFamily="18" charset="0"/>
+                        </a:rPr>
+                        <m:t>x</m:t>
+                      </m:r>
+                    </m:oMath>
+                  </m:oMathPara>
+                </a14:m>
+                <a:endParaRPr lang="ru-RU" sz="3000" dirty="0">
+                  <a:latin typeface="Times New Roman" panose="02020603050405020304" pitchFamily="18" charset="0"/>
+                </a:endParaRPr>
+              </a:p>
+            </p:txBody>
+          </p:sp>
+        </mc:Choice>
+        <mc:Fallback xmlns="">
+          <p:sp>
+            <p:nvSpPr>
+              <p:cNvPr id="31" name="TextBox 30">
+                <a:extLst>
+                  <a:ext uri="{FF2B5EF4-FFF2-40B4-BE49-F238E27FC236}">
+                    <a16:creationId xmlns:a16="http://schemas.microsoft.com/office/drawing/2014/main" id="{DC695A97-F70A-7FFC-54D1-017BC110B41F}"/>
+                  </a:ext>
+                </a:extLst>
+              </p:cNvPr>
+              <p:cNvSpPr txBox="1">
+                <a:spLocks noRot="1" noChangeAspect="1" noMove="1" noResize="1" noEditPoints="1" noAdjustHandles="1" noChangeArrowheads="1" noChangeShapeType="1" noTextEdit="1"/>
+              </p:cNvSpPr>
+              <p:nvPr/>
+            </p:nvSpPr>
+            <p:spPr>
+              <a:xfrm>
+                <a:off x="-284320" y="3837801"/>
+                <a:ext cx="7315200" cy="553998"/>
+              </a:xfrm>
+              <a:prstGeom prst="rect">
+                <a:avLst/>
+              </a:prstGeom>
+              <a:blipFill>
+                <a:blip r:embed="rId5"/>
+                <a:stretch>
+                  <a:fillRect/>
+                </a:stretch>
+              </a:blipFill>
+            </p:spPr>
+            <p:txBody>
+              <a:bodyPr/>
+              <a:lstStyle/>
+              <a:p>
+                <a:r>
+                  <a:rPr lang="ru-RU">
+                    <a:noFill/>
+                  </a:rPr>
+                  <a:t> </a:t>
+                </a:r>
+              </a:p>
+            </p:txBody>
+          </p:sp>
+        </mc:Fallback>
+      </mc:AlternateContent>
     </p:spTree>
   </p:cSld>
   <p:clrMapOvr>
@@ -5324,7 +5966,845 @@
 </p:sld>
 </file>
 
-<file path=ppt/slides/slide10.xml><?xml version="1.0" encoding="utf-8"?>
+<file path=ppt/slides/slide3.xml><?xml version="1.0" encoding="utf-8"?>
+<p:sld xmlns:a="http://schemas.openxmlformats.org/drawingml/2006/main" xmlns:r="http://schemas.openxmlformats.org/officeDocument/2006/relationships" xmlns:p="http://schemas.openxmlformats.org/presentationml/2006/main">
+  <p:cSld name="Slide 3">
+    <p:spTree>
+      <p:nvGrpSpPr>
+        <p:cNvPr id="1" name=""/>
+        <p:cNvGrpSpPr/>
+        <p:nvPr/>
+      </p:nvGrpSpPr>
+      <p:grpSpPr>
+        <a:xfrm>
+          <a:off x="0" y="0"/>
+          <a:ext cx="0" cy="0"/>
+          <a:chOff x="0" y="0"/>
+          <a:chExt cx="0" cy="0"/>
+        </a:xfrm>
+      </p:grpSpPr>
+      <p:sp>
+        <p:nvSpPr>
+          <p:cNvPr id="2" name="Text 0"/>
+          <p:cNvSpPr/>
+          <p:nvPr/>
+        </p:nvSpPr>
+        <p:spPr>
+          <a:xfrm>
+            <a:off x="793790" y="781407"/>
+            <a:ext cx="8887063" cy="708779"/>
+          </a:xfrm>
+          <a:prstGeom prst="rect">
+            <a:avLst/>
+          </a:prstGeom>
+          <a:noFill/>
+          <a:ln/>
+        </p:spPr>
+        <p:txBody>
+          <a:bodyPr wrap="none" lIns="0" tIns="0" rIns="0" bIns="0" rtlCol="0" anchor="t"/>
+          <a:lstStyle/>
+          <a:p>
+            <a:pPr marL="0" indent="0" algn="l">
+              <a:lnSpc>
+                <a:spcPts val="5550"/>
+              </a:lnSpc>
+              <a:buNone/>
+            </a:pPr>
+            <a:r>
+              <a:rPr lang="en-US" sz="4500" dirty="0">
+                <a:latin typeface="Times New Roman" panose="02020603050405020304" pitchFamily="18" charset="0"/>
+                <a:ea typeface="Instrument Sans Semi Bold" pitchFamily="34" charset="-122"/>
+                <a:cs typeface="Times New Roman" panose="02020603050405020304" pitchFamily="18" charset="0"/>
+              </a:rPr>
+              <a:t>Сингулярное</a:t>
+            </a:r>
+            <a:r>
+              <a:rPr lang="en-US" sz="4450" dirty="0">
+                <a:latin typeface="Times New Roman" panose="02020603050405020304" pitchFamily="18" charset="0"/>
+                <a:ea typeface="Instrument Sans Semi Bold" pitchFamily="34" charset="-122"/>
+                <a:cs typeface="Times New Roman" panose="02020603050405020304" pitchFamily="18" charset="0"/>
+              </a:rPr>
+              <a:t> разложение (SVD)</a:t>
+            </a:r>
+            <a:endParaRPr lang="en-US" sz="4450" dirty="0">
+              <a:latin typeface="Times New Roman" panose="02020603050405020304" pitchFamily="18" charset="0"/>
+            </a:endParaRPr>
+          </a:p>
+        </p:txBody>
+      </p:sp>
+      <p:sp>
+        <p:nvSpPr>
+          <p:cNvPr id="3" name="Text 1"/>
+          <p:cNvSpPr/>
+          <p:nvPr/>
+        </p:nvSpPr>
+        <p:spPr>
+          <a:xfrm>
+            <a:off x="793790" y="2503408"/>
+            <a:ext cx="13042821" cy="362903"/>
+          </a:xfrm>
+          <a:prstGeom prst="rect">
+            <a:avLst/>
+          </a:prstGeom>
+          <a:noFill/>
+          <a:ln/>
+        </p:spPr>
+        <p:txBody>
+          <a:bodyPr wrap="none" lIns="0" tIns="0" rIns="0" bIns="0" rtlCol="0" anchor="t"/>
+          <a:lstStyle/>
+          <a:p>
+            <a:pPr marL="0" indent="0" algn="l">
+              <a:lnSpc>
+                <a:spcPts val="2850"/>
+              </a:lnSpc>
+              <a:buNone/>
+            </a:pPr>
+            <a:r>
+              <a:rPr lang="en-US" sz="2200" dirty="0">
+                <a:latin typeface="Times New Roman" panose="02020603050405020304" pitchFamily="18" charset="0"/>
+                <a:ea typeface="Instrument Sans Medium" pitchFamily="34" charset="-122"/>
+                <a:cs typeface="Times New Roman" panose="02020603050405020304" pitchFamily="18" charset="0"/>
+              </a:rPr>
+              <a:t>Любая прямоугольная матрица </a:t>
+            </a:r>
+            <a:r>
+              <a:rPr lang="en-US" sz="2200" b="1" dirty="0">
+                <a:latin typeface="Times New Roman" panose="02020603050405020304" pitchFamily="18" charset="0"/>
+                <a:ea typeface="Instrument Sans Medium" pitchFamily="34" charset="-122"/>
+                <a:cs typeface="Times New Roman" panose="02020603050405020304" pitchFamily="18" charset="0"/>
+              </a:rPr>
+              <a:t>M</a:t>
+            </a:r>
+            <a:r>
+              <a:rPr lang="en-US" sz="2200" dirty="0">
+                <a:latin typeface="Times New Roman" panose="02020603050405020304" pitchFamily="18" charset="0"/>
+                <a:ea typeface="Instrument Sans Medium" pitchFamily="34" charset="-122"/>
+                <a:cs typeface="Times New Roman" panose="02020603050405020304" pitchFamily="18" charset="0"/>
+              </a:rPr>
+              <a:t> размера </a:t>
+            </a:r>
+            <a:r>
+              <a:rPr lang="en-US" sz="2200" dirty="0" err="1">
+                <a:latin typeface="Times New Roman" panose="02020603050405020304" pitchFamily="18" charset="0"/>
+                <a:ea typeface="Instrument Sans Medium" pitchFamily="34" charset="-122"/>
+                <a:cs typeface="Times New Roman" panose="02020603050405020304" pitchFamily="18" charset="0"/>
+              </a:rPr>
+              <a:t>m×n</a:t>
+            </a:r>
+            <a:r>
+              <a:rPr lang="en-US" sz="2200" dirty="0">
+                <a:latin typeface="Times New Roman" panose="02020603050405020304" pitchFamily="18" charset="0"/>
+                <a:ea typeface="Instrument Sans Medium" pitchFamily="34" charset="-122"/>
+                <a:cs typeface="Times New Roman" panose="02020603050405020304" pitchFamily="18" charset="0"/>
+              </a:rPr>
+              <a:t> </a:t>
+            </a:r>
+            <a:r>
+              <a:rPr lang="ru-RU" sz="2200" dirty="0">
+                <a:latin typeface="Times New Roman" panose="02020603050405020304" pitchFamily="18" charset="0"/>
+                <a:ea typeface="Instrument Sans Medium" pitchFamily="34" charset="-122"/>
+                <a:cs typeface="Times New Roman" panose="02020603050405020304" pitchFamily="18" charset="0"/>
+              </a:rPr>
+              <a:t>может быть</a:t>
+            </a:r>
+            <a:r>
+              <a:rPr lang="en-US" sz="2200" dirty="0">
+                <a:latin typeface="Times New Roman" panose="02020603050405020304" pitchFamily="18" charset="0"/>
+                <a:ea typeface="Instrument Sans Medium" pitchFamily="34" charset="-122"/>
+                <a:cs typeface="Times New Roman" panose="02020603050405020304" pitchFamily="18" charset="0"/>
+              </a:rPr>
+              <a:t> </a:t>
+            </a:r>
+            <a:r>
+              <a:rPr lang="ru-RU" sz="2200" dirty="0">
+                <a:latin typeface="Times New Roman" panose="02020603050405020304" pitchFamily="18" charset="0"/>
+                <a:ea typeface="Instrument Sans Medium" pitchFamily="34" charset="-122"/>
+                <a:cs typeface="Times New Roman" panose="02020603050405020304" pitchFamily="18" charset="0"/>
+              </a:rPr>
+              <a:t>представлена </a:t>
+            </a:r>
+            <a:r>
+              <a:rPr lang="en-US" sz="2200" dirty="0">
+                <a:latin typeface="Times New Roman" panose="02020603050405020304" pitchFamily="18" charset="0"/>
+                <a:ea typeface="Instrument Sans Medium" pitchFamily="34" charset="-122"/>
+                <a:cs typeface="Times New Roman" panose="02020603050405020304" pitchFamily="18" charset="0"/>
+              </a:rPr>
+              <a:t>в виде:</a:t>
+            </a:r>
+            <a:endParaRPr lang="en-US" sz="2200" dirty="0">
+              <a:latin typeface="Times New Roman" panose="02020603050405020304" pitchFamily="18" charset="0"/>
+            </a:endParaRPr>
+          </a:p>
+        </p:txBody>
+      </p:sp>
+      <p:sp>
+        <p:nvSpPr>
+          <p:cNvPr id="6" name="Shape 3"/>
+          <p:cNvSpPr/>
+          <p:nvPr/>
+        </p:nvSpPr>
+        <p:spPr>
+          <a:xfrm>
+            <a:off x="793790" y="3833693"/>
+            <a:ext cx="13042821" cy="3054906"/>
+          </a:xfrm>
+          <a:prstGeom prst="roundRect">
+            <a:avLst>
+              <a:gd name="adj" fmla="val 6683"/>
+            </a:avLst>
+          </a:prstGeom>
+          <a:noFill/>
+          <a:ln w="7620">
+            <a:solidFill>
+              <a:srgbClr val="000000">
+                <a:alpha val="8000"/>
+              </a:srgbClr>
+            </a:solidFill>
+            <a:prstDash val="solid"/>
+          </a:ln>
+        </p:spPr>
+        <p:txBody>
+          <a:bodyPr/>
+          <a:lstStyle/>
+          <a:p>
+            <a:endParaRPr lang="ru-RU" dirty="0">
+              <a:latin typeface="Times New Roman" panose="02020603050405020304" pitchFamily="18" charset="0"/>
+            </a:endParaRPr>
+          </a:p>
+        </p:txBody>
+      </p:sp>
+      <p:sp>
+        <p:nvSpPr>
+          <p:cNvPr id="8" name="Text 5"/>
+          <p:cNvSpPr/>
+          <p:nvPr/>
+        </p:nvSpPr>
+        <p:spPr>
+          <a:xfrm>
+            <a:off x="1028343" y="3985022"/>
+            <a:ext cx="1887498" cy="362903"/>
+          </a:xfrm>
+          <a:prstGeom prst="rect">
+            <a:avLst/>
+          </a:prstGeom>
+          <a:noFill/>
+          <a:ln/>
+        </p:spPr>
+        <p:txBody>
+          <a:bodyPr wrap="none" lIns="0" tIns="0" rIns="0" bIns="0" rtlCol="0" anchor="t"/>
+          <a:lstStyle/>
+          <a:p>
+            <a:pPr marL="0" indent="0" algn="l">
+              <a:lnSpc>
+                <a:spcPts val="2850"/>
+              </a:lnSpc>
+              <a:buNone/>
+            </a:pPr>
+            <a:r>
+              <a:rPr lang="en-US" sz="1750" b="1" dirty="0">
+                <a:latin typeface="Times New Roman" panose="02020603050405020304" pitchFamily="18" charset="0"/>
+                <a:ea typeface="Instrument Sans Medium" pitchFamily="34" charset="-122"/>
+                <a:cs typeface="Times New Roman" panose="02020603050405020304" pitchFamily="18" charset="0"/>
+              </a:rPr>
+              <a:t>U (m×m)</a:t>
+            </a:r>
+            <a:endParaRPr lang="en-US" sz="1750" dirty="0">
+              <a:latin typeface="Times New Roman" panose="02020603050405020304" pitchFamily="18" charset="0"/>
+            </a:endParaRPr>
+          </a:p>
+        </p:txBody>
+      </p:sp>
+      <p:sp>
+        <p:nvSpPr>
+          <p:cNvPr id="9" name="Text 6"/>
+          <p:cNvSpPr/>
+          <p:nvPr/>
+        </p:nvSpPr>
+        <p:spPr>
+          <a:xfrm>
+            <a:off x="3377089" y="3985022"/>
+            <a:ext cx="4880015" cy="362903"/>
+          </a:xfrm>
+          <a:prstGeom prst="rect">
+            <a:avLst/>
+          </a:prstGeom>
+          <a:noFill/>
+          <a:ln/>
+        </p:spPr>
+        <p:txBody>
+          <a:bodyPr wrap="none" lIns="0" tIns="0" rIns="0" bIns="0" rtlCol="0" anchor="t"/>
+          <a:lstStyle/>
+          <a:p>
+            <a:pPr marL="0" indent="0" algn="l">
+              <a:lnSpc>
+                <a:spcPts val="2850"/>
+              </a:lnSpc>
+              <a:buNone/>
+            </a:pPr>
+            <a:r>
+              <a:rPr lang="en-US" sz="1750" dirty="0">
+                <a:latin typeface="Times New Roman" panose="02020603050405020304" pitchFamily="18" charset="0"/>
+                <a:ea typeface="Instrument Sans Medium" pitchFamily="34" charset="-122"/>
+                <a:cs typeface="Times New Roman" panose="02020603050405020304" pitchFamily="18" charset="0"/>
+              </a:rPr>
+              <a:t>Ортогональная матрица</a:t>
+            </a:r>
+            <a:endParaRPr lang="en-US" sz="1750" dirty="0">
+              <a:latin typeface="Times New Roman" panose="02020603050405020304" pitchFamily="18" charset="0"/>
+            </a:endParaRPr>
+          </a:p>
+        </p:txBody>
+      </p:sp>
+      <p:sp>
+        <p:nvSpPr>
+          <p:cNvPr id="10" name="Text 7"/>
+          <p:cNvSpPr/>
+          <p:nvPr/>
+        </p:nvSpPr>
+        <p:spPr>
+          <a:xfrm>
+            <a:off x="8718352" y="3985022"/>
+            <a:ext cx="4883825" cy="725805"/>
+          </a:xfrm>
+          <a:prstGeom prst="rect">
+            <a:avLst/>
+          </a:prstGeom>
+          <a:noFill/>
+          <a:ln/>
+        </p:spPr>
+        <p:txBody>
+          <a:bodyPr wrap="square" lIns="0" tIns="0" rIns="0" bIns="0" rtlCol="0" anchor="t"/>
+          <a:lstStyle/>
+          <a:p>
+            <a:pPr marL="0" indent="0" algn="l">
+              <a:lnSpc>
+                <a:spcPts val="2850"/>
+              </a:lnSpc>
+              <a:buNone/>
+            </a:pPr>
+            <a:r>
+              <a:rPr lang="ru-RU" sz="1750" dirty="0">
+                <a:latin typeface="Times New Roman" panose="02020603050405020304" pitchFamily="18" charset="0"/>
+                <a:ea typeface="Instrument Sans Medium" pitchFamily="34" charset="-122"/>
+                <a:cs typeface="Times New Roman" panose="02020603050405020304" pitchFamily="18" charset="0"/>
+              </a:rPr>
+              <a:t>Л</a:t>
+            </a:r>
+            <a:r>
+              <a:rPr lang="en-US" sz="1750" dirty="0" err="1">
+                <a:latin typeface="Times New Roman" panose="02020603050405020304" pitchFamily="18" charset="0"/>
+                <a:ea typeface="Instrument Sans Medium" pitchFamily="34" charset="-122"/>
+                <a:cs typeface="Times New Roman" panose="02020603050405020304" pitchFamily="18" charset="0"/>
+              </a:rPr>
+              <a:t>евые</a:t>
+            </a:r>
+            <a:r>
+              <a:rPr lang="en-US" sz="1750" dirty="0">
+                <a:latin typeface="Times New Roman" panose="02020603050405020304" pitchFamily="18" charset="0"/>
+                <a:ea typeface="Instrument Sans Medium" pitchFamily="34" charset="-122"/>
+                <a:cs typeface="Times New Roman" panose="02020603050405020304" pitchFamily="18" charset="0"/>
+              </a:rPr>
+              <a:t> сингулярные векторы (собственные векторы MMᵀ).</a:t>
+            </a:r>
+            <a:endParaRPr lang="en-US" sz="1750" dirty="0">
+              <a:latin typeface="Times New Roman" panose="02020603050405020304" pitchFamily="18" charset="0"/>
+            </a:endParaRPr>
+          </a:p>
+        </p:txBody>
+      </p:sp>
+      <p:sp>
+        <p:nvSpPr>
+          <p:cNvPr id="11" name="Shape 8"/>
+          <p:cNvSpPr/>
+          <p:nvPr/>
+        </p:nvSpPr>
+        <p:spPr>
+          <a:xfrm>
+            <a:off x="801410" y="4854535"/>
+            <a:ext cx="13027581" cy="1013222"/>
+          </a:xfrm>
+          <a:prstGeom prst="rect">
+            <a:avLst/>
+          </a:prstGeom>
+          <a:solidFill>
+            <a:srgbClr val="000000">
+              <a:alpha val="4000"/>
+            </a:srgbClr>
+          </a:solidFill>
+          <a:ln/>
+        </p:spPr>
+        <p:txBody>
+          <a:bodyPr/>
+          <a:lstStyle/>
+          <a:p>
+            <a:endParaRPr lang="ru-RU" dirty="0">
+              <a:latin typeface="Times New Roman" panose="02020603050405020304" pitchFamily="18" charset="0"/>
+            </a:endParaRPr>
+          </a:p>
+        </p:txBody>
+      </p:sp>
+      <p:sp>
+        <p:nvSpPr>
+          <p:cNvPr id="12" name="Text 9"/>
+          <p:cNvSpPr/>
+          <p:nvPr/>
+        </p:nvSpPr>
+        <p:spPr>
+          <a:xfrm>
+            <a:off x="1028343" y="4998244"/>
+            <a:ext cx="1887498" cy="362903"/>
+          </a:xfrm>
+          <a:prstGeom prst="rect">
+            <a:avLst/>
+          </a:prstGeom>
+          <a:noFill/>
+          <a:ln/>
+        </p:spPr>
+        <p:txBody>
+          <a:bodyPr wrap="none" lIns="0" tIns="0" rIns="0" bIns="0" rtlCol="0" anchor="t"/>
+          <a:lstStyle/>
+          <a:p>
+            <a:pPr marL="0" indent="0" algn="l">
+              <a:lnSpc>
+                <a:spcPts val="2850"/>
+              </a:lnSpc>
+              <a:buNone/>
+            </a:pPr>
+            <a:r>
+              <a:rPr lang="en-US" sz="1750" b="1" dirty="0">
+                <a:latin typeface="Times New Roman" panose="02020603050405020304" pitchFamily="18" charset="0"/>
+                <a:ea typeface="Instrument Sans Medium" pitchFamily="34" charset="-122"/>
+                <a:cs typeface="Times New Roman" panose="02020603050405020304" pitchFamily="18" charset="0"/>
+              </a:rPr>
+              <a:t>Σ (m×n)</a:t>
+            </a:r>
+            <a:endParaRPr lang="en-US" sz="1750" dirty="0">
+              <a:latin typeface="Times New Roman" panose="02020603050405020304" pitchFamily="18" charset="0"/>
+            </a:endParaRPr>
+          </a:p>
+        </p:txBody>
+      </p:sp>
+      <p:sp>
+        <p:nvSpPr>
+          <p:cNvPr id="13" name="Text 10"/>
+          <p:cNvSpPr/>
+          <p:nvPr/>
+        </p:nvSpPr>
+        <p:spPr>
+          <a:xfrm>
+            <a:off x="3377089" y="4998244"/>
+            <a:ext cx="4880015" cy="362903"/>
+          </a:xfrm>
+          <a:prstGeom prst="rect">
+            <a:avLst/>
+          </a:prstGeom>
+          <a:noFill/>
+          <a:ln/>
+        </p:spPr>
+        <p:txBody>
+          <a:bodyPr wrap="none" lIns="0" tIns="0" rIns="0" bIns="0" rtlCol="0" anchor="t"/>
+          <a:lstStyle/>
+          <a:p>
+            <a:pPr marL="0" indent="0" algn="l">
+              <a:lnSpc>
+                <a:spcPts val="2850"/>
+              </a:lnSpc>
+              <a:buNone/>
+            </a:pPr>
+            <a:r>
+              <a:rPr lang="en-US" sz="1750" dirty="0">
+                <a:latin typeface="Times New Roman" panose="02020603050405020304" pitchFamily="18" charset="0"/>
+                <a:ea typeface="Instrument Sans Medium" pitchFamily="34" charset="-122"/>
+                <a:cs typeface="Times New Roman" panose="02020603050405020304" pitchFamily="18" charset="0"/>
+              </a:rPr>
+              <a:t>Диагональная матрица</a:t>
+            </a:r>
+            <a:endParaRPr lang="en-US" sz="1750" dirty="0">
+              <a:latin typeface="Times New Roman" panose="02020603050405020304" pitchFamily="18" charset="0"/>
+            </a:endParaRPr>
+          </a:p>
+        </p:txBody>
+      </p:sp>
+      <p:sp>
+        <p:nvSpPr>
+          <p:cNvPr id="14" name="Text 11"/>
+          <p:cNvSpPr/>
+          <p:nvPr/>
+        </p:nvSpPr>
+        <p:spPr>
+          <a:xfrm>
+            <a:off x="8718352" y="4998244"/>
+            <a:ext cx="4883825" cy="725805"/>
+          </a:xfrm>
+          <a:prstGeom prst="rect">
+            <a:avLst/>
+          </a:prstGeom>
+          <a:noFill/>
+          <a:ln/>
+        </p:spPr>
+        <p:txBody>
+          <a:bodyPr wrap="square" lIns="0" tIns="0" rIns="0" bIns="0" rtlCol="0" anchor="t"/>
+          <a:lstStyle/>
+          <a:p>
+            <a:pPr marL="0" indent="0" algn="l">
+              <a:lnSpc>
+                <a:spcPts val="2850"/>
+              </a:lnSpc>
+              <a:buNone/>
+            </a:pPr>
+            <a:r>
+              <a:rPr lang="ru-RU" sz="1750" dirty="0">
+                <a:latin typeface="Times New Roman" panose="02020603050405020304" pitchFamily="18" charset="0"/>
+                <a:ea typeface="Instrument Sans Medium" pitchFamily="34" charset="-122"/>
+                <a:cs typeface="Times New Roman" panose="02020603050405020304" pitchFamily="18" charset="0"/>
+              </a:rPr>
+              <a:t>С</a:t>
+            </a:r>
+            <a:r>
+              <a:rPr lang="en-US" sz="1750" dirty="0" err="1">
+                <a:latin typeface="Times New Roman" panose="02020603050405020304" pitchFamily="18" charset="0"/>
+                <a:ea typeface="Instrument Sans Medium" pitchFamily="34" charset="-122"/>
+                <a:cs typeface="Times New Roman" panose="02020603050405020304" pitchFamily="18" charset="0"/>
+              </a:rPr>
+              <a:t>ингулярные</a:t>
+            </a:r>
+            <a:r>
+              <a:rPr lang="en-US" sz="1750" dirty="0">
+                <a:latin typeface="Times New Roman" panose="02020603050405020304" pitchFamily="18" charset="0"/>
+                <a:ea typeface="Instrument Sans Medium" pitchFamily="34" charset="-122"/>
+                <a:cs typeface="Times New Roman" panose="02020603050405020304" pitchFamily="18" charset="0"/>
+              </a:rPr>
+              <a:t> числа σ₁ ≥ σ₂ ≥ … ≥ 0.</a:t>
+            </a:r>
+            <a:endParaRPr lang="en-US" sz="1750" dirty="0">
+              <a:latin typeface="Times New Roman" panose="02020603050405020304" pitchFamily="18" charset="0"/>
+            </a:endParaRPr>
+          </a:p>
+        </p:txBody>
+      </p:sp>
+      <p:sp>
+        <p:nvSpPr>
+          <p:cNvPr id="15" name="Shape 12"/>
+          <p:cNvSpPr/>
+          <p:nvPr/>
+        </p:nvSpPr>
+        <p:spPr>
+          <a:xfrm>
+            <a:off x="801410" y="5867757"/>
+            <a:ext cx="13027581" cy="1013222"/>
+          </a:xfrm>
+          <a:prstGeom prst="rect">
+            <a:avLst/>
+          </a:prstGeom>
+          <a:solidFill>
+            <a:srgbClr val="FFFFFF">
+              <a:alpha val="4000"/>
+            </a:srgbClr>
+          </a:solidFill>
+          <a:ln/>
+        </p:spPr>
+        <p:txBody>
+          <a:bodyPr/>
+          <a:lstStyle/>
+          <a:p>
+            <a:endParaRPr lang="ru-RU" dirty="0">
+              <a:latin typeface="Times New Roman" panose="02020603050405020304" pitchFamily="18" charset="0"/>
+            </a:endParaRPr>
+          </a:p>
+        </p:txBody>
+      </p:sp>
+      <p:sp>
+        <p:nvSpPr>
+          <p:cNvPr id="16" name="Text 13"/>
+          <p:cNvSpPr/>
+          <p:nvPr/>
+        </p:nvSpPr>
+        <p:spPr>
+          <a:xfrm>
+            <a:off x="1028343" y="6011466"/>
+            <a:ext cx="1887498" cy="362903"/>
+          </a:xfrm>
+          <a:prstGeom prst="rect">
+            <a:avLst/>
+          </a:prstGeom>
+          <a:noFill/>
+          <a:ln/>
+        </p:spPr>
+        <p:txBody>
+          <a:bodyPr wrap="none" lIns="0" tIns="0" rIns="0" bIns="0" rtlCol="0" anchor="t"/>
+          <a:lstStyle/>
+          <a:p>
+            <a:pPr marL="0" indent="0" algn="l">
+              <a:lnSpc>
+                <a:spcPts val="2850"/>
+              </a:lnSpc>
+              <a:buNone/>
+            </a:pPr>
+            <a:r>
+              <a:rPr lang="en-US" sz="1750" b="1" dirty="0">
+                <a:latin typeface="Times New Roman" panose="02020603050405020304" pitchFamily="18" charset="0"/>
+                <a:ea typeface="Instrument Sans Medium" pitchFamily="34" charset="-122"/>
+                <a:cs typeface="Times New Roman" panose="02020603050405020304" pitchFamily="18" charset="0"/>
+              </a:rPr>
+              <a:t>V (n×n)</a:t>
+            </a:r>
+            <a:endParaRPr lang="en-US" sz="1750" dirty="0">
+              <a:latin typeface="Times New Roman" panose="02020603050405020304" pitchFamily="18" charset="0"/>
+            </a:endParaRPr>
+          </a:p>
+        </p:txBody>
+      </p:sp>
+      <p:sp>
+        <p:nvSpPr>
+          <p:cNvPr id="17" name="Text 14"/>
+          <p:cNvSpPr/>
+          <p:nvPr/>
+        </p:nvSpPr>
+        <p:spPr>
+          <a:xfrm>
+            <a:off x="3377089" y="6011466"/>
+            <a:ext cx="4880015" cy="362903"/>
+          </a:xfrm>
+          <a:prstGeom prst="rect">
+            <a:avLst/>
+          </a:prstGeom>
+          <a:noFill/>
+          <a:ln/>
+        </p:spPr>
+        <p:txBody>
+          <a:bodyPr wrap="none" lIns="0" tIns="0" rIns="0" bIns="0" rtlCol="0" anchor="t"/>
+          <a:lstStyle/>
+          <a:p>
+            <a:pPr marL="0" indent="0" algn="l">
+              <a:lnSpc>
+                <a:spcPts val="2850"/>
+              </a:lnSpc>
+              <a:buNone/>
+            </a:pPr>
+            <a:r>
+              <a:rPr lang="en-US" sz="1750" dirty="0">
+                <a:latin typeface="Times New Roman" panose="02020603050405020304" pitchFamily="18" charset="0"/>
+                <a:ea typeface="Instrument Sans Medium" pitchFamily="34" charset="-122"/>
+                <a:cs typeface="Times New Roman" panose="02020603050405020304" pitchFamily="18" charset="0"/>
+              </a:rPr>
+              <a:t>Ортогональная матрица</a:t>
+            </a:r>
+            <a:endParaRPr lang="en-US" sz="1750" dirty="0">
+              <a:latin typeface="Times New Roman" panose="02020603050405020304" pitchFamily="18" charset="0"/>
+            </a:endParaRPr>
+          </a:p>
+        </p:txBody>
+      </p:sp>
+      <p:sp>
+        <p:nvSpPr>
+          <p:cNvPr id="18" name="Text 15"/>
+          <p:cNvSpPr/>
+          <p:nvPr/>
+        </p:nvSpPr>
+        <p:spPr>
+          <a:xfrm>
+            <a:off x="8718352" y="6011466"/>
+            <a:ext cx="4883825" cy="725805"/>
+          </a:xfrm>
+          <a:prstGeom prst="rect">
+            <a:avLst/>
+          </a:prstGeom>
+          <a:noFill/>
+          <a:ln/>
+        </p:spPr>
+        <p:txBody>
+          <a:bodyPr wrap="square" lIns="0" tIns="0" rIns="0" bIns="0" rtlCol="0" anchor="t"/>
+          <a:lstStyle/>
+          <a:p>
+            <a:pPr marL="0" indent="0" algn="l">
+              <a:lnSpc>
+                <a:spcPts val="2850"/>
+              </a:lnSpc>
+              <a:buNone/>
+            </a:pPr>
+            <a:r>
+              <a:rPr lang="ru-RU" sz="1750" dirty="0">
+                <a:latin typeface="Times New Roman" panose="02020603050405020304" pitchFamily="18" charset="0"/>
+                <a:ea typeface="Instrument Sans Medium" pitchFamily="34" charset="-122"/>
+                <a:cs typeface="Times New Roman" panose="02020603050405020304" pitchFamily="18" charset="0"/>
+              </a:rPr>
+              <a:t>П</a:t>
+            </a:r>
+            <a:r>
+              <a:rPr lang="en-US" sz="1750" dirty="0" err="1">
+                <a:latin typeface="Times New Roman" panose="02020603050405020304" pitchFamily="18" charset="0"/>
+                <a:ea typeface="Instrument Sans Medium" pitchFamily="34" charset="-122"/>
+                <a:cs typeface="Times New Roman" panose="02020603050405020304" pitchFamily="18" charset="0"/>
+              </a:rPr>
+              <a:t>равые</a:t>
+            </a:r>
+            <a:r>
+              <a:rPr lang="en-US" sz="1750" dirty="0">
+                <a:latin typeface="Times New Roman" panose="02020603050405020304" pitchFamily="18" charset="0"/>
+                <a:ea typeface="Instrument Sans Medium" pitchFamily="34" charset="-122"/>
+                <a:cs typeface="Times New Roman" panose="02020603050405020304" pitchFamily="18" charset="0"/>
+              </a:rPr>
+              <a:t> сингулярные векторы (собственные векторы MᵀM).</a:t>
+            </a:r>
+            <a:endParaRPr lang="en-US" sz="1750" dirty="0">
+              <a:latin typeface="Times New Roman" panose="02020603050405020304" pitchFamily="18" charset="0"/>
+            </a:endParaRPr>
+          </a:p>
+        </p:txBody>
+      </p:sp>
+      <mc:AlternateContent xmlns:mc="http://schemas.openxmlformats.org/markup-compatibility/2006" xmlns:a14="http://schemas.microsoft.com/office/drawing/2010/main">
+        <mc:Choice Requires="a14">
+          <p:sp>
+            <p:nvSpPr>
+              <p:cNvPr id="20" name="TextBox 19">
+                <a:extLst>
+                  <a:ext uri="{FF2B5EF4-FFF2-40B4-BE49-F238E27FC236}">
+                    <a16:creationId xmlns:a16="http://schemas.microsoft.com/office/drawing/2014/main" id="{8E4652BF-816C-2F78-243D-B737EBC9A123}"/>
+                  </a:ext>
+                </a:extLst>
+              </p:cNvPr>
+              <p:cNvSpPr txBox="1"/>
+              <p:nvPr/>
+            </p:nvSpPr>
+            <p:spPr>
+              <a:xfrm>
+                <a:off x="3657600" y="3169561"/>
+                <a:ext cx="7315200" cy="553998"/>
+              </a:xfrm>
+              <a:prstGeom prst="rect">
+                <a:avLst/>
+              </a:prstGeom>
+              <a:noFill/>
+            </p:spPr>
+            <p:txBody>
+              <a:bodyPr wrap="square">
+                <a:spAutoFit/>
+              </a:bodyPr>
+              <a:lstStyle/>
+              <a:p>
+                <a:pPr/>
+                <a14:m>
+                  <m:oMathPara xmlns:m="http://schemas.openxmlformats.org/officeDocument/2006/math">
+                    <m:oMathParaPr>
+                      <m:jc m:val="centerGroup"/>
+                    </m:oMathParaPr>
+                    <m:oMath xmlns:m="http://schemas.openxmlformats.org/officeDocument/2006/math">
+                      <m:r>
+                        <a:rPr lang="ru-RU" sz="3000" i="1" smtClean="0">
+                          <a:latin typeface="Cambria Math" panose="02040503050406030204" pitchFamily="18" charset="0"/>
+                        </a:rPr>
+                        <m:t>𝑀</m:t>
+                      </m:r>
+                      <m:r>
+                        <a:rPr lang="ru-RU" sz="3000" i="0">
+                          <a:latin typeface="Cambria Math" panose="02040503050406030204" pitchFamily="18" charset="0"/>
+                        </a:rPr>
+                        <m:t>=</m:t>
+                      </m:r>
+                      <m:r>
+                        <a:rPr lang="ru-RU" sz="3000" i="1">
+                          <a:latin typeface="Cambria Math" panose="02040503050406030204" pitchFamily="18" charset="0"/>
+                        </a:rPr>
+                        <m:t>𝑈</m:t>
+                      </m:r>
+                      <m:r>
+                        <m:rPr>
+                          <m:sty m:val="p"/>
+                        </m:rPr>
+                        <a:rPr lang="ru-RU" sz="3000" i="0">
+                          <a:latin typeface="Cambria Math" panose="02040503050406030204" pitchFamily="18" charset="0"/>
+                        </a:rPr>
+                        <m:t>Σ</m:t>
+                      </m:r>
+                      <m:sSup>
+                        <m:sSupPr>
+                          <m:ctrlPr>
+                            <a:rPr lang="ru-RU" sz="3000" i="1">
+                              <a:latin typeface="Cambria Math" panose="02040503050406030204" pitchFamily="18" charset="0"/>
+                            </a:rPr>
+                          </m:ctrlPr>
+                        </m:sSupPr>
+                        <m:e>
+                          <m:r>
+                            <a:rPr lang="ru-RU" sz="3000" i="1">
+                              <a:latin typeface="Cambria Math" panose="02040503050406030204" pitchFamily="18" charset="0"/>
+                            </a:rPr>
+                            <m:t>𝑉</m:t>
+                          </m:r>
+                        </m:e>
+                        <m:sup>
+                          <m:r>
+                            <a:rPr lang="ru-RU" sz="3000" i="1">
+                              <a:latin typeface="Cambria Math" panose="02040503050406030204" pitchFamily="18" charset="0"/>
+                            </a:rPr>
+                            <m:t>𝑇</m:t>
+                          </m:r>
+                        </m:sup>
+                      </m:sSup>
+                    </m:oMath>
+                  </m:oMathPara>
+                </a14:m>
+                <a:endParaRPr lang="ru-RU" sz="3000" dirty="0">
+                  <a:latin typeface="Times New Roman" panose="02020603050405020304" pitchFamily="18" charset="0"/>
+                </a:endParaRPr>
+              </a:p>
+            </p:txBody>
+          </p:sp>
+        </mc:Choice>
+        <mc:Fallback xmlns="">
+          <p:sp>
+            <p:nvSpPr>
+              <p:cNvPr id="20" name="TextBox 19">
+                <a:extLst>
+                  <a:ext uri="{FF2B5EF4-FFF2-40B4-BE49-F238E27FC236}">
+                    <a16:creationId xmlns:a16="http://schemas.microsoft.com/office/drawing/2014/main" id="{8E4652BF-816C-2F78-243D-B737EBC9A123}"/>
+                  </a:ext>
+                </a:extLst>
+              </p:cNvPr>
+              <p:cNvSpPr txBox="1">
+                <a:spLocks noRot="1" noChangeAspect="1" noMove="1" noResize="1" noEditPoints="1" noAdjustHandles="1" noChangeArrowheads="1" noChangeShapeType="1" noTextEdit="1"/>
+              </p:cNvSpPr>
+              <p:nvPr/>
+            </p:nvSpPr>
+            <p:spPr>
+              <a:xfrm>
+                <a:off x="3657600" y="3169561"/>
+                <a:ext cx="7315200" cy="553998"/>
+              </a:xfrm>
+              <a:prstGeom prst="rect">
+                <a:avLst/>
+              </a:prstGeom>
+              <a:blipFill>
+                <a:blip r:embed="rId3"/>
+                <a:stretch>
+                  <a:fillRect/>
+                </a:stretch>
+              </a:blipFill>
+            </p:spPr>
+            <p:txBody>
+              <a:bodyPr/>
+              <a:lstStyle/>
+              <a:p>
+                <a:r>
+                  <a:rPr lang="ru-RU">
+                    <a:noFill/>
+                  </a:rPr>
+                  <a:t> </a:t>
+                </a:r>
+              </a:p>
+            </p:txBody>
+          </p:sp>
+        </mc:Fallback>
+      </mc:AlternateContent>
+    </p:spTree>
+  </p:cSld>
+  <p:clrMapOvr>
+    <a:masterClrMapping/>
+  </p:clrMapOvr>
+</p:sld>
+</file>
+
+<file path=ppt/slides/slide4.xml><?xml version="1.0" encoding="utf-8"?>
 <p:sld xmlns:a="http://schemas.openxmlformats.org/drawingml/2006/main" xmlns:r="http://schemas.openxmlformats.org/officeDocument/2006/relationships" xmlns:p="http://schemas.openxmlformats.org/presentationml/2006/main">
   <p:cSld name="Slide 4">
     <p:spTree>
@@ -9754,7 +11234,7 @@
 </p:sld>
 </file>
 
-<file path=ppt/slides/slide11.xml><?xml version="1.0" encoding="utf-8"?>
+<file path=ppt/slides/slide5.xml><?xml version="1.0" encoding="utf-8"?>
 <p:sld xmlns:a="http://schemas.openxmlformats.org/drawingml/2006/main" xmlns:r="http://schemas.openxmlformats.org/officeDocument/2006/relationships" xmlns:p="http://schemas.openxmlformats.org/presentationml/2006/main">
   <p:cSld>
     <p:spTree>
@@ -11252,7 +12732,7 @@
 </p:sld>
 </file>
 
-<file path=ppt/slides/slide12.xml><?xml version="1.0" encoding="utf-8"?>
+<file path=ppt/slides/slide6.xml><?xml version="1.0" encoding="utf-8"?>
 <p:sld xmlns:a="http://schemas.openxmlformats.org/drawingml/2006/main" xmlns:r="http://schemas.openxmlformats.org/officeDocument/2006/relationships" xmlns:p="http://schemas.openxmlformats.org/presentationml/2006/main">
   <p:cSld name="Slide 5">
     <p:spTree>
@@ -11663,8 +13143,8 @@
           </p:sp>
         </mc:Fallback>
       </mc:AlternateContent>
-      <mc:AlternateContent xmlns:mc="http://schemas.openxmlformats.org/markup-compatibility/2006" xmlns:a14="http://schemas.microsoft.com/office/drawing/2010/main">
-        <mc:Choice Requires="a14">
+      <mc:AlternateContent xmlns:mc="http://schemas.openxmlformats.org/markup-compatibility/2006">
+        <mc:Choice xmlns:a14="http://schemas.microsoft.com/office/drawing/2010/main" Requires="a14">
           <p:sp>
             <p:nvSpPr>
               <p:cNvPr id="22" name="TextBox 21">
@@ -11799,7 +13279,13 @@
                         <a:rPr lang="ru-RU" sz="2200" i="0">
                           <a:latin typeface="Cambria Math" panose="02040503050406030204" pitchFamily="18" charset="0"/>
                         </a:rPr>
-                        <m:t>=4</m:t>
+                        <m:t>=</m:t>
+                      </m:r>
+                      <m:r>
+                        <a:rPr lang="ru-RU" sz="2200" i="0" smtClean="0">
+                          <a:latin typeface="Cambria Math" panose="02040503050406030204" pitchFamily="18" charset="0"/>
+                        </a:rPr>
+                        <m:t>4</m:t>
                       </m:r>
                       <m:d>
                         <m:dPr>
@@ -12162,7 +13648,7 @@
             </p:txBody>
           </p:sp>
         </mc:Choice>
-        <mc:Fallback xmlns="">
+        <mc:Fallback>
           <p:sp>
             <p:nvSpPr>
               <p:cNvPr id="22" name="TextBox 21">
@@ -13380,7 +14866,7 @@
 </p:sld>
 </file>
 
-<file path=ppt/slides/slide13.xml><?xml version="1.0" encoding="utf-8"?>
+<file path=ppt/slides/slide7.xml><?xml version="1.0" encoding="utf-8"?>
 <p:sld xmlns:a="http://schemas.openxmlformats.org/drawingml/2006/main" xmlns:r="http://schemas.openxmlformats.org/officeDocument/2006/relationships" xmlns:p="http://schemas.openxmlformats.org/presentationml/2006/main">
   <p:cSld name="Slide 6">
     <p:spTree>
@@ -13737,7 +15223,7 @@
 </p:sld>
 </file>
 
-<file path=ppt/slides/slide14.xml><?xml version="1.0" encoding="utf-8"?>
+<file path=ppt/slides/slide8.xml><?xml version="1.0" encoding="utf-8"?>
 <p:sld xmlns:a="http://schemas.openxmlformats.org/drawingml/2006/main" xmlns:r="http://schemas.openxmlformats.org/officeDocument/2006/relationships" xmlns:p="http://schemas.openxmlformats.org/presentationml/2006/main">
   <p:cSld name="Slide 7">
     <p:spTree>
@@ -14956,7 +16442,7 @@
 </p:sld>
 </file>
 
-<file path=ppt/slides/slide15.xml><?xml version="1.0" encoding="utf-8"?>
+<file path=ppt/slides/slide9.xml><?xml version="1.0" encoding="utf-8"?>
 <p:sld xmlns:a="http://schemas.openxmlformats.org/drawingml/2006/main" xmlns:r="http://schemas.openxmlformats.org/officeDocument/2006/relationships" xmlns:p="http://schemas.openxmlformats.org/presentationml/2006/main">
   <p:cSld name="Slide 8">
     <p:spTree>
@@ -16121,5414 +17607,6 @@
 </p:sld>
 </file>
 
-<file path=ppt/slides/slide16.xml><?xml version="1.0" encoding="utf-8"?>
-<p:sld xmlns:a="http://schemas.openxmlformats.org/drawingml/2006/main" xmlns:r="http://schemas.openxmlformats.org/officeDocument/2006/relationships" xmlns:p="http://schemas.openxmlformats.org/presentationml/2006/main">
-  <p:cSld name="Slide 9">
-    <p:spTree>
-      <p:nvGrpSpPr>
-        <p:cNvPr id="1" name=""/>
-        <p:cNvGrpSpPr/>
-        <p:nvPr/>
-      </p:nvGrpSpPr>
-      <p:grpSpPr>
-        <a:xfrm>
-          <a:off x="0" y="0"/>
-          <a:ext cx="0" cy="0"/>
-          <a:chOff x="0" y="0"/>
-          <a:chExt cx="0" cy="0"/>
-        </a:xfrm>
-      </p:grpSpPr>
-      <p:sp>
-        <p:nvSpPr>
-          <p:cNvPr id="2" name="Text 0"/>
-          <p:cNvSpPr/>
-          <p:nvPr/>
-        </p:nvSpPr>
-        <p:spPr>
-          <a:xfrm>
-            <a:off x="789503" y="730012"/>
-            <a:ext cx="6525697" cy="474821"/>
-          </a:xfrm>
-          <a:prstGeom prst="rect">
-            <a:avLst/>
-          </a:prstGeom>
-          <a:noFill/>
-          <a:ln/>
-        </p:spPr>
-        <p:txBody>
-          <a:bodyPr wrap="none" lIns="0" tIns="0" rIns="0" bIns="0" rtlCol="0" anchor="t"/>
-          <a:lstStyle/>
-          <a:p>
-            <a:pPr marL="0" indent="0" algn="l">
-              <a:lnSpc>
-                <a:spcPts val="3700"/>
-              </a:lnSpc>
-              <a:buNone/>
-            </a:pPr>
-            <a:r>
-              <a:rPr lang="en-US" sz="4500" dirty="0">
-                <a:latin typeface="Times New Roman" panose="02020603050405020304" pitchFamily="18" charset="0"/>
-                <a:ea typeface="Instrument Sans Semi Bold" pitchFamily="34" charset="-122"/>
-                <a:cs typeface="Times New Roman" panose="02020603050405020304" pitchFamily="18" charset="0"/>
-              </a:rPr>
-              <a:t>Визуализация фильтрации сигнала</a:t>
-            </a:r>
-            <a:endParaRPr lang="en-US" sz="4500" dirty="0">
-              <a:latin typeface="Times New Roman" panose="02020603050405020304" pitchFamily="18" charset="0"/>
-            </a:endParaRPr>
-          </a:p>
-        </p:txBody>
-      </p:sp>
-      <p:sp>
-        <p:nvSpPr>
-          <p:cNvPr id="3" name="Text 1"/>
-          <p:cNvSpPr/>
-          <p:nvPr/>
-        </p:nvSpPr>
-        <p:spPr>
-          <a:xfrm>
-            <a:off x="789503" y="1416367"/>
-            <a:ext cx="13297856" cy="405765"/>
-          </a:xfrm>
-          <a:prstGeom prst="rect">
-            <a:avLst/>
-          </a:prstGeom>
-          <a:noFill/>
-          <a:ln/>
-        </p:spPr>
-        <p:txBody>
-          <a:bodyPr wrap="square" lIns="0" tIns="0" rIns="0" bIns="0" rtlCol="0" anchor="t"/>
-          <a:lstStyle/>
-          <a:p>
-            <a:pPr marL="0" indent="0" algn="l">
-              <a:lnSpc>
-                <a:spcPts val="1550"/>
-              </a:lnSpc>
-              <a:buNone/>
-            </a:pPr>
-            <a:r>
-              <a:rPr lang="en-US" sz="2200" dirty="0">
-                <a:latin typeface="Times New Roman" panose="02020603050405020304" pitchFamily="18" charset="0"/>
-                <a:ea typeface="Instrument Sans Medium" pitchFamily="34" charset="-122"/>
-                <a:cs typeface="Times New Roman" panose="02020603050405020304" pitchFamily="18" charset="0"/>
-              </a:rPr>
-              <a:t>Эффективность метода SVD для фильтрации сигнала наглядно демонстрируется сравнением исходного, зашумлённого и восстановленного сигналов.</a:t>
-            </a:r>
-            <a:endParaRPr lang="en-US" sz="2200" dirty="0">
-              <a:latin typeface="Times New Roman" panose="02020603050405020304" pitchFamily="18" charset="0"/>
-            </a:endParaRPr>
-          </a:p>
-        </p:txBody>
-      </p:sp>
-      <p:pic>
-        <p:nvPicPr>
-          <p:cNvPr id="7" name="Рисунок 6">
-            <a:extLst>
-              <a:ext uri="{FF2B5EF4-FFF2-40B4-BE49-F238E27FC236}">
-                <a16:creationId xmlns:a16="http://schemas.microsoft.com/office/drawing/2014/main" id="{50775F34-D26C-8B5C-3B0C-19501EAE1CB0}"/>
-              </a:ext>
-            </a:extLst>
-          </p:cNvPr>
-          <p:cNvPicPr>
-            <a:picLocks noChangeAspect="1"/>
-          </p:cNvPicPr>
-          <p:nvPr/>
-        </p:nvPicPr>
-        <p:blipFill>
-          <a:blip r:embed="rId3"/>
-          <a:stretch>
-            <a:fillRect/>
-          </a:stretch>
-        </p:blipFill>
-        <p:spPr>
-          <a:xfrm>
-            <a:off x="2946663" y="1961299"/>
-            <a:ext cx="7872025" cy="1838629"/>
-          </a:xfrm>
-          <a:prstGeom prst="rect">
-            <a:avLst/>
-          </a:prstGeom>
-        </p:spPr>
-      </p:pic>
-      <p:pic>
-        <p:nvPicPr>
-          <p:cNvPr id="8" name="Рисунок 7">
-            <a:extLst>
-              <a:ext uri="{FF2B5EF4-FFF2-40B4-BE49-F238E27FC236}">
-                <a16:creationId xmlns:a16="http://schemas.microsoft.com/office/drawing/2014/main" id="{B61970F9-74A7-9BCC-C516-34B839BFD3FA}"/>
-              </a:ext>
-            </a:extLst>
-          </p:cNvPr>
-          <p:cNvPicPr>
-            <a:picLocks noChangeAspect="1"/>
-          </p:cNvPicPr>
-          <p:nvPr/>
-        </p:nvPicPr>
-        <p:blipFill>
-          <a:blip r:embed="rId4"/>
-          <a:stretch>
-            <a:fillRect/>
-          </a:stretch>
-        </p:blipFill>
-        <p:spPr>
-          <a:xfrm>
-            <a:off x="3018582" y="3799928"/>
-            <a:ext cx="7872025" cy="1845361"/>
-          </a:xfrm>
-          <a:prstGeom prst="rect">
-            <a:avLst/>
-          </a:prstGeom>
-        </p:spPr>
-      </p:pic>
-      <p:pic>
-        <p:nvPicPr>
-          <p:cNvPr id="9" name="Рисунок 8">
-            <a:extLst>
-              <a:ext uri="{FF2B5EF4-FFF2-40B4-BE49-F238E27FC236}">
-                <a16:creationId xmlns:a16="http://schemas.microsoft.com/office/drawing/2014/main" id="{D9E2DC31-C9FB-AC40-A72E-4305964CCF64}"/>
-              </a:ext>
-            </a:extLst>
-          </p:cNvPr>
-          <p:cNvPicPr>
-            <a:picLocks noChangeAspect="1"/>
-          </p:cNvPicPr>
-          <p:nvPr/>
-        </p:nvPicPr>
-        <p:blipFill>
-          <a:blip r:embed="rId5"/>
-          <a:stretch>
-            <a:fillRect/>
-          </a:stretch>
-        </p:blipFill>
-        <p:spPr>
-          <a:xfrm>
-            <a:off x="2982622" y="5645289"/>
-            <a:ext cx="7943944" cy="1882600"/>
-          </a:xfrm>
-          <a:prstGeom prst="rect">
-            <a:avLst/>
-          </a:prstGeom>
-        </p:spPr>
-      </p:pic>
-    </p:spTree>
-  </p:cSld>
-  <p:clrMapOvr>
-    <a:masterClrMapping/>
-  </p:clrMapOvr>
-</p:sld>
-</file>
-
-<file path=ppt/slides/slide2.xml><?xml version="1.0" encoding="utf-8"?>
-<p:sld xmlns:a="http://schemas.openxmlformats.org/drawingml/2006/main" xmlns:r="http://schemas.openxmlformats.org/officeDocument/2006/relationships" xmlns:p="http://schemas.openxmlformats.org/presentationml/2006/main">
-  <p:cSld>
-    <p:bg>
-      <p:bgRef idx="1001">
-        <a:schemeClr val="bg1"/>
-      </p:bgRef>
-    </p:bg>
-    <p:spTree>
-      <p:nvGrpSpPr>
-        <p:cNvPr id="1" name=""/>
-        <p:cNvGrpSpPr/>
-        <p:nvPr/>
-      </p:nvGrpSpPr>
-      <p:grpSpPr>
-        <a:xfrm>
-          <a:off x="0" y="0"/>
-          <a:ext cx="0" cy="0"/>
-          <a:chOff x="0" y="0"/>
-          <a:chExt cx="0" cy="0"/>
-        </a:xfrm>
-      </p:grpSpPr>
-      <p:sp>
-        <p:nvSpPr>
-          <p:cNvPr id="2" name="Text 0"/>
-          <p:cNvSpPr/>
-          <p:nvPr/>
-        </p:nvSpPr>
-        <p:spPr>
-          <a:xfrm>
-            <a:off x="864037" y="954643"/>
-            <a:ext cx="8868251" cy="771525"/>
-          </a:xfrm>
-          <a:prstGeom prst="rect">
-            <a:avLst/>
-          </a:prstGeom>
-          <a:noFill/>
-          <a:ln/>
-        </p:spPr>
-        <p:txBody>
-          <a:bodyPr wrap="none" lIns="0" tIns="0" rIns="0" bIns="0" rtlCol="0" anchor="t"/>
-          <a:lstStyle/>
-          <a:p>
-            <a:pPr marL="0" indent="0" algn="l">
-              <a:lnSpc>
-                <a:spcPts val="6050"/>
-              </a:lnSpc>
-              <a:buNone/>
-            </a:pPr>
-            <a:r>
-              <a:rPr lang="en-US" sz="4500" dirty="0">
-                <a:solidFill>
-                  <a:srgbClr val="030303"/>
-                </a:solidFill>
-                <a:latin typeface="Times New Roman" panose="02020603050405020304" pitchFamily="18" charset="0"/>
-                <a:ea typeface="DM Sans Semi Bold" pitchFamily="34" charset="-122"/>
-                <a:cs typeface="Times New Roman" panose="02020603050405020304" pitchFamily="18" charset="0"/>
-              </a:rPr>
-              <a:t>Виды преобразования Фурье</a:t>
-            </a:r>
-            <a:endParaRPr lang="en-US" sz="4500" dirty="0"/>
-          </a:p>
-        </p:txBody>
-      </p:sp>
-      <p:sp>
-        <p:nvSpPr>
-          <p:cNvPr id="3" name="Text 1"/>
-          <p:cNvSpPr/>
-          <p:nvPr/>
-        </p:nvSpPr>
-        <p:spPr>
-          <a:xfrm>
-            <a:off x="864037" y="2605683"/>
-            <a:ext cx="12902327" cy="790099"/>
-          </a:xfrm>
-          <a:prstGeom prst="rect">
-            <a:avLst/>
-          </a:prstGeom>
-          <a:noFill/>
-          <a:ln/>
-        </p:spPr>
-        <p:txBody>
-          <a:bodyPr wrap="square" lIns="0" tIns="0" rIns="0" bIns="0" rtlCol="0" anchor="t"/>
-          <a:lstStyle/>
-          <a:p>
-            <a:pPr>
-              <a:lnSpc>
-                <a:spcPts val="3100"/>
-              </a:lnSpc>
-            </a:pPr>
-            <a:r>
-              <a:rPr lang="en-US" sz="2200" dirty="0">
-                <a:latin typeface="Times New Roman" panose="02020603050405020304" pitchFamily="18" charset="0"/>
-              </a:rPr>
-              <a:t>В </a:t>
-            </a:r>
-            <a:r>
-              <a:rPr lang="en-US" sz="2200" dirty="0" err="1">
-                <a:latin typeface="Times New Roman" panose="02020603050405020304" pitchFamily="18" charset="0"/>
-              </a:rPr>
-              <a:t>зависимости</a:t>
-            </a:r>
-            <a:r>
-              <a:rPr lang="en-US" sz="2200" dirty="0">
-                <a:latin typeface="Times New Roman" panose="02020603050405020304" pitchFamily="18" charset="0"/>
-              </a:rPr>
-              <a:t> </a:t>
-            </a:r>
-            <a:r>
-              <a:rPr lang="en-US" sz="2200" dirty="0" err="1">
-                <a:latin typeface="Times New Roman" panose="02020603050405020304" pitchFamily="18" charset="0"/>
-              </a:rPr>
-              <a:t>от</a:t>
-            </a:r>
-            <a:r>
-              <a:rPr lang="en-US" sz="2200" dirty="0">
-                <a:latin typeface="Times New Roman" panose="02020603050405020304" pitchFamily="18" charset="0"/>
-              </a:rPr>
-              <a:t> </a:t>
-            </a:r>
-            <a:r>
-              <a:rPr lang="en-US" sz="2200" dirty="0" err="1">
-                <a:latin typeface="Times New Roman" panose="02020603050405020304" pitchFamily="18" charset="0"/>
-              </a:rPr>
-              <a:t>способа</a:t>
-            </a:r>
-            <a:r>
-              <a:rPr lang="en-US" sz="2200" dirty="0">
-                <a:latin typeface="Times New Roman" panose="02020603050405020304" pitchFamily="18" charset="0"/>
-              </a:rPr>
-              <a:t> представления сигнала применяются различные виды преобразования </a:t>
-            </a:r>
-            <a:r>
-              <a:rPr lang="en-US" sz="2200" dirty="0" err="1">
-                <a:latin typeface="Times New Roman" panose="02020603050405020304" pitchFamily="18" charset="0"/>
-              </a:rPr>
-              <a:t>Фурье</a:t>
-            </a:r>
-            <a:r>
-              <a:rPr lang="en-US" sz="2200" dirty="0">
-                <a:latin typeface="Times New Roman" panose="02020603050405020304" pitchFamily="18" charset="0"/>
-              </a:rPr>
-              <a:t>.</a:t>
-            </a:r>
-          </a:p>
-        </p:txBody>
-      </p:sp>
-      <p:sp>
-        <p:nvSpPr>
-          <p:cNvPr id="4" name="Text 2"/>
-          <p:cNvSpPr/>
-          <p:nvPr/>
-        </p:nvSpPr>
-        <p:spPr>
-          <a:xfrm>
-            <a:off x="864037" y="3673435"/>
-            <a:ext cx="12902327" cy="2542937"/>
-          </a:xfrm>
-          <a:prstGeom prst="rect">
-            <a:avLst/>
-          </a:prstGeom>
-          <a:noFill/>
-          <a:ln/>
-        </p:spPr>
-        <p:txBody>
-          <a:bodyPr wrap="square" lIns="0" tIns="0" rIns="0" bIns="0" rtlCol="0" anchor="t"/>
-          <a:lstStyle/>
-          <a:p>
-            <a:pPr>
-              <a:lnSpc>
-                <a:spcPts val="3100"/>
-              </a:lnSpc>
-              <a:buSzPct val="100000"/>
-            </a:pPr>
-            <a:r>
-              <a:rPr lang="en-US" sz="2200" dirty="0">
-                <a:latin typeface="Times New Roman" panose="02020603050405020304" pitchFamily="18" charset="0"/>
-              </a:rPr>
-              <a:t>НПФ / CTFT — непрерывное преобразование Фурье, используется в теории для сигналов, изменяющихся по заданным </a:t>
-            </a:r>
-            <a:r>
-              <a:rPr lang="en-US" sz="2200" dirty="0" err="1">
-                <a:latin typeface="Times New Roman" panose="02020603050405020304" pitchFamily="18" charset="0"/>
-              </a:rPr>
-              <a:t>функциям</a:t>
-            </a:r>
-            <a:r>
-              <a:rPr lang="en-US" sz="2200" dirty="0">
-                <a:latin typeface="Times New Roman" panose="02020603050405020304" pitchFamily="18" charset="0"/>
-              </a:rPr>
-              <a:t>.</a:t>
-            </a:r>
-          </a:p>
-          <a:p>
-            <a:pPr>
-              <a:lnSpc>
-                <a:spcPts val="3100"/>
-              </a:lnSpc>
-              <a:buSzPct val="100000"/>
-            </a:pPr>
-            <a:r>
-              <a:rPr lang="en-US" sz="2200" dirty="0">
-                <a:latin typeface="Times New Roman" panose="02020603050405020304" pitchFamily="18" charset="0"/>
-              </a:rPr>
-              <a:t>ДПФ / DFT — дискретное преобразование Фурье, применяется на практике для обработки дискретных данных </a:t>
-            </a:r>
-            <a:r>
-              <a:rPr lang="en-US" sz="2200" dirty="0" err="1">
-                <a:latin typeface="Times New Roman" panose="02020603050405020304" pitchFamily="18" charset="0"/>
-              </a:rPr>
-              <a:t>измерений</a:t>
-            </a:r>
-            <a:r>
-              <a:rPr lang="en-US" sz="2200" dirty="0">
-                <a:latin typeface="Times New Roman" panose="02020603050405020304" pitchFamily="18" charset="0"/>
-              </a:rPr>
-              <a:t>.</a:t>
-            </a:r>
-          </a:p>
-          <a:p>
-            <a:pPr>
-              <a:lnSpc>
-                <a:spcPts val="3100"/>
-              </a:lnSpc>
-              <a:buSzPct val="100000"/>
-            </a:pPr>
-            <a:r>
-              <a:rPr lang="en-US" sz="2200" dirty="0">
-                <a:latin typeface="Times New Roman" panose="02020603050405020304" pitchFamily="18" charset="0"/>
-              </a:rPr>
-              <a:t>БПФ / FFT — быстрое преобразование Фурье, эффективный алгоритм вычисления ДПФ, широко используемый в цифровой обработке </a:t>
-            </a:r>
-            <a:r>
-              <a:rPr lang="en-US" sz="2200" dirty="0" err="1">
-                <a:latin typeface="Times New Roman" panose="02020603050405020304" pitchFamily="18" charset="0"/>
-              </a:rPr>
-              <a:t>сигналов</a:t>
-            </a:r>
-            <a:r>
-              <a:rPr lang="en-US" sz="2200" dirty="0">
-                <a:latin typeface="Times New Roman" panose="02020603050405020304" pitchFamily="18" charset="0"/>
-              </a:rPr>
-              <a:t>.</a:t>
-            </a:r>
-          </a:p>
-        </p:txBody>
-      </p:sp>
-      <p:sp>
-        <p:nvSpPr>
-          <p:cNvPr id="5" name="Text 3"/>
-          <p:cNvSpPr/>
-          <p:nvPr/>
-        </p:nvSpPr>
-        <p:spPr>
-          <a:xfrm>
-            <a:off x="864037" y="6494026"/>
-            <a:ext cx="12902327" cy="395049"/>
-          </a:xfrm>
-          <a:prstGeom prst="rect">
-            <a:avLst/>
-          </a:prstGeom>
-          <a:noFill/>
-          <a:ln/>
-        </p:spPr>
-        <p:txBody>
-          <a:bodyPr wrap="none" lIns="0" tIns="0" rIns="0" bIns="0" rtlCol="0" anchor="t"/>
-          <a:lstStyle/>
-          <a:p>
-            <a:pPr indent="0">
-              <a:lnSpc>
-                <a:spcPts val="3100"/>
-              </a:lnSpc>
-              <a:buSzPct val="100000"/>
-              <a:buNone/>
-            </a:pPr>
-            <a:r>
-              <a:rPr lang="en-US" sz="2200" dirty="0">
-                <a:latin typeface="Times New Roman" panose="02020603050405020304" pitchFamily="18" charset="0"/>
-              </a:rPr>
-              <a:t>Нас интересует </a:t>
-            </a:r>
-            <a:r>
-              <a:rPr lang="en-US" sz="2200" dirty="0" err="1">
-                <a:latin typeface="Times New Roman" panose="02020603050405020304" pitchFamily="18" charset="0"/>
-              </a:rPr>
-              <a:t>именно</a:t>
-            </a:r>
-            <a:r>
-              <a:rPr lang="en-US" sz="2200" dirty="0">
-                <a:latin typeface="Times New Roman" panose="02020603050405020304" pitchFamily="18" charset="0"/>
-              </a:rPr>
-              <a:t> дискретное преобразование Фурье (ДПФ).</a:t>
-            </a:r>
-          </a:p>
-        </p:txBody>
-      </p:sp>
-    </p:spTree>
-  </p:cSld>
-  <p:clrMapOvr>
-    <a:overrideClrMapping bg1="lt1" tx1="dk1" bg2="lt2" tx2="dk2" accent1="accent1" accent2="accent2" accent3="accent3" accent4="accent4" accent5="accent5" accent6="accent6" hlink="hlink" folHlink="folHlink"/>
-  </p:clrMapOvr>
-</p:sld>
-</file>
-
-<file path=ppt/slides/slide3.xml><?xml version="1.0" encoding="utf-8"?>
-<p:sld xmlns:a="http://schemas.openxmlformats.org/drawingml/2006/main" xmlns:r="http://schemas.openxmlformats.org/officeDocument/2006/relationships" xmlns:p="http://schemas.openxmlformats.org/presentationml/2006/main">
-  <p:cSld>
-    <p:spTree>
-      <p:nvGrpSpPr>
-        <p:cNvPr id="1" name=""/>
-        <p:cNvGrpSpPr/>
-        <p:nvPr/>
-      </p:nvGrpSpPr>
-      <p:grpSpPr>
-        <a:xfrm>
-          <a:off x="0" y="0"/>
-          <a:ext cx="0" cy="0"/>
-          <a:chOff x="0" y="0"/>
-          <a:chExt cx="0" cy="0"/>
-        </a:xfrm>
-      </p:grpSpPr>
-      <p:sp>
-        <p:nvSpPr>
-          <p:cNvPr id="2" name="Text 0"/>
-          <p:cNvSpPr/>
-          <p:nvPr/>
-        </p:nvSpPr>
-        <p:spPr>
-          <a:xfrm>
-            <a:off x="864037" y="1212904"/>
-            <a:ext cx="10805398" cy="771525"/>
-          </a:xfrm>
-          <a:prstGeom prst="rect">
-            <a:avLst/>
-          </a:prstGeom>
-          <a:noFill/>
-          <a:ln/>
-        </p:spPr>
-        <p:txBody>
-          <a:bodyPr wrap="none" lIns="0" tIns="0" rIns="0" bIns="0" rtlCol="0" anchor="t"/>
-          <a:lstStyle/>
-          <a:p>
-            <a:pPr marL="0" indent="0" algn="l">
-              <a:lnSpc>
-                <a:spcPts val="6050"/>
-              </a:lnSpc>
-              <a:buNone/>
-            </a:pPr>
-            <a:r>
-              <a:rPr lang="en-US" sz="4500" dirty="0">
-                <a:solidFill>
-                  <a:srgbClr val="030303"/>
-                </a:solidFill>
-                <a:latin typeface="Times New Roman" panose="02020603050405020304" pitchFamily="18" charset="0"/>
-                <a:ea typeface="DM Sans Semi Bold" pitchFamily="34" charset="-122"/>
-                <a:cs typeface="Times New Roman" panose="02020603050405020304" pitchFamily="18" charset="0"/>
-              </a:rPr>
-              <a:t>Дискретное преобразование Фурье</a:t>
-            </a:r>
-            <a:endParaRPr lang="en-US" sz="4500" dirty="0"/>
-          </a:p>
-        </p:txBody>
-      </p:sp>
-      <p:sp>
-        <p:nvSpPr>
-          <p:cNvPr id="3" name="Text 1"/>
-          <p:cNvSpPr/>
-          <p:nvPr/>
-        </p:nvSpPr>
-        <p:spPr>
-          <a:xfrm>
-            <a:off x="864037" y="2750820"/>
-            <a:ext cx="12902327" cy="1185148"/>
-          </a:xfrm>
-          <a:prstGeom prst="rect">
-            <a:avLst/>
-          </a:prstGeom>
-          <a:noFill/>
-          <a:ln/>
-        </p:spPr>
-        <p:txBody>
-          <a:bodyPr wrap="square" lIns="0" tIns="0" rIns="0" bIns="0" rtlCol="0" anchor="t"/>
-          <a:lstStyle/>
-          <a:p>
-            <a:pPr marL="0" indent="0" algn="l">
-              <a:lnSpc>
-                <a:spcPts val="3100"/>
-              </a:lnSpc>
-              <a:buNone/>
-            </a:pPr>
-            <a:r>
-              <a:rPr lang="en-US" sz="2200" dirty="0">
-                <a:latin typeface="Times New Roman" panose="02020603050405020304" pitchFamily="18" charset="0"/>
-              </a:rPr>
-              <a:t>Непрерывное преобразование Фурье применяется в теории, однако на практике имеют дело с </a:t>
-            </a:r>
-            <a:r>
-              <a:rPr lang="en-US" sz="2200" dirty="0" err="1">
-                <a:latin typeface="Times New Roman" panose="02020603050405020304" pitchFamily="18" charset="0"/>
-              </a:rPr>
-              <a:t>дискретными</a:t>
-            </a:r>
-            <a:r>
-              <a:rPr lang="en-US" sz="2200" dirty="0">
-                <a:latin typeface="Times New Roman" panose="02020603050405020304" pitchFamily="18" charset="0"/>
-              </a:rPr>
-              <a:t> </a:t>
-            </a:r>
-            <a:r>
-              <a:rPr lang="en-US" sz="2200" dirty="0" err="1">
-                <a:latin typeface="Times New Roman" panose="02020603050405020304" pitchFamily="18" charset="0"/>
-              </a:rPr>
-              <a:t>данными</a:t>
-            </a:r>
-            <a:r>
-              <a:rPr lang="en-US" sz="2200" dirty="0">
-                <a:latin typeface="Times New Roman" panose="02020603050405020304" pitchFamily="18" charset="0"/>
-              </a:rPr>
-              <a:t> — результатами измерений, фиксируемых через равные промежутки времени с определённой частотой дискретизации (например, 16 000 Гц или 22 000 </a:t>
-            </a:r>
-            <a:r>
-              <a:rPr lang="en-US" sz="2200" dirty="0" err="1">
-                <a:latin typeface="Times New Roman" panose="02020603050405020304" pitchFamily="18" charset="0"/>
-              </a:rPr>
-              <a:t>Гц</a:t>
-            </a:r>
-            <a:r>
-              <a:rPr lang="en-US" sz="2200" dirty="0">
-                <a:latin typeface="Times New Roman" panose="02020603050405020304" pitchFamily="18" charset="0"/>
-              </a:rPr>
-              <a:t>).</a:t>
-            </a:r>
-          </a:p>
-        </p:txBody>
-      </p:sp>
-      <p:sp>
-        <p:nvSpPr>
-          <p:cNvPr id="4" name="Text 2"/>
-          <p:cNvSpPr/>
-          <p:nvPr/>
-        </p:nvSpPr>
-        <p:spPr>
-          <a:xfrm>
-            <a:off x="864037" y="4309888"/>
-            <a:ext cx="12902327" cy="1185148"/>
-          </a:xfrm>
-          <a:prstGeom prst="rect">
-            <a:avLst/>
-          </a:prstGeom>
-          <a:noFill/>
-          <a:ln/>
-        </p:spPr>
-        <p:txBody>
-          <a:bodyPr wrap="square" lIns="0" tIns="0" rIns="0" bIns="0" rtlCol="0" anchor="t"/>
-          <a:lstStyle/>
-          <a:p>
-            <a:pPr marL="0" indent="0" algn="l">
-              <a:lnSpc>
-                <a:spcPts val="3100"/>
-              </a:lnSpc>
-              <a:buNone/>
-            </a:pPr>
-            <a:r>
-              <a:rPr lang="en-US" sz="2200" dirty="0">
-                <a:latin typeface="Times New Roman" panose="02020603050405020304" pitchFamily="18" charset="0"/>
-              </a:rPr>
-              <a:t>ДПФ ставит в соответствие временной </a:t>
-            </a:r>
-            <a:r>
-              <a:rPr lang="en-US" sz="2200" dirty="0" err="1">
-                <a:latin typeface="Times New Roman" panose="02020603050405020304" pitchFamily="18" charset="0"/>
-              </a:rPr>
-              <a:t>функции</a:t>
-            </a:r>
-            <a:r>
-              <a:rPr lang="en-US" sz="2200" dirty="0">
-                <a:latin typeface="Times New Roman" panose="02020603050405020304" pitchFamily="18" charset="0"/>
-              </a:rPr>
-              <a:t> f(n), определённой N-точками измерений на заданном временном интервале, другую </a:t>
-            </a:r>
-            <a:r>
-              <a:rPr lang="en-US" sz="2200" dirty="0" err="1">
-                <a:latin typeface="Times New Roman" panose="02020603050405020304" pitchFamily="18" charset="0"/>
-              </a:rPr>
-              <a:t>функцию</a:t>
-            </a:r>
-            <a:r>
-              <a:rPr lang="en-US" sz="2200" dirty="0">
-                <a:latin typeface="Times New Roman" panose="02020603050405020304" pitchFamily="18" charset="0"/>
-              </a:rPr>
-              <a:t> F(k), определённую на частотном интервале. Функция на временном интервале задаётся N-отсчётами, а на частотном — K-кратным </a:t>
-            </a:r>
-            <a:r>
-              <a:rPr lang="en-US" sz="2200" dirty="0" err="1">
-                <a:latin typeface="Times New Roman" panose="02020603050405020304" pitchFamily="18" charset="0"/>
-              </a:rPr>
-              <a:t>спектром</a:t>
-            </a:r>
-            <a:r>
-              <a:rPr lang="en-US" sz="2200" dirty="0">
-                <a:latin typeface="Times New Roman" panose="02020603050405020304" pitchFamily="18" charset="0"/>
-              </a:rPr>
-              <a:t>.</a:t>
-            </a:r>
-          </a:p>
-        </p:txBody>
-      </p:sp>
-    </p:spTree>
-  </p:cSld>
-  <p:clrMapOvr>
-    <a:masterClrMapping/>
-  </p:clrMapOvr>
-</p:sld>
-</file>
-
-<file path=ppt/slides/slide4.xml><?xml version="1.0" encoding="utf-8"?>
-<p:sld xmlns:a="http://schemas.openxmlformats.org/drawingml/2006/main" xmlns:r="http://schemas.openxmlformats.org/officeDocument/2006/relationships" xmlns:p="http://schemas.openxmlformats.org/presentationml/2006/main">
-  <p:cSld>
-    <p:spTree>
-      <p:nvGrpSpPr>
-        <p:cNvPr id="1" name=""/>
-        <p:cNvGrpSpPr/>
-        <p:nvPr/>
-      </p:nvGrpSpPr>
-      <p:grpSpPr>
-        <a:xfrm>
-          <a:off x="0" y="0"/>
-          <a:ext cx="0" cy="0"/>
-          <a:chOff x="0" y="0"/>
-          <a:chExt cx="0" cy="0"/>
-        </a:xfrm>
-      </p:grpSpPr>
-      <p:sp>
-        <p:nvSpPr>
-          <p:cNvPr id="2" name="Text 0"/>
-          <p:cNvSpPr/>
-          <p:nvPr/>
-        </p:nvSpPr>
-        <p:spPr>
-          <a:xfrm>
-            <a:off x="816412" y="928926"/>
-            <a:ext cx="6613327" cy="728901"/>
-          </a:xfrm>
-          <a:prstGeom prst="rect">
-            <a:avLst/>
-          </a:prstGeom>
-          <a:noFill/>
-          <a:ln/>
-        </p:spPr>
-        <p:txBody>
-          <a:bodyPr wrap="none" lIns="0" tIns="0" rIns="0" bIns="0" rtlCol="0" anchor="t"/>
-          <a:lstStyle/>
-          <a:p>
-            <a:pPr marL="0" indent="0" algn="l">
-              <a:lnSpc>
-                <a:spcPts val="5700"/>
-              </a:lnSpc>
-              <a:buNone/>
-            </a:pPr>
-            <a:r>
-              <a:rPr lang="en-US" sz="4550" dirty="0">
-                <a:solidFill>
-                  <a:srgbClr val="030303"/>
-                </a:solidFill>
-                <a:latin typeface="Times New Roman" panose="02020603050405020304" pitchFamily="18" charset="0"/>
-                <a:ea typeface="DM Sans Semi Bold" pitchFamily="34" charset="-122"/>
-                <a:cs typeface="Times New Roman" panose="02020603050405020304" pitchFamily="18" charset="0"/>
-              </a:rPr>
-              <a:t>Теорема Котельникова</a:t>
-            </a:r>
-            <a:endParaRPr lang="en-US" sz="4550" dirty="0"/>
-          </a:p>
-        </p:txBody>
-      </p:sp>
-      <p:sp>
-        <p:nvSpPr>
-          <p:cNvPr id="3" name="Text 1"/>
-          <p:cNvSpPr/>
-          <p:nvPr/>
-        </p:nvSpPr>
-        <p:spPr>
-          <a:xfrm>
-            <a:off x="816412" y="2098596"/>
-            <a:ext cx="12997577" cy="1088708"/>
-          </a:xfrm>
-          <a:prstGeom prst="rect">
-            <a:avLst/>
-          </a:prstGeom>
-          <a:noFill/>
-          <a:ln/>
-        </p:spPr>
-        <p:txBody>
-          <a:bodyPr wrap="square" lIns="0" tIns="0" rIns="0" bIns="0" rtlCol="0" anchor="t"/>
-          <a:lstStyle/>
-          <a:p>
-            <a:pPr marL="0" indent="0" algn="l">
-              <a:lnSpc>
-                <a:spcPts val="2850"/>
-              </a:lnSpc>
-              <a:buNone/>
-            </a:pPr>
-            <a:r>
-              <a:rPr lang="en-US" sz="2200" dirty="0">
-                <a:latin typeface="Times New Roman" panose="02020603050405020304" pitchFamily="18" charset="0"/>
-              </a:rPr>
-              <a:t>Аналоговый периодический сигнал, имеющий конечный спектр (0…fmax), может быть однозначно восстановлен </a:t>
-            </a:r>
-            <a:r>
-              <a:rPr lang="en-US" sz="2200" dirty="0" err="1">
-                <a:latin typeface="Times New Roman" panose="02020603050405020304" pitchFamily="18" charset="0"/>
-              </a:rPr>
-              <a:t>без</a:t>
-            </a:r>
-            <a:r>
-              <a:rPr lang="en-US" sz="2200" dirty="0">
-                <a:latin typeface="Times New Roman" panose="02020603050405020304" pitchFamily="18" charset="0"/>
-              </a:rPr>
-              <a:t> </a:t>
-            </a:r>
-            <a:r>
-              <a:rPr lang="en-US" sz="2200" dirty="0" err="1">
-                <a:latin typeface="Times New Roman" panose="02020603050405020304" pitchFamily="18" charset="0"/>
-              </a:rPr>
-              <a:t>искажений</a:t>
-            </a:r>
-            <a:r>
-              <a:rPr lang="en-US" sz="2200" dirty="0">
-                <a:latin typeface="Times New Roman" panose="02020603050405020304" pitchFamily="18" charset="0"/>
-              </a:rPr>
-              <a:t> </a:t>
-            </a:r>
-            <a:r>
-              <a:rPr lang="en-US" sz="2200" dirty="0" err="1">
-                <a:latin typeface="Times New Roman" panose="02020603050405020304" pitchFamily="18" charset="0"/>
-              </a:rPr>
-              <a:t>по</a:t>
-            </a:r>
-            <a:r>
-              <a:rPr lang="en-US" sz="2200" dirty="0">
-                <a:latin typeface="Times New Roman" panose="02020603050405020304" pitchFamily="18" charset="0"/>
-              </a:rPr>
-              <a:t> </a:t>
-            </a:r>
-            <a:r>
-              <a:rPr lang="en-US" sz="2200" dirty="0" err="1">
-                <a:latin typeface="Times New Roman" panose="02020603050405020304" pitchFamily="18" charset="0"/>
-              </a:rPr>
-              <a:t>своим</a:t>
-            </a:r>
-            <a:r>
-              <a:rPr lang="en-US" sz="2200" dirty="0">
-                <a:latin typeface="Times New Roman" panose="02020603050405020304" pitchFamily="18" charset="0"/>
-              </a:rPr>
-              <a:t> </a:t>
-            </a:r>
-            <a:r>
-              <a:rPr lang="en-US" sz="2200" dirty="0" err="1">
-                <a:latin typeface="Times New Roman" panose="02020603050405020304" pitchFamily="18" charset="0"/>
-              </a:rPr>
-              <a:t>дискретным</a:t>
-            </a:r>
-            <a:r>
-              <a:rPr lang="en-US" sz="2200" dirty="0">
-                <a:latin typeface="Times New Roman" panose="02020603050405020304" pitchFamily="18" charset="0"/>
-              </a:rPr>
-              <a:t> </a:t>
-            </a:r>
-            <a:r>
-              <a:rPr lang="en-US" sz="2200" dirty="0" err="1">
-                <a:latin typeface="Times New Roman" panose="02020603050405020304" pitchFamily="18" charset="0"/>
-              </a:rPr>
-              <a:t>отсчётам</a:t>
-            </a:r>
-            <a:r>
-              <a:rPr lang="en-US" sz="2200" dirty="0">
-                <a:latin typeface="Times New Roman" panose="02020603050405020304" pitchFamily="18" charset="0"/>
-              </a:rPr>
-              <a:t>, </a:t>
-            </a:r>
-            <a:r>
-              <a:rPr lang="en-US" sz="2200" dirty="0" err="1">
-                <a:latin typeface="Times New Roman" panose="02020603050405020304" pitchFamily="18" charset="0"/>
-              </a:rPr>
-              <a:t>взятым</a:t>
-            </a:r>
-            <a:r>
-              <a:rPr lang="en-US" sz="2200" dirty="0">
-                <a:latin typeface="Times New Roman" panose="02020603050405020304" pitchFamily="18" charset="0"/>
-              </a:rPr>
-              <a:t> с </a:t>
-            </a:r>
-            <a:r>
-              <a:rPr lang="en-US" sz="2200" dirty="0" err="1">
-                <a:latin typeface="Times New Roman" panose="02020603050405020304" pitchFamily="18" charset="0"/>
-              </a:rPr>
-              <a:t>частотой</a:t>
-            </a:r>
-            <a:r>
-              <a:rPr lang="en-US" sz="2200" dirty="0">
-                <a:latin typeface="Times New Roman" panose="02020603050405020304" pitchFamily="18" charset="0"/>
-              </a:rPr>
-              <a:t>, </a:t>
-            </a:r>
-            <a:r>
-              <a:rPr lang="en-US" sz="2200" dirty="0" err="1">
-                <a:latin typeface="Times New Roman" panose="02020603050405020304" pitchFamily="18" charset="0"/>
-              </a:rPr>
-              <a:t>большей</a:t>
-            </a:r>
-            <a:r>
-              <a:rPr lang="en-US" sz="2200" dirty="0">
-                <a:latin typeface="Times New Roman" panose="02020603050405020304" pitchFamily="18" charset="0"/>
-              </a:rPr>
-              <a:t> </a:t>
-            </a:r>
-            <a:r>
-              <a:rPr lang="en-US" sz="2200" dirty="0" err="1">
-                <a:latin typeface="Times New Roman" panose="02020603050405020304" pitchFamily="18" charset="0"/>
-              </a:rPr>
-              <a:t>или</a:t>
-            </a:r>
-            <a:r>
-              <a:rPr lang="en-US" sz="2200" dirty="0">
-                <a:latin typeface="Times New Roman" panose="02020603050405020304" pitchFamily="18" charset="0"/>
-              </a:rPr>
-              <a:t> </a:t>
-            </a:r>
-            <a:r>
-              <a:rPr lang="en-US" sz="2200" dirty="0" err="1">
-                <a:latin typeface="Times New Roman" panose="02020603050405020304" pitchFamily="18" charset="0"/>
-              </a:rPr>
-              <a:t>равной</a:t>
-            </a:r>
-            <a:r>
-              <a:rPr lang="en-US" sz="2200" dirty="0">
-                <a:latin typeface="Times New Roman" panose="02020603050405020304" pitchFamily="18" charset="0"/>
-              </a:rPr>
-              <a:t> </a:t>
-            </a:r>
-            <a:r>
-              <a:rPr lang="en-US" sz="2200" dirty="0" err="1">
-                <a:latin typeface="Times New Roman" panose="02020603050405020304" pitchFamily="18" charset="0"/>
-              </a:rPr>
-              <a:t>удвоенной</a:t>
-            </a:r>
-            <a:r>
-              <a:rPr lang="en-US" sz="2200" dirty="0">
-                <a:latin typeface="Times New Roman" panose="02020603050405020304" pitchFamily="18" charset="0"/>
-              </a:rPr>
-              <a:t> </a:t>
-            </a:r>
-            <a:r>
-              <a:rPr lang="en-US" sz="2200" dirty="0" err="1">
-                <a:latin typeface="Times New Roman" panose="02020603050405020304" pitchFamily="18" charset="0"/>
-              </a:rPr>
-              <a:t>верхней</a:t>
-            </a:r>
-            <a:r>
-              <a:rPr lang="en-US" sz="2200" dirty="0">
-                <a:latin typeface="Times New Roman" panose="02020603050405020304" pitchFamily="18" charset="0"/>
-              </a:rPr>
-              <a:t> </a:t>
-            </a:r>
-            <a:r>
-              <a:rPr lang="en-US" sz="2200" dirty="0" err="1">
-                <a:latin typeface="Times New Roman" panose="02020603050405020304" pitchFamily="18" charset="0"/>
-              </a:rPr>
-              <a:t>частоте</a:t>
-            </a:r>
-            <a:r>
-              <a:rPr lang="en-US" sz="2200" dirty="0">
-                <a:latin typeface="Times New Roman" panose="02020603050405020304" pitchFamily="18" charset="0"/>
-              </a:rPr>
-              <a:t> </a:t>
-            </a:r>
-            <a:r>
-              <a:rPr lang="en-US" sz="2200" dirty="0" err="1">
-                <a:latin typeface="Times New Roman" panose="02020603050405020304" pitchFamily="18" charset="0"/>
-              </a:rPr>
-              <a:t>спектра</a:t>
-            </a:r>
-            <a:r>
-              <a:rPr lang="en-US" sz="2200" dirty="0">
-                <a:latin typeface="Times New Roman" panose="02020603050405020304" pitchFamily="18" charset="0"/>
-              </a:rPr>
-              <a:t>: </a:t>
-            </a:r>
-            <a:r>
-              <a:rPr lang="en-US" sz="2200" b="1" dirty="0" err="1">
-                <a:latin typeface="Times New Roman" panose="02020603050405020304" pitchFamily="18" charset="0"/>
-                <a:ea typeface="Inter Medium" pitchFamily="34" charset="-122"/>
-                <a:cs typeface="Times New Roman" panose="02020603050405020304" pitchFamily="18" charset="0"/>
-              </a:rPr>
-              <a:t>fдискр</a:t>
-            </a:r>
-            <a:r>
-              <a:rPr lang="en-US" sz="2200" b="1" dirty="0">
-                <a:latin typeface="Times New Roman" panose="02020603050405020304" pitchFamily="18" charset="0"/>
-                <a:ea typeface="Inter Medium" pitchFamily="34" charset="-122"/>
-                <a:cs typeface="Times New Roman" panose="02020603050405020304" pitchFamily="18" charset="0"/>
-              </a:rPr>
-              <a:t> ≥ 2 × fmax</a:t>
-            </a:r>
-            <a:r>
-              <a:rPr lang="en-US" sz="2200" dirty="0">
-                <a:latin typeface="Times New Roman" panose="02020603050405020304" pitchFamily="18" charset="0"/>
-                <a:ea typeface="Inter Medium" pitchFamily="34" charset="-122"/>
-                <a:cs typeface="Times New Roman" panose="02020603050405020304" pitchFamily="18" charset="0"/>
-              </a:rPr>
-              <a:t>.</a:t>
-            </a:r>
-            <a:endParaRPr lang="en-US" sz="2200" dirty="0"/>
-          </a:p>
-        </p:txBody>
-      </p:sp>
-      <p:sp>
-        <p:nvSpPr>
-          <p:cNvPr id="5" name="Text 3"/>
-          <p:cNvSpPr/>
-          <p:nvPr/>
-        </p:nvSpPr>
-        <p:spPr>
-          <a:xfrm>
-            <a:off x="816411" y="3546631"/>
-            <a:ext cx="12997577" cy="725805"/>
-          </a:xfrm>
-          <a:prstGeom prst="rect">
-            <a:avLst/>
-          </a:prstGeom>
-          <a:noFill/>
-          <a:ln/>
-        </p:spPr>
-        <p:txBody>
-          <a:bodyPr wrap="square" lIns="0" tIns="0" rIns="0" bIns="0" rtlCol="0" anchor="t"/>
-          <a:lstStyle/>
-          <a:p>
-            <a:pPr marL="0" indent="0" algn="l">
-              <a:lnSpc>
-                <a:spcPts val="2850"/>
-              </a:lnSpc>
-              <a:buNone/>
-            </a:pPr>
-            <a:r>
-              <a:rPr lang="ru-RU" sz="2200" dirty="0">
-                <a:latin typeface="Times New Roman" panose="02020603050405020304" pitchFamily="18" charset="0"/>
-              </a:rPr>
-              <a:t>Например п</a:t>
-            </a:r>
-            <a:r>
-              <a:rPr lang="en-US" sz="2200" dirty="0" err="1">
-                <a:latin typeface="Times New Roman" panose="02020603050405020304" pitchFamily="18" charset="0"/>
-              </a:rPr>
-              <a:t>ри</a:t>
-            </a:r>
-            <a:r>
-              <a:rPr lang="en-US" sz="2200" dirty="0">
-                <a:latin typeface="Times New Roman" panose="02020603050405020304" pitchFamily="18" charset="0"/>
-              </a:rPr>
-              <a:t> </a:t>
-            </a:r>
-            <a:r>
-              <a:rPr lang="en-US" sz="2200" dirty="0" err="1">
-                <a:latin typeface="Times New Roman" panose="02020603050405020304" pitchFamily="18" charset="0"/>
-              </a:rPr>
-              <a:t>частоте</a:t>
-            </a:r>
-            <a:r>
-              <a:rPr lang="en-US" sz="2200" dirty="0">
-                <a:latin typeface="Times New Roman" panose="02020603050405020304" pitchFamily="18" charset="0"/>
-              </a:rPr>
-              <a:t> </a:t>
-            </a:r>
-            <a:r>
-              <a:rPr lang="en-US" sz="2200" dirty="0" err="1">
-                <a:latin typeface="Times New Roman" panose="02020603050405020304" pitchFamily="18" charset="0"/>
-              </a:rPr>
-              <a:t>дискретизации</a:t>
-            </a:r>
-            <a:r>
-              <a:rPr lang="en-US" sz="2200" dirty="0">
-                <a:latin typeface="Times New Roman" panose="02020603050405020304" pitchFamily="18" charset="0"/>
-              </a:rPr>
-              <a:t> 1000 </a:t>
-            </a:r>
-            <a:r>
-              <a:rPr lang="en-US" sz="2200" dirty="0" err="1">
-                <a:latin typeface="Times New Roman" panose="02020603050405020304" pitchFamily="18" charset="0"/>
-              </a:rPr>
-              <a:t>Гц</a:t>
-            </a:r>
-            <a:r>
-              <a:rPr lang="en-US" sz="2200" dirty="0">
-                <a:latin typeface="Times New Roman" panose="02020603050405020304" pitchFamily="18" charset="0"/>
-              </a:rPr>
-              <a:t> </a:t>
-            </a:r>
-            <a:r>
-              <a:rPr lang="en-US" sz="2200" dirty="0" err="1">
-                <a:latin typeface="Times New Roman" panose="02020603050405020304" pitchFamily="18" charset="0"/>
-              </a:rPr>
-              <a:t>из</a:t>
-            </a:r>
-            <a:r>
-              <a:rPr lang="en-US" sz="2200" dirty="0">
-                <a:latin typeface="Times New Roman" panose="02020603050405020304" pitchFamily="18" charset="0"/>
-              </a:rPr>
-              <a:t> </a:t>
-            </a:r>
-            <a:r>
-              <a:rPr lang="en-US" sz="2200" dirty="0" err="1">
-                <a:latin typeface="Times New Roman" panose="02020603050405020304" pitchFamily="18" charset="0"/>
-              </a:rPr>
-              <a:t>аналогового</a:t>
-            </a:r>
-            <a:r>
-              <a:rPr lang="en-US" sz="2200" dirty="0">
-                <a:latin typeface="Times New Roman" panose="02020603050405020304" pitchFamily="18" charset="0"/>
-              </a:rPr>
-              <a:t> </a:t>
-            </a:r>
-            <a:r>
-              <a:rPr lang="en-US" sz="2200" dirty="0" err="1">
-                <a:latin typeface="Times New Roman" panose="02020603050405020304" pitchFamily="18" charset="0"/>
-              </a:rPr>
-              <a:t>сигнала</a:t>
-            </a:r>
-            <a:r>
-              <a:rPr lang="en-US" sz="2200" dirty="0">
-                <a:latin typeface="Times New Roman" panose="02020603050405020304" pitchFamily="18" charset="0"/>
-              </a:rPr>
-              <a:t> </a:t>
-            </a:r>
-            <a:r>
-              <a:rPr lang="en-US" sz="2200" dirty="0" err="1">
-                <a:latin typeface="Times New Roman" panose="02020603050405020304" pitchFamily="18" charset="0"/>
-              </a:rPr>
-              <a:t>можно</a:t>
-            </a:r>
-            <a:r>
-              <a:rPr lang="en-US" sz="2200" dirty="0">
-                <a:latin typeface="Times New Roman" panose="02020603050405020304" pitchFamily="18" charset="0"/>
-              </a:rPr>
-              <a:t> </a:t>
-            </a:r>
-            <a:r>
-              <a:rPr lang="en-US" sz="2200" dirty="0" err="1">
-                <a:latin typeface="Times New Roman" panose="02020603050405020304" pitchFamily="18" charset="0"/>
-              </a:rPr>
-              <a:t>восстановить</a:t>
-            </a:r>
-            <a:r>
-              <a:rPr lang="en-US" sz="2200" dirty="0">
-                <a:latin typeface="Times New Roman" panose="02020603050405020304" pitchFamily="18" charset="0"/>
-              </a:rPr>
-              <a:t> </a:t>
-            </a:r>
-            <a:r>
-              <a:rPr lang="en-US" sz="2200" dirty="0" err="1">
-                <a:latin typeface="Times New Roman" panose="02020603050405020304" pitchFamily="18" charset="0"/>
-              </a:rPr>
-              <a:t>составляющие</a:t>
-            </a:r>
-            <a:r>
-              <a:rPr lang="en-US" sz="2200" dirty="0">
-                <a:latin typeface="Times New Roman" panose="02020603050405020304" pitchFamily="18" charset="0"/>
-              </a:rPr>
-              <a:t> с </a:t>
-            </a:r>
-            <a:r>
-              <a:rPr lang="en-US" sz="2200" dirty="0" err="1">
-                <a:latin typeface="Times New Roman" panose="02020603050405020304" pitchFamily="18" charset="0"/>
-              </a:rPr>
-              <a:t>частотой</a:t>
-            </a:r>
-            <a:r>
-              <a:rPr lang="en-US" sz="2200" dirty="0">
-                <a:latin typeface="Times New Roman" panose="02020603050405020304" pitchFamily="18" charset="0"/>
-              </a:rPr>
-              <a:t> </a:t>
-            </a:r>
-            <a:r>
-              <a:rPr lang="en-US" sz="2200" dirty="0" err="1">
-                <a:latin typeface="Times New Roman" panose="02020603050405020304" pitchFamily="18" charset="0"/>
-              </a:rPr>
-              <a:t>до</a:t>
-            </a:r>
-            <a:r>
-              <a:rPr lang="en-US" sz="2200" dirty="0">
-                <a:latin typeface="Times New Roman" panose="02020603050405020304" pitchFamily="18" charset="0"/>
-              </a:rPr>
-              <a:t> 500 </a:t>
-            </a:r>
-            <a:r>
-              <a:rPr lang="en-US" sz="2200" dirty="0" err="1">
-                <a:latin typeface="Times New Roman" panose="02020603050405020304" pitchFamily="18" charset="0"/>
-              </a:rPr>
-              <a:t>Гц</a:t>
-            </a:r>
-            <a:r>
-              <a:rPr lang="en-US" sz="2200" dirty="0">
-                <a:latin typeface="Times New Roman" panose="02020603050405020304" pitchFamily="18" charset="0"/>
-              </a:rPr>
-              <a:t>.</a:t>
-            </a:r>
-          </a:p>
-        </p:txBody>
-      </p:sp>
-      <p:sp>
-        <p:nvSpPr>
-          <p:cNvPr id="6" name="Text 4"/>
-          <p:cNvSpPr/>
-          <p:nvPr/>
-        </p:nvSpPr>
-        <p:spPr>
-          <a:xfrm>
-            <a:off x="693122" y="5202085"/>
-            <a:ext cx="2915960" cy="364450"/>
-          </a:xfrm>
-          <a:prstGeom prst="rect">
-            <a:avLst/>
-          </a:prstGeom>
-          <a:noFill/>
-          <a:ln/>
-        </p:spPr>
-        <p:txBody>
-          <a:bodyPr wrap="none" lIns="0" tIns="0" rIns="0" bIns="0" rtlCol="0" anchor="t"/>
-          <a:lstStyle/>
-          <a:p>
-            <a:pPr marL="0" indent="0" algn="l">
-              <a:lnSpc>
-                <a:spcPts val="2850"/>
-              </a:lnSpc>
-              <a:buNone/>
-            </a:pPr>
-            <a:r>
-              <a:rPr lang="en-US" sz="2250" dirty="0" err="1">
-                <a:solidFill>
-                  <a:srgbClr val="030303"/>
-                </a:solidFill>
-                <a:latin typeface="Times New Roman" panose="02020603050405020304" pitchFamily="18" charset="0"/>
-                <a:ea typeface="DM Sans Semi Bold" pitchFamily="34" charset="-122"/>
-                <a:cs typeface="Times New Roman" panose="02020603050405020304" pitchFamily="18" charset="0"/>
-              </a:rPr>
-              <a:t>Важное</a:t>
-            </a:r>
-            <a:r>
-              <a:rPr lang="en-US" sz="2250" dirty="0">
-                <a:solidFill>
-                  <a:srgbClr val="030303"/>
-                </a:solidFill>
-                <a:latin typeface="Times New Roman" panose="02020603050405020304" pitchFamily="18" charset="0"/>
-                <a:ea typeface="DM Sans Semi Bold" pitchFamily="34" charset="-122"/>
-                <a:cs typeface="Times New Roman" panose="02020603050405020304" pitchFamily="18" charset="0"/>
-              </a:rPr>
-              <a:t> </a:t>
-            </a:r>
-            <a:r>
-              <a:rPr lang="en-US" sz="2250" dirty="0" err="1">
-                <a:solidFill>
-                  <a:srgbClr val="030303"/>
-                </a:solidFill>
-                <a:latin typeface="Times New Roman" panose="02020603050405020304" pitchFamily="18" charset="0"/>
-                <a:ea typeface="DM Sans Semi Bold" pitchFamily="34" charset="-122"/>
-                <a:cs typeface="Times New Roman" panose="02020603050405020304" pitchFamily="18" charset="0"/>
-              </a:rPr>
-              <a:t>следствие</a:t>
-            </a:r>
-            <a:r>
-              <a:rPr lang="en-US" sz="2250" dirty="0">
-                <a:solidFill>
-                  <a:srgbClr val="030303"/>
-                </a:solidFill>
-                <a:latin typeface="Times New Roman" panose="02020603050405020304" pitchFamily="18" charset="0"/>
-                <a:ea typeface="DM Sans Semi Bold" pitchFamily="34" charset="-122"/>
-                <a:cs typeface="Times New Roman" panose="02020603050405020304" pitchFamily="18" charset="0"/>
-              </a:rPr>
-              <a:t>:</a:t>
-            </a:r>
-            <a:endParaRPr lang="en-US" sz="2250" dirty="0"/>
-          </a:p>
-        </p:txBody>
-      </p:sp>
-      <p:sp>
-        <p:nvSpPr>
-          <p:cNvPr id="7" name="Text 5"/>
-          <p:cNvSpPr/>
-          <p:nvPr/>
-        </p:nvSpPr>
-        <p:spPr>
-          <a:xfrm>
-            <a:off x="693122" y="5798337"/>
-            <a:ext cx="12997577" cy="725805"/>
-          </a:xfrm>
-          <a:prstGeom prst="rect">
-            <a:avLst/>
-          </a:prstGeom>
-          <a:noFill/>
-          <a:ln/>
-        </p:spPr>
-        <p:txBody>
-          <a:bodyPr wrap="square" lIns="0" tIns="0" rIns="0" bIns="0" rtlCol="0" anchor="t"/>
-          <a:lstStyle/>
-          <a:p>
-            <a:pPr marL="0" indent="0" algn="l">
-              <a:lnSpc>
-                <a:spcPts val="2850"/>
-              </a:lnSpc>
-              <a:buNone/>
-            </a:pPr>
-            <a:r>
-              <a:rPr lang="en-US" sz="2200" dirty="0" err="1">
-                <a:latin typeface="Times New Roman" panose="02020603050405020304" pitchFamily="18" charset="0"/>
-              </a:rPr>
-              <a:t>Дискретизация</a:t>
-            </a:r>
-            <a:r>
-              <a:rPr lang="en-US" sz="2200" dirty="0">
-                <a:latin typeface="Times New Roman" panose="02020603050405020304" pitchFamily="18" charset="0"/>
-              </a:rPr>
-              <a:t> </a:t>
-            </a:r>
-            <a:r>
-              <a:rPr lang="en-US" sz="2200" dirty="0" err="1">
-                <a:latin typeface="Times New Roman" panose="02020603050405020304" pitchFamily="18" charset="0"/>
-              </a:rPr>
-              <a:t>функции</a:t>
-            </a:r>
-            <a:r>
-              <a:rPr lang="en-US" sz="2200" dirty="0">
-                <a:latin typeface="Times New Roman" panose="02020603050405020304" pitchFamily="18" charset="0"/>
-              </a:rPr>
-              <a:t> </a:t>
-            </a:r>
-            <a:r>
-              <a:rPr lang="en-US" sz="2200" dirty="0" err="1">
-                <a:latin typeface="Times New Roman" panose="02020603050405020304" pitchFamily="18" charset="0"/>
-              </a:rPr>
-              <a:t>по</a:t>
-            </a:r>
-            <a:r>
-              <a:rPr lang="en-US" sz="2200" dirty="0">
-                <a:latin typeface="Times New Roman" panose="02020603050405020304" pitchFamily="18" charset="0"/>
-              </a:rPr>
-              <a:t> </a:t>
-            </a:r>
-            <a:r>
-              <a:rPr lang="en-US" sz="2200" dirty="0" err="1">
-                <a:latin typeface="Times New Roman" panose="02020603050405020304" pitchFamily="18" charset="0"/>
-              </a:rPr>
-              <a:t>времени</a:t>
-            </a:r>
-            <a:r>
-              <a:rPr lang="en-US" sz="2200" dirty="0">
-                <a:latin typeface="Times New Roman" panose="02020603050405020304" pitchFamily="18" charset="0"/>
-              </a:rPr>
-              <a:t> </a:t>
-            </a:r>
-            <a:r>
-              <a:rPr lang="en-US" sz="2200" dirty="0" err="1">
-                <a:latin typeface="Times New Roman" panose="02020603050405020304" pitchFamily="18" charset="0"/>
-              </a:rPr>
-              <a:t>приводит</a:t>
-            </a:r>
-            <a:r>
-              <a:rPr lang="en-US" sz="2200" dirty="0">
-                <a:latin typeface="Times New Roman" panose="02020603050405020304" pitchFamily="18" charset="0"/>
-              </a:rPr>
-              <a:t> к </a:t>
-            </a:r>
-            <a:r>
-              <a:rPr lang="en-US" sz="2200" dirty="0" err="1">
-                <a:latin typeface="Times New Roman" panose="02020603050405020304" pitchFamily="18" charset="0"/>
-              </a:rPr>
-              <a:t>периодизации</a:t>
-            </a:r>
-            <a:r>
-              <a:rPr lang="en-US" sz="2200" dirty="0">
-                <a:latin typeface="Times New Roman" panose="02020603050405020304" pitchFamily="18" charset="0"/>
-              </a:rPr>
-              <a:t> </a:t>
-            </a:r>
-            <a:r>
-              <a:rPr lang="en-US" sz="2200" dirty="0" err="1">
-                <a:latin typeface="Times New Roman" panose="02020603050405020304" pitchFamily="18" charset="0"/>
-              </a:rPr>
-              <a:t>её</a:t>
-            </a:r>
-            <a:r>
-              <a:rPr lang="en-US" sz="2200" dirty="0">
-                <a:latin typeface="Times New Roman" panose="02020603050405020304" pitchFamily="18" charset="0"/>
-              </a:rPr>
-              <a:t> </a:t>
-            </a:r>
-            <a:r>
-              <a:rPr lang="en-US" sz="2200" dirty="0" err="1">
-                <a:latin typeface="Times New Roman" panose="02020603050405020304" pitchFamily="18" charset="0"/>
-              </a:rPr>
-              <a:t>спектра</a:t>
-            </a:r>
-            <a:r>
-              <a:rPr lang="en-US" sz="2200" dirty="0">
-                <a:latin typeface="Times New Roman" panose="02020603050405020304" pitchFamily="18" charset="0"/>
-              </a:rPr>
-              <a:t>, а </a:t>
-            </a:r>
-            <a:r>
-              <a:rPr lang="en-US" sz="2200" dirty="0" err="1">
-                <a:latin typeface="Times New Roman" panose="02020603050405020304" pitchFamily="18" charset="0"/>
-              </a:rPr>
-              <a:t>дискретизация</a:t>
-            </a:r>
-            <a:r>
-              <a:rPr lang="en-US" sz="2200" dirty="0">
-                <a:latin typeface="Times New Roman" panose="02020603050405020304" pitchFamily="18" charset="0"/>
-              </a:rPr>
-              <a:t> </a:t>
-            </a:r>
-            <a:r>
-              <a:rPr lang="en-US" sz="2200" dirty="0" err="1">
-                <a:latin typeface="Times New Roman" panose="02020603050405020304" pitchFamily="18" charset="0"/>
-              </a:rPr>
-              <a:t>спектра</a:t>
-            </a:r>
-            <a:r>
-              <a:rPr lang="en-US" sz="2200" dirty="0">
-                <a:latin typeface="Times New Roman" panose="02020603050405020304" pitchFamily="18" charset="0"/>
-              </a:rPr>
-              <a:t> </a:t>
-            </a:r>
-            <a:r>
-              <a:rPr lang="en-US" sz="2200" dirty="0" err="1">
-                <a:latin typeface="Times New Roman" panose="02020603050405020304" pitchFamily="18" charset="0"/>
-              </a:rPr>
-              <a:t>по</a:t>
-            </a:r>
-            <a:r>
-              <a:rPr lang="en-US" sz="2200" dirty="0">
-                <a:latin typeface="Times New Roman" panose="02020603050405020304" pitchFamily="18" charset="0"/>
-              </a:rPr>
-              <a:t> </a:t>
-            </a:r>
-            <a:r>
-              <a:rPr lang="en-US" sz="2200" dirty="0" err="1">
-                <a:latin typeface="Times New Roman" panose="02020603050405020304" pitchFamily="18" charset="0"/>
-              </a:rPr>
-              <a:t>частоте</a:t>
-            </a:r>
-            <a:r>
-              <a:rPr lang="en-US" sz="2200" dirty="0">
-                <a:latin typeface="Times New Roman" panose="02020603050405020304" pitchFamily="18" charset="0"/>
-              </a:rPr>
-              <a:t> — к </a:t>
-            </a:r>
-            <a:r>
-              <a:rPr lang="en-US" sz="2200" dirty="0" err="1">
-                <a:latin typeface="Times New Roman" panose="02020603050405020304" pitchFamily="18" charset="0"/>
-              </a:rPr>
-              <a:t>периодизации</a:t>
-            </a:r>
-            <a:r>
-              <a:rPr lang="en-US" sz="2200" dirty="0">
-                <a:latin typeface="Times New Roman" panose="02020603050405020304" pitchFamily="18" charset="0"/>
-              </a:rPr>
-              <a:t> </a:t>
-            </a:r>
-            <a:r>
-              <a:rPr lang="en-US" sz="2200" dirty="0" err="1">
-                <a:latin typeface="Times New Roman" panose="02020603050405020304" pitchFamily="18" charset="0"/>
-              </a:rPr>
-              <a:t>функции</a:t>
-            </a:r>
-            <a:r>
-              <a:rPr lang="en-US" sz="2200" dirty="0">
-                <a:latin typeface="Times New Roman" panose="02020603050405020304" pitchFamily="18" charset="0"/>
-              </a:rPr>
-              <a:t>.</a:t>
-            </a:r>
-          </a:p>
-        </p:txBody>
-      </p:sp>
-      <p:sp>
-        <p:nvSpPr>
-          <p:cNvPr id="8" name="Text 6"/>
-          <p:cNvSpPr/>
-          <p:nvPr/>
-        </p:nvSpPr>
-        <p:spPr>
-          <a:xfrm>
-            <a:off x="693122" y="6702017"/>
-            <a:ext cx="12997577" cy="362903"/>
-          </a:xfrm>
-          <a:prstGeom prst="rect">
-            <a:avLst/>
-          </a:prstGeom>
-          <a:noFill/>
-          <a:ln/>
-        </p:spPr>
-        <p:txBody>
-          <a:bodyPr wrap="none" lIns="0" tIns="0" rIns="0" bIns="0" rtlCol="0" anchor="t"/>
-          <a:lstStyle/>
-          <a:p>
-            <a:pPr>
-              <a:lnSpc>
-                <a:spcPts val="2850"/>
-              </a:lnSpc>
-            </a:pPr>
-            <a:r>
-              <a:rPr lang="en-US" sz="2200" dirty="0">
-                <a:latin typeface="Times New Roman" panose="02020603050405020304" pitchFamily="18" charset="0"/>
-              </a:rPr>
-              <a:t>В иностранной литературе теорема известна </a:t>
-            </a:r>
-            <a:r>
-              <a:rPr lang="en-US" sz="2200" dirty="0" err="1">
-                <a:latin typeface="Times New Roman" panose="02020603050405020304" pitchFamily="18" charset="0"/>
-              </a:rPr>
-              <a:t>как</a:t>
-            </a:r>
-            <a:r>
-              <a:rPr lang="en-US" sz="2200" dirty="0">
-                <a:latin typeface="Times New Roman" panose="02020603050405020304" pitchFamily="18" charset="0"/>
-              </a:rPr>
-              <a:t> теорема Найквиста–</a:t>
-            </a:r>
-            <a:r>
-              <a:rPr lang="en-US" sz="2200" dirty="0" err="1">
-                <a:latin typeface="Times New Roman" panose="02020603050405020304" pitchFamily="18" charset="0"/>
-              </a:rPr>
-              <a:t>Шеннона</a:t>
-            </a:r>
-            <a:r>
-              <a:rPr lang="en-US" sz="2200" dirty="0">
-                <a:latin typeface="Times New Roman" panose="02020603050405020304" pitchFamily="18" charset="0"/>
-              </a:rPr>
-              <a:t> или «теорема </a:t>
-            </a:r>
-            <a:r>
-              <a:rPr lang="en-US" sz="2200" dirty="0" err="1">
-                <a:latin typeface="Times New Roman" panose="02020603050405020304" pitchFamily="18" charset="0"/>
-              </a:rPr>
-              <a:t>отсчётов</a:t>
-            </a:r>
-            <a:r>
-              <a:rPr lang="en-US" sz="2200" dirty="0">
-                <a:latin typeface="Times New Roman" panose="02020603050405020304" pitchFamily="18" charset="0"/>
-              </a:rPr>
-              <a:t>».</a:t>
-            </a:r>
-          </a:p>
-        </p:txBody>
-      </p:sp>
-    </p:spTree>
-  </p:cSld>
-  <p:clrMapOvr>
-    <a:masterClrMapping/>
-  </p:clrMapOvr>
-</p:sld>
-</file>
-
-<file path=ppt/slides/slide5.xml><?xml version="1.0" encoding="utf-8"?>
-<p:sld xmlns:a="http://schemas.openxmlformats.org/drawingml/2006/main" xmlns:r="http://schemas.openxmlformats.org/officeDocument/2006/relationships" xmlns:p="http://schemas.openxmlformats.org/presentationml/2006/main">
-  <p:cSld>
-    <p:spTree>
-      <p:nvGrpSpPr>
-        <p:cNvPr id="1" name=""/>
-        <p:cNvGrpSpPr/>
-        <p:nvPr/>
-      </p:nvGrpSpPr>
-      <p:grpSpPr>
-        <a:xfrm>
-          <a:off x="0" y="0"/>
-          <a:ext cx="0" cy="0"/>
-          <a:chOff x="0" y="0"/>
-          <a:chExt cx="0" cy="0"/>
-        </a:xfrm>
-      </p:grpSpPr>
-      <p:sp>
-        <p:nvSpPr>
-          <p:cNvPr id="2" name="Text 0"/>
-          <p:cNvSpPr/>
-          <p:nvPr/>
-        </p:nvSpPr>
-        <p:spPr>
-          <a:xfrm>
-            <a:off x="864037" y="1189910"/>
-            <a:ext cx="6927056" cy="771525"/>
-          </a:xfrm>
-          <a:prstGeom prst="rect">
-            <a:avLst/>
-          </a:prstGeom>
-          <a:noFill/>
-          <a:ln/>
-        </p:spPr>
-        <p:txBody>
-          <a:bodyPr wrap="none" lIns="0" tIns="0" rIns="0" bIns="0" rtlCol="0" anchor="t"/>
-          <a:lstStyle/>
-          <a:p>
-            <a:pPr marL="0" indent="0" algn="l">
-              <a:lnSpc>
-                <a:spcPts val="6050"/>
-              </a:lnSpc>
-              <a:buNone/>
-            </a:pPr>
-            <a:r>
-              <a:rPr lang="en-US" sz="4500" dirty="0">
-                <a:solidFill>
-                  <a:srgbClr val="030303"/>
-                </a:solidFill>
-                <a:latin typeface="Times New Roman" panose="02020603050405020304" pitchFamily="18" charset="0"/>
-                <a:ea typeface="DM Sans Semi Bold" pitchFamily="34" charset="-122"/>
-                <a:cs typeface="Times New Roman" panose="02020603050405020304" pitchFamily="18" charset="0"/>
-              </a:rPr>
-              <a:t>Формула прямого ДПФ</a:t>
-            </a:r>
-            <a:endParaRPr lang="en-US" sz="4500" dirty="0"/>
-          </a:p>
-        </p:txBody>
-      </p:sp>
-      <p:sp>
-        <p:nvSpPr>
-          <p:cNvPr id="3" name="Text 1"/>
-          <p:cNvSpPr/>
-          <p:nvPr/>
-        </p:nvSpPr>
-        <p:spPr>
-          <a:xfrm>
-            <a:off x="864037" y="2840950"/>
-            <a:ext cx="12902327" cy="395049"/>
-          </a:xfrm>
-          <a:prstGeom prst="rect">
-            <a:avLst/>
-          </a:prstGeom>
-          <a:noFill/>
-          <a:ln/>
-        </p:spPr>
-        <p:txBody>
-          <a:bodyPr wrap="none" lIns="0" tIns="0" rIns="0" bIns="0" rtlCol="0" anchor="t"/>
-          <a:lstStyle/>
-          <a:p>
-            <a:pPr marL="0" indent="0" algn="l">
-              <a:lnSpc>
-                <a:spcPts val="3100"/>
-              </a:lnSpc>
-              <a:buNone/>
-            </a:pPr>
-            <a:r>
-              <a:rPr lang="en-US" sz="2200" dirty="0">
-                <a:latin typeface="Times New Roman" panose="02020603050405020304" pitchFamily="18" charset="0"/>
-              </a:rPr>
-              <a:t>Прямое дискретное преобразование Фурье вычисляется по следующей </a:t>
-            </a:r>
-            <a:r>
-              <a:rPr lang="en-US" sz="2200" dirty="0" err="1">
-                <a:latin typeface="Times New Roman" panose="02020603050405020304" pitchFamily="18" charset="0"/>
-              </a:rPr>
-              <a:t>формуле</a:t>
-            </a:r>
-            <a:r>
-              <a:rPr lang="en-US" sz="2200" dirty="0">
-                <a:latin typeface="Times New Roman" panose="02020603050405020304" pitchFamily="18" charset="0"/>
-              </a:rPr>
-              <a:t>:</a:t>
-            </a:r>
-          </a:p>
-        </p:txBody>
-      </p:sp>
-      <p:sp>
-        <p:nvSpPr>
-          <p:cNvPr id="4" name="Text 2"/>
-          <p:cNvSpPr/>
-          <p:nvPr/>
-        </p:nvSpPr>
-        <p:spPr>
-          <a:xfrm>
-            <a:off x="864037" y="3548420"/>
-            <a:ext cx="12902327" cy="1040249"/>
-          </a:xfrm>
-          <a:prstGeom prst="rect">
-            <a:avLst/>
-          </a:prstGeom>
-          <a:noFill/>
-          <a:ln/>
-        </p:spPr>
-        <p:txBody>
-          <a:bodyPr wrap="square" lIns="0" tIns="0" rIns="0" bIns="0" rtlCol="0" anchor="t"/>
-          <a:lstStyle/>
-          <a:p>
-            <a:pPr marL="0" indent="0" algn="l">
-              <a:lnSpc>
-                <a:spcPts val="3450"/>
-              </a:lnSpc>
-              <a:buNone/>
-            </a:pPr>
-            <a:endParaRPr lang="en-US" sz="2150" dirty="0"/>
-          </a:p>
-        </p:txBody>
-      </p:sp>
-      <p:sp>
-        <p:nvSpPr>
-          <p:cNvPr id="6" name="Text 3"/>
-          <p:cNvSpPr/>
-          <p:nvPr/>
-        </p:nvSpPr>
-        <p:spPr>
-          <a:xfrm>
-            <a:off x="864037" y="4901089"/>
-            <a:ext cx="12902327" cy="1752838"/>
-          </a:xfrm>
-          <a:prstGeom prst="rect">
-            <a:avLst/>
-          </a:prstGeom>
-          <a:noFill/>
-          <a:ln/>
-        </p:spPr>
-        <p:txBody>
-          <a:bodyPr wrap="square" lIns="0" tIns="0" rIns="0" bIns="0" rtlCol="0" anchor="t"/>
-          <a:lstStyle/>
-          <a:p>
-            <a:pPr marL="342900" indent="-342900" algn="l">
-              <a:lnSpc>
-                <a:spcPts val="3100"/>
-              </a:lnSpc>
-              <a:buSzPct val="100000"/>
-              <a:buChar char="•"/>
-            </a:pPr>
-            <a:r>
-              <a:rPr lang="en-US" sz="2200" dirty="0">
-                <a:latin typeface="Times New Roman" panose="02020603050405020304" pitchFamily="18" charset="0"/>
-              </a:rPr>
-              <a:t>N — количество значений сигнала, измеренных за период; кратность частотного </a:t>
-            </a:r>
-            <a:r>
-              <a:rPr lang="en-US" sz="2200" dirty="0" err="1">
-                <a:latin typeface="Times New Roman" panose="02020603050405020304" pitchFamily="18" charset="0"/>
-              </a:rPr>
-              <a:t>спектра</a:t>
-            </a:r>
-            <a:r>
-              <a:rPr lang="en-US" sz="2200" dirty="0">
-                <a:latin typeface="Times New Roman" panose="02020603050405020304" pitchFamily="18" charset="0"/>
-              </a:rPr>
-              <a:t>.</a:t>
-            </a:r>
-          </a:p>
-          <a:p>
-            <a:pPr marL="342900" indent="-342900" algn="l">
-              <a:lnSpc>
-                <a:spcPts val="3100"/>
-              </a:lnSpc>
-              <a:buSzPct val="100000"/>
-              <a:buChar char="•"/>
-            </a:pPr>
-            <a:r>
-              <a:rPr lang="en-US" sz="2200" dirty="0">
-                <a:latin typeface="Times New Roman" panose="02020603050405020304" pitchFamily="18" charset="0"/>
-              </a:rPr>
-              <a:t>k — индекс </a:t>
-            </a:r>
-            <a:r>
-              <a:rPr lang="en-US" sz="2200" dirty="0" err="1">
-                <a:latin typeface="Times New Roman" panose="02020603050405020304" pitchFamily="18" charset="0"/>
-              </a:rPr>
-              <a:t>частоты</a:t>
-            </a:r>
-            <a:r>
-              <a:rPr lang="en-US" sz="2200" dirty="0">
-                <a:latin typeface="Times New Roman" panose="02020603050405020304" pitchFamily="18" charset="0"/>
-              </a:rPr>
-              <a:t>.</a:t>
-            </a:r>
-          </a:p>
-          <a:p>
-            <a:pPr marL="342900" indent="-342900" algn="l">
-              <a:lnSpc>
-                <a:spcPts val="3100"/>
-              </a:lnSpc>
-              <a:buSzPct val="100000"/>
-              <a:buChar char="•"/>
-            </a:pPr>
-            <a:r>
-              <a:rPr lang="en-US" sz="2200" dirty="0">
-                <a:latin typeface="Times New Roman" panose="02020603050405020304" pitchFamily="18" charset="0"/>
-              </a:rPr>
-              <a:t>f(k) = k/T — частота k-го сигнала, </a:t>
-            </a:r>
-            <a:r>
-              <a:rPr lang="en-US" sz="2200" dirty="0" err="1">
-                <a:latin typeface="Times New Roman" panose="02020603050405020304" pitchFamily="18" charset="0"/>
-              </a:rPr>
-              <a:t>где</a:t>
-            </a:r>
-            <a:r>
-              <a:rPr lang="en-US" sz="2200" dirty="0">
-                <a:latin typeface="Times New Roman" panose="02020603050405020304" pitchFamily="18" charset="0"/>
-              </a:rPr>
-              <a:t> T — период времени, в течение которого брались входные </a:t>
-            </a:r>
-            <a:r>
-              <a:rPr lang="en-US" sz="2200" dirty="0" err="1">
-                <a:latin typeface="Times New Roman" panose="02020603050405020304" pitchFamily="18" charset="0"/>
-              </a:rPr>
-              <a:t>данные</a:t>
-            </a:r>
-            <a:r>
-              <a:rPr lang="en-US" sz="2200" dirty="0">
-                <a:latin typeface="Times New Roman" panose="02020603050405020304" pitchFamily="18" charset="0"/>
-              </a:rPr>
-              <a:t>.</a:t>
-            </a:r>
-          </a:p>
-        </p:txBody>
-      </p:sp>
-      <mc:AlternateContent xmlns:mc="http://schemas.openxmlformats.org/markup-compatibility/2006" xmlns:a14="http://schemas.microsoft.com/office/drawing/2010/main">
-        <mc:Choice Requires="a14">
-          <p:sp>
-            <p:nvSpPr>
-              <p:cNvPr id="8" name="TextBox 7">
-                <a:extLst>
-                  <a:ext uri="{FF2B5EF4-FFF2-40B4-BE49-F238E27FC236}">
-                    <a16:creationId xmlns:a16="http://schemas.microsoft.com/office/drawing/2014/main" id="{E35D3295-13D9-EC9C-3443-74D988A6F252}"/>
-                  </a:ext>
-                </a:extLst>
-              </p:cNvPr>
-              <p:cNvSpPr txBox="1"/>
-              <p:nvPr/>
-            </p:nvSpPr>
-            <p:spPr>
-              <a:xfrm>
-                <a:off x="3480954" y="3544088"/>
-                <a:ext cx="7315200" cy="1044581"/>
-              </a:xfrm>
-              <a:prstGeom prst="rect">
-                <a:avLst/>
-              </a:prstGeom>
-              <a:noFill/>
-            </p:spPr>
-            <p:txBody>
-              <a:bodyPr wrap="square">
-                <a:spAutoFit/>
-              </a:bodyPr>
-              <a:lstStyle/>
-              <a:p>
-                <a:pPr/>
-                <a14:m>
-                  <m:oMathPara xmlns:m="http://schemas.openxmlformats.org/officeDocument/2006/math">
-                    <m:oMathParaPr>
-                      <m:jc m:val="centerGroup"/>
-                    </m:oMathParaPr>
-                    <m:oMath xmlns:m="http://schemas.openxmlformats.org/officeDocument/2006/math">
-                      <m:r>
-                        <a:rPr lang="ru-RU" sz="2200" i="1" smtClean="0">
-                          <a:latin typeface="Cambria Math" panose="02040503050406030204" pitchFamily="18" charset="0"/>
-                        </a:rPr>
-                        <m:t>𝐹</m:t>
-                      </m:r>
-                      <m:d>
-                        <m:dPr>
-                          <m:ctrlPr>
-                            <a:rPr lang="ru-RU" sz="2200" i="1">
-                              <a:latin typeface="Cambria Math" panose="02040503050406030204" pitchFamily="18" charset="0"/>
-                            </a:rPr>
-                          </m:ctrlPr>
-                        </m:dPr>
-                        <m:e>
-                          <m:r>
-                            <a:rPr lang="ru-RU" sz="2200" i="1">
-                              <a:latin typeface="Cambria Math" panose="02040503050406030204" pitchFamily="18" charset="0"/>
-                            </a:rPr>
-                            <m:t>𝑘</m:t>
-                          </m:r>
-                        </m:e>
-                      </m:d>
-                      <m:r>
-                        <a:rPr lang="ru-RU" sz="2200" i="0">
-                          <a:latin typeface="Cambria Math" panose="02040503050406030204" pitchFamily="18" charset="0"/>
-                        </a:rPr>
-                        <m:t>=</m:t>
-                      </m:r>
-                      <m:nary>
-                        <m:naryPr>
-                          <m:chr m:val="∑"/>
-                          <m:limLoc m:val="undOvr"/>
-                          <m:ctrlPr>
-                            <a:rPr lang="ru-RU" sz="2200" i="1">
-                              <a:latin typeface="Cambria Math" panose="02040503050406030204" pitchFamily="18" charset="0"/>
-                            </a:rPr>
-                          </m:ctrlPr>
-                        </m:naryPr>
-                        <m:sub>
-                          <m:r>
-                            <a:rPr lang="ru-RU" sz="2200" i="1">
-                              <a:latin typeface="Cambria Math" panose="02040503050406030204" pitchFamily="18" charset="0"/>
-                            </a:rPr>
-                            <m:t>𝑛</m:t>
-                          </m:r>
-                          <m:r>
-                            <a:rPr lang="ru-RU" sz="2200" i="0">
-                              <a:latin typeface="Cambria Math" panose="02040503050406030204" pitchFamily="18" charset="0"/>
-                            </a:rPr>
-                            <m:t>=0</m:t>
-                          </m:r>
-                        </m:sub>
-                        <m:sup>
-                          <m:r>
-                            <a:rPr lang="ru-RU" sz="2200" i="1">
-                              <a:latin typeface="Cambria Math" panose="02040503050406030204" pitchFamily="18" charset="0"/>
-                            </a:rPr>
-                            <m:t>𝑁</m:t>
-                          </m:r>
-                          <m:r>
-                            <a:rPr lang="ru-RU" sz="2200" i="0">
-                              <a:latin typeface="Cambria Math" panose="02040503050406030204" pitchFamily="18" charset="0"/>
-                            </a:rPr>
-                            <m:t>−1</m:t>
-                          </m:r>
-                        </m:sup>
-                        <m:e>
-                          <m:r>
-                            <a:rPr lang="ru-RU" sz="2200" i="1">
-                              <a:latin typeface="Cambria Math" panose="02040503050406030204" pitchFamily="18" charset="0"/>
-                            </a:rPr>
-                            <m:t>𝑓</m:t>
-                          </m:r>
-                          <m:d>
-                            <m:dPr>
-                              <m:ctrlPr>
-                                <a:rPr lang="ru-RU" sz="2200" i="1">
-                                  <a:latin typeface="Cambria Math" panose="02040503050406030204" pitchFamily="18" charset="0"/>
-                                </a:rPr>
-                              </m:ctrlPr>
-                            </m:dPr>
-                            <m:e>
-                              <m:r>
-                                <a:rPr lang="ru-RU" sz="2200" i="1">
-                                  <a:latin typeface="Cambria Math" panose="02040503050406030204" pitchFamily="18" charset="0"/>
-                                </a:rPr>
-                                <m:t>𝑛</m:t>
-                              </m:r>
-                            </m:e>
-                          </m:d>
-                          <m:r>
-                            <a:rPr lang="ru-RU" sz="2200" i="0">
-                              <a:latin typeface="Cambria Math" panose="02040503050406030204" pitchFamily="18" charset="0"/>
-                            </a:rPr>
-                            <m:t>×</m:t>
-                          </m:r>
-                          <m:sSup>
-                            <m:sSupPr>
-                              <m:ctrlPr>
-                                <a:rPr lang="ru-RU" sz="2200" i="1">
-                                  <a:latin typeface="Cambria Math" panose="02040503050406030204" pitchFamily="18" charset="0"/>
-                                </a:rPr>
-                              </m:ctrlPr>
-                            </m:sSupPr>
-                            <m:e>
-                              <m:r>
-                                <a:rPr lang="ru-RU" sz="2200" i="1">
-                                  <a:latin typeface="Cambria Math" panose="02040503050406030204" pitchFamily="18" charset="0"/>
-                                </a:rPr>
-                                <m:t>𝑒</m:t>
-                              </m:r>
-                            </m:e>
-                            <m:sup>
-                              <m:r>
-                                <a:rPr lang="ru-RU" sz="2200" i="0">
-                                  <a:latin typeface="Cambria Math" panose="02040503050406030204" pitchFamily="18" charset="0"/>
-                                </a:rPr>
-                                <m:t>−</m:t>
-                              </m:r>
-                              <m:r>
-                                <a:rPr lang="ru-RU" sz="2200" i="1">
-                                  <a:latin typeface="Cambria Math" panose="02040503050406030204" pitchFamily="18" charset="0"/>
-                                </a:rPr>
-                                <m:t>𝑗</m:t>
-                              </m:r>
-                              <m:r>
-                                <a:rPr lang="ru-RU" sz="2200" i="0">
-                                  <a:latin typeface="Cambria Math" panose="02040503050406030204" pitchFamily="18" charset="0"/>
-                                </a:rPr>
-                                <m:t>×</m:t>
-                              </m:r>
-                              <m:f>
-                                <m:fPr>
-                                  <m:ctrlPr>
-                                    <a:rPr lang="ru-RU" sz="2200" i="1">
-                                      <a:latin typeface="Cambria Math" panose="02040503050406030204" pitchFamily="18" charset="0"/>
-                                    </a:rPr>
-                                  </m:ctrlPr>
-                                </m:fPr>
-                                <m:num>
-                                  <m:r>
-                                    <a:rPr lang="ru-RU" sz="2200" i="0">
-                                      <a:latin typeface="Cambria Math" panose="02040503050406030204" pitchFamily="18" charset="0"/>
-                                    </a:rPr>
-                                    <m:t>2</m:t>
-                                  </m:r>
-                                  <m:r>
-                                    <a:rPr lang="ru-RU" sz="2200" i="1">
-                                      <a:latin typeface="Cambria Math" panose="02040503050406030204" pitchFamily="18" charset="0"/>
-                                    </a:rPr>
-                                    <m:t>𝜋</m:t>
-                                  </m:r>
-                                </m:num>
-                                <m:den>
-                                  <m:r>
-                                    <a:rPr lang="ru-RU" sz="2200" i="1">
-                                      <a:latin typeface="Cambria Math" panose="02040503050406030204" pitchFamily="18" charset="0"/>
-                                    </a:rPr>
-                                    <m:t>𝑁</m:t>
-                                  </m:r>
-                                </m:den>
-                              </m:f>
-                              <m:r>
-                                <a:rPr lang="ru-RU" sz="2200" i="0">
-                                  <a:latin typeface="Cambria Math" panose="02040503050406030204" pitchFamily="18" charset="0"/>
-                                </a:rPr>
-                                <m:t>×</m:t>
-                              </m:r>
-                              <m:r>
-                                <a:rPr lang="ru-RU" sz="2200" i="1">
-                                  <a:latin typeface="Cambria Math" panose="02040503050406030204" pitchFamily="18" charset="0"/>
-                                </a:rPr>
-                                <m:t>𝑛</m:t>
-                              </m:r>
-                              <m:r>
-                                <a:rPr lang="ru-RU" sz="2200" i="0">
-                                  <a:latin typeface="Cambria Math" panose="02040503050406030204" pitchFamily="18" charset="0"/>
-                                </a:rPr>
-                                <m:t>×</m:t>
-                              </m:r>
-                              <m:r>
-                                <a:rPr lang="ru-RU" sz="2200" i="1">
-                                  <a:latin typeface="Cambria Math" panose="02040503050406030204" pitchFamily="18" charset="0"/>
-                                </a:rPr>
-                                <m:t>𝑘</m:t>
-                              </m:r>
-                            </m:sup>
-                          </m:sSup>
-                        </m:e>
-                      </m:nary>
-                      <m:r>
-                        <a:rPr lang="ru-RU" sz="2200" i="0">
-                          <a:latin typeface="Cambria Math" panose="02040503050406030204" pitchFamily="18" charset="0"/>
-                        </a:rPr>
-                        <m:t>,</m:t>
-                      </m:r>
-                      <m:r>
-                        <a:rPr lang="ru-RU" sz="2200" i="1">
-                          <a:latin typeface="Cambria Math" panose="02040503050406030204" pitchFamily="18" charset="0"/>
-                        </a:rPr>
-                        <m:t>𝑘</m:t>
-                      </m:r>
-                      <m:r>
-                        <a:rPr lang="ru-RU" sz="2200" i="0">
-                          <a:latin typeface="Cambria Math" panose="02040503050406030204" pitchFamily="18" charset="0"/>
-                        </a:rPr>
-                        <m:t>=0,…,</m:t>
-                      </m:r>
-                      <m:r>
-                        <a:rPr lang="ru-RU" sz="2200" i="1">
-                          <a:latin typeface="Cambria Math" panose="02040503050406030204" pitchFamily="18" charset="0"/>
-                        </a:rPr>
-                        <m:t>𝑁</m:t>
-                      </m:r>
-                      <m:r>
-                        <a:rPr lang="ru-RU" sz="2200" i="0">
-                          <a:latin typeface="Cambria Math" panose="02040503050406030204" pitchFamily="18" charset="0"/>
-                        </a:rPr>
-                        <m:t>−1</m:t>
-                      </m:r>
-                    </m:oMath>
-                  </m:oMathPara>
-                </a14:m>
-                <a:endParaRPr lang="ru-RU" sz="2200" dirty="0"/>
-              </a:p>
-            </p:txBody>
-          </p:sp>
-        </mc:Choice>
-        <mc:Fallback xmlns="">
-          <p:sp>
-            <p:nvSpPr>
-              <p:cNvPr id="8" name="TextBox 7">
-                <a:extLst>
-                  <a:ext uri="{FF2B5EF4-FFF2-40B4-BE49-F238E27FC236}">
-                    <a16:creationId xmlns:a16="http://schemas.microsoft.com/office/drawing/2014/main" id="{E35D3295-13D9-EC9C-3443-74D988A6F252}"/>
-                  </a:ext>
-                </a:extLst>
-              </p:cNvPr>
-              <p:cNvSpPr txBox="1">
-                <a:spLocks noRot="1" noChangeAspect="1" noMove="1" noResize="1" noEditPoints="1" noAdjustHandles="1" noChangeArrowheads="1" noChangeShapeType="1" noTextEdit="1"/>
-              </p:cNvSpPr>
-              <p:nvPr/>
-            </p:nvSpPr>
-            <p:spPr>
-              <a:xfrm>
-                <a:off x="3480954" y="3544088"/>
-                <a:ext cx="7315200" cy="1044581"/>
-              </a:xfrm>
-              <a:prstGeom prst="rect">
-                <a:avLst/>
-              </a:prstGeom>
-              <a:blipFill>
-                <a:blip r:embed="rId3"/>
-                <a:stretch>
-                  <a:fillRect/>
-                </a:stretch>
-              </a:blipFill>
-            </p:spPr>
-            <p:txBody>
-              <a:bodyPr/>
-              <a:lstStyle/>
-              <a:p>
-                <a:r>
-                  <a:rPr lang="ru-RU">
-                    <a:noFill/>
-                  </a:rPr>
-                  <a:t> </a:t>
-                </a:r>
-              </a:p>
-            </p:txBody>
-          </p:sp>
-        </mc:Fallback>
-      </mc:AlternateContent>
-    </p:spTree>
-  </p:cSld>
-  <p:clrMapOvr>
-    <a:masterClrMapping/>
-  </p:clrMapOvr>
-</p:sld>
-</file>
-
-<file path=ppt/slides/slide6.xml><?xml version="1.0" encoding="utf-8"?>
-<p:sld xmlns:a="http://schemas.openxmlformats.org/drawingml/2006/main" xmlns:r="http://schemas.openxmlformats.org/officeDocument/2006/relationships" xmlns:p="http://schemas.openxmlformats.org/presentationml/2006/main">
-  <p:cSld>
-    <p:spTree>
-      <p:nvGrpSpPr>
-        <p:cNvPr id="1" name=""/>
-        <p:cNvGrpSpPr/>
-        <p:nvPr/>
-      </p:nvGrpSpPr>
-      <p:grpSpPr>
-        <a:xfrm>
-          <a:off x="0" y="0"/>
-          <a:ext cx="0" cy="0"/>
-          <a:chOff x="0" y="0"/>
-          <a:chExt cx="0" cy="0"/>
-        </a:xfrm>
-      </p:grpSpPr>
-      <p:sp>
-        <p:nvSpPr>
-          <p:cNvPr id="2" name="Text 0"/>
-          <p:cNvSpPr/>
-          <p:nvPr/>
-        </p:nvSpPr>
-        <p:spPr>
-          <a:xfrm>
-            <a:off x="864037" y="1450896"/>
-            <a:ext cx="7776567" cy="771525"/>
-          </a:xfrm>
-          <a:prstGeom prst="rect">
-            <a:avLst/>
-          </a:prstGeom>
-          <a:noFill/>
-          <a:ln/>
-        </p:spPr>
-        <p:txBody>
-          <a:bodyPr wrap="none" lIns="0" tIns="0" rIns="0" bIns="0" rtlCol="0" anchor="t"/>
-          <a:lstStyle/>
-          <a:p>
-            <a:pPr marL="0" indent="0" algn="l">
-              <a:lnSpc>
-                <a:spcPts val="6050"/>
-              </a:lnSpc>
-              <a:buNone/>
-            </a:pPr>
-            <a:r>
-              <a:rPr lang="en-US" sz="4850" dirty="0">
-                <a:solidFill>
-                  <a:srgbClr val="030303"/>
-                </a:solidFill>
-                <a:latin typeface="Times New Roman" panose="02020603050405020304" pitchFamily="18" charset="0"/>
-                <a:ea typeface="DM Sans Semi Bold" pitchFamily="34" charset="-122"/>
-                <a:cs typeface="Times New Roman" panose="02020603050405020304" pitchFamily="18" charset="0"/>
-              </a:rPr>
-              <a:t>Пример вычисления ДПФ</a:t>
-            </a:r>
-            <a:endParaRPr lang="en-US" sz="4850" dirty="0"/>
-          </a:p>
-        </p:txBody>
-      </p:sp>
-      <p:sp>
-        <p:nvSpPr>
-          <p:cNvPr id="3" name="Text 1"/>
-          <p:cNvSpPr/>
-          <p:nvPr/>
-        </p:nvSpPr>
-        <p:spPr>
-          <a:xfrm>
-            <a:off x="864037" y="2716173"/>
-            <a:ext cx="12902327" cy="790099"/>
-          </a:xfrm>
-          <a:prstGeom prst="rect">
-            <a:avLst/>
-          </a:prstGeom>
-          <a:noFill/>
-          <a:ln/>
-        </p:spPr>
-        <p:txBody>
-          <a:bodyPr wrap="square" lIns="0" tIns="0" rIns="0" bIns="0" rtlCol="0" anchor="t"/>
-          <a:lstStyle/>
-          <a:p>
-            <a:pPr marL="0" indent="0" algn="l">
-              <a:lnSpc>
-                <a:spcPts val="3100"/>
-              </a:lnSpc>
-              <a:buNone/>
-            </a:pPr>
-            <a:r>
-              <a:rPr lang="en-US" sz="2200" dirty="0">
-                <a:latin typeface="Times New Roman" panose="02020603050405020304" pitchFamily="18" charset="0"/>
-              </a:rPr>
-              <a:t>Пусть задан </a:t>
-            </a:r>
-            <a:r>
-              <a:rPr lang="en-US" sz="2200" dirty="0" err="1">
-                <a:latin typeface="Times New Roman" panose="02020603050405020304" pitchFamily="18" charset="0"/>
-              </a:rPr>
-              <a:t>сигнал</a:t>
-            </a:r>
-            <a:r>
-              <a:rPr lang="en-US" sz="2200" dirty="0">
-                <a:latin typeface="Times New Roman" panose="02020603050405020304" pitchFamily="18" charset="0"/>
-              </a:rPr>
-              <a:t> S(n) = (3, 3, 2, 4, 1), N = 5. </a:t>
-            </a:r>
-            <a:r>
-              <a:rPr lang="ru-RU" sz="2200" dirty="0">
-                <a:latin typeface="Times New Roman" panose="02020603050405020304" pitchFamily="18" charset="0"/>
-              </a:rPr>
-              <a:t>Найдём его ДПФ</a:t>
-            </a:r>
-            <a:r>
-              <a:rPr lang="en-US" sz="2200" dirty="0">
-                <a:latin typeface="Times New Roman" panose="02020603050405020304" pitchFamily="18" charset="0"/>
-              </a:rPr>
-              <a:t>:</a:t>
-            </a:r>
-          </a:p>
-        </p:txBody>
-      </p:sp>
-      <p:sp>
-        <p:nvSpPr>
-          <p:cNvPr id="4" name="Text 2"/>
-          <p:cNvSpPr/>
-          <p:nvPr/>
-        </p:nvSpPr>
-        <p:spPr>
-          <a:xfrm>
-            <a:off x="864037" y="3818692"/>
-            <a:ext cx="12902327" cy="806529"/>
-          </a:xfrm>
-          <a:prstGeom prst="rect">
-            <a:avLst/>
-          </a:prstGeom>
-          <a:noFill/>
-          <a:ln/>
-        </p:spPr>
-        <p:txBody>
-          <a:bodyPr wrap="square" lIns="0" tIns="0" rIns="0" bIns="0" rtlCol="0" anchor="t"/>
-          <a:lstStyle/>
-          <a:p>
-            <a:pPr marL="0" indent="0" algn="l">
-              <a:lnSpc>
-                <a:spcPts val="3450"/>
-              </a:lnSpc>
-              <a:buNone/>
-            </a:pPr>
-            <a:endParaRPr lang="en-US" sz="2150" dirty="0"/>
-          </a:p>
-        </p:txBody>
-      </p:sp>
-      <p:sp>
-        <p:nvSpPr>
-          <p:cNvPr id="6" name="Text 3"/>
-          <p:cNvSpPr/>
-          <p:nvPr/>
-        </p:nvSpPr>
-        <p:spPr>
-          <a:xfrm>
-            <a:off x="864037" y="4937641"/>
-            <a:ext cx="12902327" cy="395049"/>
-          </a:xfrm>
-          <a:prstGeom prst="rect">
-            <a:avLst/>
-          </a:prstGeom>
-          <a:noFill/>
-          <a:ln/>
-        </p:spPr>
-        <p:txBody>
-          <a:bodyPr wrap="none" lIns="0" tIns="0" rIns="0" bIns="0" rtlCol="0" anchor="t"/>
-          <a:lstStyle/>
-          <a:p>
-            <a:pPr>
-              <a:lnSpc>
-                <a:spcPts val="3100"/>
-              </a:lnSpc>
-            </a:pPr>
-            <a:r>
-              <a:rPr lang="en-US" sz="2200" dirty="0">
-                <a:latin typeface="Times New Roman" panose="02020603050405020304" pitchFamily="18" charset="0"/>
-              </a:rPr>
-              <a:t>Вычисляя все компоненты, получаем результат ДПФ для S(n):</a:t>
-            </a:r>
-          </a:p>
-        </p:txBody>
-      </p:sp>
-      <mc:AlternateContent xmlns:mc="http://schemas.openxmlformats.org/markup-compatibility/2006" xmlns:a14="http://schemas.microsoft.com/office/drawing/2010/main">
-        <mc:Choice Requires="a14">
-          <p:sp>
-            <p:nvSpPr>
-              <p:cNvPr id="11" name="TextBox 10">
-                <a:extLst>
-                  <a:ext uri="{FF2B5EF4-FFF2-40B4-BE49-F238E27FC236}">
-                    <a16:creationId xmlns:a16="http://schemas.microsoft.com/office/drawing/2014/main" id="{FCF832C2-1031-6A41-CB61-F27904F416A1}"/>
-                  </a:ext>
-                </a:extLst>
-              </p:cNvPr>
-              <p:cNvSpPr txBox="1"/>
-              <p:nvPr/>
-            </p:nvSpPr>
-            <p:spPr>
-              <a:xfrm>
-                <a:off x="1962364" y="3294063"/>
-                <a:ext cx="9226193" cy="1370824"/>
-              </a:xfrm>
-              <a:prstGeom prst="rect">
-                <a:avLst/>
-              </a:prstGeom>
-              <a:noFill/>
-            </p:spPr>
-            <p:txBody>
-              <a:bodyPr wrap="square">
-                <a:spAutoFit/>
-              </a:bodyPr>
-              <a:lstStyle/>
-              <a:p>
-                <a:pPr/>
-                <a14:m>
-                  <m:oMathPara xmlns:m="http://schemas.openxmlformats.org/officeDocument/2006/math">
-                    <m:oMathParaPr>
-                      <m:jc m:val="centerGroup"/>
-                    </m:oMathParaPr>
-                    <m:oMath xmlns:m="http://schemas.openxmlformats.org/officeDocument/2006/math">
-                      <m:r>
-                        <a:rPr lang="ru-RU" i="1" smtClean="0">
-                          <a:latin typeface="Cambria Math" panose="02040503050406030204" pitchFamily="18" charset="0"/>
-                        </a:rPr>
-                        <m:t>𝐻</m:t>
-                      </m:r>
-                      <m:d>
-                        <m:dPr>
-                          <m:ctrlPr>
-                            <a:rPr lang="ru-RU" i="1" smtClean="0">
-                              <a:latin typeface="Cambria Math" panose="02040503050406030204" pitchFamily="18" charset="0"/>
-                            </a:rPr>
-                          </m:ctrlPr>
-                        </m:dPr>
-                        <m:e>
-                          <m:r>
-                            <a:rPr lang="ru-RU" i="0">
-                              <a:latin typeface="Cambria Math" panose="02040503050406030204" pitchFamily="18" charset="0"/>
-                            </a:rPr>
-                            <m:t>0</m:t>
-                          </m:r>
-                        </m:e>
-                      </m:d>
-                      <m:r>
-                        <a:rPr lang="ru-RU" i="0">
-                          <a:latin typeface="Cambria Math" panose="02040503050406030204" pitchFamily="18" charset="0"/>
-                        </a:rPr>
-                        <m:t>=</m:t>
-                      </m:r>
-                      <m:d>
-                        <m:dPr>
-                          <m:begChr m:val="["/>
-                          <m:endChr m:val="]"/>
-                          <m:ctrlPr>
-                            <a:rPr lang="ru-RU" i="1">
-                              <a:latin typeface="Cambria Math" panose="02040503050406030204" pitchFamily="18" charset="0"/>
-                            </a:rPr>
-                          </m:ctrlPr>
-                        </m:dPr>
-                        <m:e>
-                          <m:m>
-                            <m:mPr>
-                              <m:plcHide m:val="on"/>
-                              <m:mcs>
-                                <m:mc>
-                                  <m:mcPr>
-                                    <m:count m:val="5"/>
-                                    <m:mcJc m:val="center"/>
-                                  </m:mcPr>
-                                </m:mc>
-                              </m:mcs>
-                              <m:ctrlPr>
-                                <a:rPr lang="ru-RU" i="1">
-                                  <a:latin typeface="Cambria Math" panose="02040503050406030204" pitchFamily="18" charset="0"/>
-                                </a:rPr>
-                              </m:ctrlPr>
-                            </m:mPr>
-                            <m:mr>
-                              <m:e>
-                                <m:r>
-                                  <a:rPr lang="ru-RU" i="0">
-                                    <a:latin typeface="Cambria Math" panose="02040503050406030204" pitchFamily="18" charset="0"/>
-                                  </a:rPr>
-                                  <m:t>1</m:t>
-                                </m:r>
-                              </m:e>
-                              <m:e>
-                                <m:r>
-                                  <a:rPr lang="ru-RU" i="0">
-                                    <a:latin typeface="Cambria Math" panose="02040503050406030204" pitchFamily="18" charset="0"/>
-                                  </a:rPr>
-                                  <m:t>1</m:t>
-                                </m:r>
-                              </m:e>
-                              <m:e>
-                                <m:r>
-                                  <a:rPr lang="ru-RU" i="0">
-                                    <a:latin typeface="Cambria Math" panose="02040503050406030204" pitchFamily="18" charset="0"/>
-                                  </a:rPr>
-                                  <m:t>1</m:t>
-                                </m:r>
-                              </m:e>
-                              <m:e>
-                                <m:r>
-                                  <a:rPr lang="ru-RU" i="0">
-                                    <a:latin typeface="Cambria Math" panose="02040503050406030204" pitchFamily="18" charset="0"/>
-                                  </a:rPr>
-                                  <m:t>1</m:t>
-                                </m:r>
-                              </m:e>
-                              <m:e>
-                                <m:r>
-                                  <a:rPr lang="ru-RU" i="0">
-                                    <a:latin typeface="Cambria Math" panose="02040503050406030204" pitchFamily="18" charset="0"/>
-                                  </a:rPr>
-                                  <m:t>1</m:t>
-                                </m:r>
-                              </m:e>
-                            </m:mr>
-                            <m:mr>
-                              <m:e>
-                                <m:r>
-                                  <a:rPr lang="ru-RU" i="0">
-                                    <a:latin typeface="Cambria Math" panose="02040503050406030204" pitchFamily="18" charset="0"/>
-                                  </a:rPr>
-                                  <m:t>1</m:t>
-                                </m:r>
-                              </m:e>
-                              <m:e>
-                                <m:r>
-                                  <a:rPr lang="ru-RU" i="0">
-                                    <a:latin typeface="Cambria Math" panose="02040503050406030204" pitchFamily="18" charset="0"/>
-                                  </a:rPr>
-                                  <m:t>0.309−0.951</m:t>
-                                </m:r>
-                                <m:r>
-                                  <a:rPr lang="ru-RU" i="1">
-                                    <a:latin typeface="Cambria Math" panose="02040503050406030204" pitchFamily="18" charset="0"/>
-                                  </a:rPr>
-                                  <m:t>𝑖</m:t>
-                                </m:r>
-                              </m:e>
-                              <m:e>
-                                <m:r>
-                                  <a:rPr lang="ru-RU" i="0">
-                                    <a:latin typeface="Cambria Math" panose="02040503050406030204" pitchFamily="18" charset="0"/>
-                                  </a:rPr>
-                                  <m:t>−0.809−0.588</m:t>
-                                </m:r>
-                                <m:r>
-                                  <a:rPr lang="ru-RU" i="1">
-                                    <a:latin typeface="Cambria Math" panose="02040503050406030204" pitchFamily="18" charset="0"/>
-                                  </a:rPr>
-                                  <m:t>𝑖</m:t>
-                                </m:r>
-                              </m:e>
-                              <m:e>
-                                <m:r>
-                                  <a:rPr lang="ru-RU" i="0">
-                                    <a:latin typeface="Cambria Math" panose="02040503050406030204" pitchFamily="18" charset="0"/>
-                                  </a:rPr>
-                                  <m:t>−0.809+0.588</m:t>
-                                </m:r>
-                                <m:r>
-                                  <a:rPr lang="ru-RU" i="1">
-                                    <a:latin typeface="Cambria Math" panose="02040503050406030204" pitchFamily="18" charset="0"/>
-                                  </a:rPr>
-                                  <m:t>𝑖</m:t>
-                                </m:r>
-                              </m:e>
-                              <m:e>
-                                <m:r>
-                                  <a:rPr lang="ru-RU" i="0">
-                                    <a:latin typeface="Cambria Math" panose="02040503050406030204" pitchFamily="18" charset="0"/>
-                                  </a:rPr>
-                                  <m:t>0.309+0.951</m:t>
-                                </m:r>
-                                <m:r>
-                                  <a:rPr lang="ru-RU" i="1">
-                                    <a:latin typeface="Cambria Math" panose="02040503050406030204" pitchFamily="18" charset="0"/>
-                                  </a:rPr>
-                                  <m:t>𝑖</m:t>
-                                </m:r>
-                              </m:e>
-                            </m:mr>
-                            <m:mr>
-                              <m:e>
-                                <m:r>
-                                  <a:rPr lang="ru-RU" i="0">
-                                    <a:latin typeface="Cambria Math" panose="02040503050406030204" pitchFamily="18" charset="0"/>
-                                  </a:rPr>
-                                  <m:t>1</m:t>
-                                </m:r>
-                              </m:e>
-                              <m:e>
-                                <m:r>
-                                  <a:rPr lang="ru-RU" i="0">
-                                    <a:latin typeface="Cambria Math" panose="02040503050406030204" pitchFamily="18" charset="0"/>
-                                  </a:rPr>
-                                  <m:t>−0.809−0.588</m:t>
-                                </m:r>
-                                <m:r>
-                                  <a:rPr lang="ru-RU" i="1">
-                                    <a:latin typeface="Cambria Math" panose="02040503050406030204" pitchFamily="18" charset="0"/>
-                                  </a:rPr>
-                                  <m:t>𝑖</m:t>
-                                </m:r>
-                              </m:e>
-                              <m:e>
-                                <m:r>
-                                  <a:rPr lang="ru-RU" i="0">
-                                    <a:latin typeface="Cambria Math" panose="02040503050406030204" pitchFamily="18" charset="0"/>
-                                  </a:rPr>
-                                  <m:t>0.309+0.951</m:t>
-                                </m:r>
-                                <m:r>
-                                  <a:rPr lang="ru-RU" i="1">
-                                    <a:latin typeface="Cambria Math" panose="02040503050406030204" pitchFamily="18" charset="0"/>
-                                  </a:rPr>
-                                  <m:t>𝑖</m:t>
-                                </m:r>
-                              </m:e>
-                              <m:e>
-                                <m:r>
-                                  <a:rPr lang="ru-RU" i="0">
-                                    <a:latin typeface="Cambria Math" panose="02040503050406030204" pitchFamily="18" charset="0"/>
-                                  </a:rPr>
-                                  <m:t>0.309−0.951</m:t>
-                                </m:r>
-                                <m:r>
-                                  <a:rPr lang="ru-RU" i="1">
-                                    <a:latin typeface="Cambria Math" panose="02040503050406030204" pitchFamily="18" charset="0"/>
-                                  </a:rPr>
-                                  <m:t>𝑖</m:t>
-                                </m:r>
-                              </m:e>
-                              <m:e>
-                                <m:r>
-                                  <a:rPr lang="ru-RU" i="0">
-                                    <a:latin typeface="Cambria Math" panose="02040503050406030204" pitchFamily="18" charset="0"/>
-                                  </a:rPr>
-                                  <m:t>−0.809+0.588</m:t>
-                                </m:r>
-                                <m:r>
-                                  <a:rPr lang="ru-RU" i="1">
-                                    <a:latin typeface="Cambria Math" panose="02040503050406030204" pitchFamily="18" charset="0"/>
-                                  </a:rPr>
-                                  <m:t>𝑖</m:t>
-                                </m:r>
-                              </m:e>
-                            </m:mr>
-                            <m:mr>
-                              <m:e>
-                                <m:r>
-                                  <a:rPr lang="ru-RU" i="0">
-                                    <a:latin typeface="Cambria Math" panose="02040503050406030204" pitchFamily="18" charset="0"/>
-                                  </a:rPr>
-                                  <m:t>1</m:t>
-                                </m:r>
-                              </m:e>
-                              <m:e>
-                                <m:r>
-                                  <a:rPr lang="ru-RU" i="0">
-                                    <a:latin typeface="Cambria Math" panose="02040503050406030204" pitchFamily="18" charset="0"/>
-                                  </a:rPr>
-                                  <m:t>−0.809+0.588</m:t>
-                                </m:r>
-                                <m:r>
-                                  <a:rPr lang="ru-RU" i="1">
-                                    <a:latin typeface="Cambria Math" panose="02040503050406030204" pitchFamily="18" charset="0"/>
-                                  </a:rPr>
-                                  <m:t>𝑖</m:t>
-                                </m:r>
-                              </m:e>
-                              <m:e>
-                                <m:r>
-                                  <a:rPr lang="ru-RU" i="0">
-                                    <a:latin typeface="Cambria Math" panose="02040503050406030204" pitchFamily="18" charset="0"/>
-                                  </a:rPr>
-                                  <m:t>0.309−0.951</m:t>
-                                </m:r>
-                                <m:r>
-                                  <a:rPr lang="ru-RU" i="1">
-                                    <a:latin typeface="Cambria Math" panose="02040503050406030204" pitchFamily="18" charset="0"/>
-                                  </a:rPr>
-                                  <m:t>𝑖</m:t>
-                                </m:r>
-                              </m:e>
-                              <m:e>
-                                <m:r>
-                                  <a:rPr lang="ru-RU" i="0">
-                                    <a:latin typeface="Cambria Math" panose="02040503050406030204" pitchFamily="18" charset="0"/>
-                                  </a:rPr>
-                                  <m:t>0.309+0.951</m:t>
-                                </m:r>
-                                <m:r>
-                                  <a:rPr lang="ru-RU" i="1">
-                                    <a:latin typeface="Cambria Math" panose="02040503050406030204" pitchFamily="18" charset="0"/>
-                                  </a:rPr>
-                                  <m:t>𝑖</m:t>
-                                </m:r>
-                              </m:e>
-                              <m:e>
-                                <m:r>
-                                  <a:rPr lang="ru-RU" i="0">
-                                    <a:latin typeface="Cambria Math" panose="02040503050406030204" pitchFamily="18" charset="0"/>
-                                  </a:rPr>
-                                  <m:t>−0.809−0.588</m:t>
-                                </m:r>
-                                <m:r>
-                                  <a:rPr lang="ru-RU" i="1">
-                                    <a:latin typeface="Cambria Math" panose="02040503050406030204" pitchFamily="18" charset="0"/>
-                                  </a:rPr>
-                                  <m:t>𝑖</m:t>
-                                </m:r>
-                              </m:e>
-                            </m:mr>
-                            <m:mr>
-                              <m:e>
-                                <m:r>
-                                  <a:rPr lang="ru-RU" i="0">
-                                    <a:latin typeface="Cambria Math" panose="02040503050406030204" pitchFamily="18" charset="0"/>
-                                  </a:rPr>
-                                  <m:t>1</m:t>
-                                </m:r>
-                              </m:e>
-                              <m:e>
-                                <m:r>
-                                  <a:rPr lang="ru-RU" i="0">
-                                    <a:latin typeface="Cambria Math" panose="02040503050406030204" pitchFamily="18" charset="0"/>
-                                  </a:rPr>
-                                  <m:t>0.309+0.951</m:t>
-                                </m:r>
-                                <m:r>
-                                  <a:rPr lang="ru-RU" i="1">
-                                    <a:latin typeface="Cambria Math" panose="02040503050406030204" pitchFamily="18" charset="0"/>
-                                  </a:rPr>
-                                  <m:t>𝑖</m:t>
-                                </m:r>
-                              </m:e>
-                              <m:e>
-                                <m:r>
-                                  <a:rPr lang="ru-RU" i="0">
-                                    <a:latin typeface="Cambria Math" panose="02040503050406030204" pitchFamily="18" charset="0"/>
-                                  </a:rPr>
-                                  <m:t>−0.809+0.588</m:t>
-                                </m:r>
-                                <m:r>
-                                  <a:rPr lang="ru-RU" i="1">
-                                    <a:latin typeface="Cambria Math" panose="02040503050406030204" pitchFamily="18" charset="0"/>
-                                  </a:rPr>
-                                  <m:t>𝑖</m:t>
-                                </m:r>
-                              </m:e>
-                              <m:e>
-                                <m:r>
-                                  <a:rPr lang="ru-RU" i="0">
-                                    <a:latin typeface="Cambria Math" panose="02040503050406030204" pitchFamily="18" charset="0"/>
-                                  </a:rPr>
-                                  <m:t>−0.809−0.588</m:t>
-                                </m:r>
-                                <m:r>
-                                  <a:rPr lang="ru-RU" i="1">
-                                    <a:latin typeface="Cambria Math" panose="02040503050406030204" pitchFamily="18" charset="0"/>
-                                  </a:rPr>
-                                  <m:t>𝑖</m:t>
-                                </m:r>
-                              </m:e>
-                              <m:e>
-                                <m:r>
-                                  <a:rPr lang="ru-RU" i="0">
-                                    <a:latin typeface="Cambria Math" panose="02040503050406030204" pitchFamily="18" charset="0"/>
-                                  </a:rPr>
-                                  <m:t>0.309−0.951</m:t>
-                                </m:r>
-                                <m:r>
-                                  <a:rPr lang="ru-RU" i="1">
-                                    <a:latin typeface="Cambria Math" panose="02040503050406030204" pitchFamily="18" charset="0"/>
-                                  </a:rPr>
-                                  <m:t>𝑖</m:t>
-                                </m:r>
-                              </m:e>
-                            </m:mr>
-                          </m:m>
-                        </m:e>
-                      </m:d>
-                    </m:oMath>
-                  </m:oMathPara>
-                </a14:m>
-                <a:endParaRPr lang="ru-RU" dirty="0"/>
-              </a:p>
-            </p:txBody>
-          </p:sp>
-        </mc:Choice>
-        <mc:Fallback xmlns="">
-          <p:sp>
-            <p:nvSpPr>
-              <p:cNvPr id="11" name="TextBox 10">
-                <a:extLst>
-                  <a:ext uri="{FF2B5EF4-FFF2-40B4-BE49-F238E27FC236}">
-                    <a16:creationId xmlns:a16="http://schemas.microsoft.com/office/drawing/2014/main" id="{FCF832C2-1031-6A41-CB61-F27904F416A1}"/>
-                  </a:ext>
-                </a:extLst>
-              </p:cNvPr>
-              <p:cNvSpPr txBox="1">
-                <a:spLocks noRot="1" noChangeAspect="1" noMove="1" noResize="1" noEditPoints="1" noAdjustHandles="1" noChangeArrowheads="1" noChangeShapeType="1" noTextEdit="1"/>
-              </p:cNvSpPr>
-              <p:nvPr/>
-            </p:nvSpPr>
-            <p:spPr>
-              <a:xfrm>
-                <a:off x="1962364" y="3294063"/>
-                <a:ext cx="9226193" cy="1370824"/>
-              </a:xfrm>
-              <a:prstGeom prst="rect">
-                <a:avLst/>
-              </a:prstGeom>
-              <a:blipFill>
-                <a:blip r:embed="rId3"/>
-                <a:stretch>
-                  <a:fillRect/>
-                </a:stretch>
-              </a:blipFill>
-            </p:spPr>
-            <p:txBody>
-              <a:bodyPr/>
-              <a:lstStyle/>
-              <a:p>
-                <a:r>
-                  <a:rPr lang="ru-RU">
-                    <a:noFill/>
-                  </a:rPr>
-                  <a:t> </a:t>
-                </a:r>
-              </a:p>
-            </p:txBody>
-          </p:sp>
-        </mc:Fallback>
-      </mc:AlternateContent>
-      <p:pic>
-        <p:nvPicPr>
-          <p:cNvPr id="17" name="Рисунок 16">
-            <a:extLst>
-              <a:ext uri="{FF2B5EF4-FFF2-40B4-BE49-F238E27FC236}">
-                <a16:creationId xmlns:a16="http://schemas.microsoft.com/office/drawing/2014/main" id="{0A012574-FBEC-49F5-8BFE-2DAFC9D7C1E9}"/>
-              </a:ext>
-            </a:extLst>
-          </p:cNvPr>
-          <p:cNvPicPr>
-            <a:picLocks noChangeAspect="1"/>
-          </p:cNvPicPr>
-          <p:nvPr/>
-        </p:nvPicPr>
-        <p:blipFill>
-          <a:blip r:embed="rId4"/>
-          <a:stretch>
-            <a:fillRect/>
-          </a:stretch>
-        </p:blipFill>
-        <p:spPr>
-          <a:xfrm>
-            <a:off x="2941352" y="5624680"/>
-            <a:ext cx="7599934" cy="413436"/>
-          </a:xfrm>
-          <a:prstGeom prst="rect">
-            <a:avLst/>
-          </a:prstGeom>
-        </p:spPr>
-      </p:pic>
-    </p:spTree>
-  </p:cSld>
-  <p:clrMapOvr>
-    <a:masterClrMapping/>
-  </p:clrMapOvr>
-</p:sld>
-</file>
-
-<file path=ppt/slides/slide7.xml><?xml version="1.0" encoding="utf-8"?>
-<p:sld xmlns:a="http://schemas.openxmlformats.org/drawingml/2006/main" xmlns:r="http://schemas.openxmlformats.org/officeDocument/2006/relationships" xmlns:p="http://schemas.openxmlformats.org/presentationml/2006/main">
-  <p:cSld>
-    <p:spTree>
-      <p:nvGrpSpPr>
-        <p:cNvPr id="1" name=""/>
-        <p:cNvGrpSpPr/>
-        <p:nvPr/>
-      </p:nvGrpSpPr>
-      <p:grpSpPr>
-        <a:xfrm>
-          <a:off x="0" y="0"/>
-          <a:ext cx="0" cy="0"/>
-          <a:chOff x="0" y="0"/>
-          <a:chExt cx="0" cy="0"/>
-        </a:xfrm>
-      </p:grpSpPr>
-      <p:sp>
-        <p:nvSpPr>
-          <p:cNvPr id="2" name="Text 0"/>
-          <p:cNvSpPr/>
-          <p:nvPr/>
-        </p:nvSpPr>
-        <p:spPr>
-          <a:xfrm>
-            <a:off x="864037" y="770070"/>
-            <a:ext cx="8669536" cy="771525"/>
-          </a:xfrm>
-          <a:prstGeom prst="rect">
-            <a:avLst/>
-          </a:prstGeom>
-          <a:noFill/>
-          <a:ln/>
-        </p:spPr>
-        <p:txBody>
-          <a:bodyPr wrap="none" lIns="0" tIns="0" rIns="0" bIns="0" rtlCol="0" anchor="t"/>
-          <a:lstStyle/>
-          <a:p>
-            <a:pPr marL="0" indent="0" algn="l">
-              <a:lnSpc>
-                <a:spcPts val="6050"/>
-              </a:lnSpc>
-              <a:buNone/>
-            </a:pPr>
-            <a:r>
-              <a:rPr lang="en-US" sz="4850" dirty="0">
-                <a:solidFill>
-                  <a:srgbClr val="030303"/>
-                </a:solidFill>
-                <a:latin typeface="Times New Roman" panose="02020603050405020304" pitchFamily="18" charset="0"/>
-                <a:ea typeface="DM Sans Semi Bold" pitchFamily="34" charset="-122"/>
-                <a:cs typeface="Times New Roman" panose="02020603050405020304" pitchFamily="18" charset="0"/>
-              </a:rPr>
-              <a:t>Пример с матрицей Тёплица</a:t>
-            </a:r>
-            <a:endParaRPr lang="en-US" sz="4850" dirty="0"/>
-          </a:p>
-        </p:txBody>
-      </p:sp>
-      <p:sp>
-        <p:nvSpPr>
-          <p:cNvPr id="4" name="Text 2"/>
-          <p:cNvSpPr/>
-          <p:nvPr/>
-        </p:nvSpPr>
-        <p:spPr>
-          <a:xfrm>
-            <a:off x="864037" y="4165044"/>
-            <a:ext cx="12902327" cy="426125"/>
-          </a:xfrm>
-          <a:prstGeom prst="rect">
-            <a:avLst/>
-          </a:prstGeom>
-          <a:noFill/>
-          <a:ln/>
-        </p:spPr>
-        <p:txBody>
-          <a:bodyPr wrap="none" lIns="0" tIns="0" rIns="0" bIns="0" rtlCol="0" anchor="t"/>
-          <a:lstStyle/>
-          <a:p>
-            <a:pPr marL="0" indent="0" algn="l">
-              <a:lnSpc>
-                <a:spcPts val="3450"/>
-              </a:lnSpc>
-              <a:buNone/>
-            </a:pPr>
-            <a:endParaRPr lang="en-US" sz="2150" dirty="0"/>
-          </a:p>
-        </p:txBody>
-      </p:sp>
-      <p:sp>
-        <p:nvSpPr>
-          <p:cNvPr id="7" name="Text 4"/>
-          <p:cNvSpPr/>
-          <p:nvPr/>
-        </p:nvSpPr>
-        <p:spPr>
-          <a:xfrm>
-            <a:off x="864037" y="6006108"/>
-            <a:ext cx="12902327" cy="426125"/>
-          </a:xfrm>
-          <a:prstGeom prst="rect">
-            <a:avLst/>
-          </a:prstGeom>
-          <a:noFill/>
-          <a:ln/>
-        </p:spPr>
-        <p:txBody>
-          <a:bodyPr wrap="none" lIns="0" tIns="0" rIns="0" bIns="0" rtlCol="0" anchor="t"/>
-          <a:lstStyle/>
-          <a:p>
-            <a:pPr marL="0" indent="0" algn="l">
-              <a:lnSpc>
-                <a:spcPts val="3450"/>
-              </a:lnSpc>
-              <a:buNone/>
-            </a:pPr>
-            <a:endParaRPr lang="en-US" sz="2150" dirty="0"/>
-          </a:p>
-        </p:txBody>
-      </p:sp>
-      <mc:AlternateContent xmlns:mc="http://schemas.openxmlformats.org/markup-compatibility/2006" xmlns:a14="http://schemas.microsoft.com/office/drawing/2010/main">
-        <mc:Choice Requires="a14">
-          <p:sp>
-            <p:nvSpPr>
-              <p:cNvPr id="10" name="TextBox 9">
-                <a:extLst>
-                  <a:ext uri="{FF2B5EF4-FFF2-40B4-BE49-F238E27FC236}">
-                    <a16:creationId xmlns:a16="http://schemas.microsoft.com/office/drawing/2014/main" id="{E71E028E-6F49-3C0D-2045-F2885BB531B3}"/>
-                  </a:ext>
-                </a:extLst>
-              </p:cNvPr>
-              <p:cNvSpPr txBox="1"/>
-              <p:nvPr/>
-            </p:nvSpPr>
-            <p:spPr>
-              <a:xfrm>
-                <a:off x="1177522" y="2312098"/>
-                <a:ext cx="11753555" cy="2657972"/>
-              </a:xfrm>
-              <a:prstGeom prst="rect">
-                <a:avLst/>
-              </a:prstGeom>
-              <a:noFill/>
-            </p:spPr>
-            <p:txBody>
-              <a:bodyPr wrap="square">
-                <a:spAutoFit/>
-              </a:bodyPr>
-              <a:lstStyle/>
-              <a:p>
-                <a:pPr indent="450215" algn="just">
-                  <a:lnSpc>
-                    <a:spcPct val="150000"/>
-                  </a:lnSpc>
-                  <a:buNone/>
-                </a:pPr>
-                <a:r>
-                  <a:rPr lang="ru-RU" sz="2800" spc="5" dirty="0">
-                    <a:effectLst/>
-                    <a:latin typeface="Times New Roman" panose="02020603050405020304" pitchFamily="18" charset="0"/>
-                    <a:ea typeface="Calibri" panose="020F0502020204030204" pitchFamily="34" charset="0"/>
-                  </a:rPr>
-                  <a:t>Дана произвольная матрица </a:t>
-                </a:r>
-                <a:r>
-                  <a:rPr lang="ru-RU" sz="2800" spc="5" dirty="0" err="1">
-                    <a:effectLst/>
-                    <a:latin typeface="Times New Roman" panose="02020603050405020304" pitchFamily="18" charset="0"/>
-                    <a:ea typeface="Calibri" panose="020F0502020204030204" pitchFamily="34" charset="0"/>
-                  </a:rPr>
-                  <a:t>Тёплица</a:t>
-                </a:r>
-                <a:r>
-                  <a:rPr lang="ru-RU" sz="2800" spc="5" dirty="0">
-                    <a:effectLst/>
-                    <a:latin typeface="Times New Roman" panose="02020603050405020304" pitchFamily="18" charset="0"/>
-                    <a:ea typeface="Calibri" panose="020F0502020204030204" pitchFamily="34" charset="0"/>
-                  </a:rPr>
-                  <a:t>:</a:t>
-                </a:r>
-              </a:p>
-              <a:p>
-                <a:pPr indent="450215" algn="just">
-                  <a:lnSpc>
-                    <a:spcPct val="150000"/>
-                  </a:lnSpc>
-                  <a:buNone/>
-                </a:pPr>
-                <a14:m>
-                  <m:oMathPara xmlns:m="http://schemas.openxmlformats.org/officeDocument/2006/math">
-                    <m:oMathParaPr>
-                      <m:jc m:val="centerGroup"/>
-                    </m:oMathParaPr>
-                    <m:oMath xmlns:m="http://schemas.openxmlformats.org/officeDocument/2006/math">
-                      <m:r>
-                        <a:rPr lang="en-US" sz="1800" i="1" spc="5">
-                          <a:effectLst/>
-                          <a:latin typeface="Cambria Math" panose="02040503050406030204" pitchFamily="18" charset="0"/>
-                          <a:ea typeface="Times New Roman" panose="02020603050405020304" pitchFamily="18" charset="0"/>
-                        </a:rPr>
-                        <m:t>𝑇</m:t>
-                      </m:r>
-                      <m:r>
-                        <a:rPr lang="en-US" sz="1800" i="1" spc="5">
-                          <a:effectLst/>
-                          <a:latin typeface="Cambria Math" panose="02040503050406030204" pitchFamily="18" charset="0"/>
-                          <a:ea typeface="Times New Roman" panose="02020603050405020304" pitchFamily="18" charset="0"/>
-                        </a:rPr>
-                        <m:t>=</m:t>
-                      </m:r>
-                      <m:d>
-                        <m:dPr>
-                          <m:begChr m:val="["/>
-                          <m:endChr m:val="]"/>
-                          <m:ctrlPr>
-                            <a:rPr lang="ru-RU" sz="1800" i="1" spc="5">
-                              <a:effectLst/>
-                              <a:latin typeface="Cambria Math" panose="02040503050406030204" pitchFamily="18" charset="0"/>
-                              <a:ea typeface="Calibri" panose="020F0502020204030204" pitchFamily="34" charset="0"/>
-                            </a:rPr>
-                          </m:ctrlPr>
-                        </m:dPr>
-                        <m:e>
-                          <m:m>
-                            <m:mPr>
-                              <m:mcs>
-                                <m:mc>
-                                  <m:mcPr>
-                                    <m:count m:val="5"/>
-                                    <m:mcJc m:val="center"/>
-                                  </m:mcPr>
-                                </m:mc>
-                              </m:mcs>
-                              <m:ctrlPr>
-                                <a:rPr lang="ru-RU" sz="1800" i="1" spc="5">
-                                  <a:effectLst/>
-                                  <a:latin typeface="Cambria Math" panose="02040503050406030204" pitchFamily="18" charset="0"/>
-                                  <a:ea typeface="Calibri" panose="020F0502020204030204" pitchFamily="34" charset="0"/>
-                                </a:rPr>
-                              </m:ctrlPr>
-                            </m:mPr>
-                            <m:mr>
-                              <m:e>
-                                <m:r>
-                                  <a:rPr lang="ru-RU" sz="1800" i="1" spc="5">
-                                    <a:effectLst/>
-                                    <a:latin typeface="Cambria Math" panose="02040503050406030204" pitchFamily="18" charset="0"/>
-                                    <a:ea typeface="Calibri" panose="020F0502020204030204" pitchFamily="34" charset="0"/>
-                                  </a:rPr>
-                                  <m:t>2</m:t>
-                                </m:r>
-                              </m:e>
-                              <m:e>
-                                <m:r>
-                                  <a:rPr lang="ru-RU" sz="1800" i="1" spc="5">
-                                    <a:effectLst/>
-                                    <a:latin typeface="Cambria Math" panose="02040503050406030204" pitchFamily="18" charset="0"/>
-                                    <a:ea typeface="Calibri" panose="020F0502020204030204" pitchFamily="34" charset="0"/>
-                                  </a:rPr>
-                                  <m:t>0,5</m:t>
-                                </m:r>
-                              </m:e>
-                              <m:e>
-                                <m:r>
-                                  <a:rPr lang="ru-RU" sz="1800" i="1" spc="5">
-                                    <a:effectLst/>
-                                    <a:latin typeface="Cambria Math" panose="02040503050406030204" pitchFamily="18" charset="0"/>
-                                    <a:ea typeface="Cambria Math" panose="02040503050406030204" pitchFamily="18" charset="0"/>
-                                    <a:cs typeface="Cambria Math" panose="02040503050406030204" pitchFamily="18" charset="0"/>
-                                  </a:rPr>
-                                  <m:t>0</m:t>
-                                </m:r>
-                              </m:e>
-                              <m:e>
-                                <m:r>
-                                  <a:rPr lang="ru-RU" sz="1800" i="1" spc="5">
-                                    <a:effectLst/>
-                                    <a:latin typeface="Cambria Math" panose="02040503050406030204" pitchFamily="18" charset="0"/>
-                                    <a:ea typeface="Cambria Math" panose="02040503050406030204" pitchFamily="18" charset="0"/>
-                                    <a:cs typeface="Cambria Math" panose="02040503050406030204" pitchFamily="18" charset="0"/>
-                                  </a:rPr>
-                                  <m:t>0</m:t>
-                                </m:r>
-                              </m:e>
-                              <m:e>
-                                <m:r>
-                                  <a:rPr lang="ru-RU" sz="1800" i="1" spc="5">
-                                    <a:effectLst/>
-                                    <a:latin typeface="Cambria Math" panose="02040503050406030204" pitchFamily="18" charset="0"/>
-                                    <a:ea typeface="Cambria Math" panose="02040503050406030204" pitchFamily="18" charset="0"/>
-                                    <a:cs typeface="Cambria Math" panose="02040503050406030204" pitchFamily="18" charset="0"/>
-                                  </a:rPr>
-                                  <m:t>0,5</m:t>
-                                </m:r>
-                              </m:e>
-                            </m:mr>
-                            <m:mr>
-                              <m:e>
-                                <m:r>
-                                  <a:rPr lang="ru-RU" sz="1800" i="1" spc="5">
-                                    <a:effectLst/>
-                                    <a:latin typeface="Cambria Math" panose="02040503050406030204" pitchFamily="18" charset="0"/>
-                                    <a:ea typeface="Calibri" panose="020F0502020204030204" pitchFamily="34" charset="0"/>
-                                  </a:rPr>
-                                  <m:t>0.5</m:t>
-                                </m:r>
-                              </m:e>
-                              <m:e>
-                                <m:r>
-                                  <a:rPr lang="ru-RU" sz="1800" i="1" spc="5">
-                                    <a:effectLst/>
-                                    <a:latin typeface="Cambria Math" panose="02040503050406030204" pitchFamily="18" charset="0"/>
-                                    <a:ea typeface="Calibri" panose="020F0502020204030204" pitchFamily="34" charset="0"/>
-                                  </a:rPr>
-                                  <m:t>2</m:t>
-                                </m:r>
-                              </m:e>
-                              <m:e>
-                                <m:r>
-                                  <a:rPr lang="ru-RU" sz="1800" i="1" spc="5">
-                                    <a:effectLst/>
-                                    <a:latin typeface="Cambria Math" panose="02040503050406030204" pitchFamily="18" charset="0"/>
-                                    <a:ea typeface="Cambria Math" panose="02040503050406030204" pitchFamily="18" charset="0"/>
-                                    <a:cs typeface="Cambria Math" panose="02040503050406030204" pitchFamily="18" charset="0"/>
-                                  </a:rPr>
-                                  <m:t>0.5</m:t>
-                                </m:r>
-                              </m:e>
-                              <m:e>
-                                <m:r>
-                                  <a:rPr lang="ru-RU" sz="1800" i="1" spc="5">
-                                    <a:effectLst/>
-                                    <a:latin typeface="Cambria Math" panose="02040503050406030204" pitchFamily="18" charset="0"/>
-                                    <a:ea typeface="Cambria Math" panose="02040503050406030204" pitchFamily="18" charset="0"/>
-                                    <a:cs typeface="Cambria Math" panose="02040503050406030204" pitchFamily="18" charset="0"/>
-                                  </a:rPr>
-                                  <m:t>0</m:t>
-                                </m:r>
-                              </m:e>
-                              <m:e>
-                                <m:r>
-                                  <a:rPr lang="ru-RU" sz="1800" i="1" spc="5">
-                                    <a:effectLst/>
-                                    <a:latin typeface="Cambria Math" panose="02040503050406030204" pitchFamily="18" charset="0"/>
-                                    <a:ea typeface="Cambria Math" panose="02040503050406030204" pitchFamily="18" charset="0"/>
-                                    <a:cs typeface="Cambria Math" panose="02040503050406030204" pitchFamily="18" charset="0"/>
-                                  </a:rPr>
-                                  <m:t>0</m:t>
-                                </m:r>
-                              </m:e>
-                            </m:mr>
-                            <m:mr>
-                              <m:e>
-                                <m:r>
-                                  <a:rPr lang="ru-RU" sz="1800" i="1" spc="5">
-                                    <a:effectLst/>
-                                    <a:latin typeface="Cambria Math" panose="02040503050406030204" pitchFamily="18" charset="0"/>
-                                    <a:ea typeface="Cambria Math" panose="02040503050406030204" pitchFamily="18" charset="0"/>
-                                    <a:cs typeface="Cambria Math" panose="02040503050406030204" pitchFamily="18" charset="0"/>
-                                  </a:rPr>
-                                  <m:t>0</m:t>
-                                </m:r>
-                              </m:e>
-                              <m:e>
-                                <m:r>
-                                  <a:rPr lang="ru-RU" sz="1800" i="1" spc="5">
-                                    <a:effectLst/>
-                                    <a:latin typeface="Cambria Math" panose="02040503050406030204" pitchFamily="18" charset="0"/>
-                                    <a:ea typeface="Cambria Math" panose="02040503050406030204" pitchFamily="18" charset="0"/>
-                                    <a:cs typeface="Cambria Math" panose="02040503050406030204" pitchFamily="18" charset="0"/>
-                                  </a:rPr>
-                                  <m:t>0.5</m:t>
-                                </m:r>
-                              </m:e>
-                              <m:e>
-                                <m:r>
-                                  <a:rPr lang="ru-RU" sz="1800" i="1" spc="5">
-                                    <a:effectLst/>
-                                    <a:latin typeface="Cambria Math" panose="02040503050406030204" pitchFamily="18" charset="0"/>
-                                    <a:ea typeface="Cambria Math" panose="02040503050406030204" pitchFamily="18" charset="0"/>
-                                    <a:cs typeface="Cambria Math" panose="02040503050406030204" pitchFamily="18" charset="0"/>
-                                  </a:rPr>
-                                  <m:t>2</m:t>
-                                </m:r>
-                              </m:e>
-                              <m:e>
-                                <m:r>
-                                  <a:rPr lang="ru-RU" sz="1800" i="1" spc="5">
-                                    <a:effectLst/>
-                                    <a:latin typeface="Cambria Math" panose="02040503050406030204" pitchFamily="18" charset="0"/>
-                                    <a:ea typeface="Cambria Math" panose="02040503050406030204" pitchFamily="18" charset="0"/>
-                                    <a:cs typeface="Cambria Math" panose="02040503050406030204" pitchFamily="18" charset="0"/>
-                                  </a:rPr>
-                                  <m:t>0.5</m:t>
-                                </m:r>
-                              </m:e>
-                              <m:e>
-                                <m:r>
-                                  <a:rPr lang="ru-RU" sz="1800" i="1" spc="5">
-                                    <a:effectLst/>
-                                    <a:latin typeface="Cambria Math" panose="02040503050406030204" pitchFamily="18" charset="0"/>
-                                    <a:ea typeface="Cambria Math" panose="02040503050406030204" pitchFamily="18" charset="0"/>
-                                    <a:cs typeface="Cambria Math" panose="02040503050406030204" pitchFamily="18" charset="0"/>
-                                  </a:rPr>
-                                  <m:t>0</m:t>
-                                </m:r>
-                              </m:e>
-                            </m:mr>
-                            <m:mr>
-                              <m:e>
-                                <m:r>
-                                  <a:rPr lang="ru-RU" sz="1800" i="1" spc="5">
-                                    <a:effectLst/>
-                                    <a:latin typeface="Cambria Math" panose="02040503050406030204" pitchFamily="18" charset="0"/>
-                                    <a:ea typeface="Cambria Math" panose="02040503050406030204" pitchFamily="18" charset="0"/>
-                                    <a:cs typeface="Cambria Math" panose="02040503050406030204" pitchFamily="18" charset="0"/>
-                                  </a:rPr>
-                                  <m:t>0</m:t>
-                                </m:r>
-                              </m:e>
-                              <m:e>
-                                <m:r>
-                                  <a:rPr lang="ru-RU" sz="1800" i="1" spc="5">
-                                    <a:effectLst/>
-                                    <a:latin typeface="Cambria Math" panose="02040503050406030204" pitchFamily="18" charset="0"/>
-                                    <a:ea typeface="Cambria Math" panose="02040503050406030204" pitchFamily="18" charset="0"/>
-                                    <a:cs typeface="Cambria Math" panose="02040503050406030204" pitchFamily="18" charset="0"/>
-                                  </a:rPr>
-                                  <m:t>0</m:t>
-                                </m:r>
-                              </m:e>
-                              <m:e>
-                                <m:r>
-                                  <a:rPr lang="ru-RU" sz="1800" i="1" spc="5">
-                                    <a:effectLst/>
-                                    <a:latin typeface="Cambria Math" panose="02040503050406030204" pitchFamily="18" charset="0"/>
-                                    <a:ea typeface="Cambria Math" panose="02040503050406030204" pitchFamily="18" charset="0"/>
-                                    <a:cs typeface="Cambria Math" panose="02040503050406030204" pitchFamily="18" charset="0"/>
-                                  </a:rPr>
-                                  <m:t>0.5</m:t>
-                                </m:r>
-                              </m:e>
-                              <m:e>
-                                <m:r>
-                                  <a:rPr lang="ru-RU" sz="1800" i="1" spc="5">
-                                    <a:effectLst/>
-                                    <a:latin typeface="Cambria Math" panose="02040503050406030204" pitchFamily="18" charset="0"/>
-                                    <a:ea typeface="Cambria Math" panose="02040503050406030204" pitchFamily="18" charset="0"/>
-                                    <a:cs typeface="Cambria Math" panose="02040503050406030204" pitchFamily="18" charset="0"/>
-                                  </a:rPr>
-                                  <m:t>2</m:t>
-                                </m:r>
-                              </m:e>
-                              <m:e>
-                                <m:r>
-                                  <a:rPr lang="ru-RU" sz="1800" i="1" spc="5">
-                                    <a:effectLst/>
-                                    <a:latin typeface="Cambria Math" panose="02040503050406030204" pitchFamily="18" charset="0"/>
-                                    <a:ea typeface="Cambria Math" panose="02040503050406030204" pitchFamily="18" charset="0"/>
-                                    <a:cs typeface="Cambria Math" panose="02040503050406030204" pitchFamily="18" charset="0"/>
-                                  </a:rPr>
-                                  <m:t>0.5</m:t>
-                                </m:r>
-                              </m:e>
-                            </m:mr>
-                            <m:mr>
-                              <m:e>
-                                <m:r>
-                                  <a:rPr lang="ru-RU" sz="1800" i="1" spc="5">
-                                    <a:effectLst/>
-                                    <a:latin typeface="Cambria Math" panose="02040503050406030204" pitchFamily="18" charset="0"/>
-                                    <a:ea typeface="Cambria Math" panose="02040503050406030204" pitchFamily="18" charset="0"/>
-                                    <a:cs typeface="Cambria Math" panose="02040503050406030204" pitchFamily="18" charset="0"/>
-                                  </a:rPr>
-                                  <m:t>0.5</m:t>
-                                </m:r>
-                              </m:e>
-                              <m:e>
-                                <m:r>
-                                  <a:rPr lang="ru-RU" sz="1800" i="1" spc="5">
-                                    <a:effectLst/>
-                                    <a:latin typeface="Cambria Math" panose="02040503050406030204" pitchFamily="18" charset="0"/>
-                                    <a:ea typeface="Cambria Math" panose="02040503050406030204" pitchFamily="18" charset="0"/>
-                                    <a:cs typeface="Cambria Math" panose="02040503050406030204" pitchFamily="18" charset="0"/>
-                                  </a:rPr>
-                                  <m:t>0</m:t>
-                                </m:r>
-                              </m:e>
-                              <m:e>
-                                <m:r>
-                                  <a:rPr lang="ru-RU" sz="1800" i="1" spc="5">
-                                    <a:effectLst/>
-                                    <a:latin typeface="Cambria Math" panose="02040503050406030204" pitchFamily="18" charset="0"/>
-                                    <a:ea typeface="Cambria Math" panose="02040503050406030204" pitchFamily="18" charset="0"/>
-                                    <a:cs typeface="Cambria Math" panose="02040503050406030204" pitchFamily="18" charset="0"/>
-                                  </a:rPr>
-                                  <m:t>0</m:t>
-                                </m:r>
-                              </m:e>
-                              <m:e>
-                                <m:r>
-                                  <a:rPr lang="ru-RU" sz="1800" i="1" spc="5">
-                                    <a:effectLst/>
-                                    <a:latin typeface="Cambria Math" panose="02040503050406030204" pitchFamily="18" charset="0"/>
-                                    <a:ea typeface="Cambria Math" panose="02040503050406030204" pitchFamily="18" charset="0"/>
-                                    <a:cs typeface="Cambria Math" panose="02040503050406030204" pitchFamily="18" charset="0"/>
-                                  </a:rPr>
-                                  <m:t>0.5</m:t>
-                                </m:r>
-                              </m:e>
-                              <m:e>
-                                <m:r>
-                                  <a:rPr lang="ru-RU" sz="1800" i="1" spc="5">
-                                    <a:effectLst/>
-                                    <a:latin typeface="Cambria Math" panose="02040503050406030204" pitchFamily="18" charset="0"/>
-                                    <a:ea typeface="Cambria Math" panose="02040503050406030204" pitchFamily="18" charset="0"/>
-                                    <a:cs typeface="Cambria Math" panose="02040503050406030204" pitchFamily="18" charset="0"/>
-                                  </a:rPr>
-                                  <m:t>2</m:t>
-                                </m:r>
-                              </m:e>
-                            </m:mr>
-                          </m:m>
-                        </m:e>
-                      </m:d>
-                    </m:oMath>
-                  </m:oMathPara>
-                </a14:m>
-                <a:endParaRPr lang="ru-RU" sz="1800" spc="5" dirty="0">
-                  <a:effectLst/>
-                  <a:latin typeface="Times New Roman" panose="02020603050405020304" pitchFamily="18" charset="0"/>
-                  <a:ea typeface="Calibri" panose="020F0502020204030204" pitchFamily="34" charset="0"/>
-                </a:endParaRPr>
-              </a:p>
-            </p:txBody>
-          </p:sp>
-        </mc:Choice>
-        <mc:Fallback xmlns="">
-          <p:sp>
-            <p:nvSpPr>
-              <p:cNvPr id="10" name="TextBox 9">
-                <a:extLst>
-                  <a:ext uri="{FF2B5EF4-FFF2-40B4-BE49-F238E27FC236}">
-                    <a16:creationId xmlns:a16="http://schemas.microsoft.com/office/drawing/2014/main" id="{E71E028E-6F49-3C0D-2045-F2885BB531B3}"/>
-                  </a:ext>
-                </a:extLst>
-              </p:cNvPr>
-              <p:cNvSpPr txBox="1">
-                <a:spLocks noRot="1" noChangeAspect="1" noMove="1" noResize="1" noEditPoints="1" noAdjustHandles="1" noChangeArrowheads="1" noChangeShapeType="1" noTextEdit="1"/>
-              </p:cNvSpPr>
-              <p:nvPr/>
-            </p:nvSpPr>
-            <p:spPr>
-              <a:xfrm>
-                <a:off x="1177522" y="2312098"/>
-                <a:ext cx="11753555" cy="2657972"/>
-              </a:xfrm>
-              <a:prstGeom prst="rect">
-                <a:avLst/>
-              </a:prstGeom>
-              <a:blipFill>
-                <a:blip r:embed="rId3"/>
-                <a:stretch>
-                  <a:fillRect/>
-                </a:stretch>
-              </a:blipFill>
-            </p:spPr>
-            <p:txBody>
-              <a:bodyPr/>
-              <a:lstStyle/>
-              <a:p>
-                <a:r>
-                  <a:rPr lang="ru-RU">
-                    <a:noFill/>
-                  </a:rPr>
-                  <a:t> </a:t>
-                </a:r>
-              </a:p>
-            </p:txBody>
-          </p:sp>
-        </mc:Fallback>
-      </mc:AlternateContent>
-      <mc:AlternateContent xmlns:mc="http://schemas.openxmlformats.org/markup-compatibility/2006" xmlns:a14="http://schemas.microsoft.com/office/drawing/2010/main">
-        <mc:Choice Requires="a14">
-          <p:sp>
-            <p:nvSpPr>
-              <p:cNvPr id="11" name="TextBox 10">
-                <a:extLst>
-                  <a:ext uri="{FF2B5EF4-FFF2-40B4-BE49-F238E27FC236}">
-                    <a16:creationId xmlns:a16="http://schemas.microsoft.com/office/drawing/2014/main" id="{82DFF9C5-0EE2-7110-FEE4-887AEB61E592}"/>
-                  </a:ext>
-                </a:extLst>
-              </p:cNvPr>
-              <p:cNvSpPr txBox="1"/>
-              <p:nvPr/>
-            </p:nvSpPr>
-            <p:spPr>
-              <a:xfrm>
-                <a:off x="1177522" y="5387283"/>
-                <a:ext cx="10629000" cy="923330"/>
-              </a:xfrm>
-              <a:prstGeom prst="rect">
-                <a:avLst/>
-              </a:prstGeom>
-              <a:noFill/>
-            </p:spPr>
-            <p:txBody>
-              <a:bodyPr wrap="none" rtlCol="0">
-                <a:spAutoFit/>
-              </a:bodyPr>
-              <a:lstStyle/>
-              <a:p>
-                <a:pPr indent="450215" algn="just">
-                  <a:lnSpc>
-                    <a:spcPct val="150000"/>
-                  </a:lnSpc>
-                  <a:buNone/>
-                </a:pPr>
-                <a:r>
-                  <a:rPr lang="ru-RU" sz="1400" spc="5" dirty="0">
-                    <a:effectLst/>
-                    <a:latin typeface="Times New Roman" panose="02020603050405020304" pitchFamily="18" charset="0"/>
-                    <a:ea typeface="Times New Roman" panose="02020603050405020304" pitchFamily="18" charset="0"/>
-                  </a:rPr>
-                  <a:t> </a:t>
-                </a:r>
-                <a:r>
-                  <a:rPr lang="ru-RU" spc="5" dirty="0">
-                    <a:latin typeface="Times New Roman" panose="02020603050405020304" pitchFamily="18" charset="0"/>
-                    <a:ea typeface="Times New Roman" panose="02020603050405020304" pitchFamily="18" charset="0"/>
-                  </a:rPr>
-                  <a:t>С помощью её первой строки и формулы ДПФ из предыдущего примера находим ДПФ этой строки:</a:t>
-                </a:r>
-                <a:endParaRPr lang="ru-RU" spc="5" dirty="0">
-                  <a:latin typeface="Times New Roman" panose="02020603050405020304" pitchFamily="18" charset="0"/>
-                  <a:ea typeface="Calibri" panose="020F0502020204030204" pitchFamily="34" charset="0"/>
-                </a:endParaRPr>
-              </a:p>
-              <a:p>
-                <a:pPr indent="450215" algn="just">
-                  <a:lnSpc>
-                    <a:spcPct val="150000"/>
-                  </a:lnSpc>
-                  <a:buNone/>
-                </a:pPr>
-                <a14:m>
-                  <m:oMathPara xmlns:m="http://schemas.openxmlformats.org/officeDocument/2006/math">
-                    <m:oMathParaPr>
-                      <m:jc m:val="centerGroup"/>
-                    </m:oMathParaPr>
-                    <m:oMath xmlns:m="http://schemas.openxmlformats.org/officeDocument/2006/math">
-                      <m:r>
-                        <a:rPr lang="ru-RU" i="1" spc="5">
-                          <a:latin typeface="Cambria Math" panose="02040503050406030204" pitchFamily="18" charset="0"/>
-                          <a:ea typeface="Calibri" panose="020F0502020204030204" pitchFamily="34" charset="0"/>
-                        </a:rPr>
-                        <m:t>𝑇</m:t>
-                      </m:r>
-                      <m:d>
-                        <m:dPr>
-                          <m:ctrlPr>
-                            <a:rPr lang="ru-RU" i="1" spc="5">
-                              <a:latin typeface="Cambria Math" panose="02040503050406030204" pitchFamily="18" charset="0"/>
-                              <a:ea typeface="Calibri" panose="020F0502020204030204" pitchFamily="34" charset="0"/>
-                            </a:rPr>
-                          </m:ctrlPr>
-                        </m:dPr>
-                        <m:e>
-                          <m:r>
-                            <a:rPr lang="ru-RU" i="1" spc="5">
-                              <a:latin typeface="Cambria Math" panose="02040503050406030204" pitchFamily="18" charset="0"/>
-                              <a:ea typeface="Calibri" panose="020F0502020204030204" pitchFamily="34" charset="0"/>
-                            </a:rPr>
-                            <m:t>𝑘</m:t>
-                          </m:r>
-                        </m:e>
-                      </m:d>
-                      <m:r>
-                        <a:rPr lang="ru-RU" i="1" spc="5">
-                          <a:latin typeface="Cambria Math" panose="02040503050406030204" pitchFamily="18" charset="0"/>
-                          <a:ea typeface="Calibri" panose="020F0502020204030204" pitchFamily="34" charset="0"/>
-                        </a:rPr>
-                        <m:t>=[3, 1.62, 0.38, 0.38, 1.62]</m:t>
-                      </m:r>
-                    </m:oMath>
-                  </m:oMathPara>
-                </a14:m>
-                <a:endParaRPr lang="ru-RU" spc="5" dirty="0">
-                  <a:latin typeface="Times New Roman" panose="02020603050405020304" pitchFamily="18" charset="0"/>
-                  <a:ea typeface="Calibri" panose="020F0502020204030204" pitchFamily="34" charset="0"/>
-                </a:endParaRPr>
-              </a:p>
-            </p:txBody>
-          </p:sp>
-        </mc:Choice>
-        <mc:Fallback xmlns="">
-          <p:sp>
-            <p:nvSpPr>
-              <p:cNvPr id="11" name="TextBox 10">
-                <a:extLst>
-                  <a:ext uri="{FF2B5EF4-FFF2-40B4-BE49-F238E27FC236}">
-                    <a16:creationId xmlns:a16="http://schemas.microsoft.com/office/drawing/2014/main" id="{82DFF9C5-0EE2-7110-FEE4-887AEB61E592}"/>
-                  </a:ext>
-                </a:extLst>
-              </p:cNvPr>
-              <p:cNvSpPr txBox="1">
-                <a:spLocks noRot="1" noChangeAspect="1" noMove="1" noResize="1" noEditPoints="1" noAdjustHandles="1" noChangeArrowheads="1" noChangeShapeType="1" noTextEdit="1"/>
-              </p:cNvSpPr>
-              <p:nvPr/>
-            </p:nvSpPr>
-            <p:spPr>
-              <a:xfrm>
-                <a:off x="1177522" y="5387283"/>
-                <a:ext cx="10629000" cy="923330"/>
-              </a:xfrm>
-              <a:prstGeom prst="rect">
-                <a:avLst/>
-              </a:prstGeom>
-              <a:blipFill>
-                <a:blip r:embed="rId4"/>
-                <a:stretch>
-                  <a:fillRect/>
-                </a:stretch>
-              </a:blipFill>
-            </p:spPr>
-            <p:txBody>
-              <a:bodyPr/>
-              <a:lstStyle/>
-              <a:p>
-                <a:r>
-                  <a:rPr lang="ru-RU">
-                    <a:noFill/>
-                  </a:rPr>
-                  <a:t> </a:t>
-                </a:r>
-              </a:p>
-            </p:txBody>
-          </p:sp>
-        </mc:Fallback>
-      </mc:AlternateContent>
-    </p:spTree>
-  </p:cSld>
-  <p:clrMapOvr>
-    <a:masterClrMapping/>
-  </p:clrMapOvr>
-</p:sld>
-</file>
-
-<file path=ppt/slides/slide8.xml><?xml version="1.0" encoding="utf-8"?>
-<p:sld xmlns:a="http://schemas.openxmlformats.org/drawingml/2006/main" xmlns:r="http://schemas.openxmlformats.org/officeDocument/2006/relationships" xmlns:p="http://schemas.openxmlformats.org/presentationml/2006/main">
-  <p:cSld name="Slide 1">
-    <p:spTree>
-      <p:nvGrpSpPr>
-        <p:cNvPr id="1" name=""/>
-        <p:cNvGrpSpPr/>
-        <p:nvPr/>
-      </p:nvGrpSpPr>
-      <p:grpSpPr>
-        <a:xfrm>
-          <a:off x="0" y="0"/>
-          <a:ext cx="0" cy="0"/>
-          <a:chOff x="0" y="0"/>
-          <a:chExt cx="0" cy="0"/>
-        </a:xfrm>
-      </p:grpSpPr>
-      <p:sp>
-        <p:nvSpPr>
-          <p:cNvPr id="2" name="Text 0"/>
-          <p:cNvSpPr/>
-          <p:nvPr/>
-        </p:nvSpPr>
-        <p:spPr>
-          <a:xfrm>
-            <a:off x="857250" y="636924"/>
-            <a:ext cx="11953637" cy="708779"/>
-          </a:xfrm>
-          <a:prstGeom prst="rect">
-            <a:avLst/>
-          </a:prstGeom>
-          <a:noFill/>
-          <a:ln/>
-        </p:spPr>
-        <p:txBody>
-          <a:bodyPr wrap="none" lIns="0" tIns="0" rIns="0" bIns="0" rtlCol="0" anchor="t"/>
-          <a:lstStyle/>
-          <a:p>
-            <a:pPr marL="0" indent="0" algn="l">
-              <a:lnSpc>
-                <a:spcPts val="5550"/>
-              </a:lnSpc>
-              <a:buNone/>
-            </a:pPr>
-            <a:r>
-              <a:rPr lang="en-US" sz="4500" dirty="0">
-                <a:latin typeface="Times New Roman" panose="02020603050405020304" pitchFamily="18" charset="0"/>
-                <a:ea typeface="Instrument Sans Semi Bold" pitchFamily="34" charset="-122"/>
-                <a:cs typeface="Times New Roman" panose="02020603050405020304" pitchFamily="18" charset="0"/>
-              </a:rPr>
-              <a:t>Собственные</a:t>
-            </a:r>
-            <a:r>
-              <a:rPr lang="en-US" sz="4450" dirty="0">
-                <a:latin typeface="Times New Roman" panose="02020603050405020304" pitchFamily="18" charset="0"/>
-                <a:ea typeface="Instrument Sans Semi Bold" pitchFamily="34" charset="-122"/>
-                <a:cs typeface="Times New Roman" panose="02020603050405020304" pitchFamily="18" charset="0"/>
-              </a:rPr>
-              <a:t> значения и векторы матрицы</a:t>
-            </a:r>
-            <a:endParaRPr lang="en-US" sz="4450" dirty="0">
-              <a:latin typeface="Times New Roman" panose="02020603050405020304" pitchFamily="18" charset="0"/>
-            </a:endParaRPr>
-          </a:p>
-        </p:txBody>
-      </p:sp>
-      <p:sp>
-        <p:nvSpPr>
-          <p:cNvPr id="4" name="Text 2"/>
-          <p:cNvSpPr/>
-          <p:nvPr/>
-        </p:nvSpPr>
-        <p:spPr>
-          <a:xfrm>
-            <a:off x="879261" y="2370118"/>
-            <a:ext cx="2835235" cy="354330"/>
-          </a:xfrm>
-          <a:prstGeom prst="rect">
-            <a:avLst/>
-          </a:prstGeom>
-          <a:noFill/>
-          <a:ln/>
-        </p:spPr>
-        <p:txBody>
-          <a:bodyPr wrap="none" lIns="0" tIns="0" rIns="0" bIns="0" rtlCol="0" anchor="t"/>
-          <a:lstStyle/>
-          <a:p>
-            <a:pPr marL="0" indent="0" algn="l">
-              <a:lnSpc>
-                <a:spcPts val="2750"/>
-              </a:lnSpc>
-              <a:buNone/>
-            </a:pPr>
-            <a:r>
-              <a:rPr lang="en-US" sz="2200" dirty="0">
-                <a:latin typeface="Times New Roman" panose="02020603050405020304" pitchFamily="18" charset="0"/>
-                <a:ea typeface="Instrument Sans Semi Bold" pitchFamily="34" charset="-122"/>
-                <a:cs typeface="Times New Roman" panose="02020603050405020304" pitchFamily="18" charset="0"/>
-              </a:rPr>
-              <a:t>Определение</a:t>
-            </a:r>
-            <a:endParaRPr lang="en-US" sz="2200" dirty="0">
-              <a:latin typeface="Times New Roman" panose="02020603050405020304" pitchFamily="18" charset="0"/>
-              <a:cs typeface="Times New Roman" panose="02020603050405020304" pitchFamily="18" charset="0"/>
-            </a:endParaRPr>
-          </a:p>
-        </p:txBody>
-      </p:sp>
-      <p:sp>
-        <p:nvSpPr>
-          <p:cNvPr id="5" name="Text 3"/>
-          <p:cNvSpPr/>
-          <p:nvPr/>
-        </p:nvSpPr>
-        <p:spPr>
-          <a:xfrm>
-            <a:off x="879261" y="2951262"/>
-            <a:ext cx="6117788" cy="725805"/>
-          </a:xfrm>
-          <a:prstGeom prst="rect">
-            <a:avLst/>
-          </a:prstGeom>
-          <a:noFill/>
-          <a:ln/>
-        </p:spPr>
-        <p:txBody>
-          <a:bodyPr wrap="square" lIns="0" tIns="0" rIns="0" bIns="0" rtlCol="0" anchor="t"/>
-          <a:lstStyle/>
-          <a:p>
-            <a:pPr marL="0" indent="0" algn="l">
-              <a:lnSpc>
-                <a:spcPts val="2850"/>
-              </a:lnSpc>
-              <a:buNone/>
-            </a:pPr>
-            <a:r>
-              <a:rPr lang="en-US" sz="1900" dirty="0">
-                <a:latin typeface="Times New Roman" panose="02020603050405020304" pitchFamily="18" charset="0"/>
-                <a:ea typeface="Instrument Sans Medium" pitchFamily="34" charset="-122"/>
-                <a:cs typeface="Times New Roman" panose="02020603050405020304" pitchFamily="18" charset="0"/>
-              </a:rPr>
-              <a:t>Число </a:t>
-            </a:r>
-            <a:r>
-              <a:rPr lang="en-US" sz="1900" b="1" dirty="0">
-                <a:latin typeface="Times New Roman" panose="02020603050405020304" pitchFamily="18" charset="0"/>
-                <a:ea typeface="Instrument Sans Medium" pitchFamily="34" charset="-122"/>
-                <a:cs typeface="Times New Roman" panose="02020603050405020304" pitchFamily="18" charset="0"/>
-              </a:rPr>
-              <a:t>λ</a:t>
-            </a:r>
-            <a:r>
-              <a:rPr lang="en-US" sz="1900" dirty="0">
-                <a:latin typeface="Times New Roman" panose="02020603050405020304" pitchFamily="18" charset="0"/>
-                <a:ea typeface="Instrument Sans Medium" pitchFamily="34" charset="-122"/>
-                <a:cs typeface="Times New Roman" panose="02020603050405020304" pitchFamily="18" charset="0"/>
-              </a:rPr>
-              <a:t> — собственное значение матрицы </a:t>
-            </a:r>
-            <a:r>
-              <a:rPr lang="en-US" sz="1900" b="1" dirty="0">
-                <a:latin typeface="Times New Roman" panose="02020603050405020304" pitchFamily="18" charset="0"/>
-                <a:ea typeface="Instrument Sans Medium" pitchFamily="34" charset="-122"/>
-                <a:cs typeface="Times New Roman" panose="02020603050405020304" pitchFamily="18" charset="0"/>
-              </a:rPr>
-              <a:t>A</a:t>
-            </a:r>
-            <a:r>
-              <a:rPr lang="en-US" sz="1900" dirty="0">
-                <a:latin typeface="Times New Roman" panose="02020603050405020304" pitchFamily="18" charset="0"/>
-                <a:ea typeface="Instrument Sans Medium" pitchFamily="34" charset="-122"/>
-                <a:cs typeface="Times New Roman" panose="02020603050405020304" pitchFamily="18" charset="0"/>
-              </a:rPr>
-              <a:t>, если существует ненулевой вектор </a:t>
-            </a:r>
-            <a:r>
-              <a:rPr lang="en-US" sz="1900" b="1" dirty="0">
-                <a:latin typeface="Times New Roman" panose="02020603050405020304" pitchFamily="18" charset="0"/>
-                <a:ea typeface="Instrument Sans Medium" pitchFamily="34" charset="-122"/>
-                <a:cs typeface="Times New Roman" panose="02020603050405020304" pitchFamily="18" charset="0"/>
-              </a:rPr>
-              <a:t>x</a:t>
-            </a:r>
-            <a:r>
-              <a:rPr lang="en-US" sz="1900" dirty="0">
-                <a:latin typeface="Times New Roman" panose="02020603050405020304" pitchFamily="18" charset="0"/>
-                <a:ea typeface="Instrument Sans Medium" pitchFamily="34" charset="-122"/>
-                <a:cs typeface="Times New Roman" panose="02020603050405020304" pitchFamily="18" charset="0"/>
-              </a:rPr>
-              <a:t> такой, что:</a:t>
-            </a:r>
-            <a:endParaRPr lang="en-US" sz="1900" dirty="0">
-              <a:latin typeface="Times New Roman" panose="02020603050405020304" pitchFamily="18" charset="0"/>
-              <a:cs typeface="Times New Roman" panose="02020603050405020304" pitchFamily="18" charset="0"/>
-            </a:endParaRPr>
-          </a:p>
-        </p:txBody>
-      </p:sp>
-      <p:sp>
-        <p:nvSpPr>
-          <p:cNvPr id="6" name="Text 4"/>
-          <p:cNvSpPr/>
-          <p:nvPr/>
-        </p:nvSpPr>
-        <p:spPr>
-          <a:xfrm>
-            <a:off x="857250" y="4544378"/>
-            <a:ext cx="6117788" cy="393263"/>
-          </a:xfrm>
-          <a:prstGeom prst="rect">
-            <a:avLst/>
-          </a:prstGeom>
-          <a:noFill/>
-          <a:ln/>
-        </p:spPr>
-        <p:txBody>
-          <a:bodyPr wrap="none" lIns="0" tIns="0" rIns="0" bIns="0" rtlCol="0" anchor="t"/>
-          <a:lstStyle/>
-          <a:p>
-            <a:pPr marL="0" indent="0" algn="l">
-              <a:lnSpc>
-                <a:spcPts val="3200"/>
-              </a:lnSpc>
-              <a:buNone/>
-            </a:pPr>
-            <a:endParaRPr lang="en-US" sz="2000" dirty="0">
-              <a:latin typeface="Times New Roman" panose="02020603050405020304" pitchFamily="18" charset="0"/>
-            </a:endParaRPr>
-          </a:p>
-        </p:txBody>
-      </p:sp>
-      <p:sp>
-        <p:nvSpPr>
-          <p:cNvPr id="8" name="Text 5"/>
-          <p:cNvSpPr/>
-          <p:nvPr/>
-        </p:nvSpPr>
-        <p:spPr>
-          <a:xfrm>
-            <a:off x="879261" y="4644450"/>
-            <a:ext cx="6117788" cy="725805"/>
-          </a:xfrm>
-          <a:prstGeom prst="rect">
-            <a:avLst/>
-          </a:prstGeom>
-          <a:noFill/>
-          <a:ln/>
-        </p:spPr>
-        <p:txBody>
-          <a:bodyPr wrap="square" lIns="0" tIns="0" rIns="0" bIns="0" rtlCol="0" anchor="t"/>
-          <a:lstStyle/>
-          <a:p>
-            <a:pPr marL="0" indent="0" algn="l">
-              <a:lnSpc>
-                <a:spcPts val="2850"/>
-              </a:lnSpc>
-              <a:buNone/>
-            </a:pPr>
-            <a:r>
-              <a:rPr lang="en-US" sz="2200" dirty="0">
-                <a:latin typeface="Times New Roman" panose="02020603050405020304" pitchFamily="18" charset="0"/>
-                <a:ea typeface="Instrument Sans Medium" pitchFamily="34" charset="-122"/>
-                <a:cs typeface="Times New Roman" panose="02020603050405020304" pitchFamily="18" charset="0"/>
-              </a:rPr>
-              <a:t>Вектор </a:t>
-            </a:r>
-            <a:r>
-              <a:rPr lang="en-US" sz="2200" b="1" dirty="0">
-                <a:latin typeface="Times New Roman" panose="02020603050405020304" pitchFamily="18" charset="0"/>
-                <a:ea typeface="Instrument Sans Medium" pitchFamily="34" charset="-122"/>
-                <a:cs typeface="Times New Roman" panose="02020603050405020304" pitchFamily="18" charset="0"/>
-              </a:rPr>
-              <a:t>x</a:t>
-            </a:r>
-            <a:r>
-              <a:rPr lang="en-US" sz="2200" dirty="0">
-                <a:latin typeface="Times New Roman" panose="02020603050405020304" pitchFamily="18" charset="0"/>
-                <a:ea typeface="Instrument Sans Medium" pitchFamily="34" charset="-122"/>
-                <a:cs typeface="Times New Roman" panose="02020603050405020304" pitchFamily="18" charset="0"/>
-              </a:rPr>
-              <a:t> называется собственным вектором, соответствующим λ.</a:t>
-            </a:r>
-            <a:endParaRPr lang="en-US" sz="2200" dirty="0">
-              <a:latin typeface="Times New Roman" panose="02020603050405020304" pitchFamily="18" charset="0"/>
-              <a:cs typeface="Times New Roman" panose="02020603050405020304" pitchFamily="18" charset="0"/>
-            </a:endParaRPr>
-          </a:p>
-        </p:txBody>
-      </p:sp>
-      <p:sp>
-        <p:nvSpPr>
-          <p:cNvPr id="9" name="Text 6"/>
-          <p:cNvSpPr/>
-          <p:nvPr/>
-        </p:nvSpPr>
-        <p:spPr>
-          <a:xfrm>
-            <a:off x="7793551" y="2534678"/>
-            <a:ext cx="4978122" cy="354330"/>
-          </a:xfrm>
-          <a:prstGeom prst="rect">
-            <a:avLst/>
-          </a:prstGeom>
-          <a:noFill/>
-          <a:ln/>
-        </p:spPr>
-        <p:txBody>
-          <a:bodyPr wrap="none" lIns="0" tIns="0" rIns="0" bIns="0" rtlCol="0" anchor="t"/>
-          <a:lstStyle/>
-          <a:p>
-            <a:pPr marL="0" indent="0" algn="l">
-              <a:lnSpc>
-                <a:spcPts val="2750"/>
-              </a:lnSpc>
-              <a:buNone/>
-            </a:pPr>
-            <a:r>
-              <a:rPr lang="en-US" sz="2200" dirty="0">
-                <a:latin typeface="Times New Roman" panose="02020603050405020304" pitchFamily="18" charset="0"/>
-                <a:cs typeface="Times New Roman" panose="02020603050405020304" pitchFamily="18" charset="0"/>
-              </a:rPr>
-              <a:t>Нахождение собственных значений</a:t>
-            </a:r>
-          </a:p>
-        </p:txBody>
-      </p:sp>
-      <p:sp>
-        <p:nvSpPr>
-          <p:cNvPr id="10" name="Text 7"/>
-          <p:cNvSpPr/>
-          <p:nvPr/>
-        </p:nvSpPr>
-        <p:spPr>
-          <a:xfrm>
-            <a:off x="7793551" y="3115822"/>
-            <a:ext cx="6244709" cy="362903"/>
-          </a:xfrm>
-          <a:prstGeom prst="rect">
-            <a:avLst/>
-          </a:prstGeom>
-          <a:noFill/>
-          <a:ln/>
-        </p:spPr>
-        <p:txBody>
-          <a:bodyPr wrap="none" lIns="0" tIns="0" rIns="0" bIns="0" rtlCol="0" anchor="t"/>
-          <a:lstStyle/>
-          <a:p>
-            <a:pPr marL="0" indent="0" algn="l">
-              <a:lnSpc>
-                <a:spcPts val="2850"/>
-              </a:lnSpc>
-              <a:buNone/>
-            </a:pPr>
-            <a:r>
-              <a:rPr lang="en-US" sz="2200" dirty="0">
-                <a:latin typeface="Times New Roman" panose="02020603050405020304" pitchFamily="18" charset="0"/>
-                <a:cs typeface="Times New Roman" panose="02020603050405020304" pitchFamily="18" charset="0"/>
-              </a:rPr>
-              <a:t>Составляется уравнение</a:t>
-            </a:r>
-            <a:r>
-              <a:rPr lang="en-US" sz="1750" dirty="0">
-                <a:solidFill>
-                  <a:srgbClr val="1E3063"/>
-                </a:solidFill>
-                <a:latin typeface="Times New Roman" panose="02020603050405020304" pitchFamily="18" charset="0"/>
-                <a:cs typeface="Times New Roman" panose="02020603050405020304" pitchFamily="18" charset="0"/>
-              </a:rPr>
-              <a:t>:</a:t>
-            </a:r>
-            <a:endParaRPr lang="en-US" sz="1750" dirty="0">
-              <a:latin typeface="Times New Roman" panose="02020603050405020304" pitchFamily="18" charset="0"/>
-            </a:endParaRPr>
-          </a:p>
-        </p:txBody>
-      </p:sp>
-      <p:sp>
-        <p:nvSpPr>
-          <p:cNvPr id="11" name="Text 8"/>
-          <p:cNvSpPr/>
-          <p:nvPr/>
-        </p:nvSpPr>
-        <p:spPr>
-          <a:xfrm>
-            <a:off x="7599521" y="4181475"/>
-            <a:ext cx="6244709" cy="393263"/>
-          </a:xfrm>
-          <a:prstGeom prst="rect">
-            <a:avLst/>
-          </a:prstGeom>
-          <a:noFill/>
-          <a:ln/>
-        </p:spPr>
-        <p:txBody>
-          <a:bodyPr wrap="none" lIns="0" tIns="0" rIns="0" bIns="0" rtlCol="0" anchor="t"/>
-          <a:lstStyle/>
-          <a:p>
-            <a:pPr marL="0" indent="0" algn="l">
-              <a:lnSpc>
-                <a:spcPts val="3200"/>
-              </a:lnSpc>
-              <a:buNone/>
-            </a:pPr>
-            <a:endParaRPr lang="en-US" sz="2000" dirty="0">
-              <a:latin typeface="Times New Roman" panose="02020603050405020304" pitchFamily="18" charset="0"/>
-            </a:endParaRPr>
-          </a:p>
-        </p:txBody>
-      </p:sp>
-      <p:sp>
-        <p:nvSpPr>
-          <p:cNvPr id="13" name="Text 9"/>
-          <p:cNvSpPr/>
-          <p:nvPr/>
-        </p:nvSpPr>
-        <p:spPr>
-          <a:xfrm>
-            <a:off x="7793551" y="4446107"/>
-            <a:ext cx="6244709" cy="725805"/>
-          </a:xfrm>
-          <a:prstGeom prst="rect">
-            <a:avLst/>
-          </a:prstGeom>
-          <a:noFill/>
-          <a:ln/>
-        </p:spPr>
-        <p:txBody>
-          <a:bodyPr wrap="square" lIns="0" tIns="0" rIns="0" bIns="0" rtlCol="0" anchor="t"/>
-          <a:lstStyle/>
-          <a:p>
-            <a:pPr marL="0" indent="0" algn="l">
-              <a:lnSpc>
-                <a:spcPts val="2850"/>
-              </a:lnSpc>
-              <a:buNone/>
-            </a:pPr>
-            <a:r>
-              <a:rPr lang="en-US" sz="2000" dirty="0">
-                <a:latin typeface="Times New Roman" panose="02020603050405020304" pitchFamily="18" charset="0"/>
-                <a:ea typeface="Instrument Sans Medium" pitchFamily="34" charset="-122"/>
-                <a:cs typeface="Times New Roman" panose="02020603050405020304" pitchFamily="18" charset="0"/>
-              </a:rPr>
-              <a:t>После нахождения λ собственные векторы определяются из системы:</a:t>
-            </a:r>
-            <a:endParaRPr lang="en-US" sz="2000" dirty="0">
-              <a:latin typeface="Times New Roman" panose="02020603050405020304" pitchFamily="18" charset="0"/>
-              <a:cs typeface="Times New Roman" panose="02020603050405020304" pitchFamily="18" charset="0"/>
-            </a:endParaRPr>
-          </a:p>
-        </p:txBody>
-      </p:sp>
-      <p:sp>
-        <p:nvSpPr>
-          <p:cNvPr id="14" name="Text 10"/>
-          <p:cNvSpPr/>
-          <p:nvPr/>
-        </p:nvSpPr>
-        <p:spPr>
-          <a:xfrm>
-            <a:off x="7599521" y="5874663"/>
-            <a:ext cx="6244709" cy="393263"/>
-          </a:xfrm>
-          <a:prstGeom prst="rect">
-            <a:avLst/>
-          </a:prstGeom>
-          <a:noFill/>
-          <a:ln/>
-        </p:spPr>
-        <p:txBody>
-          <a:bodyPr wrap="none" lIns="0" tIns="0" rIns="0" bIns="0" rtlCol="0" anchor="t"/>
-          <a:lstStyle/>
-          <a:p>
-            <a:pPr marL="0" indent="0" algn="l">
-              <a:lnSpc>
-                <a:spcPts val="3200"/>
-              </a:lnSpc>
-              <a:buNone/>
-            </a:pPr>
-            <a:endParaRPr lang="en-US" sz="2000" dirty="0">
-              <a:latin typeface="Times New Roman" panose="02020603050405020304" pitchFamily="18" charset="0"/>
-            </a:endParaRPr>
-          </a:p>
-        </p:txBody>
-      </p:sp>
-      <mc:AlternateContent xmlns:mc="http://schemas.openxmlformats.org/markup-compatibility/2006" xmlns:a14="http://schemas.microsoft.com/office/drawing/2010/main">
-        <mc:Choice Requires="a14">
-          <p:sp>
-            <p:nvSpPr>
-              <p:cNvPr id="16" name="TextBox 15">
-                <a:extLst>
-                  <a:ext uri="{FF2B5EF4-FFF2-40B4-BE49-F238E27FC236}">
-                    <a16:creationId xmlns:a16="http://schemas.microsoft.com/office/drawing/2014/main" id="{DDC2A393-F61B-B74B-97F3-A563DDD261F7}"/>
-                  </a:ext>
-                </a:extLst>
-              </p:cNvPr>
-              <p:cNvSpPr txBox="1"/>
-              <p:nvPr/>
-            </p:nvSpPr>
-            <p:spPr>
-              <a:xfrm>
-                <a:off x="9784915" y="3667022"/>
-                <a:ext cx="2261980" cy="461665"/>
-              </a:xfrm>
-              <a:prstGeom prst="rect">
-                <a:avLst/>
-              </a:prstGeom>
-              <a:noFill/>
-            </p:spPr>
-            <p:txBody>
-              <a:bodyPr wrap="square" lIns="0" tIns="0" rIns="0" bIns="0" rtlCol="0">
-                <a:spAutoFit/>
-              </a:bodyPr>
-              <a:lstStyle/>
-              <a:p>
-                <a:pPr/>
-                <a14:m>
-                  <m:oMathPara xmlns:m="http://schemas.openxmlformats.org/officeDocument/2006/math">
-                    <m:oMathParaPr>
-                      <m:jc m:val="centerGroup"/>
-                    </m:oMathParaPr>
-                    <m:oMath xmlns:m="http://schemas.openxmlformats.org/officeDocument/2006/math">
-                      <m:r>
-                        <m:rPr>
-                          <m:sty m:val="p"/>
-                        </m:rPr>
-                        <a:rPr lang="en-US" sz="3000" b="0" i="1" smtClean="0">
-                          <a:latin typeface="Cambria Math" panose="02040503050406030204" pitchFamily="18" charset="0"/>
-                        </a:rPr>
-                        <m:t>det</m:t>
-                      </m:r>
-                      <m:r>
-                        <a:rPr lang="en-US" sz="3000" b="0" i="1" smtClean="0">
-                          <a:latin typeface="Cambria Math" panose="02040503050406030204" pitchFamily="18" charset="0"/>
-                        </a:rPr>
-                        <m:t>(</m:t>
-                      </m:r>
-                      <m:r>
-                        <m:rPr>
-                          <m:sty m:val="p"/>
-                        </m:rPr>
-                        <a:rPr lang="en-US" sz="3000" b="0" i="1" smtClean="0">
-                          <a:latin typeface="Cambria Math" panose="02040503050406030204" pitchFamily="18" charset="0"/>
-                        </a:rPr>
-                        <m:t>A</m:t>
-                      </m:r>
-                      <m:r>
-                        <a:rPr lang="en-US" sz="3000" b="0" i="1" smtClean="0">
-                          <a:latin typeface="Cambria Math" panose="02040503050406030204" pitchFamily="18" charset="0"/>
-                        </a:rPr>
-                        <m:t>−</m:t>
-                      </m:r>
-                      <m:r>
-                        <a:rPr lang="en-US" sz="3000" b="0" i="1" smtClean="0">
-                          <a:latin typeface="Cambria Math" panose="02040503050406030204" pitchFamily="18" charset="0"/>
-                          <a:ea typeface="Cambria Math" panose="02040503050406030204" pitchFamily="18" charset="0"/>
-                        </a:rPr>
-                        <m:t>𝜆</m:t>
-                      </m:r>
-                      <m:r>
-                        <m:rPr>
-                          <m:sty m:val="p"/>
-                        </m:rPr>
-                        <a:rPr lang="en-US" sz="3000" b="0" i="1" smtClean="0">
-                          <a:latin typeface="Cambria Math" panose="02040503050406030204" pitchFamily="18" charset="0"/>
-                          <a:ea typeface="Cambria Math" panose="02040503050406030204" pitchFamily="18" charset="0"/>
-                        </a:rPr>
-                        <m:t>I</m:t>
-                      </m:r>
-                      <m:r>
-                        <a:rPr lang="en-US" sz="3000" b="0" i="1" smtClean="0">
-                          <a:latin typeface="Cambria Math" panose="02040503050406030204" pitchFamily="18" charset="0"/>
-                          <a:ea typeface="Cambria Math" panose="02040503050406030204" pitchFamily="18" charset="0"/>
-                        </a:rPr>
-                        <m:t>)=0</m:t>
-                      </m:r>
-                    </m:oMath>
-                  </m:oMathPara>
-                </a14:m>
-                <a:endParaRPr lang="ru-RU" sz="3000" dirty="0">
-                  <a:latin typeface="Times New Roman" panose="02020603050405020304" pitchFamily="18" charset="0"/>
-                </a:endParaRPr>
-              </a:p>
-            </p:txBody>
-          </p:sp>
-        </mc:Choice>
-        <mc:Fallback xmlns="">
-          <p:sp>
-            <p:nvSpPr>
-              <p:cNvPr id="16" name="TextBox 15">
-                <a:extLst>
-                  <a:ext uri="{FF2B5EF4-FFF2-40B4-BE49-F238E27FC236}">
-                    <a16:creationId xmlns:a16="http://schemas.microsoft.com/office/drawing/2014/main" id="{DDC2A393-F61B-B74B-97F3-A563DDD261F7}"/>
-                  </a:ext>
-                </a:extLst>
-              </p:cNvPr>
-              <p:cNvSpPr txBox="1">
-                <a:spLocks noRot="1" noChangeAspect="1" noMove="1" noResize="1" noEditPoints="1" noAdjustHandles="1" noChangeArrowheads="1" noChangeShapeType="1" noTextEdit="1"/>
-              </p:cNvSpPr>
-              <p:nvPr/>
-            </p:nvSpPr>
-            <p:spPr>
-              <a:xfrm>
-                <a:off x="9784915" y="3667022"/>
-                <a:ext cx="2261980" cy="461665"/>
-              </a:xfrm>
-              <a:prstGeom prst="rect">
-                <a:avLst/>
-              </a:prstGeom>
-              <a:blipFill>
-                <a:blip r:embed="rId3"/>
-                <a:stretch>
-                  <a:fillRect/>
-                </a:stretch>
-              </a:blipFill>
-            </p:spPr>
-            <p:txBody>
-              <a:bodyPr/>
-              <a:lstStyle/>
-              <a:p>
-                <a:r>
-                  <a:rPr lang="ru-RU">
-                    <a:noFill/>
-                  </a:rPr>
-                  <a:t> </a:t>
-                </a:r>
-              </a:p>
-            </p:txBody>
-          </p:sp>
-        </mc:Fallback>
-      </mc:AlternateContent>
-      <mc:AlternateContent xmlns:mc="http://schemas.openxmlformats.org/markup-compatibility/2006" xmlns:a14="http://schemas.microsoft.com/office/drawing/2010/main">
-        <mc:Choice Requires="a14">
-          <p:sp>
-            <p:nvSpPr>
-              <p:cNvPr id="29" name="TextBox 28">
-                <a:extLst>
-                  <a:ext uri="{FF2B5EF4-FFF2-40B4-BE49-F238E27FC236}">
-                    <a16:creationId xmlns:a16="http://schemas.microsoft.com/office/drawing/2014/main" id="{DBFE8700-A7C8-AFD2-AE4E-AD6203C1F006}"/>
-                  </a:ext>
-                </a:extLst>
-              </p:cNvPr>
-              <p:cNvSpPr txBox="1"/>
-              <p:nvPr/>
-            </p:nvSpPr>
-            <p:spPr>
-              <a:xfrm>
-                <a:off x="7169068" y="5329908"/>
-                <a:ext cx="7315200" cy="553998"/>
-              </a:xfrm>
-              <a:prstGeom prst="rect">
-                <a:avLst/>
-              </a:prstGeom>
-              <a:noFill/>
-            </p:spPr>
-            <p:txBody>
-              <a:bodyPr wrap="square">
-                <a:spAutoFit/>
-              </a:bodyPr>
-              <a:lstStyle/>
-              <a:p>
-                <a:pPr marL="0" marR="0" lvl="0" indent="0" algn="l" defTabSz="914400" rtl="0" eaLnBrk="1" fontAlgn="auto" latinLnBrk="0" hangingPunct="1">
-                  <a:lnSpc>
-                    <a:spcPct val="100000"/>
-                  </a:lnSpc>
-                  <a:spcBef>
-                    <a:spcPts val="0"/>
-                  </a:spcBef>
-                  <a:spcAft>
-                    <a:spcPts val="0"/>
-                  </a:spcAft>
-                  <a:buClrTx/>
-                  <a:buSzTx/>
-                  <a:buFontTx/>
-                  <a:buNone/>
-                  <a:tabLst/>
-                  <a:defRPr/>
-                </a:pPr>
-                <a14:m>
-                  <m:oMathPara xmlns:m="http://schemas.openxmlformats.org/officeDocument/2006/math">
-                    <m:oMathParaPr>
-                      <m:jc m:val="centerGroup"/>
-                    </m:oMathParaPr>
-                    <m:oMath xmlns:m="http://schemas.openxmlformats.org/officeDocument/2006/math">
-                      <m:r>
-                        <a:rPr lang="en-US" sz="3000" i="1">
-                          <a:solidFill>
-                            <a:prstClr val="black"/>
-                          </a:solidFill>
-                          <a:latin typeface="Cambria Math" panose="02040503050406030204" pitchFamily="18" charset="0"/>
-                        </a:rPr>
-                        <m:t>(</m:t>
-                      </m:r>
-                      <m:r>
-                        <m:rPr>
-                          <m:sty m:val="p"/>
-                        </m:rPr>
-                        <a:rPr kumimoji="0" lang="en-US" sz="3000" b="0" i="1" u="none" strike="noStrike" kern="1200" cap="none" spc="0" normalizeH="0" baseline="0" noProof="0" smtClean="0">
-                          <a:ln>
-                            <a:noFill/>
-                          </a:ln>
-                          <a:solidFill>
-                            <a:prstClr val="black"/>
-                          </a:solidFill>
-                          <a:effectLst/>
-                          <a:uLnTx/>
-                          <a:uFillTx/>
-                          <a:latin typeface="Cambria Math" panose="02040503050406030204" pitchFamily="18" charset="0"/>
-                          <a:ea typeface="+mn-ea"/>
-                          <a:cs typeface="+mn-cs"/>
-                        </a:rPr>
-                        <m:t>A</m:t>
-                      </m:r>
-                      <m:r>
-                        <a:rPr kumimoji="0" lang="en-US" sz="3000" b="0" i="1" u="none" strike="noStrike" kern="1200" cap="none" spc="0" normalizeH="0" baseline="0" noProof="0" smtClean="0">
-                          <a:ln>
-                            <a:noFill/>
-                          </a:ln>
-                          <a:solidFill>
-                            <a:prstClr val="black"/>
-                          </a:solidFill>
-                          <a:effectLst/>
-                          <a:uLnTx/>
-                          <a:uFillTx/>
-                          <a:latin typeface="Cambria Math" panose="02040503050406030204" pitchFamily="18" charset="0"/>
-                          <a:ea typeface="+mn-ea"/>
-                          <a:cs typeface="+mn-cs"/>
-                        </a:rPr>
-                        <m:t>−</m:t>
-                      </m:r>
-                      <m:r>
-                        <a:rPr kumimoji="0" lang="en-US" sz="3000" b="0" i="1" u="none" strike="noStrike" kern="1200" cap="none" spc="0" normalizeH="0" baseline="0" noProof="0" smtClean="0">
-                          <a:ln>
-                            <a:noFill/>
-                          </a:ln>
-                          <a:solidFill>
-                            <a:prstClr val="black"/>
-                          </a:solidFill>
-                          <a:effectLst/>
-                          <a:uLnTx/>
-                          <a:uFillTx/>
-                          <a:latin typeface="Cambria Math" panose="02040503050406030204" pitchFamily="18" charset="0"/>
-                          <a:ea typeface="Cambria Math" panose="02040503050406030204" pitchFamily="18" charset="0"/>
-                          <a:cs typeface="+mn-cs"/>
-                        </a:rPr>
-                        <m:t>𝜆</m:t>
-                      </m:r>
-                      <m:r>
-                        <m:rPr>
-                          <m:sty m:val="p"/>
-                        </m:rPr>
-                        <a:rPr kumimoji="0" lang="en-US" sz="3000" b="0" i="1" u="none" strike="noStrike" kern="1200" cap="none" spc="0" normalizeH="0" baseline="0" noProof="0" smtClean="0">
-                          <a:ln>
-                            <a:noFill/>
-                          </a:ln>
-                          <a:solidFill>
-                            <a:prstClr val="black"/>
-                          </a:solidFill>
-                          <a:effectLst/>
-                          <a:uLnTx/>
-                          <a:uFillTx/>
-                          <a:latin typeface="Cambria Math" panose="02040503050406030204" pitchFamily="18" charset="0"/>
-                          <a:ea typeface="Cambria Math" panose="02040503050406030204" pitchFamily="18" charset="0"/>
-                          <a:cs typeface="+mn-cs"/>
-                        </a:rPr>
-                        <m:t>I</m:t>
-                      </m:r>
-                      <m:r>
-                        <a:rPr kumimoji="0" lang="en-US" sz="3000" b="0" i="1" u="none" strike="noStrike" kern="1200" cap="none" spc="0" normalizeH="0" baseline="0" noProof="0" smtClean="0">
-                          <a:ln>
-                            <a:noFill/>
-                          </a:ln>
-                          <a:solidFill>
-                            <a:prstClr val="black"/>
-                          </a:solidFill>
-                          <a:effectLst/>
-                          <a:uLnTx/>
-                          <a:uFillTx/>
-                          <a:latin typeface="Cambria Math" panose="02040503050406030204" pitchFamily="18" charset="0"/>
-                          <a:ea typeface="Cambria Math" panose="02040503050406030204" pitchFamily="18" charset="0"/>
-                          <a:cs typeface="+mn-cs"/>
-                        </a:rPr>
-                        <m:t>)</m:t>
-                      </m:r>
-                      <m:r>
-                        <m:rPr>
-                          <m:sty m:val="p"/>
-                        </m:rPr>
-                        <a:rPr kumimoji="0" lang="en-US" sz="3000" b="0" i="1" u="none" strike="noStrike" kern="1200" cap="none" spc="0" normalizeH="0" baseline="0" noProof="0" smtClean="0">
-                          <a:ln>
-                            <a:noFill/>
-                          </a:ln>
-                          <a:solidFill>
-                            <a:prstClr val="black"/>
-                          </a:solidFill>
-                          <a:effectLst/>
-                          <a:uLnTx/>
-                          <a:uFillTx/>
-                          <a:latin typeface="Cambria Math" panose="02040503050406030204" pitchFamily="18" charset="0"/>
-                          <a:ea typeface="Cambria Math" panose="02040503050406030204" pitchFamily="18" charset="0"/>
-                          <a:cs typeface="+mn-cs"/>
-                        </a:rPr>
-                        <m:t>x</m:t>
-                      </m:r>
-                      <m:r>
-                        <a:rPr kumimoji="0" lang="en-US" sz="3000" b="0" i="1" u="none" strike="noStrike" kern="1200" cap="none" spc="0" normalizeH="0" baseline="0" noProof="0" smtClean="0">
-                          <a:ln>
-                            <a:noFill/>
-                          </a:ln>
-                          <a:solidFill>
-                            <a:prstClr val="black"/>
-                          </a:solidFill>
-                          <a:effectLst/>
-                          <a:uLnTx/>
-                          <a:uFillTx/>
-                          <a:latin typeface="Cambria Math" panose="02040503050406030204" pitchFamily="18" charset="0"/>
-                          <a:ea typeface="Cambria Math" panose="02040503050406030204" pitchFamily="18" charset="0"/>
-                          <a:cs typeface="+mn-cs"/>
-                        </a:rPr>
-                        <m:t>=0</m:t>
-                      </m:r>
-                    </m:oMath>
-                  </m:oMathPara>
-                </a14:m>
-                <a:endParaRPr kumimoji="0" lang="ru-RU" sz="3000" b="0" i="0" u="none" strike="noStrike" kern="1200" cap="none" spc="0" normalizeH="0" baseline="0" noProof="0" dirty="0">
-                  <a:ln>
-                    <a:noFill/>
-                  </a:ln>
-                  <a:solidFill>
-                    <a:prstClr val="black"/>
-                  </a:solidFill>
-                  <a:effectLst/>
-                  <a:uLnTx/>
-                  <a:uFillTx/>
-                  <a:latin typeface="Times New Roman" panose="02020603050405020304" pitchFamily="18" charset="0"/>
-                  <a:ea typeface="+mn-ea"/>
-                  <a:cs typeface="+mn-cs"/>
-                </a:endParaRPr>
-              </a:p>
-            </p:txBody>
-          </p:sp>
-        </mc:Choice>
-        <mc:Fallback xmlns="">
-          <p:sp>
-            <p:nvSpPr>
-              <p:cNvPr id="29" name="TextBox 28">
-                <a:extLst>
-                  <a:ext uri="{FF2B5EF4-FFF2-40B4-BE49-F238E27FC236}">
-                    <a16:creationId xmlns:a16="http://schemas.microsoft.com/office/drawing/2014/main" id="{DBFE8700-A7C8-AFD2-AE4E-AD6203C1F006}"/>
-                  </a:ext>
-                </a:extLst>
-              </p:cNvPr>
-              <p:cNvSpPr txBox="1">
-                <a:spLocks noRot="1" noChangeAspect="1" noMove="1" noResize="1" noEditPoints="1" noAdjustHandles="1" noChangeArrowheads="1" noChangeShapeType="1" noTextEdit="1"/>
-              </p:cNvSpPr>
-              <p:nvPr/>
-            </p:nvSpPr>
-            <p:spPr>
-              <a:xfrm>
-                <a:off x="7169068" y="5329908"/>
-                <a:ext cx="7315200" cy="553998"/>
-              </a:xfrm>
-              <a:prstGeom prst="rect">
-                <a:avLst/>
-              </a:prstGeom>
-              <a:blipFill>
-                <a:blip r:embed="rId4"/>
-                <a:stretch>
-                  <a:fillRect/>
-                </a:stretch>
-              </a:blipFill>
-            </p:spPr>
-            <p:txBody>
-              <a:bodyPr/>
-              <a:lstStyle/>
-              <a:p>
-                <a:r>
-                  <a:rPr lang="ru-RU">
-                    <a:noFill/>
-                  </a:rPr>
-                  <a:t> </a:t>
-                </a:r>
-              </a:p>
-            </p:txBody>
-          </p:sp>
-        </mc:Fallback>
-      </mc:AlternateContent>
-      <mc:AlternateContent xmlns:mc="http://schemas.openxmlformats.org/markup-compatibility/2006" xmlns:a14="http://schemas.microsoft.com/office/drawing/2010/main">
-        <mc:Choice Requires="a14">
-          <p:sp>
-            <p:nvSpPr>
-              <p:cNvPr id="31" name="TextBox 30">
-                <a:extLst>
-                  <a:ext uri="{FF2B5EF4-FFF2-40B4-BE49-F238E27FC236}">
-                    <a16:creationId xmlns:a16="http://schemas.microsoft.com/office/drawing/2014/main" id="{DC695A97-F70A-7FFC-54D1-017BC110B41F}"/>
-                  </a:ext>
-                </a:extLst>
-              </p:cNvPr>
-              <p:cNvSpPr txBox="1"/>
-              <p:nvPr/>
-            </p:nvSpPr>
-            <p:spPr>
-              <a:xfrm>
-                <a:off x="-284320" y="3837801"/>
-                <a:ext cx="7315200" cy="553998"/>
-              </a:xfrm>
-              <a:prstGeom prst="rect">
-                <a:avLst/>
-              </a:prstGeom>
-              <a:noFill/>
-            </p:spPr>
-            <p:txBody>
-              <a:bodyPr wrap="square">
-                <a:spAutoFit/>
-              </a:bodyPr>
-              <a:lstStyle/>
-              <a:p>
-                <a:pPr/>
-                <a14:m>
-                  <m:oMathPara xmlns:m="http://schemas.openxmlformats.org/officeDocument/2006/math">
-                    <m:oMathParaPr>
-                      <m:jc m:val="centerGroup"/>
-                    </m:oMathParaPr>
-                    <m:oMath xmlns:m="http://schemas.openxmlformats.org/officeDocument/2006/math">
-                      <m:r>
-                        <m:rPr>
-                          <m:sty m:val="p"/>
-                        </m:rPr>
-                        <a:rPr kumimoji="0" lang="en-US" sz="3000" b="0" i="1" u="none" strike="noStrike" kern="1200" cap="none" spc="0" normalizeH="0" baseline="0" noProof="0" smtClean="0">
-                          <a:ln>
-                            <a:noFill/>
-                          </a:ln>
-                          <a:solidFill>
-                            <a:prstClr val="black"/>
-                          </a:solidFill>
-                          <a:effectLst/>
-                          <a:uLnTx/>
-                          <a:uFillTx/>
-                          <a:latin typeface="Cambria Math" panose="02040503050406030204" pitchFamily="18" charset="0"/>
-                        </a:rPr>
-                        <m:t>Ax</m:t>
-                      </m:r>
-                      <m:r>
-                        <a:rPr kumimoji="0" lang="en-US" sz="3000" b="0" i="1" u="none" strike="noStrike" kern="1200" cap="none" spc="0" normalizeH="0" baseline="0" noProof="0" smtClean="0">
-                          <a:ln>
-                            <a:noFill/>
-                          </a:ln>
-                          <a:solidFill>
-                            <a:prstClr val="black"/>
-                          </a:solidFill>
-                          <a:effectLst/>
-                          <a:uLnTx/>
-                          <a:uFillTx/>
-                          <a:latin typeface="Cambria Math" panose="02040503050406030204" pitchFamily="18" charset="0"/>
-                        </a:rPr>
-                        <m:t>=</m:t>
-                      </m:r>
-                      <m:r>
-                        <a:rPr kumimoji="0" lang="en-US" sz="3000" b="0" i="1" u="none" strike="noStrike" kern="1200" cap="none" spc="0" normalizeH="0" baseline="0" noProof="0" smtClean="0">
-                          <a:ln>
-                            <a:noFill/>
-                          </a:ln>
-                          <a:solidFill>
-                            <a:prstClr val="black"/>
-                          </a:solidFill>
-                          <a:effectLst/>
-                          <a:uLnTx/>
-                          <a:uFillTx/>
-                          <a:latin typeface="Cambria Math" panose="02040503050406030204" pitchFamily="18" charset="0"/>
-                          <a:ea typeface="Cambria Math" panose="02040503050406030204" pitchFamily="18" charset="0"/>
-                        </a:rPr>
-                        <m:t>𝜆</m:t>
-                      </m:r>
-                      <m:r>
-                        <m:rPr>
-                          <m:sty m:val="p"/>
-                        </m:rPr>
-                        <a:rPr kumimoji="0" lang="en-US" sz="3000" b="0" i="1" u="none" strike="noStrike" kern="1200" cap="none" spc="0" normalizeH="0" baseline="0" noProof="0" smtClean="0">
-                          <a:ln>
-                            <a:noFill/>
-                          </a:ln>
-                          <a:solidFill>
-                            <a:prstClr val="black"/>
-                          </a:solidFill>
-                          <a:effectLst/>
-                          <a:uLnTx/>
-                          <a:uFillTx/>
-                          <a:latin typeface="Cambria Math" panose="02040503050406030204" pitchFamily="18" charset="0"/>
-                          <a:ea typeface="Cambria Math" panose="02040503050406030204" pitchFamily="18" charset="0"/>
-                        </a:rPr>
-                        <m:t>x</m:t>
-                      </m:r>
-                    </m:oMath>
-                  </m:oMathPara>
-                </a14:m>
-                <a:endParaRPr lang="ru-RU" sz="3000" dirty="0">
-                  <a:latin typeface="Times New Roman" panose="02020603050405020304" pitchFamily="18" charset="0"/>
-                </a:endParaRPr>
-              </a:p>
-            </p:txBody>
-          </p:sp>
-        </mc:Choice>
-        <mc:Fallback xmlns="">
-          <p:sp>
-            <p:nvSpPr>
-              <p:cNvPr id="31" name="TextBox 30">
-                <a:extLst>
-                  <a:ext uri="{FF2B5EF4-FFF2-40B4-BE49-F238E27FC236}">
-                    <a16:creationId xmlns:a16="http://schemas.microsoft.com/office/drawing/2014/main" id="{DC695A97-F70A-7FFC-54D1-017BC110B41F}"/>
-                  </a:ext>
-                </a:extLst>
-              </p:cNvPr>
-              <p:cNvSpPr txBox="1">
-                <a:spLocks noRot="1" noChangeAspect="1" noMove="1" noResize="1" noEditPoints="1" noAdjustHandles="1" noChangeArrowheads="1" noChangeShapeType="1" noTextEdit="1"/>
-              </p:cNvSpPr>
-              <p:nvPr/>
-            </p:nvSpPr>
-            <p:spPr>
-              <a:xfrm>
-                <a:off x="-284320" y="3837801"/>
-                <a:ext cx="7315200" cy="553998"/>
-              </a:xfrm>
-              <a:prstGeom prst="rect">
-                <a:avLst/>
-              </a:prstGeom>
-              <a:blipFill>
-                <a:blip r:embed="rId5"/>
-                <a:stretch>
-                  <a:fillRect/>
-                </a:stretch>
-              </a:blipFill>
-            </p:spPr>
-            <p:txBody>
-              <a:bodyPr/>
-              <a:lstStyle/>
-              <a:p>
-                <a:r>
-                  <a:rPr lang="ru-RU">
-                    <a:noFill/>
-                  </a:rPr>
-                  <a:t> </a:t>
-                </a:r>
-              </a:p>
-            </p:txBody>
-          </p:sp>
-        </mc:Fallback>
-      </mc:AlternateContent>
-    </p:spTree>
-  </p:cSld>
-  <p:clrMapOvr>
-    <a:masterClrMapping/>
-  </p:clrMapOvr>
-</p:sld>
-</file>
-
-<file path=ppt/slides/slide9.xml><?xml version="1.0" encoding="utf-8"?>
-<p:sld xmlns:a="http://schemas.openxmlformats.org/drawingml/2006/main" xmlns:r="http://schemas.openxmlformats.org/officeDocument/2006/relationships" xmlns:p="http://schemas.openxmlformats.org/presentationml/2006/main">
-  <p:cSld name="Slide 3">
-    <p:spTree>
-      <p:nvGrpSpPr>
-        <p:cNvPr id="1" name=""/>
-        <p:cNvGrpSpPr/>
-        <p:nvPr/>
-      </p:nvGrpSpPr>
-      <p:grpSpPr>
-        <a:xfrm>
-          <a:off x="0" y="0"/>
-          <a:ext cx="0" cy="0"/>
-          <a:chOff x="0" y="0"/>
-          <a:chExt cx="0" cy="0"/>
-        </a:xfrm>
-      </p:grpSpPr>
-      <p:sp>
-        <p:nvSpPr>
-          <p:cNvPr id="2" name="Text 0"/>
-          <p:cNvSpPr/>
-          <p:nvPr/>
-        </p:nvSpPr>
-        <p:spPr>
-          <a:xfrm>
-            <a:off x="793790" y="781407"/>
-            <a:ext cx="8887063" cy="708779"/>
-          </a:xfrm>
-          <a:prstGeom prst="rect">
-            <a:avLst/>
-          </a:prstGeom>
-          <a:noFill/>
-          <a:ln/>
-        </p:spPr>
-        <p:txBody>
-          <a:bodyPr wrap="none" lIns="0" tIns="0" rIns="0" bIns="0" rtlCol="0" anchor="t"/>
-          <a:lstStyle/>
-          <a:p>
-            <a:pPr marL="0" indent="0" algn="l">
-              <a:lnSpc>
-                <a:spcPts val="5550"/>
-              </a:lnSpc>
-              <a:buNone/>
-            </a:pPr>
-            <a:r>
-              <a:rPr lang="en-US" sz="4500" dirty="0">
-                <a:latin typeface="Times New Roman" panose="02020603050405020304" pitchFamily="18" charset="0"/>
-                <a:ea typeface="Instrument Sans Semi Bold" pitchFamily="34" charset="-122"/>
-                <a:cs typeface="Times New Roman" panose="02020603050405020304" pitchFamily="18" charset="0"/>
-              </a:rPr>
-              <a:t>Сингулярное</a:t>
-            </a:r>
-            <a:r>
-              <a:rPr lang="en-US" sz="4450" dirty="0">
-                <a:latin typeface="Times New Roman" panose="02020603050405020304" pitchFamily="18" charset="0"/>
-                <a:ea typeface="Instrument Sans Semi Bold" pitchFamily="34" charset="-122"/>
-                <a:cs typeface="Times New Roman" panose="02020603050405020304" pitchFamily="18" charset="0"/>
-              </a:rPr>
-              <a:t> разложение (SVD)</a:t>
-            </a:r>
-            <a:endParaRPr lang="en-US" sz="4450" dirty="0">
-              <a:latin typeface="Times New Roman" panose="02020603050405020304" pitchFamily="18" charset="0"/>
-            </a:endParaRPr>
-          </a:p>
-        </p:txBody>
-      </p:sp>
-      <p:sp>
-        <p:nvSpPr>
-          <p:cNvPr id="3" name="Text 1"/>
-          <p:cNvSpPr/>
-          <p:nvPr/>
-        </p:nvSpPr>
-        <p:spPr>
-          <a:xfrm>
-            <a:off x="793790" y="2503408"/>
-            <a:ext cx="13042821" cy="362903"/>
-          </a:xfrm>
-          <a:prstGeom prst="rect">
-            <a:avLst/>
-          </a:prstGeom>
-          <a:noFill/>
-          <a:ln/>
-        </p:spPr>
-        <p:txBody>
-          <a:bodyPr wrap="none" lIns="0" tIns="0" rIns="0" bIns="0" rtlCol="0" anchor="t"/>
-          <a:lstStyle/>
-          <a:p>
-            <a:pPr marL="0" indent="0" algn="l">
-              <a:lnSpc>
-                <a:spcPts val="2850"/>
-              </a:lnSpc>
-              <a:buNone/>
-            </a:pPr>
-            <a:r>
-              <a:rPr lang="en-US" dirty="0">
-                <a:latin typeface="Times New Roman" panose="02020603050405020304" pitchFamily="18" charset="0"/>
-                <a:ea typeface="Instrument Sans Medium" pitchFamily="34" charset="-122"/>
-                <a:cs typeface="Times New Roman" panose="02020603050405020304" pitchFamily="18" charset="0"/>
-              </a:rPr>
-              <a:t>Любая</a:t>
-            </a:r>
-            <a:r>
-              <a:rPr lang="en-US" sz="1750" dirty="0">
-                <a:latin typeface="Times New Roman" panose="02020603050405020304" pitchFamily="18" charset="0"/>
-                <a:ea typeface="Instrument Sans Medium" pitchFamily="34" charset="-122"/>
-                <a:cs typeface="Times New Roman" panose="02020603050405020304" pitchFamily="18" charset="0"/>
-              </a:rPr>
-              <a:t> прямоугольная матрица </a:t>
-            </a:r>
-            <a:r>
-              <a:rPr lang="en-US" sz="1750" b="1" dirty="0">
-                <a:latin typeface="Times New Roman" panose="02020603050405020304" pitchFamily="18" charset="0"/>
-                <a:ea typeface="Instrument Sans Medium" pitchFamily="34" charset="-122"/>
-                <a:cs typeface="Times New Roman" panose="02020603050405020304" pitchFamily="18" charset="0"/>
-              </a:rPr>
-              <a:t>M</a:t>
-            </a:r>
-            <a:r>
-              <a:rPr lang="en-US" sz="1750" dirty="0">
-                <a:latin typeface="Times New Roman" panose="02020603050405020304" pitchFamily="18" charset="0"/>
-                <a:ea typeface="Instrument Sans Medium" pitchFamily="34" charset="-122"/>
-                <a:cs typeface="Times New Roman" panose="02020603050405020304" pitchFamily="18" charset="0"/>
-              </a:rPr>
-              <a:t> размера m×n представляется в виде:</a:t>
-            </a:r>
-            <a:endParaRPr lang="en-US" sz="1750" dirty="0">
-              <a:latin typeface="Times New Roman" panose="02020603050405020304" pitchFamily="18" charset="0"/>
-            </a:endParaRPr>
-          </a:p>
-        </p:txBody>
-      </p:sp>
-      <p:sp>
-        <p:nvSpPr>
-          <p:cNvPr id="6" name="Shape 3"/>
-          <p:cNvSpPr/>
-          <p:nvPr/>
-        </p:nvSpPr>
-        <p:spPr>
-          <a:xfrm>
-            <a:off x="793790" y="3833693"/>
-            <a:ext cx="13042821" cy="3054906"/>
-          </a:xfrm>
-          <a:prstGeom prst="roundRect">
-            <a:avLst>
-              <a:gd name="adj" fmla="val 6683"/>
-            </a:avLst>
-          </a:prstGeom>
-          <a:noFill/>
-          <a:ln w="7620">
-            <a:solidFill>
-              <a:srgbClr val="000000">
-                <a:alpha val="8000"/>
-              </a:srgbClr>
-            </a:solidFill>
-            <a:prstDash val="solid"/>
-          </a:ln>
-        </p:spPr>
-        <p:txBody>
-          <a:bodyPr/>
-          <a:lstStyle/>
-          <a:p>
-            <a:endParaRPr lang="ru-RU" dirty="0">
-              <a:latin typeface="Times New Roman" panose="02020603050405020304" pitchFamily="18" charset="0"/>
-            </a:endParaRPr>
-          </a:p>
-        </p:txBody>
-      </p:sp>
-      <p:sp>
-        <p:nvSpPr>
-          <p:cNvPr id="8" name="Text 5"/>
-          <p:cNvSpPr/>
-          <p:nvPr/>
-        </p:nvSpPr>
-        <p:spPr>
-          <a:xfrm>
-            <a:off x="1028343" y="3985022"/>
-            <a:ext cx="1887498" cy="362903"/>
-          </a:xfrm>
-          <a:prstGeom prst="rect">
-            <a:avLst/>
-          </a:prstGeom>
-          <a:noFill/>
-          <a:ln/>
-        </p:spPr>
-        <p:txBody>
-          <a:bodyPr wrap="none" lIns="0" tIns="0" rIns="0" bIns="0" rtlCol="0" anchor="t"/>
-          <a:lstStyle/>
-          <a:p>
-            <a:pPr marL="0" indent="0" algn="l">
-              <a:lnSpc>
-                <a:spcPts val="2850"/>
-              </a:lnSpc>
-              <a:buNone/>
-            </a:pPr>
-            <a:r>
-              <a:rPr lang="en-US" sz="1750" b="1" dirty="0">
-                <a:latin typeface="Times New Roman" panose="02020603050405020304" pitchFamily="18" charset="0"/>
-                <a:ea typeface="Instrument Sans Medium" pitchFamily="34" charset="-122"/>
-                <a:cs typeface="Times New Roman" panose="02020603050405020304" pitchFamily="18" charset="0"/>
-              </a:rPr>
-              <a:t>U (m×m)</a:t>
-            </a:r>
-            <a:endParaRPr lang="en-US" sz="1750" dirty="0">
-              <a:latin typeface="Times New Roman" panose="02020603050405020304" pitchFamily="18" charset="0"/>
-            </a:endParaRPr>
-          </a:p>
-        </p:txBody>
-      </p:sp>
-      <p:sp>
-        <p:nvSpPr>
-          <p:cNvPr id="9" name="Text 6"/>
-          <p:cNvSpPr/>
-          <p:nvPr/>
-        </p:nvSpPr>
-        <p:spPr>
-          <a:xfrm>
-            <a:off x="3377089" y="3985022"/>
-            <a:ext cx="4880015" cy="362903"/>
-          </a:xfrm>
-          <a:prstGeom prst="rect">
-            <a:avLst/>
-          </a:prstGeom>
-          <a:noFill/>
-          <a:ln/>
-        </p:spPr>
-        <p:txBody>
-          <a:bodyPr wrap="none" lIns="0" tIns="0" rIns="0" bIns="0" rtlCol="0" anchor="t"/>
-          <a:lstStyle/>
-          <a:p>
-            <a:pPr marL="0" indent="0" algn="l">
-              <a:lnSpc>
-                <a:spcPts val="2850"/>
-              </a:lnSpc>
-              <a:buNone/>
-            </a:pPr>
-            <a:r>
-              <a:rPr lang="en-US" sz="1750" dirty="0">
-                <a:latin typeface="Times New Roman" panose="02020603050405020304" pitchFamily="18" charset="0"/>
-                <a:ea typeface="Instrument Sans Medium" pitchFamily="34" charset="-122"/>
-                <a:cs typeface="Times New Roman" panose="02020603050405020304" pitchFamily="18" charset="0"/>
-              </a:rPr>
-              <a:t>Ортогональная матрица</a:t>
-            </a:r>
-            <a:endParaRPr lang="en-US" sz="1750" dirty="0">
-              <a:latin typeface="Times New Roman" panose="02020603050405020304" pitchFamily="18" charset="0"/>
-            </a:endParaRPr>
-          </a:p>
-        </p:txBody>
-      </p:sp>
-      <p:sp>
-        <p:nvSpPr>
-          <p:cNvPr id="10" name="Text 7"/>
-          <p:cNvSpPr/>
-          <p:nvPr/>
-        </p:nvSpPr>
-        <p:spPr>
-          <a:xfrm>
-            <a:off x="8718352" y="3985022"/>
-            <a:ext cx="4883825" cy="725805"/>
-          </a:xfrm>
-          <a:prstGeom prst="rect">
-            <a:avLst/>
-          </a:prstGeom>
-          <a:noFill/>
-          <a:ln/>
-        </p:spPr>
-        <p:txBody>
-          <a:bodyPr wrap="square" lIns="0" tIns="0" rIns="0" bIns="0" rtlCol="0" anchor="t"/>
-          <a:lstStyle/>
-          <a:p>
-            <a:pPr marL="0" indent="0" algn="l">
-              <a:lnSpc>
-                <a:spcPts val="2850"/>
-              </a:lnSpc>
-              <a:buNone/>
-            </a:pPr>
-            <a:r>
-              <a:rPr lang="ru-RU" sz="1750" dirty="0">
-                <a:latin typeface="Times New Roman" panose="02020603050405020304" pitchFamily="18" charset="0"/>
-                <a:ea typeface="Instrument Sans Medium" pitchFamily="34" charset="-122"/>
-                <a:cs typeface="Times New Roman" panose="02020603050405020304" pitchFamily="18" charset="0"/>
-              </a:rPr>
-              <a:t>Л</a:t>
-            </a:r>
-            <a:r>
-              <a:rPr lang="en-US" sz="1750" dirty="0" err="1">
-                <a:latin typeface="Times New Roman" panose="02020603050405020304" pitchFamily="18" charset="0"/>
-                <a:ea typeface="Instrument Sans Medium" pitchFamily="34" charset="-122"/>
-                <a:cs typeface="Times New Roman" panose="02020603050405020304" pitchFamily="18" charset="0"/>
-              </a:rPr>
-              <a:t>евые</a:t>
-            </a:r>
-            <a:r>
-              <a:rPr lang="en-US" sz="1750" dirty="0">
-                <a:latin typeface="Times New Roman" panose="02020603050405020304" pitchFamily="18" charset="0"/>
-                <a:ea typeface="Instrument Sans Medium" pitchFamily="34" charset="-122"/>
-                <a:cs typeface="Times New Roman" panose="02020603050405020304" pitchFamily="18" charset="0"/>
-              </a:rPr>
-              <a:t> сингулярные векторы (собственные векторы MMᵀ).</a:t>
-            </a:r>
-            <a:endParaRPr lang="en-US" sz="1750" dirty="0">
-              <a:latin typeface="Times New Roman" panose="02020603050405020304" pitchFamily="18" charset="0"/>
-            </a:endParaRPr>
-          </a:p>
-        </p:txBody>
-      </p:sp>
-      <p:sp>
-        <p:nvSpPr>
-          <p:cNvPr id="11" name="Shape 8"/>
-          <p:cNvSpPr/>
-          <p:nvPr/>
-        </p:nvSpPr>
-        <p:spPr>
-          <a:xfrm>
-            <a:off x="801410" y="4854535"/>
-            <a:ext cx="13027581" cy="1013222"/>
-          </a:xfrm>
-          <a:prstGeom prst="rect">
-            <a:avLst/>
-          </a:prstGeom>
-          <a:solidFill>
-            <a:srgbClr val="000000">
-              <a:alpha val="4000"/>
-            </a:srgbClr>
-          </a:solidFill>
-          <a:ln/>
-        </p:spPr>
-        <p:txBody>
-          <a:bodyPr/>
-          <a:lstStyle/>
-          <a:p>
-            <a:endParaRPr lang="ru-RU" dirty="0">
-              <a:latin typeface="Times New Roman" panose="02020603050405020304" pitchFamily="18" charset="0"/>
-            </a:endParaRPr>
-          </a:p>
-        </p:txBody>
-      </p:sp>
-      <p:sp>
-        <p:nvSpPr>
-          <p:cNvPr id="12" name="Text 9"/>
-          <p:cNvSpPr/>
-          <p:nvPr/>
-        </p:nvSpPr>
-        <p:spPr>
-          <a:xfrm>
-            <a:off x="1028343" y="4998244"/>
-            <a:ext cx="1887498" cy="362903"/>
-          </a:xfrm>
-          <a:prstGeom prst="rect">
-            <a:avLst/>
-          </a:prstGeom>
-          <a:noFill/>
-          <a:ln/>
-        </p:spPr>
-        <p:txBody>
-          <a:bodyPr wrap="none" lIns="0" tIns="0" rIns="0" bIns="0" rtlCol="0" anchor="t"/>
-          <a:lstStyle/>
-          <a:p>
-            <a:pPr marL="0" indent="0" algn="l">
-              <a:lnSpc>
-                <a:spcPts val="2850"/>
-              </a:lnSpc>
-              <a:buNone/>
-            </a:pPr>
-            <a:r>
-              <a:rPr lang="en-US" sz="1750" b="1" dirty="0">
-                <a:latin typeface="Times New Roman" panose="02020603050405020304" pitchFamily="18" charset="0"/>
-                <a:ea typeface="Instrument Sans Medium" pitchFamily="34" charset="-122"/>
-                <a:cs typeface="Times New Roman" panose="02020603050405020304" pitchFamily="18" charset="0"/>
-              </a:rPr>
-              <a:t>Σ (m×n)</a:t>
-            </a:r>
-            <a:endParaRPr lang="en-US" sz="1750" dirty="0">
-              <a:latin typeface="Times New Roman" panose="02020603050405020304" pitchFamily="18" charset="0"/>
-            </a:endParaRPr>
-          </a:p>
-        </p:txBody>
-      </p:sp>
-      <p:sp>
-        <p:nvSpPr>
-          <p:cNvPr id="13" name="Text 10"/>
-          <p:cNvSpPr/>
-          <p:nvPr/>
-        </p:nvSpPr>
-        <p:spPr>
-          <a:xfrm>
-            <a:off x="3377089" y="4998244"/>
-            <a:ext cx="4880015" cy="362903"/>
-          </a:xfrm>
-          <a:prstGeom prst="rect">
-            <a:avLst/>
-          </a:prstGeom>
-          <a:noFill/>
-          <a:ln/>
-        </p:spPr>
-        <p:txBody>
-          <a:bodyPr wrap="none" lIns="0" tIns="0" rIns="0" bIns="0" rtlCol="0" anchor="t"/>
-          <a:lstStyle/>
-          <a:p>
-            <a:pPr marL="0" indent="0" algn="l">
-              <a:lnSpc>
-                <a:spcPts val="2850"/>
-              </a:lnSpc>
-              <a:buNone/>
-            </a:pPr>
-            <a:r>
-              <a:rPr lang="en-US" sz="1750" dirty="0">
-                <a:latin typeface="Times New Roman" panose="02020603050405020304" pitchFamily="18" charset="0"/>
-                <a:ea typeface="Instrument Sans Medium" pitchFamily="34" charset="-122"/>
-                <a:cs typeface="Times New Roman" panose="02020603050405020304" pitchFamily="18" charset="0"/>
-              </a:rPr>
-              <a:t>Диагональная матрица</a:t>
-            </a:r>
-            <a:endParaRPr lang="en-US" sz="1750" dirty="0">
-              <a:latin typeface="Times New Roman" panose="02020603050405020304" pitchFamily="18" charset="0"/>
-            </a:endParaRPr>
-          </a:p>
-        </p:txBody>
-      </p:sp>
-      <p:sp>
-        <p:nvSpPr>
-          <p:cNvPr id="14" name="Text 11"/>
-          <p:cNvSpPr/>
-          <p:nvPr/>
-        </p:nvSpPr>
-        <p:spPr>
-          <a:xfrm>
-            <a:off x="8718352" y="4998244"/>
-            <a:ext cx="4883825" cy="725805"/>
-          </a:xfrm>
-          <a:prstGeom prst="rect">
-            <a:avLst/>
-          </a:prstGeom>
-          <a:noFill/>
-          <a:ln/>
-        </p:spPr>
-        <p:txBody>
-          <a:bodyPr wrap="square" lIns="0" tIns="0" rIns="0" bIns="0" rtlCol="0" anchor="t"/>
-          <a:lstStyle/>
-          <a:p>
-            <a:pPr marL="0" indent="0" algn="l">
-              <a:lnSpc>
-                <a:spcPts val="2850"/>
-              </a:lnSpc>
-              <a:buNone/>
-            </a:pPr>
-            <a:r>
-              <a:rPr lang="ru-RU" sz="1750" dirty="0">
-                <a:latin typeface="Times New Roman" panose="02020603050405020304" pitchFamily="18" charset="0"/>
-                <a:ea typeface="Instrument Sans Medium" pitchFamily="34" charset="-122"/>
-                <a:cs typeface="Times New Roman" panose="02020603050405020304" pitchFamily="18" charset="0"/>
-              </a:rPr>
-              <a:t>С</a:t>
-            </a:r>
-            <a:r>
-              <a:rPr lang="en-US" sz="1750" dirty="0" err="1">
-                <a:latin typeface="Times New Roman" panose="02020603050405020304" pitchFamily="18" charset="0"/>
-                <a:ea typeface="Instrument Sans Medium" pitchFamily="34" charset="-122"/>
-                <a:cs typeface="Times New Roman" panose="02020603050405020304" pitchFamily="18" charset="0"/>
-              </a:rPr>
-              <a:t>ингулярные</a:t>
-            </a:r>
-            <a:r>
-              <a:rPr lang="en-US" sz="1750" dirty="0">
-                <a:latin typeface="Times New Roman" panose="02020603050405020304" pitchFamily="18" charset="0"/>
-                <a:ea typeface="Instrument Sans Medium" pitchFamily="34" charset="-122"/>
-                <a:cs typeface="Times New Roman" panose="02020603050405020304" pitchFamily="18" charset="0"/>
-              </a:rPr>
-              <a:t> числа σ₁ ≥ σ₂ ≥ … ≥ 0.</a:t>
-            </a:r>
-            <a:endParaRPr lang="en-US" sz="1750" dirty="0">
-              <a:latin typeface="Times New Roman" panose="02020603050405020304" pitchFamily="18" charset="0"/>
-            </a:endParaRPr>
-          </a:p>
-        </p:txBody>
-      </p:sp>
-      <p:sp>
-        <p:nvSpPr>
-          <p:cNvPr id="15" name="Shape 12"/>
-          <p:cNvSpPr/>
-          <p:nvPr/>
-        </p:nvSpPr>
-        <p:spPr>
-          <a:xfrm>
-            <a:off x="801410" y="5867757"/>
-            <a:ext cx="13027581" cy="1013222"/>
-          </a:xfrm>
-          <a:prstGeom prst="rect">
-            <a:avLst/>
-          </a:prstGeom>
-          <a:solidFill>
-            <a:srgbClr val="FFFFFF">
-              <a:alpha val="4000"/>
-            </a:srgbClr>
-          </a:solidFill>
-          <a:ln/>
-        </p:spPr>
-        <p:txBody>
-          <a:bodyPr/>
-          <a:lstStyle/>
-          <a:p>
-            <a:endParaRPr lang="ru-RU" dirty="0">
-              <a:latin typeface="Times New Roman" panose="02020603050405020304" pitchFamily="18" charset="0"/>
-            </a:endParaRPr>
-          </a:p>
-        </p:txBody>
-      </p:sp>
-      <p:sp>
-        <p:nvSpPr>
-          <p:cNvPr id="16" name="Text 13"/>
-          <p:cNvSpPr/>
-          <p:nvPr/>
-        </p:nvSpPr>
-        <p:spPr>
-          <a:xfrm>
-            <a:off x="1028343" y="6011466"/>
-            <a:ext cx="1887498" cy="362903"/>
-          </a:xfrm>
-          <a:prstGeom prst="rect">
-            <a:avLst/>
-          </a:prstGeom>
-          <a:noFill/>
-          <a:ln/>
-        </p:spPr>
-        <p:txBody>
-          <a:bodyPr wrap="none" lIns="0" tIns="0" rIns="0" bIns="0" rtlCol="0" anchor="t"/>
-          <a:lstStyle/>
-          <a:p>
-            <a:pPr marL="0" indent="0" algn="l">
-              <a:lnSpc>
-                <a:spcPts val="2850"/>
-              </a:lnSpc>
-              <a:buNone/>
-            </a:pPr>
-            <a:r>
-              <a:rPr lang="en-US" sz="1750" b="1" dirty="0">
-                <a:latin typeface="Times New Roman" panose="02020603050405020304" pitchFamily="18" charset="0"/>
-                <a:ea typeface="Instrument Sans Medium" pitchFamily="34" charset="-122"/>
-                <a:cs typeface="Times New Roman" panose="02020603050405020304" pitchFamily="18" charset="0"/>
-              </a:rPr>
-              <a:t>V (n×n)</a:t>
-            </a:r>
-            <a:endParaRPr lang="en-US" sz="1750" dirty="0">
-              <a:latin typeface="Times New Roman" panose="02020603050405020304" pitchFamily="18" charset="0"/>
-            </a:endParaRPr>
-          </a:p>
-        </p:txBody>
-      </p:sp>
-      <p:sp>
-        <p:nvSpPr>
-          <p:cNvPr id="17" name="Text 14"/>
-          <p:cNvSpPr/>
-          <p:nvPr/>
-        </p:nvSpPr>
-        <p:spPr>
-          <a:xfrm>
-            <a:off x="3377089" y="6011466"/>
-            <a:ext cx="4880015" cy="362903"/>
-          </a:xfrm>
-          <a:prstGeom prst="rect">
-            <a:avLst/>
-          </a:prstGeom>
-          <a:noFill/>
-          <a:ln/>
-        </p:spPr>
-        <p:txBody>
-          <a:bodyPr wrap="none" lIns="0" tIns="0" rIns="0" bIns="0" rtlCol="0" anchor="t"/>
-          <a:lstStyle/>
-          <a:p>
-            <a:pPr marL="0" indent="0" algn="l">
-              <a:lnSpc>
-                <a:spcPts val="2850"/>
-              </a:lnSpc>
-              <a:buNone/>
-            </a:pPr>
-            <a:r>
-              <a:rPr lang="en-US" sz="1750" dirty="0">
-                <a:latin typeface="Times New Roman" panose="02020603050405020304" pitchFamily="18" charset="0"/>
-                <a:ea typeface="Instrument Sans Medium" pitchFamily="34" charset="-122"/>
-                <a:cs typeface="Times New Roman" panose="02020603050405020304" pitchFamily="18" charset="0"/>
-              </a:rPr>
-              <a:t>Ортогональная матрица</a:t>
-            </a:r>
-            <a:endParaRPr lang="en-US" sz="1750" dirty="0">
-              <a:latin typeface="Times New Roman" panose="02020603050405020304" pitchFamily="18" charset="0"/>
-            </a:endParaRPr>
-          </a:p>
-        </p:txBody>
-      </p:sp>
-      <p:sp>
-        <p:nvSpPr>
-          <p:cNvPr id="18" name="Text 15"/>
-          <p:cNvSpPr/>
-          <p:nvPr/>
-        </p:nvSpPr>
-        <p:spPr>
-          <a:xfrm>
-            <a:off x="8718352" y="6011466"/>
-            <a:ext cx="4883825" cy="725805"/>
-          </a:xfrm>
-          <a:prstGeom prst="rect">
-            <a:avLst/>
-          </a:prstGeom>
-          <a:noFill/>
-          <a:ln/>
-        </p:spPr>
-        <p:txBody>
-          <a:bodyPr wrap="square" lIns="0" tIns="0" rIns="0" bIns="0" rtlCol="0" anchor="t"/>
-          <a:lstStyle/>
-          <a:p>
-            <a:pPr marL="0" indent="0" algn="l">
-              <a:lnSpc>
-                <a:spcPts val="2850"/>
-              </a:lnSpc>
-              <a:buNone/>
-            </a:pPr>
-            <a:r>
-              <a:rPr lang="ru-RU" sz="1750" dirty="0">
-                <a:latin typeface="Times New Roman" panose="02020603050405020304" pitchFamily="18" charset="0"/>
-                <a:ea typeface="Instrument Sans Medium" pitchFamily="34" charset="-122"/>
-                <a:cs typeface="Times New Roman" panose="02020603050405020304" pitchFamily="18" charset="0"/>
-              </a:rPr>
-              <a:t>П</a:t>
-            </a:r>
-            <a:r>
-              <a:rPr lang="en-US" sz="1750" dirty="0" err="1">
-                <a:latin typeface="Times New Roman" panose="02020603050405020304" pitchFamily="18" charset="0"/>
-                <a:ea typeface="Instrument Sans Medium" pitchFamily="34" charset="-122"/>
-                <a:cs typeface="Times New Roman" panose="02020603050405020304" pitchFamily="18" charset="0"/>
-              </a:rPr>
-              <a:t>равые</a:t>
-            </a:r>
-            <a:r>
-              <a:rPr lang="en-US" sz="1750" dirty="0">
-                <a:latin typeface="Times New Roman" panose="02020603050405020304" pitchFamily="18" charset="0"/>
-                <a:ea typeface="Instrument Sans Medium" pitchFamily="34" charset="-122"/>
-                <a:cs typeface="Times New Roman" panose="02020603050405020304" pitchFamily="18" charset="0"/>
-              </a:rPr>
-              <a:t> сингулярные векторы (собственные векторы MᵀM).</a:t>
-            </a:r>
-            <a:endParaRPr lang="en-US" sz="1750" dirty="0">
-              <a:latin typeface="Times New Roman" panose="02020603050405020304" pitchFamily="18" charset="0"/>
-            </a:endParaRPr>
-          </a:p>
-        </p:txBody>
-      </p:sp>
-      <mc:AlternateContent xmlns:mc="http://schemas.openxmlformats.org/markup-compatibility/2006" xmlns:a14="http://schemas.microsoft.com/office/drawing/2010/main">
-        <mc:Choice Requires="a14">
-          <p:sp>
-            <p:nvSpPr>
-              <p:cNvPr id="20" name="TextBox 19">
-                <a:extLst>
-                  <a:ext uri="{FF2B5EF4-FFF2-40B4-BE49-F238E27FC236}">
-                    <a16:creationId xmlns:a16="http://schemas.microsoft.com/office/drawing/2014/main" id="{8E4652BF-816C-2F78-243D-B737EBC9A123}"/>
-                  </a:ext>
-                </a:extLst>
-              </p:cNvPr>
-              <p:cNvSpPr txBox="1"/>
-              <p:nvPr/>
-            </p:nvSpPr>
-            <p:spPr>
-              <a:xfrm>
-                <a:off x="3657600" y="3169561"/>
-                <a:ext cx="7315200" cy="553998"/>
-              </a:xfrm>
-              <a:prstGeom prst="rect">
-                <a:avLst/>
-              </a:prstGeom>
-              <a:noFill/>
-            </p:spPr>
-            <p:txBody>
-              <a:bodyPr wrap="square">
-                <a:spAutoFit/>
-              </a:bodyPr>
-              <a:lstStyle/>
-              <a:p>
-                <a:pPr/>
-                <a14:m>
-                  <m:oMathPara xmlns:m="http://schemas.openxmlformats.org/officeDocument/2006/math">
-                    <m:oMathParaPr>
-                      <m:jc m:val="centerGroup"/>
-                    </m:oMathParaPr>
-                    <m:oMath xmlns:m="http://schemas.openxmlformats.org/officeDocument/2006/math">
-                      <m:r>
-                        <a:rPr lang="ru-RU" sz="3000" i="1" smtClean="0">
-                          <a:latin typeface="Cambria Math" panose="02040503050406030204" pitchFamily="18" charset="0"/>
-                        </a:rPr>
-                        <m:t>𝑀</m:t>
-                      </m:r>
-                      <m:r>
-                        <a:rPr lang="ru-RU" sz="3000" i="0">
-                          <a:latin typeface="Cambria Math" panose="02040503050406030204" pitchFamily="18" charset="0"/>
-                        </a:rPr>
-                        <m:t>=</m:t>
-                      </m:r>
-                      <m:r>
-                        <a:rPr lang="ru-RU" sz="3000" i="1">
-                          <a:latin typeface="Cambria Math" panose="02040503050406030204" pitchFamily="18" charset="0"/>
-                        </a:rPr>
-                        <m:t>𝑈</m:t>
-                      </m:r>
-                      <m:r>
-                        <m:rPr>
-                          <m:sty m:val="p"/>
-                        </m:rPr>
-                        <a:rPr lang="ru-RU" sz="3000" i="0">
-                          <a:latin typeface="Cambria Math" panose="02040503050406030204" pitchFamily="18" charset="0"/>
-                        </a:rPr>
-                        <m:t>Σ</m:t>
-                      </m:r>
-                      <m:sSup>
-                        <m:sSupPr>
-                          <m:ctrlPr>
-                            <a:rPr lang="ru-RU" sz="3000" i="1">
-                              <a:latin typeface="Cambria Math" panose="02040503050406030204" pitchFamily="18" charset="0"/>
-                            </a:rPr>
-                          </m:ctrlPr>
-                        </m:sSupPr>
-                        <m:e>
-                          <m:r>
-                            <a:rPr lang="ru-RU" sz="3000" i="1">
-                              <a:latin typeface="Cambria Math" panose="02040503050406030204" pitchFamily="18" charset="0"/>
-                            </a:rPr>
-                            <m:t>𝑉</m:t>
-                          </m:r>
-                        </m:e>
-                        <m:sup>
-                          <m:r>
-                            <a:rPr lang="ru-RU" sz="3000" i="1">
-                              <a:latin typeface="Cambria Math" panose="02040503050406030204" pitchFamily="18" charset="0"/>
-                            </a:rPr>
-                            <m:t>𝑇</m:t>
-                          </m:r>
-                        </m:sup>
-                      </m:sSup>
-                    </m:oMath>
-                  </m:oMathPara>
-                </a14:m>
-                <a:endParaRPr lang="ru-RU" sz="3000" dirty="0">
-                  <a:latin typeface="Times New Roman" panose="02020603050405020304" pitchFamily="18" charset="0"/>
-                </a:endParaRPr>
-              </a:p>
-            </p:txBody>
-          </p:sp>
-        </mc:Choice>
-        <mc:Fallback xmlns="">
-          <p:sp>
-            <p:nvSpPr>
-              <p:cNvPr id="20" name="TextBox 19">
-                <a:extLst>
-                  <a:ext uri="{FF2B5EF4-FFF2-40B4-BE49-F238E27FC236}">
-                    <a16:creationId xmlns:a16="http://schemas.microsoft.com/office/drawing/2014/main" id="{8E4652BF-816C-2F78-243D-B737EBC9A123}"/>
-                  </a:ext>
-                </a:extLst>
-              </p:cNvPr>
-              <p:cNvSpPr txBox="1">
-                <a:spLocks noRot="1" noChangeAspect="1" noMove="1" noResize="1" noEditPoints="1" noAdjustHandles="1" noChangeArrowheads="1" noChangeShapeType="1" noTextEdit="1"/>
-              </p:cNvSpPr>
-              <p:nvPr/>
-            </p:nvSpPr>
-            <p:spPr>
-              <a:xfrm>
-                <a:off x="3657600" y="3169561"/>
-                <a:ext cx="7315200" cy="553998"/>
-              </a:xfrm>
-              <a:prstGeom prst="rect">
-                <a:avLst/>
-              </a:prstGeom>
-              <a:blipFill>
-                <a:blip r:embed="rId3"/>
-                <a:stretch>
-                  <a:fillRect/>
-                </a:stretch>
-              </a:blipFill>
-            </p:spPr>
-            <p:txBody>
-              <a:bodyPr/>
-              <a:lstStyle/>
-              <a:p>
-                <a:r>
-                  <a:rPr lang="ru-RU">
-                    <a:noFill/>
-                  </a:rPr>
-                  <a:t> </a:t>
-                </a:r>
-              </a:p>
-            </p:txBody>
-          </p:sp>
-        </mc:Fallback>
-      </mc:AlternateContent>
-    </p:spTree>
-  </p:cSld>
-  <p:clrMapOvr>
-    <a:masterClrMapping/>
-  </p:clrMapOvr>
-</p:sld>
-</file>
-
 <file path=ppt/theme/theme1.xml><?xml version="1.0" encoding="utf-8"?>
 <a:theme xmlns:a="http://schemas.openxmlformats.org/drawingml/2006/main" name="Тема Office">
   <a:themeElements>
